--- a/06_ppts/exploratory_analysis_figures_v3-CFB-CG.pptx
+++ b/06_ppts/exploratory_analysis_figures_v3-CFB-CG.pptx
@@ -14,8 +14,8 @@
     <p:sldId id="335" r:id="rId5"/>
     <p:sldId id="282" r:id="rId6"/>
     <p:sldId id="404" r:id="rId7"/>
-    <p:sldId id="406" r:id="rId8"/>
-    <p:sldId id="405" r:id="rId9"/>
+    <p:sldId id="405" r:id="rId8"/>
+    <p:sldId id="406" r:id="rId9"/>
     <p:sldId id="342" r:id="rId10"/>
     <p:sldId id="337" r:id="rId11"/>
     <p:sldId id="407" r:id="rId12"/>
@@ -189,28 +189,7 @@
 
 <file path=ppt/comments/modernComment_195_4CD3AFA7.xml><?xml version="1.0" encoding="utf-8"?>
 <p188:cmLst xmlns:a="http://schemas.openxmlformats.org/drawingml/2006/main" xmlns:r="http://schemas.openxmlformats.org/officeDocument/2006/relationships" xmlns:p188="http://schemas.microsoft.com/office/powerpoint/2018/8/main">
-  <p188:cm id="{9E24CEE4-4C78-9641-8DCE-68945436A826}" authorId="{9B18557D-7187-C966-2E91-CE8B6CF86FC3}" created="2025-05-29T06:07:59.568">
-    <ac:txMkLst xmlns:ac="http://schemas.microsoft.com/office/drawing/2013/main/command">
-      <pc:docMk xmlns:pc="http://schemas.microsoft.com/office/powerpoint/2013/main/command"/>
-      <pc:sldMk xmlns:pc="http://schemas.microsoft.com/office/powerpoint/2013/main/command" cId="1288941479" sldId="405"/>
-      <ac:spMk id="2" creationId="{0EDCCFA2-7421-E9F8-432B-5107BCD8FD10}"/>
-      <ac:txMk cp="0" len="9">
-        <ac:context len="107" hash="2339119931"/>
-      </ac:txMk>
-    </ac:txMkLst>
-    <p188:pos x="1268491" y="471991"/>
-    <p188:txBody>
-      <a:bodyPr/>
-      <a:lstStyle/>
-      <a:p>
-        <a:r>
-          <a:rPr lang="en-US"/>
-          <a:t>Sorry I commented on the previous slide. I guess the Obj 2 in the slide before can be removed since its presented here. </a:t>
-        </a:r>
-      </a:p>
-    </p188:txBody>
-  </p188:cm>
-  <p188:cm id="{A04E7475-72AC-EF41-8DCE-78170E424C1C}" authorId="{9B18557D-7187-C966-2E91-CE8B6CF86FC3}" created="2025-05-29T06:12:45.195">
+  <p188:cm id="{A04E7475-72AC-EF41-8DCE-78170E424C1C}" authorId="{9B18557D-7187-C966-2E91-CE8B6CF86FC3}" status="resolved" created="2025-05-29T06:12:45.195" complete="100000">
     <ac:txMkLst xmlns:ac="http://schemas.microsoft.com/office/drawing/2013/main/command">
       <pc:docMk xmlns:pc="http://schemas.microsoft.com/office/powerpoint/2013/main/command"/>
       <pc:sldMk xmlns:pc="http://schemas.microsoft.com/office/powerpoint/2013/main/command" cId="1288941479" sldId="405"/>
@@ -220,6 +199,20 @@
       </ac:txMk>
     </ac:txMkLst>
     <p188:pos x="10253995" y="471991"/>
+    <p188:replyLst>
+      <p188:reply id="{2E4515F3-7C3C-49BD-BF5F-5F31525025FA}" authorId="{DB4BCF0B-13A8-F3D9-5213-32840108FAB3}" created="2025-06-02T13:15:51.918">
+        <p188:txBody>
+          <a:bodyPr/>
+          <a:lstStyle/>
+          <a:p>
+            <a:r>
+              <a:rPr lang="es-ES"/>
+              <a:t>I think I’d rather keep them separate for now ☺️</a:t>
+            </a:r>
+          </a:p>
+        </p188:txBody>
+      </p188:reply>
+    </p188:replyLst>
     <p188:txBody>
       <a:bodyPr/>
       <a:lstStyle/>
@@ -231,13 +224,13 @@
       </a:p>
     </p188:txBody>
   </p188:cm>
-  <p188:cm id="{9E6DA31E-3171-E849-9D13-216E00158302}" authorId="{9B18557D-7187-C966-2E91-CE8B6CF86FC3}" created="2025-05-29T06:14:26.530">
+  <p188:cm id="{9E6DA31E-3171-E849-9D13-216E00158302}" authorId="{9B18557D-7187-C966-2E91-CE8B6CF86FC3}" status="resolved" created="2025-05-29T06:14:26.530" complete="100000">
     <ac:txMkLst xmlns:ac="http://schemas.microsoft.com/office/drawing/2013/main/command">
       <pc:docMk xmlns:pc="http://schemas.microsoft.com/office/powerpoint/2013/main/command"/>
       <pc:sldMk xmlns:pc="http://schemas.microsoft.com/office/powerpoint/2013/main/command" cId="1288941479" sldId="405"/>
       <ac:spMk id="8" creationId="{5D2A598E-3271-64EB-5DA8-A70DDDCC8E1C}"/>
-      <ac:txMk cp="0" len="12">
-        <ac:context len="475" hash="2544058152"/>
+      <ac:txMk cp="0" len="10">
+        <ac:context len="434" hash="1566757412"/>
       </ac:txMk>
     </ac:txMkLst>
     <p188:pos x="2182893" y="481381"/>
@@ -257,8 +250,8 @@
       <pc:docMk xmlns:pc="http://schemas.microsoft.com/office/powerpoint/2013/main/command"/>
       <pc:sldMk xmlns:pc="http://schemas.microsoft.com/office/powerpoint/2013/main/command" cId="1288941479" sldId="405"/>
       <ac:spMk id="8" creationId="{5D2A598E-3271-64EB-5DA8-A70DDDCC8E1C}"/>
-      <ac:txMk cp="313" len="7">
-        <ac:context len="475" hash="2544058152"/>
+      <ac:txMk cp="244" len="7">
+        <ac:context len="434" hash="1566757412"/>
       </ac:txMk>
     </ac:txMkLst>
     <p188:pos x="3731277" y="1822501"/>
@@ -278,7 +271,7 @@
 
 <file path=ppt/comments/modernComment_196_9A4652F4.xml><?xml version="1.0" encoding="utf-8"?>
 <p188:cmLst xmlns:a="http://schemas.openxmlformats.org/drawingml/2006/main" xmlns:r="http://schemas.openxmlformats.org/officeDocument/2006/relationships" xmlns:p188="http://schemas.microsoft.com/office/powerpoint/2018/8/main">
-  <p188:cm id="{18FC64F5-D2B2-46FE-9306-A6DE9DD7124B}" authorId="{DB4BCF0B-13A8-F3D9-5213-32840108FAB3}" created="2025-05-28T08:19:30.286">
+  <p188:cm id="{18FC64F5-D2B2-46FE-9306-A6DE9DD7124B}" authorId="{DB4BCF0B-13A8-F3D9-5213-32840108FAB3}" status="resolved" created="2025-05-28T08:19:30.286" complete="100000">
     <ac:txMkLst xmlns:ac="http://schemas.microsoft.com/office/drawing/2013/main/command">
       <pc:docMk xmlns:pc="http://schemas.microsoft.com/office/powerpoint/2013/main/command"/>
       <pc:sldMk xmlns:pc="http://schemas.microsoft.com/office/powerpoint/2013/main/command" cId="2588300020" sldId="406"/>
@@ -892,7 +885,7 @@
           <a:p>
             <a:fld id="{95285FFF-AA8A-422F-901E-D94C39C8B224}" type="slidenum">
               <a:rPr lang="es-ES" smtClean="0"/>
-              <a:t>7</a:t>
+              <a:t>8</a:t>
             </a:fld>
             <a:endParaRPr lang="es-ES"/>
           </a:p>
@@ -34433,7 +34426,7 @@
         <p:cNvPr id="1" name="">
           <a:extLst>
             <a:ext uri="{FF2B5EF4-FFF2-40B4-BE49-F238E27FC236}">
-              <a16:creationId xmlns:a16="http://schemas.microsoft.com/office/drawing/2014/main" id="{31B7D948-86BD-7218-880B-80096F80DD1E}"/>
+              <a16:creationId xmlns:a16="http://schemas.microsoft.com/office/drawing/2014/main" id="{1F055942-0646-1F75-3FD6-FB877A4F628D}"/>
             </a:ext>
           </a:extLst>
         </p:cNvPr>
@@ -34448,12 +34441,1666 @@
           <a:chExt cx="0" cy="0"/>
         </a:xfrm>
       </p:grpSpPr>
+      <p:sp>
+        <p:nvSpPr>
+          <p:cNvPr id="2" name="Marcador de contenido 2">
+            <a:extLst>
+              <a:ext uri="{FF2B5EF4-FFF2-40B4-BE49-F238E27FC236}">
+                <a16:creationId xmlns:a16="http://schemas.microsoft.com/office/drawing/2014/main" id="{0EDCCFA2-7421-E9F8-432B-5107BCD8FD10}"/>
+              </a:ext>
+            </a:extLst>
+          </p:cNvPr>
+          <p:cNvSpPr txBox="1">
+            <a:spLocks/>
+          </p:cNvSpPr>
+          <p:nvPr/>
+        </p:nvSpPr>
+        <p:spPr>
+          <a:xfrm>
+            <a:off x="633461" y="1198313"/>
+            <a:ext cx="10925077" cy="1146828"/>
+          </a:xfrm>
+          <a:prstGeom prst="rect">
+            <a:avLst/>
+          </a:prstGeom>
+        </p:spPr>
+        <p:txBody>
+          <a:bodyPr vert="horz" lIns="91440" tIns="45720" rIns="91440" bIns="45720" rtlCol="0" anchor="t">
+            <a:normAutofit/>
+          </a:bodyPr>
+          <a:lstStyle>
+            <a:lvl1pPr marL="228600" indent="-228600" algn="l" defTabSz="914400" rtl="0" eaLnBrk="1" latinLnBrk="0" hangingPunct="1">
+              <a:lnSpc>
+                <a:spcPct val="90000"/>
+              </a:lnSpc>
+              <a:spcBef>
+                <a:spcPts val="1000"/>
+              </a:spcBef>
+              <a:buFont typeface="Arial" panose="020B0604020202020204" pitchFamily="34" charset="0"/>
+              <a:buChar char="•"/>
+              <a:defRPr sz="2800" kern="1200">
+                <a:solidFill>
+                  <a:schemeClr val="tx1"/>
+                </a:solidFill>
+                <a:latin typeface="+mn-lt"/>
+                <a:ea typeface="+mn-ea"/>
+                <a:cs typeface="+mn-cs"/>
+              </a:defRPr>
+            </a:lvl1pPr>
+            <a:lvl2pPr marL="685800" indent="-228600" algn="l" defTabSz="914400" rtl="0" eaLnBrk="1" latinLnBrk="0" hangingPunct="1">
+              <a:lnSpc>
+                <a:spcPct val="90000"/>
+              </a:lnSpc>
+              <a:spcBef>
+                <a:spcPts val="500"/>
+              </a:spcBef>
+              <a:buFont typeface="Arial" panose="020B0604020202020204" pitchFamily="34" charset="0"/>
+              <a:buChar char="•"/>
+              <a:defRPr sz="2400" kern="1200">
+                <a:solidFill>
+                  <a:schemeClr val="tx1"/>
+                </a:solidFill>
+                <a:latin typeface="+mn-lt"/>
+                <a:ea typeface="+mn-ea"/>
+                <a:cs typeface="+mn-cs"/>
+              </a:defRPr>
+            </a:lvl2pPr>
+            <a:lvl3pPr marL="1143000" indent="-228600" algn="l" defTabSz="914400" rtl="0" eaLnBrk="1" latinLnBrk="0" hangingPunct="1">
+              <a:lnSpc>
+                <a:spcPct val="90000"/>
+              </a:lnSpc>
+              <a:spcBef>
+                <a:spcPts val="500"/>
+              </a:spcBef>
+              <a:buFont typeface="Arial" panose="020B0604020202020204" pitchFamily="34" charset="0"/>
+              <a:buChar char="•"/>
+              <a:defRPr sz="2000" kern="1200">
+                <a:solidFill>
+                  <a:schemeClr val="tx1"/>
+                </a:solidFill>
+                <a:latin typeface="+mn-lt"/>
+                <a:ea typeface="+mn-ea"/>
+                <a:cs typeface="+mn-cs"/>
+              </a:defRPr>
+            </a:lvl3pPr>
+            <a:lvl4pPr marL="1600200" indent="-228600" algn="l" defTabSz="914400" rtl="0" eaLnBrk="1" latinLnBrk="0" hangingPunct="1">
+              <a:lnSpc>
+                <a:spcPct val="90000"/>
+              </a:lnSpc>
+              <a:spcBef>
+                <a:spcPts val="500"/>
+              </a:spcBef>
+              <a:buFont typeface="Arial" panose="020B0604020202020204" pitchFamily="34" charset="0"/>
+              <a:buChar char="•"/>
+              <a:defRPr sz="1800" kern="1200">
+                <a:solidFill>
+                  <a:schemeClr val="tx1"/>
+                </a:solidFill>
+                <a:latin typeface="+mn-lt"/>
+                <a:ea typeface="+mn-ea"/>
+                <a:cs typeface="+mn-cs"/>
+              </a:defRPr>
+            </a:lvl4pPr>
+            <a:lvl5pPr marL="2057400" indent="-228600" algn="l" defTabSz="914400" rtl="0" eaLnBrk="1" latinLnBrk="0" hangingPunct="1">
+              <a:lnSpc>
+                <a:spcPct val="90000"/>
+              </a:lnSpc>
+              <a:spcBef>
+                <a:spcPts val="500"/>
+              </a:spcBef>
+              <a:buFont typeface="Arial" panose="020B0604020202020204" pitchFamily="34" charset="0"/>
+              <a:buChar char="•"/>
+              <a:defRPr sz="1800" kern="1200">
+                <a:solidFill>
+                  <a:schemeClr val="tx1"/>
+                </a:solidFill>
+                <a:latin typeface="+mn-lt"/>
+                <a:ea typeface="+mn-ea"/>
+                <a:cs typeface="+mn-cs"/>
+              </a:defRPr>
+            </a:lvl5pPr>
+            <a:lvl6pPr marL="2514600" indent="-228600" algn="l" defTabSz="914400" rtl="0" eaLnBrk="1" latinLnBrk="0" hangingPunct="1">
+              <a:lnSpc>
+                <a:spcPct val="90000"/>
+              </a:lnSpc>
+              <a:spcBef>
+                <a:spcPts val="500"/>
+              </a:spcBef>
+              <a:buFont typeface="Arial" panose="020B0604020202020204" pitchFamily="34" charset="0"/>
+              <a:buChar char="•"/>
+              <a:defRPr sz="1800" kern="1200">
+                <a:solidFill>
+                  <a:schemeClr val="tx1"/>
+                </a:solidFill>
+                <a:latin typeface="+mn-lt"/>
+                <a:ea typeface="+mn-ea"/>
+                <a:cs typeface="+mn-cs"/>
+              </a:defRPr>
+            </a:lvl6pPr>
+            <a:lvl7pPr marL="2971800" indent="-228600" algn="l" defTabSz="914400" rtl="0" eaLnBrk="1" latinLnBrk="0" hangingPunct="1">
+              <a:lnSpc>
+                <a:spcPct val="90000"/>
+              </a:lnSpc>
+              <a:spcBef>
+                <a:spcPts val="500"/>
+              </a:spcBef>
+              <a:buFont typeface="Arial" panose="020B0604020202020204" pitchFamily="34" charset="0"/>
+              <a:buChar char="•"/>
+              <a:defRPr sz="1800" kern="1200">
+                <a:solidFill>
+                  <a:schemeClr val="tx1"/>
+                </a:solidFill>
+                <a:latin typeface="+mn-lt"/>
+                <a:ea typeface="+mn-ea"/>
+                <a:cs typeface="+mn-cs"/>
+              </a:defRPr>
+            </a:lvl7pPr>
+            <a:lvl8pPr marL="3429000" indent="-228600" algn="l" defTabSz="914400" rtl="0" eaLnBrk="1" latinLnBrk="0" hangingPunct="1">
+              <a:lnSpc>
+                <a:spcPct val="90000"/>
+              </a:lnSpc>
+              <a:spcBef>
+                <a:spcPts val="500"/>
+              </a:spcBef>
+              <a:buFont typeface="Arial" panose="020B0604020202020204" pitchFamily="34" charset="0"/>
+              <a:buChar char="•"/>
+              <a:defRPr sz="1800" kern="1200">
+                <a:solidFill>
+                  <a:schemeClr val="tx1"/>
+                </a:solidFill>
+                <a:latin typeface="+mn-lt"/>
+                <a:ea typeface="+mn-ea"/>
+                <a:cs typeface="+mn-cs"/>
+              </a:defRPr>
+            </a:lvl8pPr>
+            <a:lvl9pPr marL="3886200" indent="-228600" algn="l" defTabSz="914400" rtl="0" eaLnBrk="1" latinLnBrk="0" hangingPunct="1">
+              <a:lnSpc>
+                <a:spcPct val="90000"/>
+              </a:lnSpc>
+              <a:spcBef>
+                <a:spcPts val="500"/>
+              </a:spcBef>
+              <a:buFont typeface="Arial" panose="020B0604020202020204" pitchFamily="34" charset="0"/>
+              <a:buChar char="•"/>
+              <a:defRPr sz="1800" kern="1200">
+                <a:solidFill>
+                  <a:schemeClr val="tx1"/>
+                </a:solidFill>
+                <a:latin typeface="+mn-lt"/>
+                <a:ea typeface="+mn-ea"/>
+                <a:cs typeface="+mn-cs"/>
+              </a:defRPr>
+            </a:lvl9pPr>
+          </a:lstStyle>
+          <a:p>
+            <a:pPr marL="0" indent="0">
+              <a:buNone/>
+            </a:pPr>
+            <a:r>
+              <a:rPr lang="es-ES" sz="2400" b="1" dirty="0" err="1">
+                <a:latin typeface="Helvetica"/>
+                <a:cs typeface="Helvetica"/>
+              </a:rPr>
+              <a:t>Obj</a:t>
+            </a:r>
+            <a:r>
+              <a:rPr lang="es-ES" sz="2400" b="1" dirty="0">
+                <a:latin typeface="Helvetica"/>
+                <a:cs typeface="Helvetica"/>
+              </a:rPr>
+              <a:t>. 2.- </a:t>
+            </a:r>
+            <a:r>
+              <a:rPr lang="es-ES" sz="2400" dirty="0" err="1">
+                <a:latin typeface="Helvetica"/>
+                <a:cs typeface="Helvetica"/>
+              </a:rPr>
+              <a:t>To</a:t>
+            </a:r>
+            <a:r>
+              <a:rPr lang="es-ES" sz="2400" dirty="0">
+                <a:latin typeface="Helvetica"/>
+                <a:cs typeface="Helvetica"/>
+              </a:rPr>
+              <a:t> </a:t>
+            </a:r>
+            <a:r>
+              <a:rPr lang="es-ES" sz="2400" dirty="0" err="1">
+                <a:latin typeface="Helvetica"/>
+                <a:cs typeface="Helvetica"/>
+              </a:rPr>
+              <a:t>assess</a:t>
+            </a:r>
+            <a:r>
+              <a:rPr lang="es-ES" sz="2400" dirty="0">
+                <a:latin typeface="Helvetica"/>
+                <a:cs typeface="Helvetica"/>
+              </a:rPr>
+              <a:t> </a:t>
+            </a:r>
+            <a:r>
+              <a:rPr lang="es-ES" sz="2400" dirty="0" err="1">
+                <a:latin typeface="Helvetica"/>
+                <a:cs typeface="Helvetica"/>
+              </a:rPr>
+              <a:t>morphological</a:t>
+            </a:r>
+            <a:r>
+              <a:rPr lang="es-ES" sz="2400" dirty="0">
+                <a:latin typeface="Helvetica"/>
+                <a:cs typeface="Helvetica"/>
+              </a:rPr>
+              <a:t> and </a:t>
+            </a:r>
+            <a:r>
+              <a:rPr lang="es-ES" sz="2400" dirty="0" err="1">
+                <a:latin typeface="Helvetica"/>
+                <a:cs typeface="Helvetica"/>
+              </a:rPr>
+              <a:t>physiological</a:t>
+            </a:r>
+            <a:r>
+              <a:rPr lang="es-ES" sz="2400" b="1" dirty="0">
+                <a:latin typeface="Helvetica"/>
+                <a:cs typeface="Helvetica"/>
+              </a:rPr>
+              <a:t> responses </a:t>
+            </a:r>
+            <a:r>
+              <a:rPr lang="es-ES" sz="2400" b="1" dirty="0" err="1">
+                <a:latin typeface="Helvetica"/>
+                <a:cs typeface="Helvetica"/>
+              </a:rPr>
+              <a:t>to</a:t>
+            </a:r>
+            <a:r>
+              <a:rPr lang="es-ES" sz="2400" b="1" dirty="0">
+                <a:latin typeface="Helvetica"/>
+                <a:cs typeface="Helvetica"/>
+              </a:rPr>
+              <a:t> </a:t>
+            </a:r>
+            <a:r>
+              <a:rPr lang="es-ES" sz="2400" b="1" dirty="0" err="1">
+                <a:latin typeface="Helvetica"/>
+                <a:cs typeface="Helvetica"/>
+              </a:rPr>
+              <a:t>drought</a:t>
+            </a:r>
+            <a:r>
+              <a:rPr lang="es-ES" sz="2400" b="1" dirty="0">
+                <a:latin typeface="Helvetica"/>
+                <a:cs typeface="Helvetica"/>
+              </a:rPr>
+              <a:t>, </a:t>
+            </a:r>
+            <a:r>
+              <a:rPr lang="es-ES" sz="2400" dirty="0">
+                <a:latin typeface="Helvetica"/>
+                <a:cs typeface="Helvetica"/>
+              </a:rPr>
+              <a:t>and </a:t>
+            </a:r>
+            <a:r>
+              <a:rPr lang="es-ES" sz="2400" b="1" dirty="0" err="1">
+                <a:latin typeface="Helvetica"/>
+                <a:cs typeface="Helvetica"/>
+              </a:rPr>
+              <a:t>what</a:t>
+            </a:r>
+            <a:r>
+              <a:rPr lang="es-ES" sz="2400" b="1" dirty="0">
+                <a:latin typeface="Helvetica"/>
+                <a:cs typeface="Helvetica"/>
+              </a:rPr>
+              <a:t> </a:t>
+            </a:r>
+            <a:r>
+              <a:rPr lang="es-ES" sz="2400" b="1" dirty="0" err="1">
+                <a:latin typeface="Helvetica"/>
+                <a:cs typeface="Helvetica"/>
+              </a:rPr>
+              <a:t>traits</a:t>
+            </a:r>
+            <a:r>
+              <a:rPr lang="es-ES" sz="2400" b="1" dirty="0">
+                <a:latin typeface="Helvetica"/>
+                <a:cs typeface="Helvetica"/>
+              </a:rPr>
+              <a:t> are more </a:t>
+            </a:r>
+            <a:r>
+              <a:rPr lang="es-ES" sz="2400" b="1" dirty="0" err="1">
+                <a:latin typeface="Helvetica"/>
+                <a:cs typeface="Helvetica"/>
+              </a:rPr>
+              <a:t>affected</a:t>
+            </a:r>
+            <a:endParaRPr lang="es-ES" sz="2400" b="1" dirty="0">
+              <a:latin typeface="Helvetica"/>
+              <a:cs typeface="Helvetica"/>
+            </a:endParaRPr>
+          </a:p>
+        </p:txBody>
+      </p:sp>
+      <p:sp>
+        <p:nvSpPr>
+          <p:cNvPr id="9" name="Título 1">
+            <a:extLst>
+              <a:ext uri="{FF2B5EF4-FFF2-40B4-BE49-F238E27FC236}">
+                <a16:creationId xmlns:a16="http://schemas.microsoft.com/office/drawing/2014/main" id="{5CD6406B-5875-AE5D-371F-5AE2CA33EA36}"/>
+              </a:ext>
+            </a:extLst>
+          </p:cNvPr>
+          <p:cNvSpPr txBox="1">
+            <a:spLocks/>
+          </p:cNvSpPr>
+          <p:nvPr/>
+        </p:nvSpPr>
+        <p:spPr>
+          <a:xfrm>
+            <a:off x="0" y="0"/>
+            <a:ext cx="9690902" cy="804155"/>
+          </a:xfrm>
+          <a:prstGeom prst="rect">
+            <a:avLst/>
+          </a:prstGeom>
+          <a:solidFill>
+            <a:srgbClr val="218317"/>
+          </a:solidFill>
+        </p:spPr>
+        <p:txBody>
+          <a:bodyPr vert="horz" lIns="91440" tIns="45720" rIns="91440" bIns="45720" rtlCol="0" anchor="ctr">
+            <a:normAutofit fontScale="97500"/>
+          </a:bodyPr>
+          <a:lstStyle>
+            <a:lvl1pPr algn="l" defTabSz="914400" rtl="0" eaLnBrk="1" latinLnBrk="0" hangingPunct="1">
+              <a:lnSpc>
+                <a:spcPct val="90000"/>
+              </a:lnSpc>
+              <a:spcBef>
+                <a:spcPct val="0"/>
+              </a:spcBef>
+              <a:buNone/>
+              <a:defRPr sz="4400" kern="1200">
+                <a:solidFill>
+                  <a:schemeClr val="tx1"/>
+                </a:solidFill>
+                <a:latin typeface="+mj-lt"/>
+                <a:ea typeface="+mj-ea"/>
+                <a:cs typeface="+mj-cs"/>
+              </a:defRPr>
+            </a:lvl1pPr>
+          </a:lstStyle>
+          <a:p>
+            <a:r>
+              <a:rPr lang="es-ES" sz="3200" b="1" dirty="0">
+                <a:solidFill>
+                  <a:schemeClr val="bg1"/>
+                </a:solidFill>
+                <a:latin typeface="Helvetica" panose="020B0604020202020204" pitchFamily="34" charset="0"/>
+                <a:cs typeface="Helvetica" panose="020B0604020202020204" pitchFamily="34" charset="0"/>
+              </a:rPr>
+              <a:t>	</a:t>
+            </a:r>
+            <a:r>
+              <a:rPr lang="es-ES" sz="3200" b="1" dirty="0" err="1">
+                <a:solidFill>
+                  <a:schemeClr val="bg1"/>
+                </a:solidFill>
+                <a:latin typeface="Helvetica" panose="020B0604020202020204" pitchFamily="34" charset="0"/>
+                <a:cs typeface="Helvetica" panose="020B0604020202020204" pitchFamily="34" charset="0"/>
+              </a:rPr>
+              <a:t>Objectives</a:t>
+            </a:r>
+            <a:r>
+              <a:rPr lang="es-ES" sz="3200" b="1" dirty="0">
+                <a:solidFill>
+                  <a:schemeClr val="bg1"/>
+                </a:solidFill>
+                <a:latin typeface="Helvetica" panose="020B0604020202020204" pitchFamily="34" charset="0"/>
+                <a:cs typeface="Helvetica" panose="020B0604020202020204" pitchFamily="34" charset="0"/>
+              </a:rPr>
+              <a:t> &amp; </a:t>
+            </a:r>
+            <a:r>
+              <a:rPr lang="es-ES" sz="3200" b="1" dirty="0" err="1">
+                <a:solidFill>
+                  <a:schemeClr val="bg1"/>
+                </a:solidFill>
+                <a:latin typeface="Helvetica" panose="020B0604020202020204" pitchFamily="34" charset="0"/>
+                <a:cs typeface="Helvetica" panose="020B0604020202020204" pitchFamily="34" charset="0"/>
+              </a:rPr>
+              <a:t>Hypotheses</a:t>
+            </a:r>
+            <a:endParaRPr lang="es-ES" sz="3200" b="1" dirty="0">
+              <a:solidFill>
+                <a:schemeClr val="bg1"/>
+              </a:solidFill>
+              <a:latin typeface="Helvetica" panose="020B0604020202020204" pitchFamily="34" charset="0"/>
+              <a:cs typeface="Helvetica" panose="020B0604020202020204" pitchFamily="34" charset="0"/>
+            </a:endParaRPr>
+          </a:p>
+        </p:txBody>
+      </p:sp>
+      <p:sp>
+        <p:nvSpPr>
+          <p:cNvPr id="10" name="Título 1">
+            <a:extLst>
+              <a:ext uri="{FF2B5EF4-FFF2-40B4-BE49-F238E27FC236}">
+                <a16:creationId xmlns:a16="http://schemas.microsoft.com/office/drawing/2014/main" id="{9D0E8E0D-4EC8-AF06-2C84-F69377E87B0A}"/>
+              </a:ext>
+            </a:extLst>
+          </p:cNvPr>
+          <p:cNvSpPr txBox="1">
+            <a:spLocks/>
+          </p:cNvSpPr>
+          <p:nvPr/>
+        </p:nvSpPr>
+        <p:spPr>
+          <a:xfrm>
+            <a:off x="9690902" y="-1"/>
+            <a:ext cx="2501098" cy="804157"/>
+          </a:xfrm>
+          <a:prstGeom prst="rect">
+            <a:avLst/>
+          </a:prstGeom>
+          <a:solidFill>
+            <a:srgbClr val="218317"/>
+          </a:solidFill>
+        </p:spPr>
+        <p:txBody>
+          <a:bodyPr vert="horz" lIns="91440" tIns="45720" rIns="91440" bIns="45720" rtlCol="0" anchor="ctr">
+            <a:normAutofit/>
+          </a:bodyPr>
+          <a:lstStyle>
+            <a:lvl1pPr algn="l" defTabSz="914400" rtl="0" eaLnBrk="1" latinLnBrk="0" hangingPunct="1">
+              <a:lnSpc>
+                <a:spcPct val="90000"/>
+              </a:lnSpc>
+              <a:spcBef>
+                <a:spcPct val="0"/>
+              </a:spcBef>
+              <a:buNone/>
+              <a:defRPr sz="4400" kern="1200">
+                <a:solidFill>
+                  <a:schemeClr val="tx1"/>
+                </a:solidFill>
+                <a:latin typeface="+mj-lt"/>
+                <a:ea typeface="+mj-ea"/>
+                <a:cs typeface="+mj-cs"/>
+              </a:defRPr>
+            </a:lvl1pPr>
+          </a:lstStyle>
+          <a:p>
+            <a:pPr algn="r"/>
+            <a:r>
+              <a:rPr lang="es-ES" sz="2800" b="1" dirty="0" err="1">
+                <a:solidFill>
+                  <a:schemeClr val="accent6">
+                    <a:lumMod val="60000"/>
+                    <a:lumOff val="40000"/>
+                  </a:schemeClr>
+                </a:solidFill>
+                <a:latin typeface="Helvetica" panose="020B0604020202020204" pitchFamily="34" charset="0"/>
+                <a:cs typeface="Helvetica" panose="020B0604020202020204" pitchFamily="34" charset="0"/>
+              </a:rPr>
+              <a:t>Introduction</a:t>
+            </a:r>
+            <a:r>
+              <a:rPr lang="es-ES" sz="2800" b="1" dirty="0">
+                <a:solidFill>
+                  <a:srgbClr val="218317"/>
+                </a:solidFill>
+                <a:latin typeface="Helvetica" panose="020B0604020202020204" pitchFamily="34" charset="0"/>
+                <a:cs typeface="Helvetica" panose="020B0604020202020204" pitchFamily="34" charset="0"/>
+              </a:rPr>
+              <a:t>.</a:t>
+            </a:r>
+          </a:p>
+        </p:txBody>
+      </p:sp>
+      <p:sp>
+        <p:nvSpPr>
+          <p:cNvPr id="4" name="Marcador de contenido 2">
+            <a:extLst>
+              <a:ext uri="{FF2B5EF4-FFF2-40B4-BE49-F238E27FC236}">
+                <a16:creationId xmlns:a16="http://schemas.microsoft.com/office/drawing/2014/main" id="{17176B63-C01E-6AD5-661C-4C9D8D28D38C}"/>
+              </a:ext>
+            </a:extLst>
+          </p:cNvPr>
+          <p:cNvSpPr txBox="1">
+            <a:spLocks/>
+          </p:cNvSpPr>
+          <p:nvPr/>
+        </p:nvSpPr>
+        <p:spPr>
+          <a:xfrm>
+            <a:off x="633459" y="2041583"/>
+            <a:ext cx="10925077" cy="1146828"/>
+          </a:xfrm>
+          <a:prstGeom prst="rect">
+            <a:avLst/>
+          </a:prstGeom>
+        </p:spPr>
+        <p:txBody>
+          <a:bodyPr vert="horz" lIns="91440" tIns="45720" rIns="91440" bIns="45720" rtlCol="0" anchor="t">
+            <a:normAutofit/>
+          </a:bodyPr>
+          <a:lstStyle>
+            <a:lvl1pPr marL="228600" indent="-228600" algn="l" defTabSz="914400" rtl="0" eaLnBrk="1" latinLnBrk="0" hangingPunct="1">
+              <a:lnSpc>
+                <a:spcPct val="90000"/>
+              </a:lnSpc>
+              <a:spcBef>
+                <a:spcPts val="1000"/>
+              </a:spcBef>
+              <a:buFont typeface="Arial" panose="020B0604020202020204" pitchFamily="34" charset="0"/>
+              <a:buChar char="•"/>
+              <a:defRPr sz="2800" kern="1200">
+                <a:solidFill>
+                  <a:schemeClr val="tx1"/>
+                </a:solidFill>
+                <a:latin typeface="+mn-lt"/>
+                <a:ea typeface="+mn-ea"/>
+                <a:cs typeface="+mn-cs"/>
+              </a:defRPr>
+            </a:lvl1pPr>
+            <a:lvl2pPr marL="685800" indent="-228600" algn="l" defTabSz="914400" rtl="0" eaLnBrk="1" latinLnBrk="0" hangingPunct="1">
+              <a:lnSpc>
+                <a:spcPct val="90000"/>
+              </a:lnSpc>
+              <a:spcBef>
+                <a:spcPts val="500"/>
+              </a:spcBef>
+              <a:buFont typeface="Arial" panose="020B0604020202020204" pitchFamily="34" charset="0"/>
+              <a:buChar char="•"/>
+              <a:defRPr sz="2400" kern="1200">
+                <a:solidFill>
+                  <a:schemeClr val="tx1"/>
+                </a:solidFill>
+                <a:latin typeface="+mn-lt"/>
+                <a:ea typeface="+mn-ea"/>
+                <a:cs typeface="+mn-cs"/>
+              </a:defRPr>
+            </a:lvl2pPr>
+            <a:lvl3pPr marL="1143000" indent="-228600" algn="l" defTabSz="914400" rtl="0" eaLnBrk="1" latinLnBrk="0" hangingPunct="1">
+              <a:lnSpc>
+                <a:spcPct val="90000"/>
+              </a:lnSpc>
+              <a:spcBef>
+                <a:spcPts val="500"/>
+              </a:spcBef>
+              <a:buFont typeface="Arial" panose="020B0604020202020204" pitchFamily="34" charset="0"/>
+              <a:buChar char="•"/>
+              <a:defRPr sz="2000" kern="1200">
+                <a:solidFill>
+                  <a:schemeClr val="tx1"/>
+                </a:solidFill>
+                <a:latin typeface="+mn-lt"/>
+                <a:ea typeface="+mn-ea"/>
+                <a:cs typeface="+mn-cs"/>
+              </a:defRPr>
+            </a:lvl3pPr>
+            <a:lvl4pPr marL="1600200" indent="-228600" algn="l" defTabSz="914400" rtl="0" eaLnBrk="1" latinLnBrk="0" hangingPunct="1">
+              <a:lnSpc>
+                <a:spcPct val="90000"/>
+              </a:lnSpc>
+              <a:spcBef>
+                <a:spcPts val="500"/>
+              </a:spcBef>
+              <a:buFont typeface="Arial" panose="020B0604020202020204" pitchFamily="34" charset="0"/>
+              <a:buChar char="•"/>
+              <a:defRPr sz="1800" kern="1200">
+                <a:solidFill>
+                  <a:schemeClr val="tx1"/>
+                </a:solidFill>
+                <a:latin typeface="+mn-lt"/>
+                <a:ea typeface="+mn-ea"/>
+                <a:cs typeface="+mn-cs"/>
+              </a:defRPr>
+            </a:lvl4pPr>
+            <a:lvl5pPr marL="2057400" indent="-228600" algn="l" defTabSz="914400" rtl="0" eaLnBrk="1" latinLnBrk="0" hangingPunct="1">
+              <a:lnSpc>
+                <a:spcPct val="90000"/>
+              </a:lnSpc>
+              <a:spcBef>
+                <a:spcPts val="500"/>
+              </a:spcBef>
+              <a:buFont typeface="Arial" panose="020B0604020202020204" pitchFamily="34" charset="0"/>
+              <a:buChar char="•"/>
+              <a:defRPr sz="1800" kern="1200">
+                <a:solidFill>
+                  <a:schemeClr val="tx1"/>
+                </a:solidFill>
+                <a:latin typeface="+mn-lt"/>
+                <a:ea typeface="+mn-ea"/>
+                <a:cs typeface="+mn-cs"/>
+              </a:defRPr>
+            </a:lvl5pPr>
+            <a:lvl6pPr marL="2514600" indent="-228600" algn="l" defTabSz="914400" rtl="0" eaLnBrk="1" latinLnBrk="0" hangingPunct="1">
+              <a:lnSpc>
+                <a:spcPct val="90000"/>
+              </a:lnSpc>
+              <a:spcBef>
+                <a:spcPts val="500"/>
+              </a:spcBef>
+              <a:buFont typeface="Arial" panose="020B0604020202020204" pitchFamily="34" charset="0"/>
+              <a:buChar char="•"/>
+              <a:defRPr sz="1800" kern="1200">
+                <a:solidFill>
+                  <a:schemeClr val="tx1"/>
+                </a:solidFill>
+                <a:latin typeface="+mn-lt"/>
+                <a:ea typeface="+mn-ea"/>
+                <a:cs typeface="+mn-cs"/>
+              </a:defRPr>
+            </a:lvl6pPr>
+            <a:lvl7pPr marL="2971800" indent="-228600" algn="l" defTabSz="914400" rtl="0" eaLnBrk="1" latinLnBrk="0" hangingPunct="1">
+              <a:lnSpc>
+                <a:spcPct val="90000"/>
+              </a:lnSpc>
+              <a:spcBef>
+                <a:spcPts val="500"/>
+              </a:spcBef>
+              <a:buFont typeface="Arial" panose="020B0604020202020204" pitchFamily="34" charset="0"/>
+              <a:buChar char="•"/>
+              <a:defRPr sz="1800" kern="1200">
+                <a:solidFill>
+                  <a:schemeClr val="tx1"/>
+                </a:solidFill>
+                <a:latin typeface="+mn-lt"/>
+                <a:ea typeface="+mn-ea"/>
+                <a:cs typeface="+mn-cs"/>
+              </a:defRPr>
+            </a:lvl7pPr>
+            <a:lvl8pPr marL="3429000" indent="-228600" algn="l" defTabSz="914400" rtl="0" eaLnBrk="1" latinLnBrk="0" hangingPunct="1">
+              <a:lnSpc>
+                <a:spcPct val="90000"/>
+              </a:lnSpc>
+              <a:spcBef>
+                <a:spcPts val="500"/>
+              </a:spcBef>
+              <a:buFont typeface="Arial" panose="020B0604020202020204" pitchFamily="34" charset="0"/>
+              <a:buChar char="•"/>
+              <a:defRPr sz="1800" kern="1200">
+                <a:solidFill>
+                  <a:schemeClr val="tx1"/>
+                </a:solidFill>
+                <a:latin typeface="+mn-lt"/>
+                <a:ea typeface="+mn-ea"/>
+                <a:cs typeface="+mn-cs"/>
+              </a:defRPr>
+            </a:lvl8pPr>
+            <a:lvl9pPr marL="3886200" indent="-228600" algn="l" defTabSz="914400" rtl="0" eaLnBrk="1" latinLnBrk="0" hangingPunct="1">
+              <a:lnSpc>
+                <a:spcPct val="90000"/>
+              </a:lnSpc>
+              <a:spcBef>
+                <a:spcPts val="500"/>
+              </a:spcBef>
+              <a:buFont typeface="Arial" panose="020B0604020202020204" pitchFamily="34" charset="0"/>
+              <a:buChar char="•"/>
+              <a:defRPr sz="1800" kern="1200">
+                <a:solidFill>
+                  <a:schemeClr val="tx1"/>
+                </a:solidFill>
+                <a:latin typeface="+mn-lt"/>
+                <a:ea typeface="+mn-ea"/>
+                <a:cs typeface="+mn-cs"/>
+              </a:defRPr>
+            </a:lvl9pPr>
+          </a:lstStyle>
+          <a:p>
+            <a:pPr marL="0" indent="0">
+              <a:buNone/>
+            </a:pPr>
+            <a:r>
+              <a:rPr lang="es-ES" sz="2400" b="1" i="1" dirty="0">
+                <a:latin typeface="Helvetica"/>
+                <a:cs typeface="Helvetica"/>
+              </a:rPr>
+              <a:t>H2.-</a:t>
+            </a:r>
+            <a:r>
+              <a:rPr lang="es-ES" sz="2400" i="1" dirty="0">
+                <a:latin typeface="Helvetica"/>
+                <a:cs typeface="Helvetica"/>
+              </a:rPr>
+              <a:t> </a:t>
+            </a:r>
+            <a:r>
+              <a:rPr lang="es-ES" sz="2400" i="1" dirty="0" err="1">
+                <a:latin typeface="Helvetica"/>
+                <a:cs typeface="Helvetica"/>
+              </a:rPr>
+              <a:t>We</a:t>
+            </a:r>
+            <a:r>
+              <a:rPr lang="es-ES" sz="2400" i="1" dirty="0">
+                <a:latin typeface="Helvetica"/>
+                <a:cs typeface="Helvetica"/>
+              </a:rPr>
+              <a:t> </a:t>
+            </a:r>
+            <a:r>
+              <a:rPr lang="es-ES" sz="2400" i="1" dirty="0" err="1">
+                <a:latin typeface="Helvetica"/>
+                <a:cs typeface="Helvetica"/>
+              </a:rPr>
+              <a:t>expect</a:t>
+            </a:r>
+            <a:r>
+              <a:rPr lang="es-ES" sz="2400" i="1" dirty="0">
+                <a:latin typeface="Helvetica"/>
+                <a:cs typeface="Helvetica"/>
+              </a:rPr>
+              <a:t> </a:t>
+            </a:r>
+            <a:r>
+              <a:rPr lang="es-ES" sz="2400" i="1" dirty="0" err="1">
+                <a:latin typeface="Helvetica"/>
+                <a:cs typeface="Helvetica"/>
+              </a:rPr>
+              <a:t>drought-induced</a:t>
+            </a:r>
+            <a:r>
+              <a:rPr lang="es-ES" sz="2400" i="1" dirty="0">
+                <a:latin typeface="Helvetica"/>
+                <a:cs typeface="Helvetica"/>
+              </a:rPr>
+              <a:t> </a:t>
+            </a:r>
+            <a:r>
+              <a:rPr lang="es-ES" sz="2400" i="1" dirty="0" err="1">
+                <a:latin typeface="Helvetica"/>
+                <a:cs typeface="Helvetica"/>
+              </a:rPr>
+              <a:t>reduced</a:t>
+            </a:r>
+            <a:r>
+              <a:rPr lang="es-ES" sz="2400" i="1" dirty="0">
+                <a:latin typeface="Helvetica"/>
+                <a:cs typeface="Helvetica"/>
+              </a:rPr>
+              <a:t> </a:t>
+            </a:r>
+            <a:r>
+              <a:rPr lang="es-ES" sz="2400" i="1" dirty="0" err="1">
+                <a:latin typeface="Helvetica"/>
+                <a:cs typeface="Helvetica"/>
+              </a:rPr>
+              <a:t>photosynthetic</a:t>
+            </a:r>
+            <a:r>
+              <a:rPr lang="es-ES" sz="2400" i="1" dirty="0">
+                <a:latin typeface="Helvetica"/>
+                <a:cs typeface="Helvetica"/>
+              </a:rPr>
+              <a:t> </a:t>
+            </a:r>
+            <a:r>
+              <a:rPr lang="es-ES" sz="2400" i="1" dirty="0" err="1">
+                <a:latin typeface="Helvetica"/>
+                <a:cs typeface="Helvetica"/>
+              </a:rPr>
+              <a:t>pigments</a:t>
+            </a:r>
+            <a:r>
+              <a:rPr lang="es-ES" sz="2400" i="1" dirty="0">
+                <a:latin typeface="Helvetica"/>
+                <a:cs typeface="Helvetica"/>
+              </a:rPr>
+              <a:t> </a:t>
+            </a:r>
+            <a:r>
+              <a:rPr lang="es-ES" sz="2400" i="1" dirty="0" err="1">
+                <a:latin typeface="Helvetica"/>
+                <a:cs typeface="Helvetica"/>
+              </a:rPr>
+              <a:t>concentrations</a:t>
+            </a:r>
+            <a:r>
+              <a:rPr lang="es-ES" sz="2400" i="1" dirty="0">
+                <a:latin typeface="Helvetica"/>
+                <a:cs typeface="Helvetica"/>
+              </a:rPr>
+              <a:t>, </a:t>
+            </a:r>
+            <a:r>
+              <a:rPr lang="es-ES" sz="2400" i="1" dirty="0" err="1">
+                <a:latin typeface="Helvetica"/>
+                <a:cs typeface="Helvetica"/>
+              </a:rPr>
+              <a:t>increased</a:t>
+            </a:r>
+            <a:r>
+              <a:rPr lang="es-ES" sz="2400" i="1" dirty="0">
+                <a:latin typeface="Helvetica"/>
+                <a:cs typeface="Helvetica"/>
+              </a:rPr>
+              <a:t> </a:t>
+            </a:r>
+            <a:r>
+              <a:rPr lang="es-ES" sz="2400" i="1" dirty="0" err="1">
+                <a:latin typeface="Helvetica"/>
+                <a:cs typeface="Helvetica"/>
+              </a:rPr>
+              <a:t>iWUE</a:t>
+            </a:r>
+            <a:r>
+              <a:rPr lang="es-ES" sz="2400" i="1" dirty="0">
+                <a:latin typeface="Helvetica"/>
+                <a:cs typeface="Helvetica"/>
+              </a:rPr>
+              <a:t> and </a:t>
+            </a:r>
+            <a:r>
+              <a:rPr lang="es-ES" sz="2400" i="1" dirty="0" err="1">
+                <a:latin typeface="Helvetica"/>
+                <a:cs typeface="Helvetica"/>
+              </a:rPr>
+              <a:t>leaves</a:t>
+            </a:r>
+            <a:r>
+              <a:rPr lang="es-ES" sz="2400" i="1" dirty="0">
+                <a:latin typeface="Helvetica"/>
+                <a:cs typeface="Helvetica"/>
+              </a:rPr>
+              <a:t> </a:t>
+            </a:r>
+            <a:r>
+              <a:rPr lang="es-ES" sz="2400" i="1" dirty="0" err="1">
+                <a:latin typeface="Helvetica"/>
+                <a:cs typeface="Helvetica"/>
+              </a:rPr>
+              <a:t>nutrients</a:t>
+            </a:r>
+            <a:r>
+              <a:rPr lang="es-ES" sz="2400" i="1" dirty="0">
+                <a:latin typeface="Helvetica"/>
+                <a:cs typeface="Helvetica"/>
+              </a:rPr>
+              <a:t> </a:t>
+            </a:r>
+            <a:r>
+              <a:rPr lang="es-ES" sz="2400" i="1" dirty="0" err="1">
+                <a:latin typeface="Helvetica"/>
+                <a:cs typeface="Helvetica"/>
+              </a:rPr>
+              <a:t>allocation</a:t>
+            </a:r>
+            <a:endParaRPr lang="es-ES" sz="2400" i="1" dirty="0">
+              <a:latin typeface="Helvetica"/>
+              <a:cs typeface="Helvetica"/>
+            </a:endParaRPr>
+          </a:p>
+        </p:txBody>
+      </p:sp>
+      <p:sp>
+        <p:nvSpPr>
+          <p:cNvPr id="8" name="Marcador de contenido 2">
+            <a:extLst>
+              <a:ext uri="{FF2B5EF4-FFF2-40B4-BE49-F238E27FC236}">
+                <a16:creationId xmlns:a16="http://schemas.microsoft.com/office/drawing/2014/main" id="{5D2A598E-3271-64EB-5DA8-A70DDDCC8E1C}"/>
+              </a:ext>
+            </a:extLst>
+          </p:cNvPr>
+          <p:cNvSpPr txBox="1">
+            <a:spLocks/>
+          </p:cNvSpPr>
+          <p:nvPr/>
+        </p:nvSpPr>
+        <p:spPr>
+          <a:xfrm>
+            <a:off x="633459" y="2951923"/>
+            <a:ext cx="8172611" cy="3399182"/>
+          </a:xfrm>
+          <a:prstGeom prst="rect">
+            <a:avLst/>
+          </a:prstGeom>
+        </p:spPr>
+        <p:txBody>
+          <a:bodyPr vert="horz" lIns="91440" tIns="45720" rIns="91440" bIns="45720" rtlCol="0" anchor="t">
+            <a:normAutofit/>
+          </a:bodyPr>
+          <a:lstStyle>
+            <a:lvl1pPr marL="228600" indent="-228600" algn="l" defTabSz="914400" rtl="0" eaLnBrk="1" latinLnBrk="0" hangingPunct="1">
+              <a:lnSpc>
+                <a:spcPct val="90000"/>
+              </a:lnSpc>
+              <a:spcBef>
+                <a:spcPts val="1000"/>
+              </a:spcBef>
+              <a:buFont typeface="Arial" panose="020B0604020202020204" pitchFamily="34" charset="0"/>
+              <a:buChar char="•"/>
+              <a:defRPr sz="2800" kern="1200">
+                <a:solidFill>
+                  <a:schemeClr val="tx1"/>
+                </a:solidFill>
+                <a:latin typeface="+mn-lt"/>
+                <a:ea typeface="+mn-ea"/>
+                <a:cs typeface="+mn-cs"/>
+              </a:defRPr>
+            </a:lvl1pPr>
+            <a:lvl2pPr marL="685800" indent="-228600" algn="l" defTabSz="914400" rtl="0" eaLnBrk="1" latinLnBrk="0" hangingPunct="1">
+              <a:lnSpc>
+                <a:spcPct val="90000"/>
+              </a:lnSpc>
+              <a:spcBef>
+                <a:spcPts val="500"/>
+              </a:spcBef>
+              <a:buFont typeface="Arial" panose="020B0604020202020204" pitchFamily="34" charset="0"/>
+              <a:buChar char="•"/>
+              <a:defRPr sz="2400" kern="1200">
+                <a:solidFill>
+                  <a:schemeClr val="tx1"/>
+                </a:solidFill>
+                <a:latin typeface="+mn-lt"/>
+                <a:ea typeface="+mn-ea"/>
+                <a:cs typeface="+mn-cs"/>
+              </a:defRPr>
+            </a:lvl2pPr>
+            <a:lvl3pPr marL="1143000" indent="-228600" algn="l" defTabSz="914400" rtl="0" eaLnBrk="1" latinLnBrk="0" hangingPunct="1">
+              <a:lnSpc>
+                <a:spcPct val="90000"/>
+              </a:lnSpc>
+              <a:spcBef>
+                <a:spcPts val="500"/>
+              </a:spcBef>
+              <a:buFont typeface="Arial" panose="020B0604020202020204" pitchFamily="34" charset="0"/>
+              <a:buChar char="•"/>
+              <a:defRPr sz="2000" kern="1200">
+                <a:solidFill>
+                  <a:schemeClr val="tx1"/>
+                </a:solidFill>
+                <a:latin typeface="+mn-lt"/>
+                <a:ea typeface="+mn-ea"/>
+                <a:cs typeface="+mn-cs"/>
+              </a:defRPr>
+            </a:lvl3pPr>
+            <a:lvl4pPr marL="1600200" indent="-228600" algn="l" defTabSz="914400" rtl="0" eaLnBrk="1" latinLnBrk="0" hangingPunct="1">
+              <a:lnSpc>
+                <a:spcPct val="90000"/>
+              </a:lnSpc>
+              <a:spcBef>
+                <a:spcPts val="500"/>
+              </a:spcBef>
+              <a:buFont typeface="Arial" panose="020B0604020202020204" pitchFamily="34" charset="0"/>
+              <a:buChar char="•"/>
+              <a:defRPr sz="1800" kern="1200">
+                <a:solidFill>
+                  <a:schemeClr val="tx1"/>
+                </a:solidFill>
+                <a:latin typeface="+mn-lt"/>
+                <a:ea typeface="+mn-ea"/>
+                <a:cs typeface="+mn-cs"/>
+              </a:defRPr>
+            </a:lvl4pPr>
+            <a:lvl5pPr marL="2057400" indent="-228600" algn="l" defTabSz="914400" rtl="0" eaLnBrk="1" latinLnBrk="0" hangingPunct="1">
+              <a:lnSpc>
+                <a:spcPct val="90000"/>
+              </a:lnSpc>
+              <a:spcBef>
+                <a:spcPts val="500"/>
+              </a:spcBef>
+              <a:buFont typeface="Arial" panose="020B0604020202020204" pitchFamily="34" charset="0"/>
+              <a:buChar char="•"/>
+              <a:defRPr sz="1800" kern="1200">
+                <a:solidFill>
+                  <a:schemeClr val="tx1"/>
+                </a:solidFill>
+                <a:latin typeface="+mn-lt"/>
+                <a:ea typeface="+mn-ea"/>
+                <a:cs typeface="+mn-cs"/>
+              </a:defRPr>
+            </a:lvl5pPr>
+            <a:lvl6pPr marL="2514600" indent="-228600" algn="l" defTabSz="914400" rtl="0" eaLnBrk="1" latinLnBrk="0" hangingPunct="1">
+              <a:lnSpc>
+                <a:spcPct val="90000"/>
+              </a:lnSpc>
+              <a:spcBef>
+                <a:spcPts val="500"/>
+              </a:spcBef>
+              <a:buFont typeface="Arial" panose="020B0604020202020204" pitchFamily="34" charset="0"/>
+              <a:buChar char="•"/>
+              <a:defRPr sz="1800" kern="1200">
+                <a:solidFill>
+                  <a:schemeClr val="tx1"/>
+                </a:solidFill>
+                <a:latin typeface="+mn-lt"/>
+                <a:ea typeface="+mn-ea"/>
+                <a:cs typeface="+mn-cs"/>
+              </a:defRPr>
+            </a:lvl6pPr>
+            <a:lvl7pPr marL="2971800" indent="-228600" algn="l" defTabSz="914400" rtl="0" eaLnBrk="1" latinLnBrk="0" hangingPunct="1">
+              <a:lnSpc>
+                <a:spcPct val="90000"/>
+              </a:lnSpc>
+              <a:spcBef>
+                <a:spcPts val="500"/>
+              </a:spcBef>
+              <a:buFont typeface="Arial" panose="020B0604020202020204" pitchFamily="34" charset="0"/>
+              <a:buChar char="•"/>
+              <a:defRPr sz="1800" kern="1200">
+                <a:solidFill>
+                  <a:schemeClr val="tx1"/>
+                </a:solidFill>
+                <a:latin typeface="+mn-lt"/>
+                <a:ea typeface="+mn-ea"/>
+                <a:cs typeface="+mn-cs"/>
+              </a:defRPr>
+            </a:lvl7pPr>
+            <a:lvl8pPr marL="3429000" indent="-228600" algn="l" defTabSz="914400" rtl="0" eaLnBrk="1" latinLnBrk="0" hangingPunct="1">
+              <a:lnSpc>
+                <a:spcPct val="90000"/>
+              </a:lnSpc>
+              <a:spcBef>
+                <a:spcPts val="500"/>
+              </a:spcBef>
+              <a:buFont typeface="Arial" panose="020B0604020202020204" pitchFamily="34" charset="0"/>
+              <a:buChar char="•"/>
+              <a:defRPr sz="1800" kern="1200">
+                <a:solidFill>
+                  <a:schemeClr val="tx1"/>
+                </a:solidFill>
+                <a:latin typeface="+mn-lt"/>
+                <a:ea typeface="+mn-ea"/>
+                <a:cs typeface="+mn-cs"/>
+              </a:defRPr>
+            </a:lvl8pPr>
+            <a:lvl9pPr marL="3886200" indent="-228600" algn="l" defTabSz="914400" rtl="0" eaLnBrk="1" latinLnBrk="0" hangingPunct="1">
+              <a:lnSpc>
+                <a:spcPct val="90000"/>
+              </a:lnSpc>
+              <a:spcBef>
+                <a:spcPts val="500"/>
+              </a:spcBef>
+              <a:buFont typeface="Arial" panose="020B0604020202020204" pitchFamily="34" charset="0"/>
+              <a:buChar char="•"/>
+              <a:defRPr sz="1800" kern="1200">
+                <a:solidFill>
+                  <a:schemeClr val="tx1"/>
+                </a:solidFill>
+                <a:latin typeface="+mn-lt"/>
+                <a:ea typeface="+mn-ea"/>
+                <a:cs typeface="+mn-cs"/>
+              </a:defRPr>
+            </a:lvl9pPr>
+          </a:lstStyle>
+          <a:p>
+            <a:pPr>
+              <a:buClr>
+                <a:srgbClr val="218317"/>
+              </a:buClr>
+            </a:pPr>
+            <a:r>
+              <a:rPr lang="es-ES" sz="2400" b="1" dirty="0" err="1">
+                <a:latin typeface="Helvetica"/>
+                <a:cs typeface="Helvetica"/>
+              </a:rPr>
+              <a:t>Pigments</a:t>
+            </a:r>
+            <a:r>
+              <a:rPr lang="es-ES" sz="2400" b="1" dirty="0">
+                <a:latin typeface="Helvetica"/>
+                <a:cs typeface="Helvetica"/>
+              </a:rPr>
+              <a:t>: </a:t>
+            </a:r>
+            <a:r>
+              <a:rPr lang="en-US" sz="2400" dirty="0">
+                <a:latin typeface="Helvetica"/>
+                <a:cs typeface="Helvetica"/>
+              </a:rPr>
+              <a:t>water stress-induced increased ABA and ROS trigger upregulation of senescence-associated genes (SAG), and to damages to photosynthetic apparatus </a:t>
+            </a:r>
+            <a:r>
+              <a:rPr lang="en-US" sz="2400" dirty="0">
+                <a:latin typeface="Helvetica"/>
+                <a:cs typeface="Helvetica"/>
+                <a:sym typeface="Wingdings" panose="05000000000000000000" pitchFamily="2" charset="2"/>
+              </a:rPr>
+              <a:t> </a:t>
+            </a:r>
+            <a:r>
+              <a:rPr lang="es-ES" sz="2400" b="1" dirty="0">
+                <a:latin typeface="Helvetica"/>
+                <a:cs typeface="Helvetica"/>
+                <a:sym typeface="Wingdings" panose="05000000000000000000" pitchFamily="2" charset="2"/>
+              </a:rPr>
+              <a:t>↓ </a:t>
+            </a:r>
+            <a:r>
+              <a:rPr lang="es-ES" sz="2400" b="1" dirty="0" err="1">
+                <a:latin typeface="Helvetica"/>
+                <a:cs typeface="Helvetica"/>
+                <a:sym typeface="Wingdings" panose="05000000000000000000" pitchFamily="2" charset="2"/>
+              </a:rPr>
+              <a:t>Pigments</a:t>
+            </a:r>
+            <a:r>
+              <a:rPr lang="es-ES" sz="2400" b="1" dirty="0">
+                <a:latin typeface="Helvetica"/>
+                <a:cs typeface="Helvetica"/>
+                <a:sym typeface="Wingdings" panose="05000000000000000000" pitchFamily="2" charset="2"/>
+              </a:rPr>
+              <a:t> </a:t>
+            </a:r>
+            <a:r>
+              <a:rPr lang="es-ES" sz="2400" b="1" dirty="0" err="1">
+                <a:latin typeface="Helvetica"/>
+                <a:cs typeface="Helvetica"/>
+                <a:sym typeface="Wingdings" panose="05000000000000000000" pitchFamily="2" charset="2"/>
+              </a:rPr>
+              <a:t>concentration</a:t>
+            </a:r>
+            <a:endParaRPr lang="es-ES" sz="2400" b="1" dirty="0">
+              <a:solidFill>
+                <a:srgbClr val="C00000"/>
+              </a:solidFill>
+              <a:latin typeface="Helvetica"/>
+              <a:cs typeface="Helvetica"/>
+              <a:sym typeface="Wingdings" panose="05000000000000000000" pitchFamily="2" charset="2"/>
+            </a:endParaRPr>
+          </a:p>
+          <a:p>
+            <a:pPr>
+              <a:buClr>
+                <a:srgbClr val="218317"/>
+              </a:buClr>
+            </a:pPr>
+            <a:r>
+              <a:rPr lang="es-ES" sz="2400" b="1" dirty="0" err="1">
+                <a:latin typeface="Helvetica"/>
+                <a:cs typeface="Helvetica"/>
+              </a:rPr>
+              <a:t>iWUE</a:t>
+            </a:r>
+            <a:r>
+              <a:rPr lang="es-ES" sz="2400" b="1" dirty="0">
+                <a:latin typeface="Helvetica"/>
+                <a:cs typeface="Helvetica"/>
+              </a:rPr>
+              <a:t>: </a:t>
+            </a:r>
+            <a:r>
+              <a:rPr lang="es-ES" sz="2400" dirty="0" err="1">
+                <a:latin typeface="Helvetica"/>
+                <a:cs typeface="Helvetica"/>
+              </a:rPr>
+              <a:t>we</a:t>
+            </a:r>
+            <a:r>
+              <a:rPr lang="es-ES" sz="2400" dirty="0">
+                <a:latin typeface="Helvetica"/>
+                <a:cs typeface="Helvetica"/>
+              </a:rPr>
+              <a:t> </a:t>
+            </a:r>
+            <a:r>
+              <a:rPr lang="es-ES" sz="2400" dirty="0" err="1">
+                <a:latin typeface="Helvetica"/>
+                <a:cs typeface="Helvetica"/>
+              </a:rPr>
+              <a:t>an</a:t>
+            </a:r>
+            <a:r>
+              <a:rPr lang="es-ES" sz="2400" dirty="0">
+                <a:latin typeface="Helvetica"/>
+                <a:cs typeface="Helvetica"/>
+              </a:rPr>
+              <a:t> </a:t>
+            </a:r>
+            <a:r>
+              <a:rPr lang="es-ES" sz="2400" dirty="0" err="1">
+                <a:latin typeface="Helvetica"/>
+                <a:cs typeface="Helvetica"/>
+              </a:rPr>
+              <a:t>isohydric</a:t>
+            </a:r>
+            <a:r>
+              <a:rPr lang="es-ES" sz="2400" dirty="0">
+                <a:latin typeface="Helvetica"/>
+                <a:cs typeface="Helvetica"/>
+              </a:rPr>
+              <a:t> </a:t>
+            </a:r>
+            <a:r>
+              <a:rPr lang="es-ES" sz="2400" dirty="0" err="1">
+                <a:latin typeface="Helvetica"/>
+                <a:cs typeface="Helvetica"/>
+              </a:rPr>
+              <a:t>behaviour</a:t>
+            </a:r>
+            <a:r>
+              <a:rPr lang="es-ES" sz="2400" dirty="0">
+                <a:latin typeface="Helvetica"/>
+                <a:cs typeface="Helvetica"/>
+              </a:rPr>
+              <a:t> </a:t>
+            </a:r>
+            <a:r>
+              <a:rPr lang="es-ES" sz="2400" dirty="0" err="1">
+                <a:latin typeface="Helvetica"/>
+                <a:cs typeface="Helvetica"/>
+              </a:rPr>
+              <a:t>leading</a:t>
+            </a:r>
+            <a:r>
+              <a:rPr lang="es-ES" sz="2400" dirty="0">
+                <a:latin typeface="Helvetica"/>
+                <a:cs typeface="Helvetica"/>
+              </a:rPr>
+              <a:t> </a:t>
+            </a:r>
+            <a:r>
+              <a:rPr lang="es-ES" sz="2400" dirty="0" err="1">
+                <a:latin typeface="Helvetica"/>
+                <a:cs typeface="Helvetica"/>
+              </a:rPr>
+              <a:t>to</a:t>
+            </a:r>
+            <a:r>
+              <a:rPr lang="es-ES" sz="2400" dirty="0">
+                <a:latin typeface="Helvetica"/>
+                <a:cs typeface="Helvetica"/>
+              </a:rPr>
+              <a:t> </a:t>
+            </a:r>
+            <a:r>
+              <a:rPr lang="es-ES" sz="2400" dirty="0" err="1">
+                <a:latin typeface="Helvetica"/>
+                <a:cs typeface="Helvetica"/>
+              </a:rPr>
+              <a:t>stomatal</a:t>
+            </a:r>
+            <a:r>
+              <a:rPr lang="es-ES" sz="2400" dirty="0">
+                <a:latin typeface="Helvetica"/>
+                <a:cs typeface="Helvetica"/>
+              </a:rPr>
+              <a:t> </a:t>
+            </a:r>
+            <a:r>
+              <a:rPr lang="es-ES" sz="2400" dirty="0" err="1">
+                <a:latin typeface="Helvetica"/>
+                <a:cs typeface="Helvetica"/>
+              </a:rPr>
+              <a:t>closure</a:t>
+            </a:r>
+            <a:r>
+              <a:rPr lang="es-ES" sz="2400" dirty="0">
+                <a:latin typeface="Helvetica"/>
+                <a:cs typeface="Helvetica"/>
+              </a:rPr>
+              <a:t> </a:t>
+            </a:r>
+            <a:r>
+              <a:rPr lang="es-ES" sz="2400" dirty="0">
+                <a:latin typeface="Helvetica"/>
+                <a:cs typeface="Helvetica"/>
+                <a:sym typeface="Wingdings" panose="05000000000000000000" pitchFamily="2" charset="2"/>
+              </a:rPr>
+              <a:t> </a:t>
+            </a:r>
+            <a:r>
+              <a:rPr lang="es-ES" sz="2400" b="1" dirty="0">
+                <a:latin typeface="Helvetica"/>
+                <a:cs typeface="Helvetica"/>
+                <a:sym typeface="Wingdings" panose="05000000000000000000" pitchFamily="2" charset="2"/>
+              </a:rPr>
+              <a:t>↑ </a:t>
+            </a:r>
+            <a:r>
+              <a:rPr lang="el-GR" sz="2400" b="1" dirty="0">
+                <a:latin typeface="Helvetica"/>
+                <a:cs typeface="Helvetica"/>
+                <a:sym typeface="Wingdings" panose="05000000000000000000" pitchFamily="2" charset="2"/>
+              </a:rPr>
+              <a:t>δ</a:t>
+            </a:r>
+            <a:r>
+              <a:rPr lang="es-ES" sz="2400" b="1" baseline="30000" dirty="0">
+                <a:latin typeface="Helvetica"/>
+                <a:cs typeface="Helvetica"/>
+                <a:sym typeface="Wingdings" panose="05000000000000000000" pitchFamily="2" charset="2"/>
+              </a:rPr>
+              <a:t>13</a:t>
+            </a:r>
+            <a:r>
+              <a:rPr lang="es-ES" sz="2400" b="1" dirty="0">
+                <a:latin typeface="Helvetica"/>
+                <a:cs typeface="Helvetica"/>
+                <a:sym typeface="Wingdings" panose="05000000000000000000" pitchFamily="2" charset="2"/>
+              </a:rPr>
+              <a:t>C and </a:t>
+            </a:r>
+            <a:r>
+              <a:rPr lang="el-GR" sz="2400" b="1" dirty="0">
+                <a:latin typeface="Helvetica"/>
+                <a:cs typeface="Helvetica"/>
+                <a:sym typeface="Wingdings" panose="05000000000000000000" pitchFamily="2" charset="2"/>
+              </a:rPr>
+              <a:t>δ</a:t>
+            </a:r>
+            <a:r>
+              <a:rPr lang="es-ES" sz="2400" b="1" baseline="30000" dirty="0">
+                <a:latin typeface="Helvetica"/>
+                <a:cs typeface="Helvetica"/>
+                <a:sym typeface="Wingdings" panose="05000000000000000000" pitchFamily="2" charset="2"/>
+              </a:rPr>
+              <a:t>18</a:t>
+            </a:r>
+            <a:r>
+              <a:rPr lang="es-ES" sz="2400" b="1" dirty="0">
+                <a:latin typeface="Helvetica"/>
+                <a:cs typeface="Helvetica"/>
+                <a:sym typeface="Wingdings" panose="05000000000000000000" pitchFamily="2" charset="2"/>
+              </a:rPr>
+              <a:t>O in </a:t>
+            </a:r>
+            <a:r>
+              <a:rPr lang="es-ES" sz="2400" b="1" dirty="0" err="1">
+                <a:latin typeface="Helvetica"/>
+                <a:cs typeface="Helvetica"/>
+                <a:sym typeface="Wingdings" panose="05000000000000000000" pitchFamily="2" charset="2"/>
+              </a:rPr>
+              <a:t>leaves</a:t>
+            </a:r>
+            <a:r>
+              <a:rPr lang="es-ES" sz="2400" b="1" dirty="0">
+                <a:latin typeface="Helvetica"/>
+                <a:cs typeface="Helvetica"/>
+                <a:sym typeface="Wingdings" panose="05000000000000000000" pitchFamily="2" charset="2"/>
+              </a:rPr>
+              <a:t> and </a:t>
+            </a:r>
+            <a:r>
+              <a:rPr lang="es-ES" sz="2400" b="1" dirty="0" err="1">
+                <a:latin typeface="Helvetica"/>
+                <a:cs typeface="Helvetica"/>
+                <a:sym typeface="Wingdings" panose="05000000000000000000" pitchFamily="2" charset="2"/>
+              </a:rPr>
+              <a:t>wood</a:t>
+            </a:r>
+            <a:r>
+              <a:rPr lang="es-ES" sz="2400" b="1" dirty="0">
+                <a:latin typeface="Helvetica"/>
+                <a:cs typeface="Helvetica"/>
+                <a:sym typeface="Wingdings" panose="05000000000000000000" pitchFamily="2" charset="2"/>
+              </a:rPr>
+              <a:t> </a:t>
+            </a:r>
+            <a:r>
+              <a:rPr lang="es-ES" sz="2400" b="1" dirty="0" err="1">
+                <a:latin typeface="Helvetica"/>
+                <a:cs typeface="Helvetica"/>
+                <a:sym typeface="Wingdings" panose="05000000000000000000" pitchFamily="2" charset="2"/>
+              </a:rPr>
+              <a:t>tissue</a:t>
+            </a:r>
+            <a:endParaRPr lang="es-ES" sz="2400" b="1" dirty="0">
+              <a:latin typeface="Helvetica"/>
+              <a:cs typeface="Helvetica"/>
+              <a:sym typeface="Wingdings" panose="05000000000000000000" pitchFamily="2" charset="2"/>
+            </a:endParaRPr>
+          </a:p>
+          <a:p>
+            <a:pPr>
+              <a:buClr>
+                <a:srgbClr val="218317"/>
+              </a:buClr>
+            </a:pPr>
+            <a:r>
+              <a:rPr lang="es-ES" sz="2400" b="1" dirty="0" err="1">
+                <a:latin typeface="Helvetica"/>
+                <a:cs typeface="Helvetica"/>
+                <a:sym typeface="Wingdings" panose="05000000000000000000" pitchFamily="2" charset="2"/>
+              </a:rPr>
+              <a:t>Nutrients</a:t>
+            </a:r>
+            <a:r>
+              <a:rPr lang="es-ES" sz="2400" b="1" dirty="0">
+                <a:latin typeface="Helvetica"/>
+                <a:cs typeface="Helvetica"/>
+                <a:sym typeface="Wingdings" panose="05000000000000000000" pitchFamily="2" charset="2"/>
+              </a:rPr>
+              <a:t>: </a:t>
+            </a:r>
+            <a:r>
+              <a:rPr lang="es-ES" sz="2400" dirty="0" err="1">
+                <a:latin typeface="Helvetica"/>
+                <a:cs typeface="Helvetica"/>
+                <a:sym typeface="Wingdings" panose="05000000000000000000" pitchFamily="2" charset="2"/>
+              </a:rPr>
+              <a:t>we</a:t>
+            </a:r>
+            <a:r>
+              <a:rPr lang="es-ES" sz="2400" dirty="0">
+                <a:latin typeface="Helvetica"/>
+                <a:cs typeface="Helvetica"/>
+                <a:sym typeface="Wingdings" panose="05000000000000000000" pitchFamily="2" charset="2"/>
+              </a:rPr>
+              <a:t> </a:t>
+            </a:r>
+            <a:r>
+              <a:rPr lang="es-ES" sz="2400" dirty="0" err="1">
+                <a:latin typeface="Helvetica"/>
+                <a:cs typeface="Helvetica"/>
+                <a:sym typeface="Wingdings" panose="05000000000000000000" pitchFamily="2" charset="2"/>
+              </a:rPr>
+              <a:t>nutrient</a:t>
+            </a:r>
+            <a:r>
+              <a:rPr lang="es-ES" sz="2400" dirty="0">
+                <a:latin typeface="Helvetica"/>
+                <a:cs typeface="Helvetica"/>
+                <a:sym typeface="Wingdings" panose="05000000000000000000" pitchFamily="2" charset="2"/>
+              </a:rPr>
+              <a:t> </a:t>
+            </a:r>
+            <a:r>
+              <a:rPr lang="es-ES" sz="2400" dirty="0" err="1">
+                <a:latin typeface="Helvetica"/>
+                <a:cs typeface="Helvetica"/>
+                <a:sym typeface="Wingdings" panose="05000000000000000000" pitchFamily="2" charset="2"/>
+              </a:rPr>
+              <a:t>allocation</a:t>
+            </a:r>
+            <a:r>
+              <a:rPr lang="es-ES" sz="2400" dirty="0">
+                <a:latin typeface="Helvetica"/>
+                <a:cs typeface="Helvetica"/>
+                <a:sym typeface="Wingdings" panose="05000000000000000000" pitchFamily="2" charset="2"/>
+              </a:rPr>
+              <a:t> in </a:t>
+            </a:r>
+            <a:r>
+              <a:rPr lang="es-ES" sz="2400" dirty="0" err="1">
+                <a:latin typeface="Helvetica"/>
+                <a:cs typeface="Helvetica"/>
+                <a:sym typeface="Wingdings" panose="05000000000000000000" pitchFamily="2" charset="2"/>
+              </a:rPr>
+              <a:t>leaves</a:t>
+            </a:r>
+            <a:r>
+              <a:rPr lang="es-ES" sz="2400" dirty="0">
+                <a:latin typeface="Helvetica"/>
+                <a:cs typeface="Helvetica"/>
+                <a:sym typeface="Wingdings" panose="05000000000000000000" pitchFamily="2" charset="2"/>
+              </a:rPr>
+              <a:t> </a:t>
+            </a:r>
+            <a:r>
+              <a:rPr lang="es-ES" sz="2400" dirty="0" err="1">
+                <a:latin typeface="Helvetica"/>
+                <a:cs typeface="Helvetica"/>
+                <a:sym typeface="Wingdings" panose="05000000000000000000" pitchFamily="2" charset="2"/>
+              </a:rPr>
+              <a:t>due</a:t>
+            </a:r>
+            <a:r>
+              <a:rPr lang="es-ES" sz="2400" dirty="0">
+                <a:latin typeface="Helvetica"/>
+                <a:cs typeface="Helvetica"/>
+                <a:sym typeface="Wingdings" panose="05000000000000000000" pitchFamily="2" charset="2"/>
+              </a:rPr>
+              <a:t> </a:t>
+            </a:r>
+            <a:r>
+              <a:rPr lang="es-ES" sz="2400" dirty="0" err="1">
+                <a:latin typeface="Helvetica"/>
+                <a:cs typeface="Helvetica"/>
+                <a:sym typeface="Wingdings" panose="05000000000000000000" pitchFamily="2" charset="2"/>
+              </a:rPr>
+              <a:t>to</a:t>
+            </a:r>
+            <a:r>
+              <a:rPr lang="es-ES" sz="2400" dirty="0">
+                <a:latin typeface="Helvetica"/>
+                <a:cs typeface="Helvetica"/>
+                <a:sym typeface="Wingdings" panose="05000000000000000000" pitchFamily="2" charset="2"/>
+              </a:rPr>
+              <a:t> </a:t>
+            </a:r>
+            <a:r>
+              <a:rPr lang="es-ES" sz="2400" dirty="0" err="1">
+                <a:latin typeface="Helvetica"/>
+                <a:cs typeface="Helvetica"/>
+                <a:sym typeface="Wingdings" panose="05000000000000000000" pitchFamily="2" charset="2"/>
+              </a:rPr>
+              <a:t>drought-induced</a:t>
+            </a:r>
+            <a:r>
+              <a:rPr lang="es-ES" sz="2400" dirty="0">
+                <a:latin typeface="Helvetica"/>
+                <a:cs typeface="Helvetica"/>
+                <a:sym typeface="Wingdings" panose="05000000000000000000" pitchFamily="2" charset="2"/>
+              </a:rPr>
+              <a:t> </a:t>
+            </a:r>
+            <a:r>
+              <a:rPr lang="es-ES" sz="2400" dirty="0" err="1">
+                <a:latin typeface="Helvetica"/>
+                <a:cs typeface="Helvetica"/>
+                <a:sym typeface="Wingdings" panose="05000000000000000000" pitchFamily="2" charset="2"/>
+              </a:rPr>
+              <a:t>reduced</a:t>
+            </a:r>
+            <a:r>
+              <a:rPr lang="es-ES" sz="2400" dirty="0">
+                <a:latin typeface="Helvetica"/>
+                <a:cs typeface="Helvetica"/>
+                <a:sym typeface="Wingdings" panose="05000000000000000000" pitchFamily="2" charset="2"/>
+              </a:rPr>
+              <a:t> </a:t>
+            </a:r>
+            <a:r>
+              <a:rPr lang="es-ES" sz="2400" dirty="0" err="1">
+                <a:latin typeface="Helvetica"/>
+                <a:cs typeface="Helvetica"/>
+                <a:sym typeface="Wingdings" panose="05000000000000000000" pitchFamily="2" charset="2"/>
+              </a:rPr>
+              <a:t>nutrients</a:t>
+            </a:r>
+            <a:r>
+              <a:rPr lang="es-ES" sz="2400" dirty="0">
+                <a:latin typeface="Helvetica"/>
+                <a:cs typeface="Helvetica"/>
+                <a:sym typeface="Wingdings" panose="05000000000000000000" pitchFamily="2" charset="2"/>
+              </a:rPr>
+              <a:t> </a:t>
+            </a:r>
+            <a:r>
+              <a:rPr lang="es-ES" sz="2400" dirty="0" err="1">
+                <a:latin typeface="Helvetica"/>
+                <a:cs typeface="Helvetica"/>
+                <a:sym typeface="Wingdings" panose="05000000000000000000" pitchFamily="2" charset="2"/>
+              </a:rPr>
+              <a:t>uptake</a:t>
+            </a:r>
+            <a:r>
+              <a:rPr lang="es-ES" sz="2400" dirty="0">
+                <a:latin typeface="Helvetica"/>
+                <a:cs typeface="Helvetica"/>
+                <a:sym typeface="Wingdings" panose="05000000000000000000" pitchFamily="2" charset="2"/>
+              </a:rPr>
+              <a:t>   </a:t>
+            </a:r>
+            <a:r>
+              <a:rPr lang="es-ES" sz="2400" b="1" dirty="0">
+                <a:latin typeface="Helvetica"/>
+                <a:cs typeface="Helvetica"/>
+                <a:sym typeface="Wingdings" panose="05000000000000000000" pitchFamily="2" charset="2"/>
+              </a:rPr>
+              <a:t>↓N </a:t>
+            </a:r>
+            <a:r>
+              <a:rPr lang="es-ES" sz="2400" b="1" dirty="0" err="1">
+                <a:latin typeface="Helvetica"/>
+                <a:cs typeface="Helvetica"/>
+                <a:sym typeface="Wingdings" panose="05000000000000000000" pitchFamily="2" charset="2"/>
+              </a:rPr>
+              <a:t>concentration</a:t>
+            </a:r>
+            <a:r>
+              <a:rPr lang="es-ES" sz="2400" b="1" dirty="0">
+                <a:latin typeface="Helvetica"/>
+                <a:cs typeface="Helvetica"/>
+                <a:sym typeface="Wingdings" panose="05000000000000000000" pitchFamily="2" charset="2"/>
+              </a:rPr>
+              <a:t> and ↑ C:N ratio in </a:t>
+            </a:r>
+            <a:r>
+              <a:rPr lang="es-ES" sz="2400" b="1" dirty="0" err="1">
+                <a:solidFill>
+                  <a:srgbClr val="C00000"/>
+                </a:solidFill>
+                <a:latin typeface="Helvetica"/>
+                <a:cs typeface="Helvetica"/>
+                <a:sym typeface="Wingdings" panose="05000000000000000000" pitchFamily="2" charset="2"/>
+              </a:rPr>
+              <a:t>declining</a:t>
+            </a:r>
+            <a:r>
+              <a:rPr lang="es-ES" sz="2400" b="1" dirty="0">
+                <a:solidFill>
+                  <a:srgbClr val="C00000"/>
+                </a:solidFill>
+                <a:latin typeface="Helvetica"/>
+                <a:cs typeface="Helvetica"/>
+                <a:sym typeface="Wingdings" panose="05000000000000000000" pitchFamily="2" charset="2"/>
+              </a:rPr>
+              <a:t> sites</a:t>
+            </a:r>
+            <a:endParaRPr lang="es-ES" sz="2400" b="1" dirty="0">
+              <a:latin typeface="Helvetica"/>
+              <a:cs typeface="Helvetica"/>
+            </a:endParaRPr>
+          </a:p>
+          <a:p>
+            <a:pPr>
+              <a:buClr>
+                <a:srgbClr val="218317"/>
+              </a:buClr>
+            </a:pPr>
+            <a:endParaRPr lang="es-ES" sz="2400" b="1" dirty="0">
+              <a:solidFill>
+                <a:srgbClr val="C00000"/>
+              </a:solidFill>
+              <a:latin typeface="Helvetica"/>
+              <a:cs typeface="Helvetica"/>
+            </a:endParaRPr>
+          </a:p>
+        </p:txBody>
+      </p:sp>
       <p:grpSp>
         <p:nvGrpSpPr>
-          <p:cNvPr id="13" name="Grupo 12">
+          <p:cNvPr id="3" name="Grupo 2">
             <a:extLst>
               <a:ext uri="{FF2B5EF4-FFF2-40B4-BE49-F238E27FC236}">
-                <a16:creationId xmlns:a16="http://schemas.microsoft.com/office/drawing/2014/main" id="{B90BC2F3-897A-2B30-EFC7-41E5B902FBC3}"/>
+                <a16:creationId xmlns:a16="http://schemas.microsoft.com/office/drawing/2014/main" id="{CD59DB51-5D88-D4EB-E8F6-3F6BAA5E1023}"/>
               </a:ext>
             </a:extLst>
           </p:cNvPr>
@@ -34462,18 +36109,18 @@
         </p:nvGrpSpPr>
         <p:grpSpPr>
           <a:xfrm>
-            <a:off x="6187927" y="3071492"/>
-            <a:ext cx="3301889" cy="1220763"/>
-            <a:chOff x="6178013" y="5057218"/>
-            <a:chExt cx="3301889" cy="1220763"/>
+            <a:off x="8752732" y="3174880"/>
+            <a:ext cx="3477754" cy="1250117"/>
+            <a:chOff x="1139560" y="5095351"/>
+            <a:chExt cx="3477754" cy="1250117"/>
           </a:xfrm>
         </p:grpSpPr>
         <p:pic>
           <p:nvPicPr>
-            <p:cNvPr id="14" name="Imagen 13">
+            <p:cNvPr id="5" name="Imagen 4">
               <a:extLst>
                 <a:ext uri="{FF2B5EF4-FFF2-40B4-BE49-F238E27FC236}">
-                  <a16:creationId xmlns:a16="http://schemas.microsoft.com/office/drawing/2014/main" id="{20FBB0A9-4054-E0D3-A9E2-30ABC5114F8A}"/>
+                  <a16:creationId xmlns:a16="http://schemas.microsoft.com/office/drawing/2014/main" id="{9E1E93E6-363C-013D-E9E5-1C142428746D}"/>
                 </a:ext>
               </a:extLst>
             </p:cNvPr>
@@ -34483,7 +36130,157 @@
             <p:nvPr/>
           </p:nvPicPr>
           <p:blipFill>
-            <a:blip r:embed="rId4"/>
+            <a:blip r:embed="rId3"/>
+            <a:srcRect b="57655"/>
+            <a:stretch/>
+          </p:blipFill>
+          <p:spPr>
+            <a:xfrm>
+              <a:off x="1139560" y="5095351"/>
+              <a:ext cx="3477754" cy="1250117"/>
+            </a:xfrm>
+            <a:prstGeom prst="rect">
+              <a:avLst/>
+            </a:prstGeom>
+          </p:spPr>
+        </p:pic>
+        <p:sp>
+          <p:nvSpPr>
+            <p:cNvPr id="6" name="CuadroTexto 5">
+              <a:extLst>
+                <a:ext uri="{FF2B5EF4-FFF2-40B4-BE49-F238E27FC236}">
+                  <a16:creationId xmlns:a16="http://schemas.microsoft.com/office/drawing/2014/main" id="{2FEF6D0F-A69C-A522-AA0F-98D0F4174B64}"/>
+                </a:ext>
+              </a:extLst>
+            </p:cNvPr>
+            <p:cNvSpPr txBox="1"/>
+            <p:nvPr/>
+          </p:nvSpPr>
+          <p:spPr>
+            <a:xfrm>
+              <a:off x="1609302" y="5843116"/>
+              <a:ext cx="1132041" cy="292388"/>
+            </a:xfrm>
+            <a:prstGeom prst="rect">
+              <a:avLst/>
+            </a:prstGeom>
+            <a:solidFill>
+              <a:schemeClr val="bg1"/>
+            </a:solidFill>
+          </p:spPr>
+          <p:txBody>
+            <a:bodyPr wrap="none" rtlCol="0">
+              <a:spAutoFit/>
+            </a:bodyPr>
+            <a:lstStyle/>
+            <a:p>
+              <a:r>
+                <a:rPr lang="es-ES" sz="1300" dirty="0">
+                  <a:solidFill>
+                    <a:srgbClr val="2F5597"/>
+                  </a:solidFill>
+                </a:rPr>
+                <a:t>Non-</a:t>
+              </a:r>
+              <a:r>
+                <a:rPr lang="es-ES" sz="1300" dirty="0" err="1">
+                  <a:solidFill>
+                    <a:srgbClr val="2F5597"/>
+                  </a:solidFill>
+                </a:rPr>
+                <a:t>declining</a:t>
+              </a:r>
+              <a:endParaRPr lang="es-ES" sz="1300" dirty="0">
+                <a:solidFill>
+                  <a:srgbClr val="2F5597"/>
+                </a:solidFill>
+              </a:endParaRPr>
+            </a:p>
+          </p:txBody>
+        </p:sp>
+        <p:sp>
+          <p:nvSpPr>
+            <p:cNvPr id="7" name="CuadroTexto 6">
+              <a:extLst>
+                <a:ext uri="{FF2B5EF4-FFF2-40B4-BE49-F238E27FC236}">
+                  <a16:creationId xmlns:a16="http://schemas.microsoft.com/office/drawing/2014/main" id="{0A30C1B7-6EB8-97DA-72BA-71484368860C}"/>
+                </a:ext>
+              </a:extLst>
+            </p:cNvPr>
+            <p:cNvSpPr txBox="1"/>
+            <p:nvPr/>
+          </p:nvSpPr>
+          <p:spPr>
+            <a:xfrm>
+              <a:off x="3151746" y="5843116"/>
+              <a:ext cx="811441" cy="292388"/>
+            </a:xfrm>
+            <a:prstGeom prst="rect">
+              <a:avLst/>
+            </a:prstGeom>
+            <a:solidFill>
+              <a:schemeClr val="bg1"/>
+            </a:solidFill>
+          </p:spPr>
+          <p:txBody>
+            <a:bodyPr wrap="none" rtlCol="0">
+              <a:spAutoFit/>
+            </a:bodyPr>
+            <a:lstStyle/>
+            <a:p>
+              <a:r>
+                <a:rPr lang="es-ES" sz="1300" dirty="0" err="1">
+                  <a:solidFill>
+                    <a:srgbClr val="C00000"/>
+                  </a:solidFill>
+                </a:rPr>
+                <a:t>Declining</a:t>
+              </a:r>
+              <a:endParaRPr lang="es-ES" sz="1300" dirty="0">
+                <a:solidFill>
+                  <a:srgbClr val="C00000"/>
+                </a:solidFill>
+              </a:endParaRPr>
+            </a:p>
+          </p:txBody>
+        </p:sp>
+      </p:grpSp>
+      <p:grpSp>
+        <p:nvGrpSpPr>
+          <p:cNvPr id="11" name="Grupo 10">
+            <a:extLst>
+              <a:ext uri="{FF2B5EF4-FFF2-40B4-BE49-F238E27FC236}">
+                <a16:creationId xmlns:a16="http://schemas.microsoft.com/office/drawing/2014/main" id="{B082686E-8BB0-F750-B3B1-7FCB2D135B37}"/>
+              </a:ext>
+            </a:extLst>
+          </p:cNvPr>
+          <p:cNvGrpSpPr/>
+          <p:nvPr/>
+        </p:nvGrpSpPr>
+        <p:grpSpPr>
+          <a:xfrm>
+            <a:off x="8752732" y="4438528"/>
+            <a:ext cx="3301889" cy="1220763"/>
+            <a:chOff x="6178013" y="5057218"/>
+            <a:chExt cx="3301889" cy="1220763"/>
+          </a:xfrm>
+        </p:grpSpPr>
+        <p:pic>
+          <p:nvPicPr>
+            <p:cNvPr id="12" name="Imagen 11">
+              <a:extLst>
+                <a:ext uri="{FF2B5EF4-FFF2-40B4-BE49-F238E27FC236}">
+                  <a16:creationId xmlns:a16="http://schemas.microsoft.com/office/drawing/2014/main" id="{AAFF188B-F49B-5A75-5066-5D26817E26A0}"/>
+                </a:ext>
+              </a:extLst>
+            </p:cNvPr>
+            <p:cNvPicPr>
+              <a:picLocks noChangeAspect="1"/>
+            </p:cNvPicPr>
+            <p:nvPr/>
+          </p:nvPicPr>
+          <p:blipFill>
+            <a:blip r:embed="rId3"/>
             <a:srcRect t="53835"/>
             <a:stretch/>
           </p:blipFill>
@@ -34499,10 +36296,10 @@
         </p:pic>
         <p:sp>
           <p:nvSpPr>
-            <p:cNvPr id="15" name="CuadroTexto 14">
+            <p:cNvPr id="13" name="CuadroTexto 12">
               <a:extLst>
                 <a:ext uri="{FF2B5EF4-FFF2-40B4-BE49-F238E27FC236}">
-                  <a16:creationId xmlns:a16="http://schemas.microsoft.com/office/drawing/2014/main" id="{C6E4E855-85D9-0951-CC38-E1446CBA3B6E}"/>
+                  <a16:creationId xmlns:a16="http://schemas.microsoft.com/office/drawing/2014/main" id="{C166D1FD-614B-8988-6A96-F2B8CE294316}"/>
                 </a:ext>
               </a:extLst>
             </p:cNvPr>
@@ -34557,10 +36354,10 @@
         </p:sp>
         <p:sp>
           <p:nvSpPr>
-            <p:cNvPr id="16" name="CuadroTexto 15">
+            <p:cNvPr id="14" name="CuadroTexto 13">
               <a:extLst>
                 <a:ext uri="{FF2B5EF4-FFF2-40B4-BE49-F238E27FC236}">
-                  <a16:creationId xmlns:a16="http://schemas.microsoft.com/office/drawing/2014/main" id="{68EB5557-D40F-117D-763A-D65209B528BB}"/>
+                  <a16:creationId xmlns:a16="http://schemas.microsoft.com/office/drawing/2014/main" id="{18957225-F35F-94AB-9237-9E5686244606}"/>
                 </a:ext>
               </a:extLst>
             </p:cNvPr>
@@ -34618,10 +36415,10 @@
         </p:sp>
         <p:sp>
           <p:nvSpPr>
-            <p:cNvPr id="17" name="CuadroTexto 16">
+            <p:cNvPr id="15" name="CuadroTexto 14">
               <a:extLst>
                 <a:ext uri="{FF2B5EF4-FFF2-40B4-BE49-F238E27FC236}">
-                  <a16:creationId xmlns:a16="http://schemas.microsoft.com/office/drawing/2014/main" id="{80BE9F0E-6247-FF83-8BA0-C3A25A523C8C}"/>
+                  <a16:creationId xmlns:a16="http://schemas.microsoft.com/office/drawing/2014/main" id="{09A0E59A-4CBE-0538-942B-88DBCFAD2FB7}"/>
                 </a:ext>
               </a:extLst>
             </p:cNvPr>
@@ -34666,498 +36463,47 @@
           </p:txBody>
         </p:sp>
       </p:grpSp>
-      <p:grpSp>
-        <p:nvGrpSpPr>
-          <p:cNvPr id="3" name="Grupo 2">
-            <a:extLst>
-              <a:ext uri="{FF2B5EF4-FFF2-40B4-BE49-F238E27FC236}">
-                <a16:creationId xmlns:a16="http://schemas.microsoft.com/office/drawing/2014/main" id="{F504D05B-F387-BF28-9D8C-2567B4605224}"/>
-              </a:ext>
-            </a:extLst>
-          </p:cNvPr>
-          <p:cNvGrpSpPr/>
-          <p:nvPr/>
-        </p:nvGrpSpPr>
-        <p:grpSpPr>
-          <a:xfrm>
-            <a:off x="1149474" y="3109624"/>
-            <a:ext cx="3477754" cy="1250117"/>
-            <a:chOff x="1139560" y="5095351"/>
-            <a:chExt cx="3477754" cy="1250117"/>
-          </a:xfrm>
-        </p:grpSpPr>
-        <p:pic>
-          <p:nvPicPr>
-            <p:cNvPr id="6" name="Imagen 5">
-              <a:extLst>
-                <a:ext uri="{FF2B5EF4-FFF2-40B4-BE49-F238E27FC236}">
-                  <a16:creationId xmlns:a16="http://schemas.microsoft.com/office/drawing/2014/main" id="{A6FF630D-B396-BF9B-D2D5-56468DDA141D}"/>
-                </a:ext>
-              </a:extLst>
-            </p:cNvPr>
-            <p:cNvPicPr>
-              <a:picLocks noChangeAspect="1"/>
-            </p:cNvPicPr>
-            <p:nvPr/>
-          </p:nvPicPr>
-          <p:blipFill>
-            <a:blip r:embed="rId4"/>
-            <a:srcRect b="57655"/>
-            <a:stretch/>
-          </p:blipFill>
-          <p:spPr>
-            <a:xfrm>
-              <a:off x="1139560" y="5095351"/>
-              <a:ext cx="3477754" cy="1250117"/>
-            </a:xfrm>
-            <a:prstGeom prst="rect">
-              <a:avLst/>
-            </a:prstGeom>
-          </p:spPr>
-        </p:pic>
-        <p:sp>
-          <p:nvSpPr>
-            <p:cNvPr id="11" name="CuadroTexto 10">
-              <a:extLst>
-                <a:ext uri="{FF2B5EF4-FFF2-40B4-BE49-F238E27FC236}">
-                  <a16:creationId xmlns:a16="http://schemas.microsoft.com/office/drawing/2014/main" id="{3CB7EB22-22F6-D47C-A02D-E20CEFE03EE0}"/>
-                </a:ext>
-              </a:extLst>
-            </p:cNvPr>
-            <p:cNvSpPr txBox="1"/>
-            <p:nvPr/>
-          </p:nvSpPr>
-          <p:spPr>
-            <a:xfrm>
-              <a:off x="1609302" y="5843116"/>
-              <a:ext cx="1132041" cy="292388"/>
-            </a:xfrm>
-            <a:prstGeom prst="rect">
-              <a:avLst/>
-            </a:prstGeom>
-            <a:solidFill>
-              <a:schemeClr val="bg1"/>
-            </a:solidFill>
-          </p:spPr>
-          <p:txBody>
-            <a:bodyPr wrap="none" rtlCol="0">
-              <a:spAutoFit/>
-            </a:bodyPr>
-            <a:lstStyle/>
-            <a:p>
-              <a:r>
-                <a:rPr lang="es-ES" sz="1300" dirty="0">
-                  <a:solidFill>
-                    <a:srgbClr val="2F5597"/>
-                  </a:solidFill>
-                </a:rPr>
-                <a:t>Non-</a:t>
-              </a:r>
-              <a:r>
-                <a:rPr lang="es-ES" sz="1300" dirty="0" err="1">
-                  <a:solidFill>
-                    <a:srgbClr val="2F5597"/>
-                  </a:solidFill>
-                </a:rPr>
-                <a:t>declining</a:t>
-              </a:r>
-              <a:endParaRPr lang="es-ES" sz="1300" dirty="0">
-                <a:solidFill>
-                  <a:srgbClr val="2F5597"/>
-                </a:solidFill>
-              </a:endParaRPr>
-            </a:p>
-          </p:txBody>
-        </p:sp>
-        <p:sp>
-          <p:nvSpPr>
-            <p:cNvPr id="12" name="CuadroTexto 11">
-              <a:extLst>
-                <a:ext uri="{FF2B5EF4-FFF2-40B4-BE49-F238E27FC236}">
-                  <a16:creationId xmlns:a16="http://schemas.microsoft.com/office/drawing/2014/main" id="{0D6586EF-2595-559C-99E0-2257B29975E5}"/>
-                </a:ext>
-              </a:extLst>
-            </p:cNvPr>
-            <p:cNvSpPr txBox="1"/>
-            <p:nvPr/>
-          </p:nvSpPr>
-          <p:spPr>
-            <a:xfrm>
-              <a:off x="3151746" y="5843116"/>
-              <a:ext cx="811441" cy="292388"/>
-            </a:xfrm>
-            <a:prstGeom prst="rect">
-              <a:avLst/>
-            </a:prstGeom>
-            <a:solidFill>
-              <a:schemeClr val="bg1"/>
-            </a:solidFill>
-          </p:spPr>
-          <p:txBody>
-            <a:bodyPr wrap="none" rtlCol="0">
-              <a:spAutoFit/>
-            </a:bodyPr>
-            <a:lstStyle/>
-            <a:p>
-              <a:r>
-                <a:rPr lang="es-ES" sz="1300" dirty="0" err="1">
-                  <a:solidFill>
-                    <a:srgbClr val="C00000"/>
-                  </a:solidFill>
-                </a:rPr>
-                <a:t>Declining</a:t>
-              </a:r>
-              <a:endParaRPr lang="es-ES" sz="1300" dirty="0">
-                <a:solidFill>
-                  <a:srgbClr val="C00000"/>
-                </a:solidFill>
-              </a:endParaRPr>
-            </a:p>
-          </p:txBody>
-        </p:sp>
-      </p:grpSp>
-      <p:sp>
-        <p:nvSpPr>
-          <p:cNvPr id="2" name="Marcador de contenido 2">
-            <a:extLst>
-              <a:ext uri="{FF2B5EF4-FFF2-40B4-BE49-F238E27FC236}">
-                <a16:creationId xmlns:a16="http://schemas.microsoft.com/office/drawing/2014/main" id="{657212A9-DCCC-9779-274B-38E7EFB305D2}"/>
-              </a:ext>
-            </a:extLst>
-          </p:cNvPr>
-          <p:cNvSpPr txBox="1">
-            <a:spLocks/>
-          </p:cNvSpPr>
-          <p:nvPr/>
-        </p:nvSpPr>
-        <p:spPr>
-          <a:xfrm>
-            <a:off x="633461" y="1198313"/>
-            <a:ext cx="10925077" cy="1146828"/>
-          </a:xfrm>
-          <a:prstGeom prst="rect">
-            <a:avLst/>
-          </a:prstGeom>
-        </p:spPr>
-        <p:txBody>
-          <a:bodyPr vert="horz" lIns="91440" tIns="45720" rIns="91440" bIns="45720" rtlCol="0" anchor="t">
-            <a:normAutofit/>
-          </a:bodyPr>
-          <a:lstStyle>
-            <a:lvl1pPr marL="228600" indent="-228600" algn="l" defTabSz="914400" rtl="0" eaLnBrk="1" latinLnBrk="0" hangingPunct="1">
-              <a:lnSpc>
-                <a:spcPct val="90000"/>
-              </a:lnSpc>
-              <a:spcBef>
-                <a:spcPts val="1000"/>
-              </a:spcBef>
-              <a:buFont typeface="Arial" panose="020B0604020202020204" pitchFamily="34" charset="0"/>
-              <a:buChar char="•"/>
-              <a:defRPr sz="2800" kern="1200">
-                <a:solidFill>
-                  <a:schemeClr val="tx1"/>
-                </a:solidFill>
-                <a:latin typeface="+mn-lt"/>
-                <a:ea typeface="+mn-ea"/>
-                <a:cs typeface="+mn-cs"/>
-              </a:defRPr>
-            </a:lvl1pPr>
-            <a:lvl2pPr marL="685800" indent="-228600" algn="l" defTabSz="914400" rtl="0" eaLnBrk="1" latinLnBrk="0" hangingPunct="1">
-              <a:lnSpc>
-                <a:spcPct val="90000"/>
-              </a:lnSpc>
-              <a:spcBef>
-                <a:spcPts val="500"/>
-              </a:spcBef>
-              <a:buFont typeface="Arial" panose="020B0604020202020204" pitchFamily="34" charset="0"/>
-              <a:buChar char="•"/>
-              <a:defRPr sz="2400" kern="1200">
-                <a:solidFill>
-                  <a:schemeClr val="tx1"/>
-                </a:solidFill>
-                <a:latin typeface="+mn-lt"/>
-                <a:ea typeface="+mn-ea"/>
-                <a:cs typeface="+mn-cs"/>
-              </a:defRPr>
-            </a:lvl2pPr>
-            <a:lvl3pPr marL="1143000" indent="-228600" algn="l" defTabSz="914400" rtl="0" eaLnBrk="1" latinLnBrk="0" hangingPunct="1">
-              <a:lnSpc>
-                <a:spcPct val="90000"/>
-              </a:lnSpc>
-              <a:spcBef>
-                <a:spcPts val="500"/>
-              </a:spcBef>
-              <a:buFont typeface="Arial" panose="020B0604020202020204" pitchFamily="34" charset="0"/>
-              <a:buChar char="•"/>
-              <a:defRPr sz="2000" kern="1200">
-                <a:solidFill>
-                  <a:schemeClr val="tx1"/>
-                </a:solidFill>
-                <a:latin typeface="+mn-lt"/>
-                <a:ea typeface="+mn-ea"/>
-                <a:cs typeface="+mn-cs"/>
-              </a:defRPr>
-            </a:lvl3pPr>
-            <a:lvl4pPr marL="1600200" indent="-228600" algn="l" defTabSz="914400" rtl="0" eaLnBrk="1" latinLnBrk="0" hangingPunct="1">
-              <a:lnSpc>
-                <a:spcPct val="90000"/>
-              </a:lnSpc>
-              <a:spcBef>
-                <a:spcPts val="500"/>
-              </a:spcBef>
-              <a:buFont typeface="Arial" panose="020B0604020202020204" pitchFamily="34" charset="0"/>
-              <a:buChar char="•"/>
-              <a:defRPr sz="1800" kern="1200">
-                <a:solidFill>
-                  <a:schemeClr val="tx1"/>
-                </a:solidFill>
-                <a:latin typeface="+mn-lt"/>
-                <a:ea typeface="+mn-ea"/>
-                <a:cs typeface="+mn-cs"/>
-              </a:defRPr>
-            </a:lvl4pPr>
-            <a:lvl5pPr marL="2057400" indent="-228600" algn="l" defTabSz="914400" rtl="0" eaLnBrk="1" latinLnBrk="0" hangingPunct="1">
-              <a:lnSpc>
-                <a:spcPct val="90000"/>
-              </a:lnSpc>
-              <a:spcBef>
-                <a:spcPts val="500"/>
-              </a:spcBef>
-              <a:buFont typeface="Arial" panose="020B0604020202020204" pitchFamily="34" charset="0"/>
-              <a:buChar char="•"/>
-              <a:defRPr sz="1800" kern="1200">
-                <a:solidFill>
-                  <a:schemeClr val="tx1"/>
-                </a:solidFill>
-                <a:latin typeface="+mn-lt"/>
-                <a:ea typeface="+mn-ea"/>
-                <a:cs typeface="+mn-cs"/>
-              </a:defRPr>
-            </a:lvl5pPr>
-            <a:lvl6pPr marL="2514600" indent="-228600" algn="l" defTabSz="914400" rtl="0" eaLnBrk="1" latinLnBrk="0" hangingPunct="1">
-              <a:lnSpc>
-                <a:spcPct val="90000"/>
-              </a:lnSpc>
-              <a:spcBef>
-                <a:spcPts val="500"/>
-              </a:spcBef>
-              <a:buFont typeface="Arial" panose="020B0604020202020204" pitchFamily="34" charset="0"/>
-              <a:buChar char="•"/>
-              <a:defRPr sz="1800" kern="1200">
-                <a:solidFill>
-                  <a:schemeClr val="tx1"/>
-                </a:solidFill>
-                <a:latin typeface="+mn-lt"/>
-                <a:ea typeface="+mn-ea"/>
-                <a:cs typeface="+mn-cs"/>
-              </a:defRPr>
-            </a:lvl6pPr>
-            <a:lvl7pPr marL="2971800" indent="-228600" algn="l" defTabSz="914400" rtl="0" eaLnBrk="1" latinLnBrk="0" hangingPunct="1">
-              <a:lnSpc>
-                <a:spcPct val="90000"/>
-              </a:lnSpc>
-              <a:spcBef>
-                <a:spcPts val="500"/>
-              </a:spcBef>
-              <a:buFont typeface="Arial" panose="020B0604020202020204" pitchFamily="34" charset="0"/>
-              <a:buChar char="•"/>
-              <a:defRPr sz="1800" kern="1200">
-                <a:solidFill>
-                  <a:schemeClr val="tx1"/>
-                </a:solidFill>
-                <a:latin typeface="+mn-lt"/>
-                <a:ea typeface="+mn-ea"/>
-                <a:cs typeface="+mn-cs"/>
-              </a:defRPr>
-            </a:lvl7pPr>
-            <a:lvl8pPr marL="3429000" indent="-228600" algn="l" defTabSz="914400" rtl="0" eaLnBrk="1" latinLnBrk="0" hangingPunct="1">
-              <a:lnSpc>
-                <a:spcPct val="90000"/>
-              </a:lnSpc>
-              <a:spcBef>
-                <a:spcPts val="500"/>
-              </a:spcBef>
-              <a:buFont typeface="Arial" panose="020B0604020202020204" pitchFamily="34" charset="0"/>
-              <a:buChar char="•"/>
-              <a:defRPr sz="1800" kern="1200">
-                <a:solidFill>
-                  <a:schemeClr val="tx1"/>
-                </a:solidFill>
-                <a:latin typeface="+mn-lt"/>
-                <a:ea typeface="+mn-ea"/>
-                <a:cs typeface="+mn-cs"/>
-              </a:defRPr>
-            </a:lvl8pPr>
-            <a:lvl9pPr marL="3886200" indent="-228600" algn="l" defTabSz="914400" rtl="0" eaLnBrk="1" latinLnBrk="0" hangingPunct="1">
-              <a:lnSpc>
-                <a:spcPct val="90000"/>
-              </a:lnSpc>
-              <a:spcBef>
-                <a:spcPts val="500"/>
-              </a:spcBef>
-              <a:buFont typeface="Arial" panose="020B0604020202020204" pitchFamily="34" charset="0"/>
-              <a:buChar char="•"/>
-              <a:defRPr sz="1800" kern="1200">
-                <a:solidFill>
-                  <a:schemeClr val="tx1"/>
-                </a:solidFill>
-                <a:latin typeface="+mn-lt"/>
-                <a:ea typeface="+mn-ea"/>
-                <a:cs typeface="+mn-cs"/>
-              </a:defRPr>
-            </a:lvl9pPr>
-          </a:lstStyle>
-          <a:p>
-            <a:pPr marL="0" indent="0">
-              <a:buNone/>
-            </a:pPr>
-            <a:r>
-              <a:rPr lang="es-ES" sz="2400" b="1" dirty="0" err="1">
-                <a:latin typeface="Helvetica"/>
-                <a:cs typeface="Helvetica"/>
-              </a:rPr>
-              <a:t>Obj</a:t>
-            </a:r>
-            <a:r>
-              <a:rPr lang="es-ES" sz="2400" b="1" dirty="0">
-                <a:latin typeface="Helvetica"/>
-                <a:cs typeface="Helvetica"/>
-              </a:rPr>
-              <a:t>. 2.- </a:t>
-            </a:r>
-            <a:r>
-              <a:rPr lang="es-ES" sz="2400" dirty="0" err="1">
-                <a:latin typeface="Helvetica"/>
-                <a:cs typeface="Helvetica"/>
-              </a:rPr>
-              <a:t>To</a:t>
-            </a:r>
-            <a:r>
-              <a:rPr lang="es-ES" sz="2400" dirty="0">
-                <a:latin typeface="Helvetica"/>
-                <a:cs typeface="Helvetica"/>
-              </a:rPr>
-              <a:t> </a:t>
-            </a:r>
-            <a:r>
-              <a:rPr lang="es-ES" sz="2400" dirty="0" err="1">
-                <a:latin typeface="Helvetica"/>
-                <a:cs typeface="Helvetica"/>
-              </a:rPr>
-              <a:t>assess</a:t>
-            </a:r>
-            <a:r>
-              <a:rPr lang="es-ES" sz="2400" dirty="0">
-                <a:latin typeface="Helvetica"/>
-                <a:cs typeface="Helvetica"/>
-              </a:rPr>
-              <a:t> </a:t>
-            </a:r>
-            <a:r>
-              <a:rPr lang="es-ES" sz="2400" dirty="0" err="1">
-                <a:latin typeface="Helvetica"/>
-                <a:cs typeface="Helvetica"/>
-              </a:rPr>
-              <a:t>morphological</a:t>
-            </a:r>
-            <a:r>
-              <a:rPr lang="es-ES" sz="2400" dirty="0">
-                <a:latin typeface="Helvetica"/>
-                <a:cs typeface="Helvetica"/>
-              </a:rPr>
-              <a:t> and </a:t>
-            </a:r>
-            <a:r>
-              <a:rPr lang="es-ES" sz="2400" dirty="0" err="1">
-                <a:latin typeface="Helvetica"/>
-                <a:cs typeface="Helvetica"/>
-              </a:rPr>
-              <a:t>physiological</a:t>
-            </a:r>
-            <a:r>
-              <a:rPr lang="es-ES" sz="2400" b="1" dirty="0">
-                <a:latin typeface="Helvetica"/>
-                <a:cs typeface="Helvetica"/>
-              </a:rPr>
-              <a:t> responses </a:t>
-            </a:r>
-            <a:r>
-              <a:rPr lang="es-ES" sz="2400" b="1" dirty="0" err="1">
-                <a:latin typeface="Helvetica"/>
-                <a:cs typeface="Helvetica"/>
-              </a:rPr>
-              <a:t>to</a:t>
-            </a:r>
-            <a:r>
-              <a:rPr lang="es-ES" sz="2400" b="1" dirty="0">
-                <a:latin typeface="Helvetica"/>
-                <a:cs typeface="Helvetica"/>
-              </a:rPr>
-              <a:t> </a:t>
-            </a:r>
-            <a:r>
-              <a:rPr lang="es-ES" sz="2400" b="1" dirty="0" err="1">
-                <a:latin typeface="Helvetica"/>
-                <a:cs typeface="Helvetica"/>
-              </a:rPr>
-              <a:t>drought</a:t>
-            </a:r>
-            <a:r>
-              <a:rPr lang="es-ES" sz="2400" b="1" dirty="0">
-                <a:latin typeface="Helvetica"/>
-                <a:cs typeface="Helvetica"/>
-              </a:rPr>
-              <a:t>, </a:t>
-            </a:r>
-            <a:r>
-              <a:rPr lang="es-ES" sz="2400" dirty="0">
-                <a:latin typeface="Helvetica"/>
-                <a:cs typeface="Helvetica"/>
-              </a:rPr>
-              <a:t>and </a:t>
-            </a:r>
-            <a:r>
-              <a:rPr lang="es-ES" sz="2400" b="1" dirty="0" err="1">
-                <a:latin typeface="Helvetica"/>
-                <a:cs typeface="Helvetica"/>
-              </a:rPr>
-              <a:t>what</a:t>
-            </a:r>
-            <a:r>
-              <a:rPr lang="es-ES" sz="2400" b="1" dirty="0">
-                <a:latin typeface="Helvetica"/>
-                <a:cs typeface="Helvetica"/>
-              </a:rPr>
-              <a:t> </a:t>
-            </a:r>
-            <a:r>
-              <a:rPr lang="es-ES" sz="2400" b="1" dirty="0" err="1">
-                <a:latin typeface="Helvetica"/>
-                <a:cs typeface="Helvetica"/>
-              </a:rPr>
-              <a:t>traits</a:t>
-            </a:r>
-            <a:r>
-              <a:rPr lang="es-ES" sz="2400" b="1" dirty="0">
-                <a:latin typeface="Helvetica"/>
-                <a:cs typeface="Helvetica"/>
-              </a:rPr>
-              <a:t> are more </a:t>
-            </a:r>
-            <a:r>
-              <a:rPr lang="es-ES" sz="2400" b="1" dirty="0" err="1">
-                <a:latin typeface="Helvetica"/>
-                <a:cs typeface="Helvetica"/>
-              </a:rPr>
-              <a:t>affected</a:t>
-            </a:r>
-            <a:endParaRPr lang="es-ES" sz="2400" b="1" dirty="0">
-              <a:latin typeface="Helvetica"/>
-              <a:cs typeface="Helvetica"/>
-            </a:endParaRPr>
-          </a:p>
-        </p:txBody>
-      </p:sp>
+    </p:spTree>
+    <p:extLst>
+      <p:ext uri="{BB962C8B-B14F-4D97-AF65-F5344CB8AC3E}">
+        <p14:creationId xmlns:p14="http://schemas.microsoft.com/office/powerpoint/2010/main" val="1288941479"/>
+      </p:ext>
+    </p:extLst>
+  </p:cSld>
+  <p:clrMapOvr>
+    <a:masterClrMapping/>
+  </p:clrMapOvr>
+  <p:extLst>
+    <p:ext uri="{6950BFC3-D8DA-4A85-94F7-54DA5524770B}">
+      <p188:commentRel xmlns:p188="http://schemas.microsoft.com/office/powerpoint/2018/8/main" r:id="rId2"/>
+    </p:ext>
+  </p:extLst>
+</p:sld>
+</file>
+
+<file path=ppt/slides/slide8.xml><?xml version="1.0" encoding="utf-8"?>
+<p:sld xmlns:a="http://schemas.openxmlformats.org/drawingml/2006/main" xmlns:r="http://schemas.openxmlformats.org/officeDocument/2006/relationships" xmlns:p="http://schemas.openxmlformats.org/presentationml/2006/main">
+  <p:cSld>
+    <p:spTree>
+      <p:nvGrpSpPr>
+        <p:cNvPr id="1" name="">
+          <a:extLst>
+            <a:ext uri="{FF2B5EF4-FFF2-40B4-BE49-F238E27FC236}">
+              <a16:creationId xmlns:a16="http://schemas.microsoft.com/office/drawing/2014/main" id="{31B7D948-86BD-7218-880B-80096F80DD1E}"/>
+            </a:ext>
+          </a:extLst>
+        </p:cNvPr>
+        <p:cNvGrpSpPr/>
+        <p:nvPr/>
+      </p:nvGrpSpPr>
+      <p:grpSpPr>
+        <a:xfrm>
+          <a:off x="0" y="0"/>
+          <a:ext cx="0" cy="0"/>
+          <a:chOff x="0" y="0"/>
+          <a:chExt cx="0" cy="0"/>
+        </a:xfrm>
+      </p:grpSpPr>
       <p:sp>
         <p:nvSpPr>
           <p:cNvPr id="9" name="Título 1">
@@ -35351,7 +36697,7 @@
         </p:nvSpPr>
         <p:spPr>
           <a:xfrm>
-            <a:off x="633461" y="4748750"/>
+            <a:off x="633461" y="1419141"/>
             <a:ext cx="10925077" cy="1146828"/>
           </a:xfrm>
           <a:prstGeom prst="rect">
@@ -35796,7 +37142,7 @@
         </p:nvSpPr>
         <p:spPr>
           <a:xfrm>
-            <a:off x="633460" y="5711172"/>
+            <a:off x="633460" y="2381563"/>
             <a:ext cx="10925077" cy="1146828"/>
           </a:xfrm>
           <a:prstGeom prst="rect">
@@ -36149,383 +37495,6 @@
                 <a:cs typeface="Helvetica"/>
               </a:rPr>
               <a:t>species</a:t>
-            </a:r>
-            <a:endParaRPr lang="es-ES" sz="2400" i="1" dirty="0">
-              <a:latin typeface="Helvetica"/>
-              <a:cs typeface="Helvetica"/>
-            </a:endParaRPr>
-          </a:p>
-        </p:txBody>
-      </p:sp>
-      <p:sp>
-        <p:nvSpPr>
-          <p:cNvPr id="4" name="Marcador de contenido 2">
-            <a:extLst>
-              <a:ext uri="{FF2B5EF4-FFF2-40B4-BE49-F238E27FC236}">
-                <a16:creationId xmlns:a16="http://schemas.microsoft.com/office/drawing/2014/main" id="{C713888D-F036-1927-F7A3-7FD8FFA4D2BD}"/>
-              </a:ext>
-            </a:extLst>
-          </p:cNvPr>
-          <p:cNvSpPr txBox="1">
-            <a:spLocks/>
-          </p:cNvSpPr>
-          <p:nvPr/>
-        </p:nvSpPr>
-        <p:spPr>
-          <a:xfrm>
-            <a:off x="633459" y="2041583"/>
-            <a:ext cx="10925077" cy="1146828"/>
-          </a:xfrm>
-          <a:prstGeom prst="rect">
-            <a:avLst/>
-          </a:prstGeom>
-        </p:spPr>
-        <p:txBody>
-          <a:bodyPr vert="horz" lIns="91440" tIns="45720" rIns="91440" bIns="45720" rtlCol="0" anchor="t">
-            <a:normAutofit/>
-          </a:bodyPr>
-          <a:lstStyle>
-            <a:lvl1pPr marL="228600" indent="-228600" algn="l" defTabSz="914400" rtl="0" eaLnBrk="1" latinLnBrk="0" hangingPunct="1">
-              <a:lnSpc>
-                <a:spcPct val="90000"/>
-              </a:lnSpc>
-              <a:spcBef>
-                <a:spcPts val="1000"/>
-              </a:spcBef>
-              <a:buFont typeface="Arial" panose="020B0604020202020204" pitchFamily="34" charset="0"/>
-              <a:buChar char="•"/>
-              <a:defRPr sz="2800" kern="1200">
-                <a:solidFill>
-                  <a:schemeClr val="tx1"/>
-                </a:solidFill>
-                <a:latin typeface="+mn-lt"/>
-                <a:ea typeface="+mn-ea"/>
-                <a:cs typeface="+mn-cs"/>
-              </a:defRPr>
-            </a:lvl1pPr>
-            <a:lvl2pPr marL="685800" indent="-228600" algn="l" defTabSz="914400" rtl="0" eaLnBrk="1" latinLnBrk="0" hangingPunct="1">
-              <a:lnSpc>
-                <a:spcPct val="90000"/>
-              </a:lnSpc>
-              <a:spcBef>
-                <a:spcPts val="500"/>
-              </a:spcBef>
-              <a:buFont typeface="Arial" panose="020B0604020202020204" pitchFamily="34" charset="0"/>
-              <a:buChar char="•"/>
-              <a:defRPr sz="2400" kern="1200">
-                <a:solidFill>
-                  <a:schemeClr val="tx1"/>
-                </a:solidFill>
-                <a:latin typeface="+mn-lt"/>
-                <a:ea typeface="+mn-ea"/>
-                <a:cs typeface="+mn-cs"/>
-              </a:defRPr>
-            </a:lvl2pPr>
-            <a:lvl3pPr marL="1143000" indent="-228600" algn="l" defTabSz="914400" rtl="0" eaLnBrk="1" latinLnBrk="0" hangingPunct="1">
-              <a:lnSpc>
-                <a:spcPct val="90000"/>
-              </a:lnSpc>
-              <a:spcBef>
-                <a:spcPts val="500"/>
-              </a:spcBef>
-              <a:buFont typeface="Arial" panose="020B0604020202020204" pitchFamily="34" charset="0"/>
-              <a:buChar char="•"/>
-              <a:defRPr sz="2000" kern="1200">
-                <a:solidFill>
-                  <a:schemeClr val="tx1"/>
-                </a:solidFill>
-                <a:latin typeface="+mn-lt"/>
-                <a:ea typeface="+mn-ea"/>
-                <a:cs typeface="+mn-cs"/>
-              </a:defRPr>
-            </a:lvl3pPr>
-            <a:lvl4pPr marL="1600200" indent="-228600" algn="l" defTabSz="914400" rtl="0" eaLnBrk="1" latinLnBrk="0" hangingPunct="1">
-              <a:lnSpc>
-                <a:spcPct val="90000"/>
-              </a:lnSpc>
-              <a:spcBef>
-                <a:spcPts val="500"/>
-              </a:spcBef>
-              <a:buFont typeface="Arial" panose="020B0604020202020204" pitchFamily="34" charset="0"/>
-              <a:buChar char="•"/>
-              <a:defRPr sz="1800" kern="1200">
-                <a:solidFill>
-                  <a:schemeClr val="tx1"/>
-                </a:solidFill>
-                <a:latin typeface="+mn-lt"/>
-                <a:ea typeface="+mn-ea"/>
-                <a:cs typeface="+mn-cs"/>
-              </a:defRPr>
-            </a:lvl4pPr>
-            <a:lvl5pPr marL="2057400" indent="-228600" algn="l" defTabSz="914400" rtl="0" eaLnBrk="1" latinLnBrk="0" hangingPunct="1">
-              <a:lnSpc>
-                <a:spcPct val="90000"/>
-              </a:lnSpc>
-              <a:spcBef>
-                <a:spcPts val="500"/>
-              </a:spcBef>
-              <a:buFont typeface="Arial" panose="020B0604020202020204" pitchFamily="34" charset="0"/>
-              <a:buChar char="•"/>
-              <a:defRPr sz="1800" kern="1200">
-                <a:solidFill>
-                  <a:schemeClr val="tx1"/>
-                </a:solidFill>
-                <a:latin typeface="+mn-lt"/>
-                <a:ea typeface="+mn-ea"/>
-                <a:cs typeface="+mn-cs"/>
-              </a:defRPr>
-            </a:lvl5pPr>
-            <a:lvl6pPr marL="2514600" indent="-228600" algn="l" defTabSz="914400" rtl="0" eaLnBrk="1" latinLnBrk="0" hangingPunct="1">
-              <a:lnSpc>
-                <a:spcPct val="90000"/>
-              </a:lnSpc>
-              <a:spcBef>
-                <a:spcPts val="500"/>
-              </a:spcBef>
-              <a:buFont typeface="Arial" panose="020B0604020202020204" pitchFamily="34" charset="0"/>
-              <a:buChar char="•"/>
-              <a:defRPr sz="1800" kern="1200">
-                <a:solidFill>
-                  <a:schemeClr val="tx1"/>
-                </a:solidFill>
-                <a:latin typeface="+mn-lt"/>
-                <a:ea typeface="+mn-ea"/>
-                <a:cs typeface="+mn-cs"/>
-              </a:defRPr>
-            </a:lvl6pPr>
-            <a:lvl7pPr marL="2971800" indent="-228600" algn="l" defTabSz="914400" rtl="0" eaLnBrk="1" latinLnBrk="0" hangingPunct="1">
-              <a:lnSpc>
-                <a:spcPct val="90000"/>
-              </a:lnSpc>
-              <a:spcBef>
-                <a:spcPts val="500"/>
-              </a:spcBef>
-              <a:buFont typeface="Arial" panose="020B0604020202020204" pitchFamily="34" charset="0"/>
-              <a:buChar char="•"/>
-              <a:defRPr sz="1800" kern="1200">
-                <a:solidFill>
-                  <a:schemeClr val="tx1"/>
-                </a:solidFill>
-                <a:latin typeface="+mn-lt"/>
-                <a:ea typeface="+mn-ea"/>
-                <a:cs typeface="+mn-cs"/>
-              </a:defRPr>
-            </a:lvl7pPr>
-            <a:lvl8pPr marL="3429000" indent="-228600" algn="l" defTabSz="914400" rtl="0" eaLnBrk="1" latinLnBrk="0" hangingPunct="1">
-              <a:lnSpc>
-                <a:spcPct val="90000"/>
-              </a:lnSpc>
-              <a:spcBef>
-                <a:spcPts val="500"/>
-              </a:spcBef>
-              <a:buFont typeface="Arial" panose="020B0604020202020204" pitchFamily="34" charset="0"/>
-              <a:buChar char="•"/>
-              <a:defRPr sz="1800" kern="1200">
-                <a:solidFill>
-                  <a:schemeClr val="tx1"/>
-                </a:solidFill>
-                <a:latin typeface="+mn-lt"/>
-                <a:ea typeface="+mn-ea"/>
-                <a:cs typeface="+mn-cs"/>
-              </a:defRPr>
-            </a:lvl8pPr>
-            <a:lvl9pPr marL="3886200" indent="-228600" algn="l" defTabSz="914400" rtl="0" eaLnBrk="1" latinLnBrk="0" hangingPunct="1">
-              <a:lnSpc>
-                <a:spcPct val="90000"/>
-              </a:lnSpc>
-              <a:spcBef>
-                <a:spcPts val="500"/>
-              </a:spcBef>
-              <a:buFont typeface="Arial" panose="020B0604020202020204" pitchFamily="34" charset="0"/>
-              <a:buChar char="•"/>
-              <a:defRPr sz="1800" kern="1200">
-                <a:solidFill>
-                  <a:schemeClr val="tx1"/>
-                </a:solidFill>
-                <a:latin typeface="+mn-lt"/>
-                <a:ea typeface="+mn-ea"/>
-                <a:cs typeface="+mn-cs"/>
-              </a:defRPr>
-            </a:lvl9pPr>
-          </a:lstStyle>
-          <a:p>
-            <a:pPr marL="0" indent="0">
-              <a:buNone/>
-            </a:pPr>
-            <a:r>
-              <a:rPr lang="es-ES" sz="2400" b="1" i="1" dirty="0">
-                <a:latin typeface="Helvetica"/>
-                <a:cs typeface="Helvetica"/>
-              </a:rPr>
-              <a:t>H2.-</a:t>
-            </a:r>
-            <a:r>
-              <a:rPr lang="es-ES" sz="2400" i="1" dirty="0">
-                <a:latin typeface="Helvetica"/>
-                <a:cs typeface="Helvetica"/>
-              </a:rPr>
-              <a:t> </a:t>
-            </a:r>
-            <a:r>
-              <a:rPr lang="es-ES" sz="2400" i="1" dirty="0" err="1">
-                <a:latin typeface="Helvetica"/>
-                <a:cs typeface="Helvetica"/>
-              </a:rPr>
-              <a:t>We</a:t>
-            </a:r>
-            <a:r>
-              <a:rPr lang="es-ES" sz="2400" i="1" dirty="0">
-                <a:latin typeface="Helvetica"/>
-                <a:cs typeface="Helvetica"/>
-              </a:rPr>
-              <a:t> </a:t>
-            </a:r>
-            <a:r>
-              <a:rPr lang="es-ES" sz="2400" i="1" dirty="0" err="1">
-                <a:latin typeface="Helvetica"/>
-                <a:cs typeface="Helvetica"/>
-              </a:rPr>
-              <a:t>expect</a:t>
-            </a:r>
-            <a:r>
-              <a:rPr lang="es-ES" sz="2400" i="1" dirty="0">
-                <a:latin typeface="Helvetica"/>
-                <a:cs typeface="Helvetica"/>
-              </a:rPr>
-              <a:t> </a:t>
-            </a:r>
-            <a:r>
-              <a:rPr lang="es-ES" sz="2400" i="1" dirty="0" err="1">
-                <a:latin typeface="Helvetica"/>
-                <a:cs typeface="Helvetica"/>
-              </a:rPr>
-              <a:t>drought-induced</a:t>
-            </a:r>
-            <a:r>
-              <a:rPr lang="es-ES" sz="2400" i="1" dirty="0">
-                <a:latin typeface="Helvetica"/>
-                <a:cs typeface="Helvetica"/>
-              </a:rPr>
-              <a:t> </a:t>
-            </a:r>
-            <a:r>
-              <a:rPr lang="es-ES" sz="2400" i="1" dirty="0" err="1">
-                <a:latin typeface="Helvetica"/>
-                <a:cs typeface="Helvetica"/>
-              </a:rPr>
-              <a:t>reduced</a:t>
-            </a:r>
-            <a:r>
-              <a:rPr lang="es-ES" sz="2400" i="1" dirty="0">
-                <a:latin typeface="Helvetica"/>
-                <a:cs typeface="Helvetica"/>
-              </a:rPr>
-              <a:t> </a:t>
-            </a:r>
-            <a:r>
-              <a:rPr lang="es-ES" sz="2400" i="1" dirty="0" err="1">
-                <a:latin typeface="Helvetica"/>
-                <a:cs typeface="Helvetica"/>
-              </a:rPr>
-              <a:t>photosynthetic</a:t>
-            </a:r>
-            <a:r>
-              <a:rPr lang="es-ES" sz="2400" i="1" dirty="0">
-                <a:latin typeface="Helvetica"/>
-                <a:cs typeface="Helvetica"/>
-              </a:rPr>
-              <a:t> </a:t>
-            </a:r>
-            <a:r>
-              <a:rPr lang="es-ES" sz="2400" i="1" dirty="0" err="1">
-                <a:latin typeface="Helvetica"/>
-                <a:cs typeface="Helvetica"/>
-              </a:rPr>
-              <a:t>pigments</a:t>
-            </a:r>
-            <a:r>
-              <a:rPr lang="es-ES" sz="2400" i="1" dirty="0">
-                <a:latin typeface="Helvetica"/>
-                <a:cs typeface="Helvetica"/>
-              </a:rPr>
-              <a:t> </a:t>
-            </a:r>
-            <a:r>
-              <a:rPr lang="es-ES" sz="2400" i="1" dirty="0" err="1">
-                <a:latin typeface="Helvetica"/>
-                <a:cs typeface="Helvetica"/>
-              </a:rPr>
-              <a:t>concentrations</a:t>
-            </a:r>
-            <a:r>
-              <a:rPr lang="es-ES" sz="2400" i="1" dirty="0">
-                <a:latin typeface="Helvetica"/>
-                <a:cs typeface="Helvetica"/>
-              </a:rPr>
-              <a:t>, </a:t>
-            </a:r>
-            <a:r>
-              <a:rPr lang="es-ES" sz="2400" i="1" dirty="0" err="1">
-                <a:latin typeface="Helvetica"/>
-                <a:cs typeface="Helvetica"/>
-              </a:rPr>
-              <a:t>increased</a:t>
-            </a:r>
-            <a:r>
-              <a:rPr lang="es-ES" sz="2400" i="1" dirty="0">
-                <a:latin typeface="Helvetica"/>
-                <a:cs typeface="Helvetica"/>
-              </a:rPr>
-              <a:t> </a:t>
-            </a:r>
-            <a:r>
-              <a:rPr lang="es-ES" sz="2400" i="1" dirty="0" err="1">
-                <a:latin typeface="Helvetica"/>
-                <a:cs typeface="Helvetica"/>
-              </a:rPr>
-              <a:t>iWUE</a:t>
-            </a:r>
-            <a:r>
-              <a:rPr lang="es-ES" sz="2400" i="1" dirty="0">
-                <a:latin typeface="Helvetica"/>
-                <a:cs typeface="Helvetica"/>
-              </a:rPr>
-              <a:t> and </a:t>
-            </a:r>
-            <a:r>
-              <a:rPr lang="es-ES" sz="2400" i="1" dirty="0" err="1">
-                <a:latin typeface="Helvetica"/>
-                <a:cs typeface="Helvetica"/>
-              </a:rPr>
-              <a:t>leaves</a:t>
-            </a:r>
-            <a:r>
-              <a:rPr lang="es-ES" sz="2400" i="1" dirty="0">
-                <a:latin typeface="Helvetica"/>
-                <a:cs typeface="Helvetica"/>
-              </a:rPr>
-              <a:t> </a:t>
-            </a:r>
-            <a:r>
-              <a:rPr lang="es-ES" sz="2400" i="1" dirty="0" err="1">
-                <a:latin typeface="Helvetica"/>
-                <a:cs typeface="Helvetica"/>
-              </a:rPr>
-              <a:t>nutrients</a:t>
-            </a:r>
-            <a:r>
-              <a:rPr lang="es-ES" sz="2400" i="1" dirty="0">
-                <a:latin typeface="Helvetica"/>
-                <a:cs typeface="Helvetica"/>
-              </a:rPr>
-              <a:t> </a:t>
-            </a:r>
-            <a:r>
-              <a:rPr lang="es-ES" sz="2400" i="1" dirty="0" err="1">
-                <a:latin typeface="Helvetica"/>
-                <a:cs typeface="Helvetica"/>
-              </a:rPr>
-              <a:t>allocation</a:t>
             </a:r>
             <a:endParaRPr lang="es-ES" sz="2400" i="1" dirty="0">
               <a:latin typeface="Helvetica"/>
@@ -36547,1751 +37516,6 @@
   <p:extLst>
     <p:ext uri="{6950BFC3-D8DA-4A85-94F7-54DA5524770B}">
       <p188:commentRel xmlns:p188="http://schemas.microsoft.com/office/powerpoint/2018/8/main" r:id="rId3"/>
-    </p:ext>
-  </p:extLst>
-</p:sld>
-</file>
-
-<file path=ppt/slides/slide8.xml><?xml version="1.0" encoding="utf-8"?>
-<p:sld xmlns:a="http://schemas.openxmlformats.org/drawingml/2006/main" xmlns:r="http://schemas.openxmlformats.org/officeDocument/2006/relationships" xmlns:p="http://schemas.openxmlformats.org/presentationml/2006/main">
-  <p:cSld>
-    <p:spTree>
-      <p:nvGrpSpPr>
-        <p:cNvPr id="1" name="">
-          <a:extLst>
-            <a:ext uri="{FF2B5EF4-FFF2-40B4-BE49-F238E27FC236}">
-              <a16:creationId xmlns:a16="http://schemas.microsoft.com/office/drawing/2014/main" id="{1F055942-0646-1F75-3FD6-FB877A4F628D}"/>
-            </a:ext>
-          </a:extLst>
-        </p:cNvPr>
-        <p:cNvGrpSpPr/>
-        <p:nvPr/>
-      </p:nvGrpSpPr>
-      <p:grpSpPr>
-        <a:xfrm>
-          <a:off x="0" y="0"/>
-          <a:ext cx="0" cy="0"/>
-          <a:chOff x="0" y="0"/>
-          <a:chExt cx="0" cy="0"/>
-        </a:xfrm>
-      </p:grpSpPr>
-      <p:sp>
-        <p:nvSpPr>
-          <p:cNvPr id="2" name="Marcador de contenido 2">
-            <a:extLst>
-              <a:ext uri="{FF2B5EF4-FFF2-40B4-BE49-F238E27FC236}">
-                <a16:creationId xmlns:a16="http://schemas.microsoft.com/office/drawing/2014/main" id="{0EDCCFA2-7421-E9F8-432B-5107BCD8FD10}"/>
-              </a:ext>
-            </a:extLst>
-          </p:cNvPr>
-          <p:cNvSpPr txBox="1">
-            <a:spLocks/>
-          </p:cNvSpPr>
-          <p:nvPr/>
-        </p:nvSpPr>
-        <p:spPr>
-          <a:xfrm>
-            <a:off x="633461" y="1198313"/>
-            <a:ext cx="10925077" cy="1146828"/>
-          </a:xfrm>
-          <a:prstGeom prst="rect">
-            <a:avLst/>
-          </a:prstGeom>
-        </p:spPr>
-        <p:txBody>
-          <a:bodyPr vert="horz" lIns="91440" tIns="45720" rIns="91440" bIns="45720" rtlCol="0" anchor="t">
-            <a:normAutofit/>
-          </a:bodyPr>
-          <a:lstStyle>
-            <a:lvl1pPr marL="228600" indent="-228600" algn="l" defTabSz="914400" rtl="0" eaLnBrk="1" latinLnBrk="0" hangingPunct="1">
-              <a:lnSpc>
-                <a:spcPct val="90000"/>
-              </a:lnSpc>
-              <a:spcBef>
-                <a:spcPts val="1000"/>
-              </a:spcBef>
-              <a:buFont typeface="Arial" panose="020B0604020202020204" pitchFamily="34" charset="0"/>
-              <a:buChar char="•"/>
-              <a:defRPr sz="2800" kern="1200">
-                <a:solidFill>
-                  <a:schemeClr val="tx1"/>
-                </a:solidFill>
-                <a:latin typeface="+mn-lt"/>
-                <a:ea typeface="+mn-ea"/>
-                <a:cs typeface="+mn-cs"/>
-              </a:defRPr>
-            </a:lvl1pPr>
-            <a:lvl2pPr marL="685800" indent="-228600" algn="l" defTabSz="914400" rtl="0" eaLnBrk="1" latinLnBrk="0" hangingPunct="1">
-              <a:lnSpc>
-                <a:spcPct val="90000"/>
-              </a:lnSpc>
-              <a:spcBef>
-                <a:spcPts val="500"/>
-              </a:spcBef>
-              <a:buFont typeface="Arial" panose="020B0604020202020204" pitchFamily="34" charset="0"/>
-              <a:buChar char="•"/>
-              <a:defRPr sz="2400" kern="1200">
-                <a:solidFill>
-                  <a:schemeClr val="tx1"/>
-                </a:solidFill>
-                <a:latin typeface="+mn-lt"/>
-                <a:ea typeface="+mn-ea"/>
-                <a:cs typeface="+mn-cs"/>
-              </a:defRPr>
-            </a:lvl2pPr>
-            <a:lvl3pPr marL="1143000" indent="-228600" algn="l" defTabSz="914400" rtl="0" eaLnBrk="1" latinLnBrk="0" hangingPunct="1">
-              <a:lnSpc>
-                <a:spcPct val="90000"/>
-              </a:lnSpc>
-              <a:spcBef>
-                <a:spcPts val="500"/>
-              </a:spcBef>
-              <a:buFont typeface="Arial" panose="020B0604020202020204" pitchFamily="34" charset="0"/>
-              <a:buChar char="•"/>
-              <a:defRPr sz="2000" kern="1200">
-                <a:solidFill>
-                  <a:schemeClr val="tx1"/>
-                </a:solidFill>
-                <a:latin typeface="+mn-lt"/>
-                <a:ea typeface="+mn-ea"/>
-                <a:cs typeface="+mn-cs"/>
-              </a:defRPr>
-            </a:lvl3pPr>
-            <a:lvl4pPr marL="1600200" indent="-228600" algn="l" defTabSz="914400" rtl="0" eaLnBrk="1" latinLnBrk="0" hangingPunct="1">
-              <a:lnSpc>
-                <a:spcPct val="90000"/>
-              </a:lnSpc>
-              <a:spcBef>
-                <a:spcPts val="500"/>
-              </a:spcBef>
-              <a:buFont typeface="Arial" panose="020B0604020202020204" pitchFamily="34" charset="0"/>
-              <a:buChar char="•"/>
-              <a:defRPr sz="1800" kern="1200">
-                <a:solidFill>
-                  <a:schemeClr val="tx1"/>
-                </a:solidFill>
-                <a:latin typeface="+mn-lt"/>
-                <a:ea typeface="+mn-ea"/>
-                <a:cs typeface="+mn-cs"/>
-              </a:defRPr>
-            </a:lvl4pPr>
-            <a:lvl5pPr marL="2057400" indent="-228600" algn="l" defTabSz="914400" rtl="0" eaLnBrk="1" latinLnBrk="0" hangingPunct="1">
-              <a:lnSpc>
-                <a:spcPct val="90000"/>
-              </a:lnSpc>
-              <a:spcBef>
-                <a:spcPts val="500"/>
-              </a:spcBef>
-              <a:buFont typeface="Arial" panose="020B0604020202020204" pitchFamily="34" charset="0"/>
-              <a:buChar char="•"/>
-              <a:defRPr sz="1800" kern="1200">
-                <a:solidFill>
-                  <a:schemeClr val="tx1"/>
-                </a:solidFill>
-                <a:latin typeface="+mn-lt"/>
-                <a:ea typeface="+mn-ea"/>
-                <a:cs typeface="+mn-cs"/>
-              </a:defRPr>
-            </a:lvl5pPr>
-            <a:lvl6pPr marL="2514600" indent="-228600" algn="l" defTabSz="914400" rtl="0" eaLnBrk="1" latinLnBrk="0" hangingPunct="1">
-              <a:lnSpc>
-                <a:spcPct val="90000"/>
-              </a:lnSpc>
-              <a:spcBef>
-                <a:spcPts val="500"/>
-              </a:spcBef>
-              <a:buFont typeface="Arial" panose="020B0604020202020204" pitchFamily="34" charset="0"/>
-              <a:buChar char="•"/>
-              <a:defRPr sz="1800" kern="1200">
-                <a:solidFill>
-                  <a:schemeClr val="tx1"/>
-                </a:solidFill>
-                <a:latin typeface="+mn-lt"/>
-                <a:ea typeface="+mn-ea"/>
-                <a:cs typeface="+mn-cs"/>
-              </a:defRPr>
-            </a:lvl6pPr>
-            <a:lvl7pPr marL="2971800" indent="-228600" algn="l" defTabSz="914400" rtl="0" eaLnBrk="1" latinLnBrk="0" hangingPunct="1">
-              <a:lnSpc>
-                <a:spcPct val="90000"/>
-              </a:lnSpc>
-              <a:spcBef>
-                <a:spcPts val="500"/>
-              </a:spcBef>
-              <a:buFont typeface="Arial" panose="020B0604020202020204" pitchFamily="34" charset="0"/>
-              <a:buChar char="•"/>
-              <a:defRPr sz="1800" kern="1200">
-                <a:solidFill>
-                  <a:schemeClr val="tx1"/>
-                </a:solidFill>
-                <a:latin typeface="+mn-lt"/>
-                <a:ea typeface="+mn-ea"/>
-                <a:cs typeface="+mn-cs"/>
-              </a:defRPr>
-            </a:lvl7pPr>
-            <a:lvl8pPr marL="3429000" indent="-228600" algn="l" defTabSz="914400" rtl="0" eaLnBrk="1" latinLnBrk="0" hangingPunct="1">
-              <a:lnSpc>
-                <a:spcPct val="90000"/>
-              </a:lnSpc>
-              <a:spcBef>
-                <a:spcPts val="500"/>
-              </a:spcBef>
-              <a:buFont typeface="Arial" panose="020B0604020202020204" pitchFamily="34" charset="0"/>
-              <a:buChar char="•"/>
-              <a:defRPr sz="1800" kern="1200">
-                <a:solidFill>
-                  <a:schemeClr val="tx1"/>
-                </a:solidFill>
-                <a:latin typeface="+mn-lt"/>
-                <a:ea typeface="+mn-ea"/>
-                <a:cs typeface="+mn-cs"/>
-              </a:defRPr>
-            </a:lvl8pPr>
-            <a:lvl9pPr marL="3886200" indent="-228600" algn="l" defTabSz="914400" rtl="0" eaLnBrk="1" latinLnBrk="0" hangingPunct="1">
-              <a:lnSpc>
-                <a:spcPct val="90000"/>
-              </a:lnSpc>
-              <a:spcBef>
-                <a:spcPts val="500"/>
-              </a:spcBef>
-              <a:buFont typeface="Arial" panose="020B0604020202020204" pitchFamily="34" charset="0"/>
-              <a:buChar char="•"/>
-              <a:defRPr sz="1800" kern="1200">
-                <a:solidFill>
-                  <a:schemeClr val="tx1"/>
-                </a:solidFill>
-                <a:latin typeface="+mn-lt"/>
-                <a:ea typeface="+mn-ea"/>
-                <a:cs typeface="+mn-cs"/>
-              </a:defRPr>
-            </a:lvl9pPr>
-          </a:lstStyle>
-          <a:p>
-            <a:pPr marL="0" indent="0">
-              <a:buNone/>
-            </a:pPr>
-            <a:r>
-              <a:rPr lang="es-ES" sz="2400" b="1" dirty="0" err="1">
-                <a:latin typeface="Helvetica"/>
-                <a:cs typeface="Helvetica"/>
-              </a:rPr>
-              <a:t>Obj</a:t>
-            </a:r>
-            <a:r>
-              <a:rPr lang="es-ES" sz="2400" b="1" dirty="0">
-                <a:latin typeface="Helvetica"/>
-                <a:cs typeface="Helvetica"/>
-              </a:rPr>
-              <a:t>. 2.- </a:t>
-            </a:r>
-            <a:r>
-              <a:rPr lang="es-ES" sz="2400" dirty="0" err="1">
-                <a:latin typeface="Helvetica"/>
-                <a:cs typeface="Helvetica"/>
-              </a:rPr>
-              <a:t>To</a:t>
-            </a:r>
-            <a:r>
-              <a:rPr lang="es-ES" sz="2400" dirty="0">
-                <a:latin typeface="Helvetica"/>
-                <a:cs typeface="Helvetica"/>
-              </a:rPr>
-              <a:t> </a:t>
-            </a:r>
-            <a:r>
-              <a:rPr lang="es-ES" sz="2400" dirty="0" err="1">
-                <a:latin typeface="Helvetica"/>
-                <a:cs typeface="Helvetica"/>
-              </a:rPr>
-              <a:t>assess</a:t>
-            </a:r>
-            <a:r>
-              <a:rPr lang="es-ES" sz="2400" dirty="0">
-                <a:latin typeface="Helvetica"/>
-                <a:cs typeface="Helvetica"/>
-              </a:rPr>
-              <a:t> </a:t>
-            </a:r>
-            <a:r>
-              <a:rPr lang="es-ES" sz="2400" dirty="0" err="1">
-                <a:latin typeface="Helvetica"/>
-                <a:cs typeface="Helvetica"/>
-              </a:rPr>
-              <a:t>morphological</a:t>
-            </a:r>
-            <a:r>
-              <a:rPr lang="es-ES" sz="2400" dirty="0">
-                <a:latin typeface="Helvetica"/>
-                <a:cs typeface="Helvetica"/>
-              </a:rPr>
-              <a:t> and </a:t>
-            </a:r>
-            <a:r>
-              <a:rPr lang="es-ES" sz="2400" dirty="0" err="1">
-                <a:latin typeface="Helvetica"/>
-                <a:cs typeface="Helvetica"/>
-              </a:rPr>
-              <a:t>physiological</a:t>
-            </a:r>
-            <a:r>
-              <a:rPr lang="es-ES" sz="2400" b="1" dirty="0">
-                <a:latin typeface="Helvetica"/>
-                <a:cs typeface="Helvetica"/>
-              </a:rPr>
-              <a:t> responses </a:t>
-            </a:r>
-            <a:r>
-              <a:rPr lang="es-ES" sz="2400" b="1" dirty="0" err="1">
-                <a:latin typeface="Helvetica"/>
-                <a:cs typeface="Helvetica"/>
-              </a:rPr>
-              <a:t>to</a:t>
-            </a:r>
-            <a:r>
-              <a:rPr lang="es-ES" sz="2400" b="1" dirty="0">
-                <a:latin typeface="Helvetica"/>
-                <a:cs typeface="Helvetica"/>
-              </a:rPr>
-              <a:t> </a:t>
-            </a:r>
-            <a:r>
-              <a:rPr lang="es-ES" sz="2400" b="1" dirty="0" err="1">
-                <a:latin typeface="Helvetica"/>
-                <a:cs typeface="Helvetica"/>
-              </a:rPr>
-              <a:t>drought</a:t>
-            </a:r>
-            <a:r>
-              <a:rPr lang="es-ES" sz="2400" b="1" dirty="0">
-                <a:latin typeface="Helvetica"/>
-                <a:cs typeface="Helvetica"/>
-              </a:rPr>
-              <a:t>, </a:t>
-            </a:r>
-            <a:r>
-              <a:rPr lang="es-ES" sz="2400" dirty="0">
-                <a:latin typeface="Helvetica"/>
-                <a:cs typeface="Helvetica"/>
-              </a:rPr>
-              <a:t>and </a:t>
-            </a:r>
-            <a:r>
-              <a:rPr lang="es-ES" sz="2400" b="1" dirty="0" err="1">
-                <a:latin typeface="Helvetica"/>
-                <a:cs typeface="Helvetica"/>
-              </a:rPr>
-              <a:t>what</a:t>
-            </a:r>
-            <a:r>
-              <a:rPr lang="es-ES" sz="2400" b="1" dirty="0">
-                <a:latin typeface="Helvetica"/>
-                <a:cs typeface="Helvetica"/>
-              </a:rPr>
-              <a:t> </a:t>
-            </a:r>
-            <a:r>
-              <a:rPr lang="es-ES" sz="2400" b="1" dirty="0" err="1">
-                <a:latin typeface="Helvetica"/>
-                <a:cs typeface="Helvetica"/>
-              </a:rPr>
-              <a:t>traits</a:t>
-            </a:r>
-            <a:r>
-              <a:rPr lang="es-ES" sz="2400" b="1" dirty="0">
-                <a:latin typeface="Helvetica"/>
-                <a:cs typeface="Helvetica"/>
-              </a:rPr>
-              <a:t> are more </a:t>
-            </a:r>
-            <a:r>
-              <a:rPr lang="es-ES" sz="2400" b="1" dirty="0" err="1">
-                <a:latin typeface="Helvetica"/>
-                <a:cs typeface="Helvetica"/>
-              </a:rPr>
-              <a:t>affected</a:t>
-            </a:r>
-            <a:endParaRPr lang="es-ES" sz="2400" b="1" dirty="0">
-              <a:latin typeface="Helvetica"/>
-              <a:cs typeface="Helvetica"/>
-            </a:endParaRPr>
-          </a:p>
-        </p:txBody>
-      </p:sp>
-      <p:sp>
-        <p:nvSpPr>
-          <p:cNvPr id="9" name="Título 1">
-            <a:extLst>
-              <a:ext uri="{FF2B5EF4-FFF2-40B4-BE49-F238E27FC236}">
-                <a16:creationId xmlns:a16="http://schemas.microsoft.com/office/drawing/2014/main" id="{5CD6406B-5875-AE5D-371F-5AE2CA33EA36}"/>
-              </a:ext>
-            </a:extLst>
-          </p:cNvPr>
-          <p:cNvSpPr txBox="1">
-            <a:spLocks/>
-          </p:cNvSpPr>
-          <p:nvPr/>
-        </p:nvSpPr>
-        <p:spPr>
-          <a:xfrm>
-            <a:off x="0" y="0"/>
-            <a:ext cx="9690902" cy="804155"/>
-          </a:xfrm>
-          <a:prstGeom prst="rect">
-            <a:avLst/>
-          </a:prstGeom>
-          <a:solidFill>
-            <a:srgbClr val="218317"/>
-          </a:solidFill>
-        </p:spPr>
-        <p:txBody>
-          <a:bodyPr vert="horz" lIns="91440" tIns="45720" rIns="91440" bIns="45720" rtlCol="0" anchor="ctr">
-            <a:normAutofit fontScale="97500"/>
-          </a:bodyPr>
-          <a:lstStyle>
-            <a:lvl1pPr algn="l" defTabSz="914400" rtl="0" eaLnBrk="1" latinLnBrk="0" hangingPunct="1">
-              <a:lnSpc>
-                <a:spcPct val="90000"/>
-              </a:lnSpc>
-              <a:spcBef>
-                <a:spcPct val="0"/>
-              </a:spcBef>
-              <a:buNone/>
-              <a:defRPr sz="4400" kern="1200">
-                <a:solidFill>
-                  <a:schemeClr val="tx1"/>
-                </a:solidFill>
-                <a:latin typeface="+mj-lt"/>
-                <a:ea typeface="+mj-ea"/>
-                <a:cs typeface="+mj-cs"/>
-              </a:defRPr>
-            </a:lvl1pPr>
-          </a:lstStyle>
-          <a:p>
-            <a:r>
-              <a:rPr lang="es-ES" sz="3200" b="1" dirty="0">
-                <a:solidFill>
-                  <a:schemeClr val="bg1"/>
-                </a:solidFill>
-                <a:latin typeface="Helvetica" panose="020B0604020202020204" pitchFamily="34" charset="0"/>
-                <a:cs typeface="Helvetica" panose="020B0604020202020204" pitchFamily="34" charset="0"/>
-              </a:rPr>
-              <a:t>	</a:t>
-            </a:r>
-            <a:r>
-              <a:rPr lang="es-ES" sz="3200" b="1" dirty="0" err="1">
-                <a:solidFill>
-                  <a:schemeClr val="bg1"/>
-                </a:solidFill>
-                <a:latin typeface="Helvetica" panose="020B0604020202020204" pitchFamily="34" charset="0"/>
-                <a:cs typeface="Helvetica" panose="020B0604020202020204" pitchFamily="34" charset="0"/>
-              </a:rPr>
-              <a:t>Objectives</a:t>
-            </a:r>
-            <a:r>
-              <a:rPr lang="es-ES" sz="3200" b="1" dirty="0">
-                <a:solidFill>
-                  <a:schemeClr val="bg1"/>
-                </a:solidFill>
-                <a:latin typeface="Helvetica" panose="020B0604020202020204" pitchFamily="34" charset="0"/>
-                <a:cs typeface="Helvetica" panose="020B0604020202020204" pitchFamily="34" charset="0"/>
-              </a:rPr>
-              <a:t> &amp; </a:t>
-            </a:r>
-            <a:r>
-              <a:rPr lang="es-ES" sz="3200" b="1" dirty="0" err="1">
-                <a:solidFill>
-                  <a:schemeClr val="bg1"/>
-                </a:solidFill>
-                <a:latin typeface="Helvetica" panose="020B0604020202020204" pitchFamily="34" charset="0"/>
-                <a:cs typeface="Helvetica" panose="020B0604020202020204" pitchFamily="34" charset="0"/>
-              </a:rPr>
-              <a:t>Hypotheses</a:t>
-            </a:r>
-            <a:endParaRPr lang="es-ES" sz="3200" b="1" dirty="0">
-              <a:solidFill>
-                <a:schemeClr val="bg1"/>
-              </a:solidFill>
-              <a:latin typeface="Helvetica" panose="020B0604020202020204" pitchFamily="34" charset="0"/>
-              <a:cs typeface="Helvetica" panose="020B0604020202020204" pitchFamily="34" charset="0"/>
-            </a:endParaRPr>
-          </a:p>
-        </p:txBody>
-      </p:sp>
-      <p:sp>
-        <p:nvSpPr>
-          <p:cNvPr id="10" name="Título 1">
-            <a:extLst>
-              <a:ext uri="{FF2B5EF4-FFF2-40B4-BE49-F238E27FC236}">
-                <a16:creationId xmlns:a16="http://schemas.microsoft.com/office/drawing/2014/main" id="{9D0E8E0D-4EC8-AF06-2C84-F69377E87B0A}"/>
-              </a:ext>
-            </a:extLst>
-          </p:cNvPr>
-          <p:cNvSpPr txBox="1">
-            <a:spLocks/>
-          </p:cNvSpPr>
-          <p:nvPr/>
-        </p:nvSpPr>
-        <p:spPr>
-          <a:xfrm>
-            <a:off x="9690902" y="-1"/>
-            <a:ext cx="2501098" cy="804157"/>
-          </a:xfrm>
-          <a:prstGeom prst="rect">
-            <a:avLst/>
-          </a:prstGeom>
-          <a:solidFill>
-            <a:srgbClr val="218317"/>
-          </a:solidFill>
-        </p:spPr>
-        <p:txBody>
-          <a:bodyPr vert="horz" lIns="91440" tIns="45720" rIns="91440" bIns="45720" rtlCol="0" anchor="ctr">
-            <a:normAutofit/>
-          </a:bodyPr>
-          <a:lstStyle>
-            <a:lvl1pPr algn="l" defTabSz="914400" rtl="0" eaLnBrk="1" latinLnBrk="0" hangingPunct="1">
-              <a:lnSpc>
-                <a:spcPct val="90000"/>
-              </a:lnSpc>
-              <a:spcBef>
-                <a:spcPct val="0"/>
-              </a:spcBef>
-              <a:buNone/>
-              <a:defRPr sz="4400" kern="1200">
-                <a:solidFill>
-                  <a:schemeClr val="tx1"/>
-                </a:solidFill>
-                <a:latin typeface="+mj-lt"/>
-                <a:ea typeface="+mj-ea"/>
-                <a:cs typeface="+mj-cs"/>
-              </a:defRPr>
-            </a:lvl1pPr>
-          </a:lstStyle>
-          <a:p>
-            <a:pPr algn="r"/>
-            <a:r>
-              <a:rPr lang="es-ES" sz="2800" b="1" dirty="0" err="1">
-                <a:solidFill>
-                  <a:schemeClr val="accent6">
-                    <a:lumMod val="60000"/>
-                    <a:lumOff val="40000"/>
-                  </a:schemeClr>
-                </a:solidFill>
-                <a:latin typeface="Helvetica" panose="020B0604020202020204" pitchFamily="34" charset="0"/>
-                <a:cs typeface="Helvetica" panose="020B0604020202020204" pitchFamily="34" charset="0"/>
-              </a:rPr>
-              <a:t>Introduction</a:t>
-            </a:r>
-            <a:r>
-              <a:rPr lang="es-ES" sz="2800" b="1" dirty="0">
-                <a:solidFill>
-                  <a:srgbClr val="218317"/>
-                </a:solidFill>
-                <a:latin typeface="Helvetica" panose="020B0604020202020204" pitchFamily="34" charset="0"/>
-                <a:cs typeface="Helvetica" panose="020B0604020202020204" pitchFamily="34" charset="0"/>
-              </a:rPr>
-              <a:t>.</a:t>
-            </a:r>
-          </a:p>
-        </p:txBody>
-      </p:sp>
-      <p:sp>
-        <p:nvSpPr>
-          <p:cNvPr id="4" name="Marcador de contenido 2">
-            <a:extLst>
-              <a:ext uri="{FF2B5EF4-FFF2-40B4-BE49-F238E27FC236}">
-                <a16:creationId xmlns:a16="http://schemas.microsoft.com/office/drawing/2014/main" id="{17176B63-C01E-6AD5-661C-4C9D8D28D38C}"/>
-              </a:ext>
-            </a:extLst>
-          </p:cNvPr>
-          <p:cNvSpPr txBox="1">
-            <a:spLocks/>
-          </p:cNvSpPr>
-          <p:nvPr/>
-        </p:nvSpPr>
-        <p:spPr>
-          <a:xfrm>
-            <a:off x="633459" y="2041583"/>
-            <a:ext cx="10925077" cy="1146828"/>
-          </a:xfrm>
-          <a:prstGeom prst="rect">
-            <a:avLst/>
-          </a:prstGeom>
-        </p:spPr>
-        <p:txBody>
-          <a:bodyPr vert="horz" lIns="91440" tIns="45720" rIns="91440" bIns="45720" rtlCol="0" anchor="t">
-            <a:normAutofit/>
-          </a:bodyPr>
-          <a:lstStyle>
-            <a:lvl1pPr marL="228600" indent="-228600" algn="l" defTabSz="914400" rtl="0" eaLnBrk="1" latinLnBrk="0" hangingPunct="1">
-              <a:lnSpc>
-                <a:spcPct val="90000"/>
-              </a:lnSpc>
-              <a:spcBef>
-                <a:spcPts val="1000"/>
-              </a:spcBef>
-              <a:buFont typeface="Arial" panose="020B0604020202020204" pitchFamily="34" charset="0"/>
-              <a:buChar char="•"/>
-              <a:defRPr sz="2800" kern="1200">
-                <a:solidFill>
-                  <a:schemeClr val="tx1"/>
-                </a:solidFill>
-                <a:latin typeface="+mn-lt"/>
-                <a:ea typeface="+mn-ea"/>
-                <a:cs typeface="+mn-cs"/>
-              </a:defRPr>
-            </a:lvl1pPr>
-            <a:lvl2pPr marL="685800" indent="-228600" algn="l" defTabSz="914400" rtl="0" eaLnBrk="1" latinLnBrk="0" hangingPunct="1">
-              <a:lnSpc>
-                <a:spcPct val="90000"/>
-              </a:lnSpc>
-              <a:spcBef>
-                <a:spcPts val="500"/>
-              </a:spcBef>
-              <a:buFont typeface="Arial" panose="020B0604020202020204" pitchFamily="34" charset="0"/>
-              <a:buChar char="•"/>
-              <a:defRPr sz="2400" kern="1200">
-                <a:solidFill>
-                  <a:schemeClr val="tx1"/>
-                </a:solidFill>
-                <a:latin typeface="+mn-lt"/>
-                <a:ea typeface="+mn-ea"/>
-                <a:cs typeface="+mn-cs"/>
-              </a:defRPr>
-            </a:lvl2pPr>
-            <a:lvl3pPr marL="1143000" indent="-228600" algn="l" defTabSz="914400" rtl="0" eaLnBrk="1" latinLnBrk="0" hangingPunct="1">
-              <a:lnSpc>
-                <a:spcPct val="90000"/>
-              </a:lnSpc>
-              <a:spcBef>
-                <a:spcPts val="500"/>
-              </a:spcBef>
-              <a:buFont typeface="Arial" panose="020B0604020202020204" pitchFamily="34" charset="0"/>
-              <a:buChar char="•"/>
-              <a:defRPr sz="2000" kern="1200">
-                <a:solidFill>
-                  <a:schemeClr val="tx1"/>
-                </a:solidFill>
-                <a:latin typeface="+mn-lt"/>
-                <a:ea typeface="+mn-ea"/>
-                <a:cs typeface="+mn-cs"/>
-              </a:defRPr>
-            </a:lvl3pPr>
-            <a:lvl4pPr marL="1600200" indent="-228600" algn="l" defTabSz="914400" rtl="0" eaLnBrk="1" latinLnBrk="0" hangingPunct="1">
-              <a:lnSpc>
-                <a:spcPct val="90000"/>
-              </a:lnSpc>
-              <a:spcBef>
-                <a:spcPts val="500"/>
-              </a:spcBef>
-              <a:buFont typeface="Arial" panose="020B0604020202020204" pitchFamily="34" charset="0"/>
-              <a:buChar char="•"/>
-              <a:defRPr sz="1800" kern="1200">
-                <a:solidFill>
-                  <a:schemeClr val="tx1"/>
-                </a:solidFill>
-                <a:latin typeface="+mn-lt"/>
-                <a:ea typeface="+mn-ea"/>
-                <a:cs typeface="+mn-cs"/>
-              </a:defRPr>
-            </a:lvl4pPr>
-            <a:lvl5pPr marL="2057400" indent="-228600" algn="l" defTabSz="914400" rtl="0" eaLnBrk="1" latinLnBrk="0" hangingPunct="1">
-              <a:lnSpc>
-                <a:spcPct val="90000"/>
-              </a:lnSpc>
-              <a:spcBef>
-                <a:spcPts val="500"/>
-              </a:spcBef>
-              <a:buFont typeface="Arial" panose="020B0604020202020204" pitchFamily="34" charset="0"/>
-              <a:buChar char="•"/>
-              <a:defRPr sz="1800" kern="1200">
-                <a:solidFill>
-                  <a:schemeClr val="tx1"/>
-                </a:solidFill>
-                <a:latin typeface="+mn-lt"/>
-                <a:ea typeface="+mn-ea"/>
-                <a:cs typeface="+mn-cs"/>
-              </a:defRPr>
-            </a:lvl5pPr>
-            <a:lvl6pPr marL="2514600" indent="-228600" algn="l" defTabSz="914400" rtl="0" eaLnBrk="1" latinLnBrk="0" hangingPunct="1">
-              <a:lnSpc>
-                <a:spcPct val="90000"/>
-              </a:lnSpc>
-              <a:spcBef>
-                <a:spcPts val="500"/>
-              </a:spcBef>
-              <a:buFont typeface="Arial" panose="020B0604020202020204" pitchFamily="34" charset="0"/>
-              <a:buChar char="•"/>
-              <a:defRPr sz="1800" kern="1200">
-                <a:solidFill>
-                  <a:schemeClr val="tx1"/>
-                </a:solidFill>
-                <a:latin typeface="+mn-lt"/>
-                <a:ea typeface="+mn-ea"/>
-                <a:cs typeface="+mn-cs"/>
-              </a:defRPr>
-            </a:lvl6pPr>
-            <a:lvl7pPr marL="2971800" indent="-228600" algn="l" defTabSz="914400" rtl="0" eaLnBrk="1" latinLnBrk="0" hangingPunct="1">
-              <a:lnSpc>
-                <a:spcPct val="90000"/>
-              </a:lnSpc>
-              <a:spcBef>
-                <a:spcPts val="500"/>
-              </a:spcBef>
-              <a:buFont typeface="Arial" panose="020B0604020202020204" pitchFamily="34" charset="0"/>
-              <a:buChar char="•"/>
-              <a:defRPr sz="1800" kern="1200">
-                <a:solidFill>
-                  <a:schemeClr val="tx1"/>
-                </a:solidFill>
-                <a:latin typeface="+mn-lt"/>
-                <a:ea typeface="+mn-ea"/>
-                <a:cs typeface="+mn-cs"/>
-              </a:defRPr>
-            </a:lvl7pPr>
-            <a:lvl8pPr marL="3429000" indent="-228600" algn="l" defTabSz="914400" rtl="0" eaLnBrk="1" latinLnBrk="0" hangingPunct="1">
-              <a:lnSpc>
-                <a:spcPct val="90000"/>
-              </a:lnSpc>
-              <a:spcBef>
-                <a:spcPts val="500"/>
-              </a:spcBef>
-              <a:buFont typeface="Arial" panose="020B0604020202020204" pitchFamily="34" charset="0"/>
-              <a:buChar char="•"/>
-              <a:defRPr sz="1800" kern="1200">
-                <a:solidFill>
-                  <a:schemeClr val="tx1"/>
-                </a:solidFill>
-                <a:latin typeface="+mn-lt"/>
-                <a:ea typeface="+mn-ea"/>
-                <a:cs typeface="+mn-cs"/>
-              </a:defRPr>
-            </a:lvl8pPr>
-            <a:lvl9pPr marL="3886200" indent="-228600" algn="l" defTabSz="914400" rtl="0" eaLnBrk="1" latinLnBrk="0" hangingPunct="1">
-              <a:lnSpc>
-                <a:spcPct val="90000"/>
-              </a:lnSpc>
-              <a:spcBef>
-                <a:spcPts val="500"/>
-              </a:spcBef>
-              <a:buFont typeface="Arial" panose="020B0604020202020204" pitchFamily="34" charset="0"/>
-              <a:buChar char="•"/>
-              <a:defRPr sz="1800" kern="1200">
-                <a:solidFill>
-                  <a:schemeClr val="tx1"/>
-                </a:solidFill>
-                <a:latin typeface="+mn-lt"/>
-                <a:ea typeface="+mn-ea"/>
-                <a:cs typeface="+mn-cs"/>
-              </a:defRPr>
-            </a:lvl9pPr>
-          </a:lstStyle>
-          <a:p>
-            <a:pPr marL="0" indent="0">
-              <a:buNone/>
-            </a:pPr>
-            <a:r>
-              <a:rPr lang="es-ES" sz="2400" b="1" i="1" dirty="0">
-                <a:latin typeface="Helvetica"/>
-                <a:cs typeface="Helvetica"/>
-              </a:rPr>
-              <a:t>H2.-</a:t>
-            </a:r>
-            <a:r>
-              <a:rPr lang="es-ES" sz="2400" i="1" dirty="0">
-                <a:latin typeface="Helvetica"/>
-                <a:cs typeface="Helvetica"/>
-              </a:rPr>
-              <a:t> </a:t>
-            </a:r>
-            <a:r>
-              <a:rPr lang="es-ES" sz="2400" i="1" dirty="0" err="1">
-                <a:latin typeface="Helvetica"/>
-                <a:cs typeface="Helvetica"/>
-              </a:rPr>
-              <a:t>We</a:t>
-            </a:r>
-            <a:r>
-              <a:rPr lang="es-ES" sz="2400" i="1" dirty="0">
-                <a:latin typeface="Helvetica"/>
-                <a:cs typeface="Helvetica"/>
-              </a:rPr>
-              <a:t> </a:t>
-            </a:r>
-            <a:r>
-              <a:rPr lang="es-ES" sz="2400" i="1" dirty="0" err="1">
-                <a:latin typeface="Helvetica"/>
-                <a:cs typeface="Helvetica"/>
-              </a:rPr>
-              <a:t>expect</a:t>
-            </a:r>
-            <a:r>
-              <a:rPr lang="es-ES" sz="2400" i="1" dirty="0">
-                <a:latin typeface="Helvetica"/>
-                <a:cs typeface="Helvetica"/>
-              </a:rPr>
-              <a:t> </a:t>
-            </a:r>
-            <a:r>
-              <a:rPr lang="es-ES" sz="2400" i="1" dirty="0" err="1">
-                <a:latin typeface="Helvetica"/>
-                <a:cs typeface="Helvetica"/>
-              </a:rPr>
-              <a:t>drought-induced</a:t>
-            </a:r>
-            <a:r>
-              <a:rPr lang="es-ES" sz="2400" i="1" dirty="0">
-                <a:latin typeface="Helvetica"/>
-                <a:cs typeface="Helvetica"/>
-              </a:rPr>
-              <a:t> </a:t>
-            </a:r>
-            <a:r>
-              <a:rPr lang="es-ES" sz="2400" i="1" dirty="0" err="1">
-                <a:latin typeface="Helvetica"/>
-                <a:cs typeface="Helvetica"/>
-              </a:rPr>
-              <a:t>reduced</a:t>
-            </a:r>
-            <a:r>
-              <a:rPr lang="es-ES" sz="2400" i="1" dirty="0">
-                <a:latin typeface="Helvetica"/>
-                <a:cs typeface="Helvetica"/>
-              </a:rPr>
-              <a:t> </a:t>
-            </a:r>
-            <a:r>
-              <a:rPr lang="es-ES" sz="2400" i="1" dirty="0" err="1">
-                <a:latin typeface="Helvetica"/>
-                <a:cs typeface="Helvetica"/>
-              </a:rPr>
-              <a:t>photosynthetic</a:t>
-            </a:r>
-            <a:r>
-              <a:rPr lang="es-ES" sz="2400" i="1" dirty="0">
-                <a:latin typeface="Helvetica"/>
-                <a:cs typeface="Helvetica"/>
-              </a:rPr>
-              <a:t> </a:t>
-            </a:r>
-            <a:r>
-              <a:rPr lang="es-ES" sz="2400" i="1" dirty="0" err="1">
-                <a:latin typeface="Helvetica"/>
-                <a:cs typeface="Helvetica"/>
-              </a:rPr>
-              <a:t>pigments</a:t>
-            </a:r>
-            <a:r>
-              <a:rPr lang="es-ES" sz="2400" i="1" dirty="0">
-                <a:latin typeface="Helvetica"/>
-                <a:cs typeface="Helvetica"/>
-              </a:rPr>
-              <a:t> </a:t>
-            </a:r>
-            <a:r>
-              <a:rPr lang="es-ES" sz="2400" i="1" dirty="0" err="1">
-                <a:latin typeface="Helvetica"/>
-                <a:cs typeface="Helvetica"/>
-              </a:rPr>
-              <a:t>concentrations</a:t>
-            </a:r>
-            <a:r>
-              <a:rPr lang="es-ES" sz="2400" i="1" dirty="0">
-                <a:latin typeface="Helvetica"/>
-                <a:cs typeface="Helvetica"/>
-              </a:rPr>
-              <a:t>, </a:t>
-            </a:r>
-            <a:r>
-              <a:rPr lang="es-ES" sz="2400" i="1" dirty="0" err="1">
-                <a:latin typeface="Helvetica"/>
-                <a:cs typeface="Helvetica"/>
-              </a:rPr>
-              <a:t>increased</a:t>
-            </a:r>
-            <a:r>
-              <a:rPr lang="es-ES" sz="2400" i="1" dirty="0">
-                <a:latin typeface="Helvetica"/>
-                <a:cs typeface="Helvetica"/>
-              </a:rPr>
-              <a:t> </a:t>
-            </a:r>
-            <a:r>
-              <a:rPr lang="es-ES" sz="2400" i="1" dirty="0" err="1">
-                <a:latin typeface="Helvetica"/>
-                <a:cs typeface="Helvetica"/>
-              </a:rPr>
-              <a:t>iWUE</a:t>
-            </a:r>
-            <a:r>
-              <a:rPr lang="es-ES" sz="2400" i="1" dirty="0">
-                <a:latin typeface="Helvetica"/>
-                <a:cs typeface="Helvetica"/>
-              </a:rPr>
-              <a:t> and </a:t>
-            </a:r>
-            <a:r>
-              <a:rPr lang="es-ES" sz="2400" i="1" dirty="0" err="1">
-                <a:latin typeface="Helvetica"/>
-                <a:cs typeface="Helvetica"/>
-              </a:rPr>
-              <a:t>leaves</a:t>
-            </a:r>
-            <a:r>
-              <a:rPr lang="es-ES" sz="2400" i="1" dirty="0">
-                <a:latin typeface="Helvetica"/>
-                <a:cs typeface="Helvetica"/>
-              </a:rPr>
-              <a:t> </a:t>
-            </a:r>
-            <a:r>
-              <a:rPr lang="es-ES" sz="2400" i="1" dirty="0" err="1">
-                <a:latin typeface="Helvetica"/>
-                <a:cs typeface="Helvetica"/>
-              </a:rPr>
-              <a:t>nutrients</a:t>
-            </a:r>
-            <a:r>
-              <a:rPr lang="es-ES" sz="2400" i="1" dirty="0">
-                <a:latin typeface="Helvetica"/>
-                <a:cs typeface="Helvetica"/>
-              </a:rPr>
-              <a:t> </a:t>
-            </a:r>
-            <a:r>
-              <a:rPr lang="es-ES" sz="2400" i="1" dirty="0" err="1">
-                <a:latin typeface="Helvetica"/>
-                <a:cs typeface="Helvetica"/>
-              </a:rPr>
-              <a:t>allocation</a:t>
-            </a:r>
-            <a:endParaRPr lang="es-ES" sz="2400" i="1" dirty="0">
-              <a:latin typeface="Helvetica"/>
-              <a:cs typeface="Helvetica"/>
-            </a:endParaRPr>
-          </a:p>
-        </p:txBody>
-      </p:sp>
-      <p:sp>
-        <p:nvSpPr>
-          <p:cNvPr id="8" name="Marcador de contenido 2">
-            <a:extLst>
-              <a:ext uri="{FF2B5EF4-FFF2-40B4-BE49-F238E27FC236}">
-                <a16:creationId xmlns:a16="http://schemas.microsoft.com/office/drawing/2014/main" id="{5D2A598E-3271-64EB-5DA8-A70DDDCC8E1C}"/>
-              </a:ext>
-            </a:extLst>
-          </p:cNvPr>
-          <p:cNvSpPr txBox="1">
-            <a:spLocks/>
-          </p:cNvSpPr>
-          <p:nvPr/>
-        </p:nvSpPr>
-        <p:spPr>
-          <a:xfrm>
-            <a:off x="633459" y="3188411"/>
-            <a:ext cx="10925077" cy="2561279"/>
-          </a:xfrm>
-          <a:prstGeom prst="rect">
-            <a:avLst/>
-          </a:prstGeom>
-        </p:spPr>
-        <p:txBody>
-          <a:bodyPr vert="horz" lIns="91440" tIns="45720" rIns="91440" bIns="45720" rtlCol="0" anchor="t">
-            <a:normAutofit fontScale="92500"/>
-          </a:bodyPr>
-          <a:lstStyle>
-            <a:lvl1pPr marL="228600" indent="-228600" algn="l" defTabSz="914400" rtl="0" eaLnBrk="1" latinLnBrk="0" hangingPunct="1">
-              <a:lnSpc>
-                <a:spcPct val="90000"/>
-              </a:lnSpc>
-              <a:spcBef>
-                <a:spcPts val="1000"/>
-              </a:spcBef>
-              <a:buFont typeface="Arial" panose="020B0604020202020204" pitchFamily="34" charset="0"/>
-              <a:buChar char="•"/>
-              <a:defRPr sz="2800" kern="1200">
-                <a:solidFill>
-                  <a:schemeClr val="tx1"/>
-                </a:solidFill>
-                <a:latin typeface="+mn-lt"/>
-                <a:ea typeface="+mn-ea"/>
-                <a:cs typeface="+mn-cs"/>
-              </a:defRPr>
-            </a:lvl1pPr>
-            <a:lvl2pPr marL="685800" indent="-228600" algn="l" defTabSz="914400" rtl="0" eaLnBrk="1" latinLnBrk="0" hangingPunct="1">
-              <a:lnSpc>
-                <a:spcPct val="90000"/>
-              </a:lnSpc>
-              <a:spcBef>
-                <a:spcPts val="500"/>
-              </a:spcBef>
-              <a:buFont typeface="Arial" panose="020B0604020202020204" pitchFamily="34" charset="0"/>
-              <a:buChar char="•"/>
-              <a:defRPr sz="2400" kern="1200">
-                <a:solidFill>
-                  <a:schemeClr val="tx1"/>
-                </a:solidFill>
-                <a:latin typeface="+mn-lt"/>
-                <a:ea typeface="+mn-ea"/>
-                <a:cs typeface="+mn-cs"/>
-              </a:defRPr>
-            </a:lvl2pPr>
-            <a:lvl3pPr marL="1143000" indent="-228600" algn="l" defTabSz="914400" rtl="0" eaLnBrk="1" latinLnBrk="0" hangingPunct="1">
-              <a:lnSpc>
-                <a:spcPct val="90000"/>
-              </a:lnSpc>
-              <a:spcBef>
-                <a:spcPts val="500"/>
-              </a:spcBef>
-              <a:buFont typeface="Arial" panose="020B0604020202020204" pitchFamily="34" charset="0"/>
-              <a:buChar char="•"/>
-              <a:defRPr sz="2000" kern="1200">
-                <a:solidFill>
-                  <a:schemeClr val="tx1"/>
-                </a:solidFill>
-                <a:latin typeface="+mn-lt"/>
-                <a:ea typeface="+mn-ea"/>
-                <a:cs typeface="+mn-cs"/>
-              </a:defRPr>
-            </a:lvl3pPr>
-            <a:lvl4pPr marL="1600200" indent="-228600" algn="l" defTabSz="914400" rtl="0" eaLnBrk="1" latinLnBrk="0" hangingPunct="1">
-              <a:lnSpc>
-                <a:spcPct val="90000"/>
-              </a:lnSpc>
-              <a:spcBef>
-                <a:spcPts val="500"/>
-              </a:spcBef>
-              <a:buFont typeface="Arial" panose="020B0604020202020204" pitchFamily="34" charset="0"/>
-              <a:buChar char="•"/>
-              <a:defRPr sz="1800" kern="1200">
-                <a:solidFill>
-                  <a:schemeClr val="tx1"/>
-                </a:solidFill>
-                <a:latin typeface="+mn-lt"/>
-                <a:ea typeface="+mn-ea"/>
-                <a:cs typeface="+mn-cs"/>
-              </a:defRPr>
-            </a:lvl4pPr>
-            <a:lvl5pPr marL="2057400" indent="-228600" algn="l" defTabSz="914400" rtl="0" eaLnBrk="1" latinLnBrk="0" hangingPunct="1">
-              <a:lnSpc>
-                <a:spcPct val="90000"/>
-              </a:lnSpc>
-              <a:spcBef>
-                <a:spcPts val="500"/>
-              </a:spcBef>
-              <a:buFont typeface="Arial" panose="020B0604020202020204" pitchFamily="34" charset="0"/>
-              <a:buChar char="•"/>
-              <a:defRPr sz="1800" kern="1200">
-                <a:solidFill>
-                  <a:schemeClr val="tx1"/>
-                </a:solidFill>
-                <a:latin typeface="+mn-lt"/>
-                <a:ea typeface="+mn-ea"/>
-                <a:cs typeface="+mn-cs"/>
-              </a:defRPr>
-            </a:lvl5pPr>
-            <a:lvl6pPr marL="2514600" indent="-228600" algn="l" defTabSz="914400" rtl="0" eaLnBrk="1" latinLnBrk="0" hangingPunct="1">
-              <a:lnSpc>
-                <a:spcPct val="90000"/>
-              </a:lnSpc>
-              <a:spcBef>
-                <a:spcPts val="500"/>
-              </a:spcBef>
-              <a:buFont typeface="Arial" panose="020B0604020202020204" pitchFamily="34" charset="0"/>
-              <a:buChar char="•"/>
-              <a:defRPr sz="1800" kern="1200">
-                <a:solidFill>
-                  <a:schemeClr val="tx1"/>
-                </a:solidFill>
-                <a:latin typeface="+mn-lt"/>
-                <a:ea typeface="+mn-ea"/>
-                <a:cs typeface="+mn-cs"/>
-              </a:defRPr>
-            </a:lvl6pPr>
-            <a:lvl7pPr marL="2971800" indent="-228600" algn="l" defTabSz="914400" rtl="0" eaLnBrk="1" latinLnBrk="0" hangingPunct="1">
-              <a:lnSpc>
-                <a:spcPct val="90000"/>
-              </a:lnSpc>
-              <a:spcBef>
-                <a:spcPts val="500"/>
-              </a:spcBef>
-              <a:buFont typeface="Arial" panose="020B0604020202020204" pitchFamily="34" charset="0"/>
-              <a:buChar char="•"/>
-              <a:defRPr sz="1800" kern="1200">
-                <a:solidFill>
-                  <a:schemeClr val="tx1"/>
-                </a:solidFill>
-                <a:latin typeface="+mn-lt"/>
-                <a:ea typeface="+mn-ea"/>
-                <a:cs typeface="+mn-cs"/>
-              </a:defRPr>
-            </a:lvl7pPr>
-            <a:lvl8pPr marL="3429000" indent="-228600" algn="l" defTabSz="914400" rtl="0" eaLnBrk="1" latinLnBrk="0" hangingPunct="1">
-              <a:lnSpc>
-                <a:spcPct val="90000"/>
-              </a:lnSpc>
-              <a:spcBef>
-                <a:spcPts val="500"/>
-              </a:spcBef>
-              <a:buFont typeface="Arial" panose="020B0604020202020204" pitchFamily="34" charset="0"/>
-              <a:buChar char="•"/>
-              <a:defRPr sz="1800" kern="1200">
-                <a:solidFill>
-                  <a:schemeClr val="tx1"/>
-                </a:solidFill>
-                <a:latin typeface="+mn-lt"/>
-                <a:ea typeface="+mn-ea"/>
-                <a:cs typeface="+mn-cs"/>
-              </a:defRPr>
-            </a:lvl8pPr>
-            <a:lvl9pPr marL="3886200" indent="-228600" algn="l" defTabSz="914400" rtl="0" eaLnBrk="1" latinLnBrk="0" hangingPunct="1">
-              <a:lnSpc>
-                <a:spcPct val="90000"/>
-              </a:lnSpc>
-              <a:spcBef>
-                <a:spcPts val="500"/>
-              </a:spcBef>
-              <a:buFont typeface="Arial" panose="020B0604020202020204" pitchFamily="34" charset="0"/>
-              <a:buChar char="•"/>
-              <a:defRPr sz="1800" kern="1200">
-                <a:solidFill>
-                  <a:schemeClr val="tx1"/>
-                </a:solidFill>
-                <a:latin typeface="+mn-lt"/>
-                <a:ea typeface="+mn-ea"/>
-                <a:cs typeface="+mn-cs"/>
-              </a:defRPr>
-            </a:lvl9pPr>
-          </a:lstStyle>
-          <a:p>
-            <a:pPr>
-              <a:buClr>
-                <a:srgbClr val="218317"/>
-              </a:buClr>
-            </a:pPr>
-            <a:r>
-              <a:rPr lang="es-ES" sz="2400" b="1" dirty="0" err="1">
-                <a:latin typeface="Helvetica"/>
-                <a:cs typeface="Helvetica"/>
-              </a:rPr>
-              <a:t>Senescence</a:t>
-            </a:r>
-            <a:r>
-              <a:rPr lang="es-ES" sz="2400" b="1" dirty="0">
-                <a:latin typeface="Helvetica"/>
-                <a:cs typeface="Helvetica"/>
-              </a:rPr>
-              <a:t>: </a:t>
-            </a:r>
-            <a:r>
-              <a:rPr lang="en-US" sz="2400" dirty="0">
-                <a:latin typeface="Helvetica"/>
-                <a:cs typeface="Helvetica"/>
-              </a:rPr>
-              <a:t>water stress-induced increased ABA and ROS trigger upregulation of senescence-associated genes (SAG), and to damages to photosynthetic apparatus </a:t>
-            </a:r>
-            <a:r>
-              <a:rPr lang="en-US" sz="2400" dirty="0">
-                <a:latin typeface="Helvetica"/>
-                <a:cs typeface="Helvetica"/>
-                <a:sym typeface="Wingdings" panose="05000000000000000000" pitchFamily="2" charset="2"/>
-              </a:rPr>
-              <a:t> </a:t>
-            </a:r>
-            <a:r>
-              <a:rPr lang="es-ES" sz="2400" b="1" dirty="0">
-                <a:latin typeface="Helvetica"/>
-                <a:cs typeface="Helvetica"/>
-                <a:sym typeface="Wingdings" panose="05000000000000000000" pitchFamily="2" charset="2"/>
-              </a:rPr>
-              <a:t>↓ </a:t>
-            </a:r>
-            <a:r>
-              <a:rPr lang="es-ES" sz="2400" b="1" dirty="0" err="1">
-                <a:latin typeface="Helvetica"/>
-                <a:cs typeface="Helvetica"/>
-                <a:sym typeface="Wingdings" panose="05000000000000000000" pitchFamily="2" charset="2"/>
-              </a:rPr>
-              <a:t>Pigments</a:t>
-            </a:r>
-            <a:r>
-              <a:rPr lang="es-ES" sz="2400" b="1" dirty="0">
-                <a:latin typeface="Helvetica"/>
-                <a:cs typeface="Helvetica"/>
-                <a:sym typeface="Wingdings" panose="05000000000000000000" pitchFamily="2" charset="2"/>
-              </a:rPr>
-              <a:t> </a:t>
-            </a:r>
-            <a:r>
-              <a:rPr lang="es-ES" sz="2400" b="1" dirty="0" err="1">
-                <a:latin typeface="Helvetica"/>
-                <a:cs typeface="Helvetica"/>
-                <a:sym typeface="Wingdings" panose="05000000000000000000" pitchFamily="2" charset="2"/>
-              </a:rPr>
-              <a:t>concentration</a:t>
-            </a:r>
-            <a:r>
-              <a:rPr lang="es-ES" sz="2400" b="1" dirty="0">
-                <a:latin typeface="Helvetica"/>
-                <a:cs typeface="Helvetica"/>
-                <a:sym typeface="Wingdings" panose="05000000000000000000" pitchFamily="2" charset="2"/>
-              </a:rPr>
-              <a:t> and C:N ratio in </a:t>
-            </a:r>
-            <a:r>
-              <a:rPr lang="es-ES" sz="2400" b="1" dirty="0" err="1">
-                <a:solidFill>
-                  <a:srgbClr val="C00000"/>
-                </a:solidFill>
-                <a:latin typeface="Helvetica"/>
-                <a:cs typeface="Helvetica"/>
-                <a:sym typeface="Wingdings" panose="05000000000000000000" pitchFamily="2" charset="2"/>
-              </a:rPr>
-              <a:t>declining</a:t>
-            </a:r>
-            <a:r>
-              <a:rPr lang="es-ES" sz="2400" b="1" dirty="0">
-                <a:solidFill>
-                  <a:srgbClr val="C00000"/>
-                </a:solidFill>
-                <a:latin typeface="Helvetica"/>
-                <a:cs typeface="Helvetica"/>
-                <a:sym typeface="Wingdings" panose="05000000000000000000" pitchFamily="2" charset="2"/>
-              </a:rPr>
-              <a:t> sites</a:t>
-            </a:r>
-          </a:p>
-          <a:p>
-            <a:pPr>
-              <a:buClr>
-                <a:srgbClr val="218317"/>
-              </a:buClr>
-            </a:pPr>
-            <a:r>
-              <a:rPr lang="es-ES" sz="2400" b="1" dirty="0" err="1">
-                <a:latin typeface="Helvetica"/>
-                <a:cs typeface="Helvetica"/>
-              </a:rPr>
-              <a:t>Transpiration</a:t>
-            </a:r>
-            <a:r>
-              <a:rPr lang="es-ES" sz="2400" b="1" dirty="0">
-                <a:latin typeface="Helvetica"/>
-                <a:cs typeface="Helvetica"/>
-              </a:rPr>
-              <a:t> and </a:t>
-            </a:r>
-            <a:r>
-              <a:rPr lang="es-ES" sz="2400" b="1" dirty="0" err="1">
-                <a:latin typeface="Helvetica"/>
-                <a:cs typeface="Helvetica"/>
-              </a:rPr>
-              <a:t>photosynthetic</a:t>
-            </a:r>
-            <a:r>
-              <a:rPr lang="es-ES" sz="2400" b="1" dirty="0">
-                <a:latin typeface="Helvetica"/>
-                <a:cs typeface="Helvetica"/>
-              </a:rPr>
-              <a:t> </a:t>
-            </a:r>
-            <a:r>
-              <a:rPr lang="es-ES" sz="2400" b="1" dirty="0" err="1">
-                <a:latin typeface="Helvetica"/>
-                <a:cs typeface="Helvetica"/>
-              </a:rPr>
-              <a:t>rates</a:t>
-            </a:r>
-            <a:r>
-              <a:rPr lang="es-ES" sz="2400" b="1" dirty="0">
-                <a:latin typeface="Helvetica"/>
-                <a:cs typeface="Helvetica"/>
-              </a:rPr>
-              <a:t>: </a:t>
-            </a:r>
-            <a:r>
-              <a:rPr lang="es-ES" sz="2400" dirty="0" err="1">
-                <a:latin typeface="Helvetica"/>
-                <a:cs typeface="Helvetica"/>
-              </a:rPr>
-              <a:t>we</a:t>
-            </a:r>
-            <a:r>
-              <a:rPr lang="es-ES" sz="2400" dirty="0">
-                <a:latin typeface="Helvetica"/>
-                <a:cs typeface="Helvetica"/>
-              </a:rPr>
-              <a:t> </a:t>
-            </a:r>
-            <a:r>
-              <a:rPr lang="es-ES" sz="2400" dirty="0" err="1">
-                <a:latin typeface="Helvetica"/>
-                <a:cs typeface="Helvetica"/>
-              </a:rPr>
-              <a:t>an</a:t>
-            </a:r>
-            <a:r>
-              <a:rPr lang="es-ES" sz="2400" dirty="0">
-                <a:latin typeface="Helvetica"/>
-                <a:cs typeface="Helvetica"/>
-              </a:rPr>
-              <a:t> </a:t>
-            </a:r>
-            <a:r>
-              <a:rPr lang="es-ES" sz="2400" dirty="0" err="1">
-                <a:latin typeface="Helvetica"/>
-                <a:cs typeface="Helvetica"/>
-              </a:rPr>
-              <a:t>isohydric</a:t>
-            </a:r>
-            <a:r>
-              <a:rPr lang="es-ES" sz="2400" dirty="0">
-                <a:latin typeface="Helvetica"/>
-                <a:cs typeface="Helvetica"/>
-              </a:rPr>
-              <a:t> </a:t>
-            </a:r>
-            <a:r>
-              <a:rPr lang="es-ES" sz="2400" dirty="0" err="1">
-                <a:latin typeface="Helvetica"/>
-                <a:cs typeface="Helvetica"/>
-              </a:rPr>
-              <a:t>behaviour</a:t>
-            </a:r>
-            <a:r>
-              <a:rPr lang="es-ES" sz="2400" dirty="0">
-                <a:latin typeface="Helvetica"/>
-                <a:cs typeface="Helvetica"/>
-              </a:rPr>
-              <a:t> </a:t>
-            </a:r>
-            <a:r>
-              <a:rPr lang="es-ES" sz="2400" dirty="0" err="1">
-                <a:latin typeface="Helvetica"/>
-                <a:cs typeface="Helvetica"/>
-              </a:rPr>
-              <a:t>leading</a:t>
-            </a:r>
-            <a:r>
-              <a:rPr lang="es-ES" sz="2400" dirty="0">
-                <a:latin typeface="Helvetica"/>
-                <a:cs typeface="Helvetica"/>
-              </a:rPr>
-              <a:t> </a:t>
-            </a:r>
-            <a:r>
-              <a:rPr lang="es-ES" sz="2400" dirty="0" err="1">
-                <a:latin typeface="Helvetica"/>
-                <a:cs typeface="Helvetica"/>
-              </a:rPr>
-              <a:t>to</a:t>
-            </a:r>
-            <a:r>
-              <a:rPr lang="es-ES" sz="2400" dirty="0">
-                <a:latin typeface="Helvetica"/>
-                <a:cs typeface="Helvetica"/>
-              </a:rPr>
-              <a:t> </a:t>
-            </a:r>
-            <a:r>
-              <a:rPr lang="es-ES" sz="2400" dirty="0" err="1">
-                <a:latin typeface="Helvetica"/>
-                <a:cs typeface="Helvetica"/>
-              </a:rPr>
-              <a:t>stomatal</a:t>
-            </a:r>
-            <a:r>
-              <a:rPr lang="es-ES" sz="2400" dirty="0">
-                <a:latin typeface="Helvetica"/>
-                <a:cs typeface="Helvetica"/>
-              </a:rPr>
-              <a:t> </a:t>
-            </a:r>
-            <a:r>
-              <a:rPr lang="es-ES" sz="2400" dirty="0" err="1">
-                <a:latin typeface="Helvetica"/>
-                <a:cs typeface="Helvetica"/>
-              </a:rPr>
-              <a:t>closure</a:t>
-            </a:r>
-            <a:r>
-              <a:rPr lang="es-ES" sz="2400" dirty="0">
-                <a:latin typeface="Helvetica"/>
-                <a:cs typeface="Helvetica"/>
-              </a:rPr>
-              <a:t> </a:t>
-            </a:r>
-            <a:r>
-              <a:rPr lang="es-ES" sz="2400" dirty="0">
-                <a:latin typeface="Helvetica"/>
-                <a:cs typeface="Helvetica"/>
-                <a:sym typeface="Wingdings" panose="05000000000000000000" pitchFamily="2" charset="2"/>
-              </a:rPr>
-              <a:t> </a:t>
-            </a:r>
-            <a:r>
-              <a:rPr lang="es-ES" sz="2400" b="1" dirty="0">
-                <a:latin typeface="Helvetica"/>
-                <a:cs typeface="Helvetica"/>
-                <a:sym typeface="Wingdings" panose="05000000000000000000" pitchFamily="2" charset="2"/>
-              </a:rPr>
-              <a:t>↑ </a:t>
-            </a:r>
-            <a:r>
-              <a:rPr lang="el-GR" sz="2400" b="1" dirty="0">
-                <a:latin typeface="Helvetica"/>
-                <a:cs typeface="Helvetica"/>
-                <a:sym typeface="Wingdings" panose="05000000000000000000" pitchFamily="2" charset="2"/>
-              </a:rPr>
-              <a:t>δ</a:t>
-            </a:r>
-            <a:r>
-              <a:rPr lang="es-ES" sz="2400" b="1" baseline="30000" dirty="0">
-                <a:latin typeface="Helvetica"/>
-                <a:cs typeface="Helvetica"/>
-                <a:sym typeface="Wingdings" panose="05000000000000000000" pitchFamily="2" charset="2"/>
-              </a:rPr>
-              <a:t>13</a:t>
-            </a:r>
-            <a:r>
-              <a:rPr lang="es-ES" sz="2400" b="1" dirty="0">
-                <a:latin typeface="Helvetica"/>
-                <a:cs typeface="Helvetica"/>
-                <a:sym typeface="Wingdings" panose="05000000000000000000" pitchFamily="2" charset="2"/>
-              </a:rPr>
-              <a:t>C and </a:t>
-            </a:r>
-            <a:r>
-              <a:rPr lang="el-GR" sz="2400" b="1" dirty="0">
-                <a:latin typeface="Helvetica"/>
-                <a:cs typeface="Helvetica"/>
-                <a:sym typeface="Wingdings" panose="05000000000000000000" pitchFamily="2" charset="2"/>
-              </a:rPr>
-              <a:t>δ</a:t>
-            </a:r>
-            <a:r>
-              <a:rPr lang="es-ES" sz="2400" b="1" baseline="30000" dirty="0">
-                <a:latin typeface="Helvetica"/>
-                <a:cs typeface="Helvetica"/>
-                <a:sym typeface="Wingdings" panose="05000000000000000000" pitchFamily="2" charset="2"/>
-              </a:rPr>
-              <a:t>18</a:t>
-            </a:r>
-            <a:r>
-              <a:rPr lang="es-ES" sz="2400" b="1" dirty="0">
-                <a:latin typeface="Helvetica"/>
-                <a:cs typeface="Helvetica"/>
-                <a:sym typeface="Wingdings" panose="05000000000000000000" pitchFamily="2" charset="2"/>
-              </a:rPr>
-              <a:t>O in </a:t>
-            </a:r>
-            <a:r>
-              <a:rPr lang="es-ES" sz="2400" b="1" dirty="0" err="1">
-                <a:latin typeface="Helvetica"/>
-                <a:cs typeface="Helvetica"/>
-                <a:sym typeface="Wingdings" panose="05000000000000000000" pitchFamily="2" charset="2"/>
-              </a:rPr>
-              <a:t>leaves</a:t>
-            </a:r>
-            <a:r>
-              <a:rPr lang="es-ES" sz="2400" b="1" dirty="0">
-                <a:latin typeface="Helvetica"/>
-                <a:cs typeface="Helvetica"/>
-                <a:sym typeface="Wingdings" panose="05000000000000000000" pitchFamily="2" charset="2"/>
-              </a:rPr>
-              <a:t> and </a:t>
-            </a:r>
-            <a:r>
-              <a:rPr lang="es-ES" sz="2400" b="1" dirty="0" err="1">
-                <a:latin typeface="Helvetica"/>
-                <a:cs typeface="Helvetica"/>
-                <a:sym typeface="Wingdings" panose="05000000000000000000" pitchFamily="2" charset="2"/>
-              </a:rPr>
-              <a:t>wood</a:t>
-            </a:r>
-            <a:r>
-              <a:rPr lang="es-ES" sz="2400" b="1" dirty="0">
-                <a:latin typeface="Helvetica"/>
-                <a:cs typeface="Helvetica"/>
-                <a:sym typeface="Wingdings" panose="05000000000000000000" pitchFamily="2" charset="2"/>
-              </a:rPr>
-              <a:t> </a:t>
-            </a:r>
-            <a:r>
-              <a:rPr lang="es-ES" sz="2400" b="1" dirty="0" err="1">
-                <a:latin typeface="Helvetica"/>
-                <a:cs typeface="Helvetica"/>
-                <a:sym typeface="Wingdings" panose="05000000000000000000" pitchFamily="2" charset="2"/>
-              </a:rPr>
-              <a:t>tissue</a:t>
-            </a:r>
-            <a:endParaRPr lang="es-ES" sz="2400" b="1" dirty="0">
-              <a:latin typeface="Helvetica"/>
-              <a:cs typeface="Helvetica"/>
-              <a:sym typeface="Wingdings" panose="05000000000000000000" pitchFamily="2" charset="2"/>
-            </a:endParaRPr>
-          </a:p>
-          <a:p>
-            <a:pPr>
-              <a:buClr>
-                <a:srgbClr val="218317"/>
-              </a:buClr>
-            </a:pPr>
-            <a:r>
-              <a:rPr lang="es-ES" sz="2400" b="1" dirty="0" err="1">
-                <a:latin typeface="Helvetica"/>
-                <a:cs typeface="Helvetica"/>
-                <a:sym typeface="Wingdings" panose="05000000000000000000" pitchFamily="2" charset="2"/>
-              </a:rPr>
-              <a:t>Nutrients</a:t>
-            </a:r>
-            <a:r>
-              <a:rPr lang="es-ES" sz="2400" b="1" dirty="0">
-                <a:latin typeface="Helvetica"/>
-                <a:cs typeface="Helvetica"/>
-                <a:sym typeface="Wingdings" panose="05000000000000000000" pitchFamily="2" charset="2"/>
-              </a:rPr>
-              <a:t>: </a:t>
-            </a:r>
-            <a:r>
-              <a:rPr lang="es-ES" sz="2400" dirty="0" err="1">
-                <a:latin typeface="Helvetica"/>
-                <a:cs typeface="Helvetica"/>
-                <a:sym typeface="Wingdings" panose="05000000000000000000" pitchFamily="2" charset="2"/>
-              </a:rPr>
-              <a:t>we</a:t>
-            </a:r>
-            <a:r>
-              <a:rPr lang="es-ES" sz="2400" dirty="0">
-                <a:latin typeface="Helvetica"/>
-                <a:cs typeface="Helvetica"/>
-                <a:sym typeface="Wingdings" panose="05000000000000000000" pitchFamily="2" charset="2"/>
-              </a:rPr>
-              <a:t> </a:t>
-            </a:r>
-            <a:r>
-              <a:rPr lang="es-ES" sz="2400" dirty="0" err="1">
-                <a:latin typeface="Helvetica"/>
-                <a:cs typeface="Helvetica"/>
-                <a:sym typeface="Wingdings" panose="05000000000000000000" pitchFamily="2" charset="2"/>
-              </a:rPr>
-              <a:t>expected</a:t>
-            </a:r>
-            <a:r>
-              <a:rPr lang="es-ES" sz="2400" dirty="0">
-                <a:latin typeface="Helvetica"/>
-                <a:cs typeface="Helvetica"/>
-                <a:sym typeface="Wingdings" panose="05000000000000000000" pitchFamily="2" charset="2"/>
-              </a:rPr>
-              <a:t> </a:t>
-            </a:r>
-            <a:r>
-              <a:rPr lang="es-ES" sz="2400" dirty="0" err="1">
-                <a:latin typeface="Helvetica"/>
-                <a:cs typeface="Helvetica"/>
-                <a:sym typeface="Wingdings" panose="05000000000000000000" pitchFamily="2" charset="2"/>
-              </a:rPr>
-              <a:t>limited</a:t>
-            </a:r>
-            <a:r>
-              <a:rPr lang="es-ES" sz="2400" dirty="0">
-                <a:latin typeface="Helvetica"/>
-                <a:cs typeface="Helvetica"/>
-                <a:sym typeface="Wingdings" panose="05000000000000000000" pitchFamily="2" charset="2"/>
-              </a:rPr>
-              <a:t> </a:t>
-            </a:r>
-            <a:r>
-              <a:rPr lang="es-ES" sz="2400" dirty="0" err="1">
-                <a:latin typeface="Helvetica"/>
-                <a:cs typeface="Helvetica"/>
-                <a:sym typeface="Wingdings" panose="05000000000000000000" pitchFamily="2" charset="2"/>
-              </a:rPr>
-              <a:t>nutrient</a:t>
-            </a:r>
-            <a:r>
-              <a:rPr lang="es-ES" sz="2400" dirty="0">
-                <a:latin typeface="Helvetica"/>
-                <a:cs typeface="Helvetica"/>
-                <a:sym typeface="Wingdings" panose="05000000000000000000" pitchFamily="2" charset="2"/>
-              </a:rPr>
-              <a:t> </a:t>
-            </a:r>
-            <a:r>
-              <a:rPr lang="es-ES" sz="2400" dirty="0" err="1">
-                <a:latin typeface="Helvetica"/>
-                <a:cs typeface="Helvetica"/>
-                <a:sym typeface="Wingdings" panose="05000000000000000000" pitchFamily="2" charset="2"/>
-              </a:rPr>
-              <a:t>uptake</a:t>
-            </a:r>
-            <a:r>
-              <a:rPr lang="es-ES" sz="2400" dirty="0">
-                <a:latin typeface="Helvetica"/>
-                <a:cs typeface="Helvetica"/>
-                <a:sym typeface="Wingdings" panose="05000000000000000000" pitchFamily="2" charset="2"/>
-              </a:rPr>
-              <a:t> </a:t>
-            </a:r>
-            <a:r>
-              <a:rPr lang="es-ES" sz="2400" dirty="0" err="1">
-                <a:latin typeface="Helvetica"/>
-                <a:cs typeface="Helvetica"/>
-                <a:sym typeface="Wingdings" panose="05000000000000000000" pitchFamily="2" charset="2"/>
-              </a:rPr>
-              <a:t>due</a:t>
-            </a:r>
-            <a:r>
-              <a:rPr lang="es-ES" sz="2400" dirty="0">
-                <a:latin typeface="Helvetica"/>
-                <a:cs typeface="Helvetica"/>
-                <a:sym typeface="Wingdings" panose="05000000000000000000" pitchFamily="2" charset="2"/>
-              </a:rPr>
-              <a:t> </a:t>
-            </a:r>
-            <a:r>
-              <a:rPr lang="es-ES" sz="2400" dirty="0" err="1">
-                <a:latin typeface="Helvetica"/>
-                <a:cs typeface="Helvetica"/>
-                <a:sym typeface="Wingdings" panose="05000000000000000000" pitchFamily="2" charset="2"/>
-              </a:rPr>
-              <a:t>to</a:t>
-            </a:r>
-            <a:r>
-              <a:rPr lang="es-ES" sz="2400" dirty="0">
-                <a:latin typeface="Helvetica"/>
-                <a:cs typeface="Helvetica"/>
-                <a:sym typeface="Wingdings" panose="05000000000000000000" pitchFamily="2" charset="2"/>
-              </a:rPr>
-              <a:t> </a:t>
-            </a:r>
-            <a:r>
-              <a:rPr lang="es-ES" sz="2400" dirty="0" err="1">
-                <a:latin typeface="Helvetica"/>
-                <a:cs typeface="Helvetica"/>
-                <a:sym typeface="Wingdings" panose="05000000000000000000" pitchFamily="2" charset="2"/>
-              </a:rPr>
-              <a:t>reduced</a:t>
-            </a:r>
-            <a:r>
-              <a:rPr lang="es-ES" sz="2400" dirty="0">
-                <a:latin typeface="Helvetica"/>
-                <a:cs typeface="Helvetica"/>
-                <a:sym typeface="Wingdings" panose="05000000000000000000" pitchFamily="2" charset="2"/>
-              </a:rPr>
-              <a:t> </a:t>
-            </a:r>
-            <a:r>
-              <a:rPr lang="es-ES" sz="2400" dirty="0" err="1">
-                <a:latin typeface="Helvetica"/>
-                <a:cs typeface="Helvetica"/>
-                <a:sym typeface="Wingdings" panose="05000000000000000000" pitchFamily="2" charset="2"/>
-              </a:rPr>
-              <a:t>water</a:t>
-            </a:r>
-            <a:r>
-              <a:rPr lang="es-ES" sz="2400" dirty="0">
-                <a:latin typeface="Helvetica"/>
-                <a:cs typeface="Helvetica"/>
-                <a:sym typeface="Wingdings" panose="05000000000000000000" pitchFamily="2" charset="2"/>
-              </a:rPr>
-              <a:t> </a:t>
-            </a:r>
-            <a:r>
-              <a:rPr lang="es-ES" sz="2400" dirty="0" err="1">
-                <a:latin typeface="Helvetica"/>
-                <a:cs typeface="Helvetica"/>
-                <a:sym typeface="Wingdings" panose="05000000000000000000" pitchFamily="2" charset="2"/>
-              </a:rPr>
-              <a:t>availability</a:t>
-            </a:r>
-            <a:r>
-              <a:rPr lang="es-ES" sz="2400" dirty="0">
-                <a:latin typeface="Helvetica"/>
-                <a:cs typeface="Helvetica"/>
-                <a:sym typeface="Wingdings" panose="05000000000000000000" pitchFamily="2" charset="2"/>
-              </a:rPr>
-              <a:t>  </a:t>
-            </a:r>
-            <a:r>
-              <a:rPr lang="es-ES" sz="2400" b="1" dirty="0">
-                <a:latin typeface="Helvetica"/>
-                <a:cs typeface="Helvetica"/>
-                <a:sym typeface="Wingdings" panose="05000000000000000000" pitchFamily="2" charset="2"/>
-              </a:rPr>
-              <a:t>↓N </a:t>
-            </a:r>
-            <a:r>
-              <a:rPr lang="es-ES" sz="2400" b="1" dirty="0" err="1">
-                <a:latin typeface="Helvetica"/>
-                <a:cs typeface="Helvetica"/>
-                <a:sym typeface="Wingdings" panose="05000000000000000000" pitchFamily="2" charset="2"/>
-              </a:rPr>
-              <a:t>concentration</a:t>
-            </a:r>
-            <a:r>
-              <a:rPr lang="es-ES" sz="2400" b="1" dirty="0">
-                <a:latin typeface="Helvetica"/>
-                <a:cs typeface="Helvetica"/>
-                <a:sym typeface="Wingdings" panose="05000000000000000000" pitchFamily="2" charset="2"/>
-              </a:rPr>
-              <a:t> in </a:t>
-            </a:r>
-            <a:r>
-              <a:rPr lang="es-ES" sz="2400" b="1" dirty="0" err="1">
-                <a:solidFill>
-                  <a:srgbClr val="C00000"/>
-                </a:solidFill>
-                <a:latin typeface="Helvetica"/>
-                <a:cs typeface="Helvetica"/>
-                <a:sym typeface="Wingdings" panose="05000000000000000000" pitchFamily="2" charset="2"/>
-              </a:rPr>
-              <a:t>declining</a:t>
-            </a:r>
-            <a:r>
-              <a:rPr lang="es-ES" sz="2400" b="1" dirty="0">
-                <a:solidFill>
-                  <a:srgbClr val="C00000"/>
-                </a:solidFill>
-                <a:latin typeface="Helvetica"/>
-                <a:cs typeface="Helvetica"/>
-                <a:sym typeface="Wingdings" panose="05000000000000000000" pitchFamily="2" charset="2"/>
-              </a:rPr>
-              <a:t> sites</a:t>
-            </a:r>
-            <a:endParaRPr lang="es-ES" sz="2400" b="1" dirty="0">
-              <a:latin typeface="Helvetica"/>
-              <a:cs typeface="Helvetica"/>
-            </a:endParaRPr>
-          </a:p>
-          <a:p>
-            <a:pPr>
-              <a:buClr>
-                <a:srgbClr val="218317"/>
-              </a:buClr>
-            </a:pPr>
-            <a:endParaRPr lang="es-ES" sz="2400" b="1" dirty="0">
-              <a:solidFill>
-                <a:srgbClr val="C00000"/>
-              </a:solidFill>
-              <a:latin typeface="Helvetica"/>
-              <a:cs typeface="Helvetica"/>
-            </a:endParaRPr>
-          </a:p>
-        </p:txBody>
-      </p:sp>
-    </p:spTree>
-    <p:extLst>
-      <p:ext uri="{BB962C8B-B14F-4D97-AF65-F5344CB8AC3E}">
-        <p14:creationId xmlns:p14="http://schemas.microsoft.com/office/powerpoint/2010/main" val="1288941479"/>
-      </p:ext>
-    </p:extLst>
-  </p:cSld>
-  <p:clrMapOvr>
-    <a:masterClrMapping/>
-  </p:clrMapOvr>
-  <p:extLst>
-    <p:ext uri="{6950BFC3-D8DA-4A85-94F7-54DA5524770B}">
-      <p188:commentRel xmlns:p188="http://schemas.microsoft.com/office/powerpoint/2018/8/main" r:id="rId2"/>
     </p:ext>
   </p:extLst>
 </p:sld>

--- a/06_ppts/exploratory_analysis_figures_v3-CFB-CG.pptx
+++ b/06_ppts/exploratory_analysis_figures_v3-CFB-CG.pptx
@@ -25,8 +25,8 @@
     <p:sldId id="411" r:id="rId16"/>
     <p:sldId id="412" r:id="rId17"/>
     <p:sldId id="413" r:id="rId18"/>
-    <p:sldId id="414" r:id="rId19"/>
-    <p:sldId id="415" r:id="rId20"/>
+    <p:sldId id="417" r:id="rId19"/>
+    <p:sldId id="418" r:id="rId20"/>
   </p:sldIdLst>
   <p:sldSz cx="12192000" cy="6858000"/>
   <p:notesSz cx="6858000" cy="9144000"/>
@@ -140,53 +140,6 @@
 </p188:authorLst>
 </file>
 
-<file path=ppt/comments/modernComment_14F_36DED8AD.xml><?xml version="1.0" encoding="utf-8"?>
-<p188:cmLst xmlns:a="http://schemas.openxmlformats.org/drawingml/2006/main" xmlns:r="http://schemas.openxmlformats.org/officeDocument/2006/relationships" xmlns:p188="http://schemas.microsoft.com/office/powerpoint/2018/8/main">
-  <p188:cm id="{E72AF825-BE95-3241-AEA5-C9EEB621F435}" authorId="{9B18557D-7187-C966-2E91-CE8B6CF86FC3}" created="2025-05-02T12:23:10.993">
-    <pc:sldMkLst xmlns:pc="http://schemas.microsoft.com/office/powerpoint/2013/main/command">
-      <pc:docMk/>
-      <pc:sldMk cId="920574125" sldId="335"/>
-    </pc:sldMkLst>
-    <p188:replyLst>
-      <p188:reply id="{E26608CF-4E9D-4396-9053-190CB4A16447}" authorId="{DB4BCF0B-13A8-F3D9-5213-32840108FAB3}" created="2025-05-27T13:51:56.997">
-        <p188:txBody>
-          <a:bodyPr/>
-          <a:lstStyle/>
-          <a:p>
-            <a:r>
-              <a:rPr lang="es-ES"/>
-              <a:t>Paloma agrees! Maybe we could remove the sites list at the right, and include in a smaller map the distribution area of Pinus sylvestris, Pinus pinea and Abies alba?</a:t>
-            </a:r>
-          </a:p>
-        </p188:txBody>
-      </p188:reply>
-      <p188:reply id="{B860C380-96D0-6C42-937C-9DC0777E96D0}" authorId="{9B18557D-7187-C966-2E91-CE8B6CF86FC3}" created="2025-05-29T06:02:12.303">
-        <p188:txBody>
-          <a:bodyPr/>
-          <a:lstStyle/>
-          <a:p>
-            <a:r>
-              <a:rPr lang="en-US"/>
-              <a:t>I fully agree. Great idea with the distribution. Looking forward to the final figure. this will be beautiful</a:t>
-            </a:r>
-          </a:p>
-        </p188:txBody>
-      </p188:reply>
-    </p188:replyLst>
-    <p188:txBody>
-      <a:bodyPr/>
-      <a:lstStyle/>
-      <a:p>
-        <a:r>
-          <a:rPr lang="en-US"/>
-          <a:t>your first figure could be a map like this one I believe</a:t>
-        </a:r>
-      </a:p>
-    </p188:txBody>
-  </p188:cm>
-</p188:cmLst>
-</file>
-
 <file path=ppt/comments/modernComment_195_4CD3AFA7.xml><?xml version="1.0" encoding="utf-8"?>
 <p188:cmLst xmlns:a="http://schemas.openxmlformats.org/drawingml/2006/main" xmlns:r="http://schemas.openxmlformats.org/officeDocument/2006/relationships" xmlns:p188="http://schemas.microsoft.com/office/powerpoint/2018/8/main">
   <p188:cm id="{A04E7475-72AC-EF41-8DCE-78170E424C1C}" authorId="{9B18557D-7187-C966-2E91-CE8B6CF86FC3}" status="resolved" created="2025-05-29T06:12:45.195" complete="100000">
@@ -220,48 +173,6 @@
         <a:r>
           <a:rPr lang="en-US"/>
           <a:t>why not merge Obj 1 and Obj2 by saying that you investigate the intrinsik risk factors (size, competition...) and the observable responses (mentionned here)?</a:t>
-        </a:r>
-      </a:p>
-    </p188:txBody>
-  </p188:cm>
-  <p188:cm id="{9E6DA31E-3171-E849-9D13-216E00158302}" authorId="{9B18557D-7187-C966-2E91-CE8B6CF86FC3}" status="resolved" created="2025-05-29T06:14:26.530" complete="100000">
-    <ac:txMkLst xmlns:ac="http://schemas.microsoft.com/office/drawing/2013/main/command">
-      <pc:docMk xmlns:pc="http://schemas.microsoft.com/office/powerpoint/2013/main/command"/>
-      <pc:sldMk xmlns:pc="http://schemas.microsoft.com/office/powerpoint/2013/main/command" cId="1288941479" sldId="405"/>
-      <ac:spMk id="8" creationId="{5D2A598E-3271-64EB-5DA8-A70DDDCC8E1C}"/>
-      <ac:txMk cp="0" len="10">
-        <ac:context len="434" hash="1566757412"/>
-      </ac:txMk>
-    </ac:txMkLst>
-    <p188:pos x="2182893" y="481381"/>
-    <p188:txBody>
-      <a:bodyPr/>
-      <a:lstStyle/>
-      <a:p>
-        <a:r>
-          <a:rPr lang="en-US"/>
-          <a:t>but you dont measure senescence per se so you can't say that it is measured, same for transpiration. You need in the intro to say that these are indicators of transpiration and in the objectiive description you formulate it the otherway around : d13C (i.e., indicator of WUE)</a:t>
-        </a:r>
-      </a:p>
-    </p188:txBody>
-  </p188:cm>
-  <p188:cm id="{955AC656-0168-DB42-B262-221F64286C42}" authorId="{9B18557D-7187-C966-2E91-CE8B6CF86FC3}" status="resolved" created="2025-05-29T06:15:10.224" complete="100000">
-    <ac:txMkLst xmlns:ac="http://schemas.microsoft.com/office/drawing/2013/main/command">
-      <pc:docMk xmlns:pc="http://schemas.microsoft.com/office/powerpoint/2013/main/command"/>
-      <pc:sldMk xmlns:pc="http://schemas.microsoft.com/office/powerpoint/2013/main/command" cId="1288941479" sldId="405"/>
-      <ac:spMk id="8" creationId="{5D2A598E-3271-64EB-5DA8-A70DDDCC8E1C}"/>
-      <ac:txMk cp="244" len="7">
-        <ac:context len="434" hash="1566757412"/>
-      </ac:txMk>
-    </ac:txMkLst>
-    <p188:pos x="3731277" y="1822501"/>
-    <p188:txBody>
-      <a:bodyPr/>
-      <a:lstStyle/>
-      <a:p>
-        <a:r>
-          <a:rPr lang="en-US"/>
-          <a:t>d13C is rather an indicator of WUE than transpiration</a:t>
         </a:r>
       </a:p>
     </p188:txBody>
@@ -385,85 +296,6 @@
         <a:r>
           <a:rPr lang="en-US"/>
           <a:t>I though you said you can only do this in Pinus synvesltris? Then this hypotheses should rather be formulated like H1</a:t>
-        </a:r>
-      </a:p>
-    </p188:txBody>
-  </p188:cm>
-</p188:cmLst>
-</file>
-
-<file path=ppt/comments/modernComment_19D_E6C7FCE7.xml><?xml version="1.0" encoding="utf-8"?>
-<p188:cmLst xmlns:a="http://schemas.openxmlformats.org/drawingml/2006/main" xmlns:r="http://schemas.openxmlformats.org/officeDocument/2006/relationships" xmlns:p188="http://schemas.microsoft.com/office/powerpoint/2018/8/main">
-  <p188:cm id="{5FE692DE-1540-1749-8480-24406C1CE541}" authorId="{9B18557D-7187-C966-2E91-CE8B6CF86FC3}" created="2025-05-29T06:16:45.284">
-    <ac:deMkLst xmlns:ac="http://schemas.microsoft.com/office/drawing/2013/main/command">
-      <pc:docMk xmlns:pc="http://schemas.microsoft.com/office/powerpoint/2013/main/command"/>
-      <pc:sldMk xmlns:pc="http://schemas.microsoft.com/office/powerpoint/2013/main/command" cId="3871866087" sldId="413"/>
-      <ac:picMk id="6" creationId="{4A839B70-2AA1-A2D9-351F-FDAB6E029D6B}"/>
-    </ac:deMkLst>
-    <p188:txBody>
-      <a:bodyPr/>
-      <a:lstStyle/>
-      <a:p>
-        <a:r>
-          <a:rPr lang="en-US"/>
-          <a:t>cool figures! To show the overall effect you could consider having an insert in each figure that shows the mean of all declining vs. healthy trees across all species</a:t>
-        </a:r>
-      </a:p>
-    </p188:txBody>
-  </p188:cm>
-</p188:cmLst>
-</file>
-
-<file path=ppt/comments/modernComment_19E_E57EE501.xml><?xml version="1.0" encoding="utf-8"?>
-<p188:cmLst xmlns:a="http://schemas.openxmlformats.org/drawingml/2006/main" xmlns:r="http://schemas.openxmlformats.org/officeDocument/2006/relationships" xmlns:p188="http://schemas.microsoft.com/office/powerpoint/2018/8/main">
-  <p188:cm id="{B247A5EF-AB37-7F43-8EAF-889A767EE01B}" authorId="{9B18557D-7187-C966-2E91-CE8B6CF86FC3}" created="2025-05-29T06:19:32.086">
-    <ac:deMkLst xmlns:ac="http://schemas.microsoft.com/office/drawing/2013/main/command">
-      <pc:docMk xmlns:pc="http://schemas.microsoft.com/office/powerpoint/2013/main/command"/>
-      <pc:sldMk xmlns:pc="http://schemas.microsoft.com/office/powerpoint/2013/main/command" cId="3850298625" sldId="414"/>
-      <ac:picMk id="6" creationId="{A9F74993-0A4C-E813-363F-E0876843D936}"/>
-    </ac:deMkLst>
-    <p188:replyLst>
-      <p188:reply id="{BE2095AE-1EFF-D04B-B0E1-F3A138E8E7A3}" authorId="{9B18557D-7187-C966-2E91-CE8B6CF86FC3}" created="2025-05-29T06:20:48.533">
-        <p188:txBody>
-          <a:bodyPr/>
-          <a:lstStyle/>
-          <a:p>
-            <a:r>
-              <a:rPr lang="en-US"/>
-              <a:t>Also I would merge in 1 figure all the response vs. all the intrsinsik factors as you separated them in the objectives</a:t>
-            </a:r>
-          </a:p>
-        </p188:txBody>
-      </p188:reply>
-    </p188:replyLst>
-    <p188:txBody>
-      <a:bodyPr/>
-      <a:lstStyle/>
-      <a:p>
-        <a:r>
-          <a:rPr lang="en-US"/>
-          <a:t>here I would also suggest the same insert as before</a:t>
-        </a:r>
-      </a:p>
-    </p188:txBody>
-  </p188:cm>
-</p188:cmLst>
-</file>
-
-<file path=ppt/comments/modernComment_19F_7A1565F.xml><?xml version="1.0" encoding="utf-8"?>
-<p188:cmLst xmlns:a="http://schemas.openxmlformats.org/drawingml/2006/main" xmlns:r="http://schemas.openxmlformats.org/officeDocument/2006/relationships" xmlns:p188="http://schemas.microsoft.com/office/powerpoint/2018/8/main">
-  <p188:cm id="{FB4D4660-1684-B947-A52A-CBB020A8ADC9}" authorId="{9B18557D-7187-C966-2E91-CE8B6CF86FC3}" created="2025-05-29T06:21:38.773">
-    <pc:sldMkLst xmlns:pc="http://schemas.microsoft.com/office/powerpoint/2013/main/command">
-      <pc:docMk/>
-      <pc:sldMk cId="128013919" sldId="415"/>
-    </pc:sldMkLst>
-    <p188:txBody>
-      <a:bodyPr/>
-      <a:lstStyle/>
-      <a:p>
-        <a:r>
-          <a:rPr lang="en-US"/>
-          <a:t>I don't remember reading about resistance in the objectives and hypotheses. Make sure to add them as well</a:t>
         </a:r>
       </a:p>
     </p188:txBody>
@@ -553,7 +385,7 @@
           <a:p>
             <a:fld id="{B02983DD-E218-4F5B-97E6-73372FCDFB94}" type="datetimeFigureOut">
               <a:rPr lang="es-ES" smtClean="0"/>
-              <a:t>02/06/2025</a:t>
+              <a:t>10/06/2025</a:t>
             </a:fld>
             <a:endParaRPr lang="es-ES"/>
           </a:p>
@@ -1072,6 +904,222 @@
 </p:notes>
 </file>
 
+<file path=ppt/notesSlides/notesSlide4.xml><?xml version="1.0" encoding="utf-8"?>
+<p:notes xmlns:a="http://schemas.openxmlformats.org/drawingml/2006/main" xmlns:r="http://schemas.openxmlformats.org/officeDocument/2006/relationships" xmlns:p="http://schemas.openxmlformats.org/presentationml/2006/main">
+  <p:cSld>
+    <p:spTree>
+      <p:nvGrpSpPr>
+        <p:cNvPr id="1" name="">
+          <a:extLst>
+            <a:ext uri="{FF2B5EF4-FFF2-40B4-BE49-F238E27FC236}">
+              <a16:creationId xmlns:a16="http://schemas.microsoft.com/office/drawing/2014/main" id="{BA12C936-5A85-D26D-A1A2-3995F25E443D}"/>
+            </a:ext>
+          </a:extLst>
+        </p:cNvPr>
+        <p:cNvGrpSpPr/>
+        <p:nvPr/>
+      </p:nvGrpSpPr>
+      <p:grpSpPr>
+        <a:xfrm>
+          <a:off x="0" y="0"/>
+          <a:ext cx="0" cy="0"/>
+          <a:chOff x="0" y="0"/>
+          <a:chExt cx="0" cy="0"/>
+        </a:xfrm>
+      </p:grpSpPr>
+      <p:sp>
+        <p:nvSpPr>
+          <p:cNvPr id="2" name="Marcador de imagen de diapositiva 1">
+            <a:extLst>
+              <a:ext uri="{FF2B5EF4-FFF2-40B4-BE49-F238E27FC236}">
+                <a16:creationId xmlns:a16="http://schemas.microsoft.com/office/drawing/2014/main" id="{5DF41241-C527-0269-5349-925DD9211FAD}"/>
+              </a:ext>
+            </a:extLst>
+          </p:cNvPr>
+          <p:cNvSpPr>
+            <a:spLocks noGrp="1" noRot="1" noChangeAspect="1"/>
+          </p:cNvSpPr>
+          <p:nvPr>
+            <p:ph type="sldImg"/>
+          </p:nvPr>
+        </p:nvSpPr>
+        <p:spPr/>
+      </p:sp>
+      <p:sp>
+        <p:nvSpPr>
+          <p:cNvPr id="3" name="Marcador de notas 2">
+            <a:extLst>
+              <a:ext uri="{FF2B5EF4-FFF2-40B4-BE49-F238E27FC236}">
+                <a16:creationId xmlns:a16="http://schemas.microsoft.com/office/drawing/2014/main" id="{9F304C16-9142-9471-FF44-7379A61918F9}"/>
+              </a:ext>
+            </a:extLst>
+          </p:cNvPr>
+          <p:cNvSpPr>
+            <a:spLocks noGrp="1"/>
+          </p:cNvSpPr>
+          <p:nvPr>
+            <p:ph type="body" idx="1"/>
+          </p:nvPr>
+        </p:nvSpPr>
+        <p:spPr/>
+        <p:txBody>
+          <a:bodyPr/>
+          <a:lstStyle/>
+          <a:p>
+            <a:endParaRPr lang="es-ES" dirty="0"/>
+          </a:p>
+        </p:txBody>
+      </p:sp>
+      <p:sp>
+        <p:nvSpPr>
+          <p:cNvPr id="4" name="Marcador de número de diapositiva 3">
+            <a:extLst>
+              <a:ext uri="{FF2B5EF4-FFF2-40B4-BE49-F238E27FC236}">
+                <a16:creationId xmlns:a16="http://schemas.microsoft.com/office/drawing/2014/main" id="{49249B6E-84D0-BAF7-0235-37077C7C20A9}"/>
+              </a:ext>
+            </a:extLst>
+          </p:cNvPr>
+          <p:cNvSpPr>
+            <a:spLocks noGrp="1"/>
+          </p:cNvSpPr>
+          <p:nvPr>
+            <p:ph type="sldNum" sz="quarter" idx="5"/>
+          </p:nvPr>
+        </p:nvSpPr>
+        <p:spPr/>
+        <p:txBody>
+          <a:bodyPr/>
+          <a:lstStyle/>
+          <a:p>
+            <a:fld id="{95285FFF-AA8A-422F-901E-D94C39C8B224}" type="slidenum">
+              <a:rPr lang="es-ES" smtClean="0"/>
+              <a:t>18</a:t>
+            </a:fld>
+            <a:endParaRPr lang="es-ES"/>
+          </a:p>
+        </p:txBody>
+      </p:sp>
+    </p:spTree>
+    <p:extLst>
+      <p:ext uri="{BB962C8B-B14F-4D97-AF65-F5344CB8AC3E}">
+        <p14:creationId xmlns:p14="http://schemas.microsoft.com/office/powerpoint/2010/main" val="3854016901"/>
+      </p:ext>
+    </p:extLst>
+  </p:cSld>
+  <p:clrMapOvr>
+    <a:masterClrMapping/>
+  </p:clrMapOvr>
+</p:notes>
+</file>
+
+<file path=ppt/notesSlides/notesSlide5.xml><?xml version="1.0" encoding="utf-8"?>
+<p:notes xmlns:a="http://schemas.openxmlformats.org/drawingml/2006/main" xmlns:r="http://schemas.openxmlformats.org/officeDocument/2006/relationships" xmlns:p="http://schemas.openxmlformats.org/presentationml/2006/main">
+  <p:cSld>
+    <p:spTree>
+      <p:nvGrpSpPr>
+        <p:cNvPr id="1" name="">
+          <a:extLst>
+            <a:ext uri="{FF2B5EF4-FFF2-40B4-BE49-F238E27FC236}">
+              <a16:creationId xmlns:a16="http://schemas.microsoft.com/office/drawing/2014/main" id="{3440A726-8B60-9081-AB22-2ACFF82A3213}"/>
+            </a:ext>
+          </a:extLst>
+        </p:cNvPr>
+        <p:cNvGrpSpPr/>
+        <p:nvPr/>
+      </p:nvGrpSpPr>
+      <p:grpSpPr>
+        <a:xfrm>
+          <a:off x="0" y="0"/>
+          <a:ext cx="0" cy="0"/>
+          <a:chOff x="0" y="0"/>
+          <a:chExt cx="0" cy="0"/>
+        </a:xfrm>
+      </p:grpSpPr>
+      <p:sp>
+        <p:nvSpPr>
+          <p:cNvPr id="2" name="Marcador de imagen de diapositiva 1">
+            <a:extLst>
+              <a:ext uri="{FF2B5EF4-FFF2-40B4-BE49-F238E27FC236}">
+                <a16:creationId xmlns:a16="http://schemas.microsoft.com/office/drawing/2014/main" id="{750546EF-CD9D-6AF5-42AA-6256E4E21272}"/>
+              </a:ext>
+            </a:extLst>
+          </p:cNvPr>
+          <p:cNvSpPr>
+            <a:spLocks noGrp="1" noRot="1" noChangeAspect="1"/>
+          </p:cNvSpPr>
+          <p:nvPr>
+            <p:ph type="sldImg"/>
+          </p:nvPr>
+        </p:nvSpPr>
+        <p:spPr/>
+      </p:sp>
+      <p:sp>
+        <p:nvSpPr>
+          <p:cNvPr id="3" name="Marcador de notas 2">
+            <a:extLst>
+              <a:ext uri="{FF2B5EF4-FFF2-40B4-BE49-F238E27FC236}">
+                <a16:creationId xmlns:a16="http://schemas.microsoft.com/office/drawing/2014/main" id="{678122E8-E439-6B82-DA47-AC465F3A7253}"/>
+              </a:ext>
+            </a:extLst>
+          </p:cNvPr>
+          <p:cNvSpPr>
+            <a:spLocks noGrp="1"/>
+          </p:cNvSpPr>
+          <p:nvPr>
+            <p:ph type="body" idx="1"/>
+          </p:nvPr>
+        </p:nvSpPr>
+        <p:spPr/>
+        <p:txBody>
+          <a:bodyPr/>
+          <a:lstStyle/>
+          <a:p>
+            <a:endParaRPr lang="es-ES" dirty="0"/>
+          </a:p>
+        </p:txBody>
+      </p:sp>
+      <p:sp>
+        <p:nvSpPr>
+          <p:cNvPr id="4" name="Marcador de número de diapositiva 3">
+            <a:extLst>
+              <a:ext uri="{FF2B5EF4-FFF2-40B4-BE49-F238E27FC236}">
+                <a16:creationId xmlns:a16="http://schemas.microsoft.com/office/drawing/2014/main" id="{9915EA7E-2854-2B8E-0B30-689552412DDE}"/>
+              </a:ext>
+            </a:extLst>
+          </p:cNvPr>
+          <p:cNvSpPr>
+            <a:spLocks noGrp="1"/>
+          </p:cNvSpPr>
+          <p:nvPr>
+            <p:ph type="sldNum" sz="quarter" idx="5"/>
+          </p:nvPr>
+        </p:nvSpPr>
+        <p:spPr/>
+        <p:txBody>
+          <a:bodyPr/>
+          <a:lstStyle/>
+          <a:p>
+            <a:fld id="{95285FFF-AA8A-422F-901E-D94C39C8B224}" type="slidenum">
+              <a:rPr lang="es-ES" smtClean="0"/>
+              <a:t>19</a:t>
+            </a:fld>
+            <a:endParaRPr lang="es-ES"/>
+          </a:p>
+        </p:txBody>
+      </p:sp>
+    </p:spTree>
+    <p:extLst>
+      <p:ext uri="{BB962C8B-B14F-4D97-AF65-F5344CB8AC3E}">
+        <p14:creationId xmlns:p14="http://schemas.microsoft.com/office/powerpoint/2010/main" val="2778219967"/>
+      </p:ext>
+    </p:extLst>
+  </p:cSld>
+  <p:clrMapOvr>
+    <a:masterClrMapping/>
+  </p:clrMapOvr>
+</p:notes>
+</file>
+
 <file path=ppt/slideLayouts/slideLayout1.xml><?xml version="1.0" encoding="utf-8"?>
 <p:sldLayout xmlns:a="http://schemas.openxmlformats.org/drawingml/2006/main" xmlns:r="http://schemas.openxmlformats.org/officeDocument/2006/relationships" xmlns:p="http://schemas.openxmlformats.org/presentationml/2006/main" type="title" preserve="1">
   <p:cSld name="Diapositiva de título">
@@ -1219,7 +1267,7 @@
           <a:p>
             <a:fld id="{05302A3C-7F5D-464A-B794-A5CF9734955A}" type="datetimeFigureOut">
               <a:rPr lang="es-ES" smtClean="0"/>
-              <a:t>02/06/2025</a:t>
+              <a:t>10/06/2025</a:t>
             </a:fld>
             <a:endParaRPr lang="es-ES"/>
           </a:p>
@@ -1417,7 +1465,7 @@
           <a:p>
             <a:fld id="{05302A3C-7F5D-464A-B794-A5CF9734955A}" type="datetimeFigureOut">
               <a:rPr lang="es-ES" smtClean="0"/>
-              <a:t>02/06/2025</a:t>
+              <a:t>10/06/2025</a:t>
             </a:fld>
             <a:endParaRPr lang="es-ES"/>
           </a:p>
@@ -1625,7 +1673,7 @@
           <a:p>
             <a:fld id="{05302A3C-7F5D-464A-B794-A5CF9734955A}" type="datetimeFigureOut">
               <a:rPr lang="es-ES" smtClean="0"/>
-              <a:t>02/06/2025</a:t>
+              <a:t>10/06/2025</a:t>
             </a:fld>
             <a:endParaRPr lang="es-ES"/>
           </a:p>
@@ -1823,7 +1871,7 @@
           <a:p>
             <a:fld id="{05302A3C-7F5D-464A-B794-A5CF9734955A}" type="datetimeFigureOut">
               <a:rPr lang="es-ES" smtClean="0"/>
-              <a:t>02/06/2025</a:t>
+              <a:t>10/06/2025</a:t>
             </a:fld>
             <a:endParaRPr lang="es-ES"/>
           </a:p>
@@ -2098,7 +2146,7 @@
           <a:p>
             <a:fld id="{05302A3C-7F5D-464A-B794-A5CF9734955A}" type="datetimeFigureOut">
               <a:rPr lang="es-ES" smtClean="0"/>
-              <a:t>02/06/2025</a:t>
+              <a:t>10/06/2025</a:t>
             </a:fld>
             <a:endParaRPr lang="es-ES"/>
           </a:p>
@@ -2363,7 +2411,7 @@
           <a:p>
             <a:fld id="{05302A3C-7F5D-464A-B794-A5CF9734955A}" type="datetimeFigureOut">
               <a:rPr lang="es-ES" smtClean="0"/>
-              <a:t>02/06/2025</a:t>
+              <a:t>10/06/2025</a:t>
             </a:fld>
             <a:endParaRPr lang="es-ES"/>
           </a:p>
@@ -2775,7 +2823,7 @@
           <a:p>
             <a:fld id="{05302A3C-7F5D-464A-B794-A5CF9734955A}" type="datetimeFigureOut">
               <a:rPr lang="es-ES" smtClean="0"/>
-              <a:t>02/06/2025</a:t>
+              <a:t>10/06/2025</a:t>
             </a:fld>
             <a:endParaRPr lang="es-ES"/>
           </a:p>
@@ -2916,7 +2964,7 @@
           <a:p>
             <a:fld id="{05302A3C-7F5D-464A-B794-A5CF9734955A}" type="datetimeFigureOut">
               <a:rPr lang="es-ES" smtClean="0"/>
-              <a:t>02/06/2025</a:t>
+              <a:t>10/06/2025</a:t>
             </a:fld>
             <a:endParaRPr lang="es-ES"/>
           </a:p>
@@ -3029,7 +3077,7 @@
           <a:p>
             <a:fld id="{05302A3C-7F5D-464A-B794-A5CF9734955A}" type="datetimeFigureOut">
               <a:rPr lang="es-ES" smtClean="0"/>
-              <a:t>02/06/2025</a:t>
+              <a:t>10/06/2025</a:t>
             </a:fld>
             <a:endParaRPr lang="es-ES"/>
           </a:p>
@@ -3340,7 +3388,7 @@
           <a:p>
             <a:fld id="{05302A3C-7F5D-464A-B794-A5CF9734955A}" type="datetimeFigureOut">
               <a:rPr lang="es-ES" smtClean="0"/>
-              <a:t>02/06/2025</a:t>
+              <a:t>10/06/2025</a:t>
             </a:fld>
             <a:endParaRPr lang="es-ES"/>
           </a:p>
@@ -3628,7 +3676,7 @@
           <a:p>
             <a:fld id="{05302A3C-7F5D-464A-B794-A5CF9734955A}" type="datetimeFigureOut">
               <a:rPr lang="es-ES" smtClean="0"/>
-              <a:t>02/06/2025</a:t>
+              <a:t>10/06/2025</a:t>
             </a:fld>
             <a:endParaRPr lang="es-ES"/>
           </a:p>
@@ -3869,7 +3917,7 @@
           <a:p>
             <a:fld id="{05302A3C-7F5D-464A-B794-A5CF9734955A}" type="datetimeFigureOut">
               <a:rPr lang="es-ES" smtClean="0"/>
-              <a:t>02/06/2025</a:t>
+              <a:t>10/06/2025</a:t>
             </a:fld>
             <a:endParaRPr lang="es-ES"/>
           </a:p>
@@ -15968,41 +16016,6 @@
           </a:p>
         </p:txBody>
       </p:sp>
-      <p:pic>
-        <p:nvPicPr>
-          <p:cNvPr id="6" name="Imagen 5">
-            <a:extLst>
-              <a:ext uri="{FF2B5EF4-FFF2-40B4-BE49-F238E27FC236}">
-                <a16:creationId xmlns:a16="http://schemas.microsoft.com/office/drawing/2014/main" id="{4A839B70-2AA1-A2D9-351F-FDAB6E029D6B}"/>
-              </a:ext>
-            </a:extLst>
-          </p:cNvPr>
-          <p:cNvPicPr>
-            <a:picLocks noChangeAspect="1"/>
-          </p:cNvPicPr>
-          <p:nvPr/>
-        </p:nvPicPr>
-        <p:blipFill>
-          <a:blip r:embed="rId4">
-            <a:extLst>
-              <a:ext uri="{28A0092B-C50C-407E-A947-70E740481C1C}">
-                <a14:useLocalDpi xmlns:a14="http://schemas.microsoft.com/office/drawing/2010/main" val="0"/>
-              </a:ext>
-            </a:extLst>
-          </a:blip>
-          <a:srcRect b="75615"/>
-          <a:stretch/>
-        </p:blipFill>
-        <p:spPr>
-          <a:xfrm>
-            <a:off x="1285054" y="1070861"/>
-            <a:ext cx="9621891" cy="2607059"/>
-          </a:xfrm>
-          <a:prstGeom prst="rect">
-            <a:avLst/>
-          </a:prstGeom>
-        </p:spPr>
-      </p:pic>
       <p:sp>
         <p:nvSpPr>
           <p:cNvPr id="7" name="CuadroTexto 10">
@@ -16017,8 +16030,8 @@
         </p:nvSpPr>
         <p:spPr>
           <a:xfrm>
-            <a:off x="1483360" y="3677920"/>
-            <a:ext cx="2956560" cy="2308324"/>
+            <a:off x="1739812" y="3596455"/>
+            <a:ext cx="6111420" cy="1200329"/>
           </a:xfrm>
           <a:prstGeom prst="rect">
             <a:avLst/>
@@ -16152,6 +16165,69 @@
                 <a:latin typeface="Helvetica" panose="020B0604020202020204" pitchFamily="34" charset="0"/>
                 <a:cs typeface="Helvetica" panose="020B0604020202020204" pitchFamily="34" charset="0"/>
               </a:rPr>
+              <a:t> and </a:t>
+            </a:r>
+            <a:r>
+              <a:rPr lang="es-ES" b="1" dirty="0" err="1">
+                <a:latin typeface="Helvetica" panose="020B0604020202020204" pitchFamily="34" charset="0"/>
+                <a:cs typeface="Helvetica" panose="020B0604020202020204" pitchFamily="34" charset="0"/>
+              </a:rPr>
+              <a:t>d.b.h</a:t>
+            </a:r>
+            <a:r>
+              <a:rPr lang="es-ES" b="1" dirty="0">
+                <a:latin typeface="Helvetica" panose="020B0604020202020204" pitchFamily="34" charset="0"/>
+                <a:cs typeface="Helvetica" panose="020B0604020202020204" pitchFamily="34" charset="0"/>
+              </a:rPr>
+              <a:t>. </a:t>
+            </a:r>
+            <a:r>
+              <a:rPr lang="es-ES" dirty="0">
+                <a:latin typeface="Helvetica" panose="020B0604020202020204" pitchFamily="34" charset="0"/>
+                <a:cs typeface="Helvetica" panose="020B0604020202020204" pitchFamily="34" charset="0"/>
+              </a:rPr>
+              <a:t>are </a:t>
+            </a:r>
+            <a:r>
+              <a:rPr lang="es-ES" dirty="0" err="1">
+                <a:latin typeface="Helvetica" panose="020B0604020202020204" pitchFamily="34" charset="0"/>
+                <a:cs typeface="Helvetica" panose="020B0604020202020204" pitchFamily="34" charset="0"/>
+              </a:rPr>
+              <a:t>higher</a:t>
+            </a:r>
+            <a:r>
+              <a:rPr lang="es-ES" dirty="0">
+                <a:latin typeface="Helvetica" panose="020B0604020202020204" pitchFamily="34" charset="0"/>
+                <a:cs typeface="Helvetica" panose="020B0604020202020204" pitchFamily="34" charset="0"/>
+              </a:rPr>
+              <a:t> in non-</a:t>
+            </a:r>
+            <a:r>
+              <a:rPr lang="es-ES" dirty="0" err="1">
+                <a:latin typeface="Helvetica" panose="020B0604020202020204" pitchFamily="34" charset="0"/>
+                <a:cs typeface="Helvetica" panose="020B0604020202020204" pitchFamily="34" charset="0"/>
+              </a:rPr>
+              <a:t>declining</a:t>
+            </a:r>
+            <a:r>
+              <a:rPr lang="es-ES" dirty="0">
+                <a:latin typeface="Helvetica" panose="020B0604020202020204" pitchFamily="34" charset="0"/>
+                <a:cs typeface="Helvetica" panose="020B0604020202020204" pitchFamily="34" charset="0"/>
+              </a:rPr>
+              <a:t> sites in </a:t>
+            </a:r>
+            <a:r>
+              <a:rPr lang="es-ES" dirty="0" err="1">
+                <a:latin typeface="Helvetica" panose="020B0604020202020204" pitchFamily="34" charset="0"/>
+                <a:cs typeface="Helvetica" panose="020B0604020202020204" pitchFamily="34" charset="0"/>
+              </a:rPr>
+              <a:t>all</a:t>
+            </a:r>
+            <a:r>
+              <a:rPr lang="es-ES" dirty="0">
+                <a:latin typeface="Helvetica" panose="020B0604020202020204" pitchFamily="34" charset="0"/>
+                <a:cs typeface="Helvetica" panose="020B0604020202020204" pitchFamily="34" charset="0"/>
+              </a:rPr>
               <a:t> </a:t>
             </a:r>
             <a:r>
@@ -16159,83 +16235,37 @@
                 <a:latin typeface="Helvetica" panose="020B0604020202020204" pitchFamily="34" charset="0"/>
                 <a:cs typeface="Helvetica" panose="020B0604020202020204" pitchFamily="34" charset="0"/>
               </a:rPr>
-              <a:t>is</a:t>
+              <a:t>species</a:t>
             </a:r>
             <a:r>
               <a:rPr lang="es-ES" dirty="0">
                 <a:latin typeface="Helvetica" panose="020B0604020202020204" pitchFamily="34" charset="0"/>
                 <a:cs typeface="Helvetica" panose="020B0604020202020204" pitchFamily="34" charset="0"/>
               </a:rPr>
+              <a:t>.</a:t>
+            </a:r>
+          </a:p>
+          <a:p>
+            <a:pPr lvl="1" algn="ctr"/>
+            <a:r>
+              <a:rPr lang="es-ES" b="1" dirty="0" err="1">
+                <a:solidFill>
+                  <a:srgbClr val="FF0000"/>
+                </a:solidFill>
+                <a:latin typeface="Helvetica" panose="020B0604020202020204" pitchFamily="34" charset="0"/>
+                <a:cs typeface="Helvetica" panose="020B0604020202020204" pitchFamily="34" charset="0"/>
+              </a:rPr>
+              <a:t>Bigger</a:t>
+            </a:r>
+            <a:r>
+              <a:rPr lang="es-ES" b="1" dirty="0">
+                <a:solidFill>
+                  <a:srgbClr val="FF0000"/>
+                </a:solidFill>
+                <a:latin typeface="Helvetica" panose="020B0604020202020204" pitchFamily="34" charset="0"/>
+                <a:cs typeface="Helvetica" panose="020B0604020202020204" pitchFamily="34" charset="0"/>
+              </a:rPr>
               <a:t> </a:t>
-            </a:r>
-            <a:r>
-              <a:rPr lang="es-ES" dirty="0" err="1">
-                <a:latin typeface="Helvetica" panose="020B0604020202020204" pitchFamily="34" charset="0"/>
-                <a:cs typeface="Helvetica" panose="020B0604020202020204" pitchFamily="34" charset="0"/>
-              </a:rPr>
-              <a:t>higher</a:t>
-            </a:r>
-            <a:r>
-              <a:rPr lang="es-ES" dirty="0">
-                <a:latin typeface="Helvetica" panose="020B0604020202020204" pitchFamily="34" charset="0"/>
-                <a:cs typeface="Helvetica" panose="020B0604020202020204" pitchFamily="34" charset="0"/>
-              </a:rPr>
-              <a:t> in non-</a:t>
-            </a:r>
-            <a:r>
-              <a:rPr lang="es-ES" dirty="0" err="1">
-                <a:latin typeface="Helvetica" panose="020B0604020202020204" pitchFamily="34" charset="0"/>
-                <a:cs typeface="Helvetica" panose="020B0604020202020204" pitchFamily="34" charset="0"/>
-              </a:rPr>
-              <a:t>declining</a:t>
-            </a:r>
-            <a:r>
-              <a:rPr lang="es-ES" dirty="0">
-                <a:latin typeface="Helvetica" panose="020B0604020202020204" pitchFamily="34" charset="0"/>
-                <a:cs typeface="Helvetica" panose="020B0604020202020204" pitchFamily="34" charset="0"/>
-              </a:rPr>
-              <a:t> sites in </a:t>
-            </a:r>
-            <a:r>
-              <a:rPr lang="es-ES" dirty="0" err="1">
-                <a:latin typeface="Helvetica" panose="020B0604020202020204" pitchFamily="34" charset="0"/>
-                <a:cs typeface="Helvetica" panose="020B0604020202020204" pitchFamily="34" charset="0"/>
-              </a:rPr>
-              <a:t>all</a:t>
-            </a:r>
-            <a:r>
-              <a:rPr lang="es-ES" dirty="0">
-                <a:latin typeface="Helvetica" panose="020B0604020202020204" pitchFamily="34" charset="0"/>
-                <a:cs typeface="Helvetica" panose="020B0604020202020204" pitchFamily="34" charset="0"/>
-              </a:rPr>
-              <a:t> </a:t>
-            </a:r>
-            <a:r>
-              <a:rPr lang="es-ES" dirty="0" err="1">
-                <a:latin typeface="Helvetica" panose="020B0604020202020204" pitchFamily="34" charset="0"/>
-                <a:cs typeface="Helvetica" panose="020B0604020202020204" pitchFamily="34" charset="0"/>
-              </a:rPr>
-              <a:t>species</a:t>
-            </a:r>
-            <a:r>
-              <a:rPr lang="es-ES" dirty="0">
-                <a:latin typeface="Helvetica" panose="020B0604020202020204" pitchFamily="34" charset="0"/>
-                <a:cs typeface="Helvetica" panose="020B0604020202020204" pitchFamily="34" charset="0"/>
-              </a:rPr>
-              <a:t>.</a:t>
-            </a:r>
-          </a:p>
-          <a:p>
-            <a:pPr lvl="1" algn="ctr"/>
-            <a:r>
-              <a:rPr lang="es-ES" b="1" dirty="0">
-                <a:solidFill>
-                  <a:srgbClr val="FF0000"/>
-                </a:solidFill>
-                <a:latin typeface="Helvetica" panose="020B0604020202020204" pitchFamily="34" charset="0"/>
-                <a:cs typeface="Helvetica" panose="020B0604020202020204" pitchFamily="34" charset="0"/>
-              </a:rPr>
-              <a:t>Taller </a:t>
             </a:r>
             <a:r>
               <a:rPr lang="es-ES" b="1" dirty="0" err="1">
@@ -16420,272 +16450,6 @@
               <a:latin typeface="Helvetica" panose="020B0604020202020204" pitchFamily="34" charset="0"/>
               <a:cs typeface="Helvetica" panose="020B0604020202020204" pitchFamily="34" charset="0"/>
             </a:endParaRPr>
-          </a:p>
-        </p:txBody>
-      </p:sp>
-      <p:sp>
-        <p:nvSpPr>
-          <p:cNvPr id="9" name="CuadroTexto 10">
-            <a:extLst>
-              <a:ext uri="{FF2B5EF4-FFF2-40B4-BE49-F238E27FC236}">
-                <a16:creationId xmlns:a16="http://schemas.microsoft.com/office/drawing/2014/main" id="{68926A5D-6BF7-B942-F35A-54A3F22D891B}"/>
-              </a:ext>
-            </a:extLst>
-          </p:cNvPr>
-          <p:cNvSpPr txBox="1"/>
-          <p:nvPr/>
-        </p:nvSpPr>
-        <p:spPr>
-          <a:xfrm>
-            <a:off x="4795522" y="3677920"/>
-            <a:ext cx="2956560" cy="2031325"/>
-          </a:xfrm>
-          <a:prstGeom prst="rect">
-            <a:avLst/>
-          </a:prstGeom>
-          <a:noFill/>
-        </p:spPr>
-        <p:txBody>
-          <a:bodyPr wrap="square" rtlCol="0">
-            <a:spAutoFit/>
-          </a:bodyPr>
-          <a:lstStyle>
-            <a:defPPr>
-              <a:defRPr lang="es-ES"/>
-            </a:defPPr>
-            <a:lvl1pPr marL="0" algn="l" defTabSz="914400" rtl="0" eaLnBrk="1" latinLnBrk="0" hangingPunct="1">
-              <a:defRPr sz="1800" kern="1200">
-                <a:solidFill>
-                  <a:schemeClr val="tx1"/>
-                </a:solidFill>
-                <a:latin typeface="+mn-lt"/>
-                <a:ea typeface="+mn-ea"/>
-                <a:cs typeface="+mn-cs"/>
-              </a:defRPr>
-            </a:lvl1pPr>
-            <a:lvl2pPr marL="457200" algn="l" defTabSz="914400" rtl="0" eaLnBrk="1" latinLnBrk="0" hangingPunct="1">
-              <a:defRPr sz="1800" kern="1200">
-                <a:solidFill>
-                  <a:schemeClr val="tx1"/>
-                </a:solidFill>
-                <a:latin typeface="+mn-lt"/>
-                <a:ea typeface="+mn-ea"/>
-                <a:cs typeface="+mn-cs"/>
-              </a:defRPr>
-            </a:lvl2pPr>
-            <a:lvl3pPr marL="914400" algn="l" defTabSz="914400" rtl="0" eaLnBrk="1" latinLnBrk="0" hangingPunct="1">
-              <a:defRPr sz="1800" kern="1200">
-                <a:solidFill>
-                  <a:schemeClr val="tx1"/>
-                </a:solidFill>
-                <a:latin typeface="+mn-lt"/>
-                <a:ea typeface="+mn-ea"/>
-                <a:cs typeface="+mn-cs"/>
-              </a:defRPr>
-            </a:lvl3pPr>
-            <a:lvl4pPr marL="1371600" algn="l" defTabSz="914400" rtl="0" eaLnBrk="1" latinLnBrk="0" hangingPunct="1">
-              <a:defRPr sz="1800" kern="1200">
-                <a:solidFill>
-                  <a:schemeClr val="tx1"/>
-                </a:solidFill>
-                <a:latin typeface="+mn-lt"/>
-                <a:ea typeface="+mn-ea"/>
-                <a:cs typeface="+mn-cs"/>
-              </a:defRPr>
-            </a:lvl4pPr>
-            <a:lvl5pPr marL="1828800" algn="l" defTabSz="914400" rtl="0" eaLnBrk="1" latinLnBrk="0" hangingPunct="1">
-              <a:defRPr sz="1800" kern="1200">
-                <a:solidFill>
-                  <a:schemeClr val="tx1"/>
-                </a:solidFill>
-                <a:latin typeface="+mn-lt"/>
-                <a:ea typeface="+mn-ea"/>
-                <a:cs typeface="+mn-cs"/>
-              </a:defRPr>
-            </a:lvl5pPr>
-            <a:lvl6pPr marL="2286000" algn="l" defTabSz="914400" rtl="0" eaLnBrk="1" latinLnBrk="0" hangingPunct="1">
-              <a:defRPr sz="1800" kern="1200">
-                <a:solidFill>
-                  <a:schemeClr val="tx1"/>
-                </a:solidFill>
-                <a:latin typeface="+mn-lt"/>
-                <a:ea typeface="+mn-ea"/>
-                <a:cs typeface="+mn-cs"/>
-              </a:defRPr>
-            </a:lvl6pPr>
-            <a:lvl7pPr marL="2743200" algn="l" defTabSz="914400" rtl="0" eaLnBrk="1" latinLnBrk="0" hangingPunct="1">
-              <a:defRPr sz="1800" kern="1200">
-                <a:solidFill>
-                  <a:schemeClr val="tx1"/>
-                </a:solidFill>
-                <a:latin typeface="+mn-lt"/>
-                <a:ea typeface="+mn-ea"/>
-                <a:cs typeface="+mn-cs"/>
-              </a:defRPr>
-            </a:lvl7pPr>
-            <a:lvl8pPr marL="3200400" algn="l" defTabSz="914400" rtl="0" eaLnBrk="1" latinLnBrk="0" hangingPunct="1">
-              <a:defRPr sz="1800" kern="1200">
-                <a:solidFill>
-                  <a:schemeClr val="tx1"/>
-                </a:solidFill>
-                <a:latin typeface="+mn-lt"/>
-                <a:ea typeface="+mn-ea"/>
-                <a:cs typeface="+mn-cs"/>
-              </a:defRPr>
-            </a:lvl8pPr>
-            <a:lvl9pPr marL="3657600" algn="l" defTabSz="914400" rtl="0" eaLnBrk="1" latinLnBrk="0" hangingPunct="1">
-              <a:defRPr sz="1800" kern="1200">
-                <a:solidFill>
-                  <a:schemeClr val="tx1"/>
-                </a:solidFill>
-                <a:latin typeface="+mn-lt"/>
-                <a:ea typeface="+mn-ea"/>
-                <a:cs typeface="+mn-cs"/>
-              </a:defRPr>
-            </a:lvl9pPr>
-          </a:lstStyle>
-          <a:p>
-            <a:pPr lvl="1" algn="ctr"/>
-            <a:r>
-              <a:rPr lang="es-ES" b="1" dirty="0" err="1">
-                <a:latin typeface="Helvetica" panose="020B0604020202020204" pitchFamily="34" charset="0"/>
-                <a:cs typeface="Helvetica" panose="020B0604020202020204" pitchFamily="34" charset="0"/>
-              </a:rPr>
-              <a:t>Competition</a:t>
-            </a:r>
-            <a:r>
-              <a:rPr lang="es-ES" dirty="0">
-                <a:latin typeface="Helvetica" panose="020B0604020202020204" pitchFamily="34" charset="0"/>
-                <a:cs typeface="Helvetica" panose="020B0604020202020204" pitchFamily="34" charset="0"/>
-              </a:rPr>
-              <a:t> </a:t>
-            </a:r>
-            <a:r>
-              <a:rPr lang="es-ES" dirty="0" err="1">
-                <a:latin typeface="Helvetica" panose="020B0604020202020204" pitchFamily="34" charset="0"/>
-                <a:cs typeface="Helvetica" panose="020B0604020202020204" pitchFamily="34" charset="0"/>
-              </a:rPr>
-              <a:t>is</a:t>
-            </a:r>
-            <a:r>
-              <a:rPr lang="es-ES" dirty="0">
-                <a:latin typeface="Helvetica" panose="020B0604020202020204" pitchFamily="34" charset="0"/>
-                <a:cs typeface="Helvetica" panose="020B0604020202020204" pitchFamily="34" charset="0"/>
-              </a:rPr>
-              <a:t> more intense in </a:t>
-            </a:r>
-            <a:r>
-              <a:rPr lang="es-ES" dirty="0" err="1">
-                <a:latin typeface="Helvetica" panose="020B0604020202020204" pitchFamily="34" charset="0"/>
-                <a:cs typeface="Helvetica" panose="020B0604020202020204" pitchFamily="34" charset="0"/>
-              </a:rPr>
-              <a:t>declining</a:t>
-            </a:r>
-            <a:r>
-              <a:rPr lang="es-ES" dirty="0">
-                <a:latin typeface="Helvetica" panose="020B0604020202020204" pitchFamily="34" charset="0"/>
-                <a:cs typeface="Helvetica" panose="020B0604020202020204" pitchFamily="34" charset="0"/>
-              </a:rPr>
-              <a:t> sites. </a:t>
-            </a:r>
-            <a:r>
-              <a:rPr lang="es-ES" b="1" dirty="0" err="1">
-                <a:latin typeface="Helvetica" panose="020B0604020202020204" pitchFamily="34" charset="0"/>
-                <a:cs typeface="Helvetica" panose="020B0604020202020204" pitchFamily="34" charset="0"/>
-              </a:rPr>
-              <a:t>Denser</a:t>
-            </a:r>
-            <a:r>
-              <a:rPr lang="es-ES" b="1" dirty="0">
-                <a:latin typeface="Helvetica" panose="020B0604020202020204" pitchFamily="34" charset="0"/>
-                <a:cs typeface="Helvetica" panose="020B0604020202020204" pitchFamily="34" charset="0"/>
-              </a:rPr>
-              <a:t> stands </a:t>
-            </a:r>
-            <a:r>
-              <a:rPr lang="es-ES" dirty="0">
-                <a:latin typeface="Helvetica" panose="020B0604020202020204" pitchFamily="34" charset="0"/>
-                <a:cs typeface="Helvetica" panose="020B0604020202020204" pitchFamily="34" charset="0"/>
-              </a:rPr>
-              <a:t>are </a:t>
-            </a:r>
-            <a:r>
-              <a:rPr lang="es-ES" b="1" dirty="0">
-                <a:latin typeface="Helvetica" panose="020B0604020202020204" pitchFamily="34" charset="0"/>
-                <a:cs typeface="Helvetica" panose="020B0604020202020204" pitchFamily="34" charset="0"/>
-              </a:rPr>
-              <a:t>more vulnerable </a:t>
-            </a:r>
-            <a:r>
-              <a:rPr lang="es-ES" dirty="0" err="1">
-                <a:latin typeface="Helvetica" panose="020B0604020202020204" pitchFamily="34" charset="0"/>
-                <a:cs typeface="Helvetica" panose="020B0604020202020204" pitchFamily="34" charset="0"/>
-              </a:rPr>
-              <a:t>due</a:t>
-            </a:r>
-            <a:r>
-              <a:rPr lang="es-ES" dirty="0">
-                <a:latin typeface="Helvetica" panose="020B0604020202020204" pitchFamily="34" charset="0"/>
-                <a:cs typeface="Helvetica" panose="020B0604020202020204" pitchFamily="34" charset="0"/>
-              </a:rPr>
-              <a:t> </a:t>
-            </a:r>
-            <a:r>
-              <a:rPr lang="es-ES" dirty="0" err="1">
-                <a:latin typeface="Helvetica" panose="020B0604020202020204" pitchFamily="34" charset="0"/>
-                <a:cs typeface="Helvetica" panose="020B0604020202020204" pitchFamily="34" charset="0"/>
-              </a:rPr>
-              <a:t>limitting</a:t>
-            </a:r>
-            <a:r>
-              <a:rPr lang="es-ES" dirty="0">
-                <a:latin typeface="Helvetica" panose="020B0604020202020204" pitchFamily="34" charset="0"/>
-                <a:cs typeface="Helvetica" panose="020B0604020202020204" pitchFamily="34" charset="0"/>
-              </a:rPr>
-              <a:t> </a:t>
-            </a:r>
-            <a:r>
-              <a:rPr lang="es-ES" dirty="0" err="1">
-                <a:latin typeface="Helvetica" panose="020B0604020202020204" pitchFamily="34" charset="0"/>
-                <a:cs typeface="Helvetica" panose="020B0604020202020204" pitchFamily="34" charset="0"/>
-              </a:rPr>
-              <a:t>water</a:t>
-            </a:r>
-            <a:r>
-              <a:rPr lang="es-ES" dirty="0">
-                <a:latin typeface="Helvetica" panose="020B0604020202020204" pitchFamily="34" charset="0"/>
-                <a:cs typeface="Helvetica" panose="020B0604020202020204" pitchFamily="34" charset="0"/>
-              </a:rPr>
-              <a:t> and </a:t>
-            </a:r>
-            <a:r>
-              <a:rPr lang="es-ES" dirty="0" err="1">
-                <a:latin typeface="Helvetica" panose="020B0604020202020204" pitchFamily="34" charset="0"/>
-                <a:cs typeface="Helvetica" panose="020B0604020202020204" pitchFamily="34" charset="0"/>
-              </a:rPr>
-              <a:t>nutrients</a:t>
-            </a:r>
-            <a:r>
-              <a:rPr lang="es-ES" dirty="0">
-                <a:latin typeface="Helvetica" panose="020B0604020202020204" pitchFamily="34" charset="0"/>
-                <a:cs typeface="Helvetica" panose="020B0604020202020204" pitchFamily="34" charset="0"/>
-              </a:rPr>
-              <a:t> </a:t>
-            </a:r>
-            <a:r>
-              <a:rPr lang="es-ES" dirty="0" err="1">
-                <a:latin typeface="Helvetica" panose="020B0604020202020204" pitchFamily="34" charset="0"/>
-                <a:cs typeface="Helvetica" panose="020B0604020202020204" pitchFamily="34" charset="0"/>
-              </a:rPr>
-              <a:t>availability</a:t>
-            </a:r>
-            <a:r>
-              <a:rPr lang="es-ES" dirty="0">
-                <a:latin typeface="Helvetica" panose="020B0604020202020204" pitchFamily="34" charset="0"/>
-                <a:cs typeface="Helvetica" panose="020B0604020202020204" pitchFamily="34" charset="0"/>
-              </a:rPr>
-              <a:t> per individual</a:t>
-            </a:r>
           </a:p>
         </p:txBody>
       </p:sp>
@@ -17081,7 +16845,7 @@
         </p:nvSpPr>
         <p:spPr>
           <a:xfrm>
-            <a:off x="129540" y="6100313"/>
+            <a:off x="1963422" y="4837516"/>
             <a:ext cx="5664199" cy="369332"/>
           </a:xfrm>
           <a:prstGeom prst="rect">
@@ -17297,6 +17061,43 @@
           </a:p>
         </p:txBody>
       </p:sp>
+      <p:pic>
+        <p:nvPicPr>
+          <p:cNvPr id="11" name="Imagen 10">
+            <a:extLst>
+              <a:ext uri="{FF2B5EF4-FFF2-40B4-BE49-F238E27FC236}">
+                <a16:creationId xmlns:a16="http://schemas.microsoft.com/office/drawing/2014/main" id="{BA3090E5-3344-7682-8401-8E6E1FBDFAD7}"/>
+              </a:ext>
+            </a:extLst>
+          </p:cNvPr>
+          <p:cNvPicPr>
+            <a:picLocks noChangeAspect="1"/>
+          </p:cNvPicPr>
+          <p:nvPr/>
+        </p:nvPicPr>
+        <p:blipFill>
+          <a:blip r:embed="rId3">
+            <a:extLst>
+              <a:ext uri="{28A0092B-C50C-407E-A947-70E740481C1C}">
+                <a14:useLocalDpi xmlns:a14="http://schemas.microsoft.com/office/drawing/2010/main" val="0"/>
+              </a:ext>
+            </a:extLst>
+          </a:blip>
+          <a:srcRect r="21514"/>
+          <a:stretch>
+            <a:fillRect/>
+          </a:stretch>
+        </p:blipFill>
+        <p:spPr>
+          <a:xfrm>
+            <a:off x="1489310" y="1125916"/>
+            <a:ext cx="9568983" cy="2437935"/>
+          </a:xfrm>
+          <a:prstGeom prst="rect">
+            <a:avLst/>
+          </a:prstGeom>
+        </p:spPr>
+      </p:pic>
     </p:spTree>
     <p:extLst>
       <p:ext uri="{BB962C8B-B14F-4D97-AF65-F5344CB8AC3E}">
@@ -17307,11 +17108,6 @@
   <p:clrMapOvr>
     <a:masterClrMapping/>
   </p:clrMapOvr>
-  <p:extLst>
-    <p:ext uri="{6950BFC3-D8DA-4A85-94F7-54DA5524770B}">
-      <p188:commentRel xmlns:p188="http://schemas.microsoft.com/office/powerpoint/2018/8/main" r:id="rId3"/>
-    </p:ext>
-  </p:extLst>
 </p:sld>
 </file>
 
@@ -17323,7 +17119,7 @@
         <p:cNvPr id="1" name="">
           <a:extLst>
             <a:ext uri="{FF2B5EF4-FFF2-40B4-BE49-F238E27FC236}">
-              <a16:creationId xmlns:a16="http://schemas.microsoft.com/office/drawing/2014/main" id="{F94D8D41-657E-4FC9-863A-C46F9A7BA03A}"/>
+              <a16:creationId xmlns:a16="http://schemas.microsoft.com/office/drawing/2014/main" id="{4B7BB3F3-3AA3-1A33-1327-48FE2BC9AE3B}"/>
             </a:ext>
           </a:extLst>
         </p:cNvPr>
@@ -17343,7 +17139,7 @@
           <p:cNvPr id="3" name="Rectangle 1">
             <a:extLst>
               <a:ext uri="{FF2B5EF4-FFF2-40B4-BE49-F238E27FC236}">
-                <a16:creationId xmlns:a16="http://schemas.microsoft.com/office/drawing/2014/main" id="{706FCF1C-553F-1FAF-CC23-00699FA08473}"/>
+                <a16:creationId xmlns:a16="http://schemas.microsoft.com/office/drawing/2014/main" id="{F9D7B8CA-CD6C-C18E-3E03-319F19470422}"/>
               </a:ext>
             </a:extLst>
           </p:cNvPr>
@@ -17605,7 +17401,7 @@
           <p:cNvPr id="2" name="Título 1">
             <a:extLst>
               <a:ext uri="{FF2B5EF4-FFF2-40B4-BE49-F238E27FC236}">
-                <a16:creationId xmlns:a16="http://schemas.microsoft.com/office/drawing/2014/main" id="{CE9D40A1-2403-322F-D2A4-4B2657D8B9E6}"/>
+                <a16:creationId xmlns:a16="http://schemas.microsoft.com/office/drawing/2014/main" id="{DD3F8DC2-F439-732C-6ABC-DF331931459C}"/>
               </a:ext>
             </a:extLst>
           </p:cNvPr>
@@ -17686,7 +17482,7 @@
           <p:cNvPr id="8" name="Título 1">
             <a:extLst>
               <a:ext uri="{FF2B5EF4-FFF2-40B4-BE49-F238E27FC236}">
-                <a16:creationId xmlns:a16="http://schemas.microsoft.com/office/drawing/2014/main" id="{D7B4279A-D5B6-73C3-7955-EFED977C3629}"/>
+                <a16:creationId xmlns:a16="http://schemas.microsoft.com/office/drawing/2014/main" id="{49FFA1FA-24B2-07BA-7DCC-6DA1633359EB}"/>
               </a:ext>
             </a:extLst>
           </p:cNvPr>
@@ -17760,10 +17556,10 @@
       </p:sp>
       <p:pic>
         <p:nvPicPr>
-          <p:cNvPr id="6" name="Imagen 5">
+          <p:cNvPr id="5" name="Imagen 4">
             <a:extLst>
               <a:ext uri="{FF2B5EF4-FFF2-40B4-BE49-F238E27FC236}">
-                <a16:creationId xmlns:a16="http://schemas.microsoft.com/office/drawing/2014/main" id="{A9F74993-0A4C-E813-363F-E0876843D936}"/>
+                <a16:creationId xmlns:a16="http://schemas.microsoft.com/office/drawing/2014/main" id="{D7E0C2BF-7E7C-0CAB-43B1-B4D031CD3036}"/>
               </a:ext>
             </a:extLst>
           </p:cNvPr>
@@ -17780,13 +17576,15 @@
               </a:ext>
             </a:extLst>
           </a:blip>
-          <a:srcRect t="24665" r="32788" b="50950"/>
-          <a:stretch/>
+          <a:srcRect r="28540"/>
+          <a:stretch>
+            <a:fillRect/>
+          </a:stretch>
         </p:blipFill>
         <p:spPr>
           <a:xfrm>
-            <a:off x="1285055" y="1070861"/>
-            <a:ext cx="6467028" cy="2607059"/>
+            <a:off x="1536612" y="1058155"/>
+            <a:ext cx="8712376" cy="3047516"/>
           </a:xfrm>
           <a:prstGeom prst="rect">
             <a:avLst/>
@@ -17795,10 +17593,10 @@
       </p:pic>
       <p:sp>
         <p:nvSpPr>
-          <p:cNvPr id="7" name="CuadroTexto 10">
+          <p:cNvPr id="6" name="CuadroTexto 10">
             <a:extLst>
               <a:ext uri="{FF2B5EF4-FFF2-40B4-BE49-F238E27FC236}">
-                <a16:creationId xmlns:a16="http://schemas.microsoft.com/office/drawing/2014/main" id="{EB3398C9-D8A7-FCC2-EBA7-93E4556645A1}"/>
+                <a16:creationId xmlns:a16="http://schemas.microsoft.com/office/drawing/2014/main" id="{D83437F7-F8D1-4EBF-37B6-07B5C8A7D181}"/>
               </a:ext>
             </a:extLst>
           </p:cNvPr>
@@ -17807,7 +17605,7 @@
         </p:nvSpPr>
         <p:spPr>
           <a:xfrm>
-            <a:off x="1483360" y="3677920"/>
+            <a:off x="5288915" y="4105671"/>
             <a:ext cx="2956560" cy="1754326"/>
           </a:xfrm>
           <a:prstGeom prst="rect">
@@ -18177,7 +17975,7 @@
           <p:cNvPr id="9" name="CuadroTexto 10">
             <a:extLst>
               <a:ext uri="{FF2B5EF4-FFF2-40B4-BE49-F238E27FC236}">
-                <a16:creationId xmlns:a16="http://schemas.microsoft.com/office/drawing/2014/main" id="{99523C24-29E5-5604-C068-291A939F8009}"/>
+                <a16:creationId xmlns:a16="http://schemas.microsoft.com/office/drawing/2014/main" id="{C82EAB7D-F378-7BA4-9A88-AC54DB8D51F1}"/>
               </a:ext>
             </a:extLst>
           </p:cNvPr>
@@ -18186,7 +17984,426 @@
         </p:nvSpPr>
         <p:spPr>
           <a:xfrm>
-            <a:off x="4795522" y="3677920"/>
+            <a:off x="4026703" y="5903083"/>
+            <a:ext cx="5664199" cy="369332"/>
+          </a:xfrm>
+          <a:prstGeom prst="rect">
+            <a:avLst/>
+          </a:prstGeom>
+          <a:noFill/>
+        </p:spPr>
+        <p:txBody>
+          <a:bodyPr wrap="square" rtlCol="0">
+            <a:spAutoFit/>
+          </a:bodyPr>
+          <a:lstStyle>
+            <a:defPPr>
+              <a:defRPr lang="es-ES"/>
+            </a:defPPr>
+            <a:lvl1pPr marL="0" algn="l" defTabSz="914400" rtl="0" eaLnBrk="1" latinLnBrk="0" hangingPunct="1">
+              <a:defRPr sz="1800" kern="1200">
+                <a:solidFill>
+                  <a:schemeClr val="tx1"/>
+                </a:solidFill>
+                <a:latin typeface="+mn-lt"/>
+                <a:ea typeface="+mn-ea"/>
+                <a:cs typeface="+mn-cs"/>
+              </a:defRPr>
+            </a:lvl1pPr>
+            <a:lvl2pPr marL="457200" algn="l" defTabSz="914400" rtl="0" eaLnBrk="1" latinLnBrk="0" hangingPunct="1">
+              <a:defRPr sz="1800" kern="1200">
+                <a:solidFill>
+                  <a:schemeClr val="tx1"/>
+                </a:solidFill>
+                <a:latin typeface="+mn-lt"/>
+                <a:ea typeface="+mn-ea"/>
+                <a:cs typeface="+mn-cs"/>
+              </a:defRPr>
+            </a:lvl2pPr>
+            <a:lvl3pPr marL="914400" algn="l" defTabSz="914400" rtl="0" eaLnBrk="1" latinLnBrk="0" hangingPunct="1">
+              <a:defRPr sz="1800" kern="1200">
+                <a:solidFill>
+                  <a:schemeClr val="tx1"/>
+                </a:solidFill>
+                <a:latin typeface="+mn-lt"/>
+                <a:ea typeface="+mn-ea"/>
+                <a:cs typeface="+mn-cs"/>
+              </a:defRPr>
+            </a:lvl3pPr>
+            <a:lvl4pPr marL="1371600" algn="l" defTabSz="914400" rtl="0" eaLnBrk="1" latinLnBrk="0" hangingPunct="1">
+              <a:defRPr sz="1800" kern="1200">
+                <a:solidFill>
+                  <a:schemeClr val="tx1"/>
+                </a:solidFill>
+                <a:latin typeface="+mn-lt"/>
+                <a:ea typeface="+mn-ea"/>
+                <a:cs typeface="+mn-cs"/>
+              </a:defRPr>
+            </a:lvl4pPr>
+            <a:lvl5pPr marL="1828800" algn="l" defTabSz="914400" rtl="0" eaLnBrk="1" latinLnBrk="0" hangingPunct="1">
+              <a:defRPr sz="1800" kern="1200">
+                <a:solidFill>
+                  <a:schemeClr val="tx1"/>
+                </a:solidFill>
+                <a:latin typeface="+mn-lt"/>
+                <a:ea typeface="+mn-ea"/>
+                <a:cs typeface="+mn-cs"/>
+              </a:defRPr>
+            </a:lvl5pPr>
+            <a:lvl6pPr marL="2286000" algn="l" defTabSz="914400" rtl="0" eaLnBrk="1" latinLnBrk="0" hangingPunct="1">
+              <a:defRPr sz="1800" kern="1200">
+                <a:solidFill>
+                  <a:schemeClr val="tx1"/>
+                </a:solidFill>
+                <a:latin typeface="+mn-lt"/>
+                <a:ea typeface="+mn-ea"/>
+                <a:cs typeface="+mn-cs"/>
+              </a:defRPr>
+            </a:lvl6pPr>
+            <a:lvl7pPr marL="2743200" algn="l" defTabSz="914400" rtl="0" eaLnBrk="1" latinLnBrk="0" hangingPunct="1">
+              <a:defRPr sz="1800" kern="1200">
+                <a:solidFill>
+                  <a:schemeClr val="tx1"/>
+                </a:solidFill>
+                <a:latin typeface="+mn-lt"/>
+                <a:ea typeface="+mn-ea"/>
+                <a:cs typeface="+mn-cs"/>
+              </a:defRPr>
+            </a:lvl7pPr>
+            <a:lvl8pPr marL="3200400" algn="l" defTabSz="914400" rtl="0" eaLnBrk="1" latinLnBrk="0" hangingPunct="1">
+              <a:defRPr sz="1800" kern="1200">
+                <a:solidFill>
+                  <a:schemeClr val="tx1"/>
+                </a:solidFill>
+                <a:latin typeface="+mn-lt"/>
+                <a:ea typeface="+mn-ea"/>
+                <a:cs typeface="+mn-cs"/>
+              </a:defRPr>
+            </a:lvl8pPr>
+            <a:lvl9pPr marL="3657600" algn="l" defTabSz="914400" rtl="0" eaLnBrk="1" latinLnBrk="0" hangingPunct="1">
+              <a:defRPr sz="1800" kern="1200">
+                <a:solidFill>
+                  <a:schemeClr val="tx1"/>
+                </a:solidFill>
+                <a:latin typeface="+mn-lt"/>
+                <a:ea typeface="+mn-ea"/>
+                <a:cs typeface="+mn-cs"/>
+              </a:defRPr>
+            </a:lvl9pPr>
+          </a:lstStyle>
+          <a:p>
+            <a:pPr lvl="1" algn="ctr"/>
+            <a:r>
+              <a:rPr lang="es-ES" b="1" dirty="0" err="1">
+                <a:solidFill>
+                  <a:srgbClr val="FF0000"/>
+                </a:solidFill>
+                <a:latin typeface="Helvetica" panose="020B0604020202020204" pitchFamily="34" charset="0"/>
+                <a:cs typeface="Helvetica" panose="020B0604020202020204" pitchFamily="34" charset="0"/>
+              </a:rPr>
+              <a:t>Contrary</a:t>
+            </a:r>
+            <a:r>
+              <a:rPr lang="es-ES" b="1" dirty="0">
+                <a:solidFill>
+                  <a:srgbClr val="FF0000"/>
+                </a:solidFill>
+                <a:latin typeface="Helvetica" panose="020B0604020202020204" pitchFamily="34" charset="0"/>
+                <a:cs typeface="Helvetica" panose="020B0604020202020204" pitchFamily="34" charset="0"/>
+              </a:rPr>
+              <a:t> </a:t>
+            </a:r>
+            <a:r>
+              <a:rPr lang="es-ES" b="1" dirty="0" err="1">
+                <a:solidFill>
+                  <a:srgbClr val="FF0000"/>
+                </a:solidFill>
+                <a:latin typeface="Helvetica" panose="020B0604020202020204" pitchFamily="34" charset="0"/>
+                <a:cs typeface="Helvetica" panose="020B0604020202020204" pitchFamily="34" charset="0"/>
+              </a:rPr>
+              <a:t>to</a:t>
+            </a:r>
+            <a:r>
+              <a:rPr lang="es-ES" b="1" dirty="0">
+                <a:solidFill>
+                  <a:srgbClr val="FF0000"/>
+                </a:solidFill>
+                <a:latin typeface="Helvetica" panose="020B0604020202020204" pitchFamily="34" charset="0"/>
+                <a:cs typeface="Helvetica" panose="020B0604020202020204" pitchFamily="34" charset="0"/>
+              </a:rPr>
+              <a:t> </a:t>
+            </a:r>
+            <a:r>
+              <a:rPr lang="es-ES" b="1" dirty="0" err="1">
+                <a:solidFill>
+                  <a:srgbClr val="FF0000"/>
+                </a:solidFill>
+                <a:latin typeface="Helvetica" panose="020B0604020202020204" pitchFamily="34" charset="0"/>
+                <a:cs typeface="Helvetica" panose="020B0604020202020204" pitchFamily="34" charset="0"/>
+              </a:rPr>
+              <a:t>what</a:t>
+            </a:r>
+            <a:r>
+              <a:rPr lang="es-ES" b="1" dirty="0">
+                <a:solidFill>
+                  <a:srgbClr val="FF0000"/>
+                </a:solidFill>
+                <a:latin typeface="Helvetica" panose="020B0604020202020204" pitchFamily="34" charset="0"/>
+                <a:cs typeface="Helvetica" panose="020B0604020202020204" pitchFamily="34" charset="0"/>
+              </a:rPr>
+              <a:t> </a:t>
+            </a:r>
+            <a:r>
+              <a:rPr lang="es-ES" b="1" dirty="0" err="1">
+                <a:solidFill>
+                  <a:srgbClr val="FF0000"/>
+                </a:solidFill>
+                <a:latin typeface="Helvetica" panose="020B0604020202020204" pitchFamily="34" charset="0"/>
+                <a:cs typeface="Helvetica" panose="020B0604020202020204" pitchFamily="34" charset="0"/>
+              </a:rPr>
+              <a:t>we</a:t>
+            </a:r>
+            <a:r>
+              <a:rPr lang="es-ES" b="1" dirty="0">
+                <a:solidFill>
+                  <a:srgbClr val="FF0000"/>
+                </a:solidFill>
+                <a:latin typeface="Helvetica" panose="020B0604020202020204" pitchFamily="34" charset="0"/>
+                <a:cs typeface="Helvetica" panose="020B0604020202020204" pitchFamily="34" charset="0"/>
+              </a:rPr>
+              <a:t> </a:t>
+            </a:r>
+            <a:r>
+              <a:rPr lang="es-ES" b="1" dirty="0" err="1">
+                <a:solidFill>
+                  <a:srgbClr val="FF0000"/>
+                </a:solidFill>
+                <a:latin typeface="Helvetica" panose="020B0604020202020204" pitchFamily="34" charset="0"/>
+                <a:cs typeface="Helvetica" panose="020B0604020202020204" pitchFamily="34" charset="0"/>
+              </a:rPr>
+              <a:t>expected</a:t>
+            </a:r>
+            <a:r>
+              <a:rPr lang="es-ES" b="1" dirty="0">
+                <a:solidFill>
+                  <a:srgbClr val="FF0000"/>
+                </a:solidFill>
+                <a:latin typeface="Helvetica" panose="020B0604020202020204" pitchFamily="34" charset="0"/>
+                <a:cs typeface="Helvetica" panose="020B0604020202020204" pitchFamily="34" charset="0"/>
+              </a:rPr>
+              <a:t>!</a:t>
+            </a:r>
+            <a:endParaRPr lang="es-ES" dirty="0">
+              <a:latin typeface="Helvetica" panose="020B0604020202020204" pitchFamily="34" charset="0"/>
+              <a:cs typeface="Helvetica" panose="020B0604020202020204" pitchFamily="34" charset="0"/>
+            </a:endParaRPr>
+          </a:p>
+        </p:txBody>
+      </p:sp>
+      <p:sp>
+        <p:nvSpPr>
+          <p:cNvPr id="10" name="CuadroTexto 10">
+            <a:extLst>
+              <a:ext uri="{FF2B5EF4-FFF2-40B4-BE49-F238E27FC236}">
+                <a16:creationId xmlns:a16="http://schemas.microsoft.com/office/drawing/2014/main" id="{4AFD5ADB-7309-9E31-754C-662A52E6DE59}"/>
+              </a:ext>
+            </a:extLst>
+          </p:cNvPr>
+          <p:cNvSpPr txBox="1"/>
+          <p:nvPr/>
+        </p:nvSpPr>
+        <p:spPr>
+          <a:xfrm>
+            <a:off x="8661397" y="4542712"/>
+            <a:ext cx="2621279" cy="923330"/>
+          </a:xfrm>
+          <a:prstGeom prst="rect">
+            <a:avLst/>
+          </a:prstGeom>
+          <a:noFill/>
+        </p:spPr>
+        <p:txBody>
+          <a:bodyPr wrap="square" rtlCol="0">
+            <a:spAutoFit/>
+          </a:bodyPr>
+          <a:lstStyle>
+            <a:defPPr>
+              <a:defRPr lang="es-ES"/>
+            </a:defPPr>
+            <a:lvl1pPr marL="0" algn="l" defTabSz="914400" rtl="0" eaLnBrk="1" latinLnBrk="0" hangingPunct="1">
+              <a:defRPr sz="1800" kern="1200">
+                <a:solidFill>
+                  <a:schemeClr val="tx1"/>
+                </a:solidFill>
+                <a:latin typeface="+mn-lt"/>
+                <a:ea typeface="+mn-ea"/>
+                <a:cs typeface="+mn-cs"/>
+              </a:defRPr>
+            </a:lvl1pPr>
+            <a:lvl2pPr marL="457200" algn="l" defTabSz="914400" rtl="0" eaLnBrk="1" latinLnBrk="0" hangingPunct="1">
+              <a:defRPr sz="1800" kern="1200">
+                <a:solidFill>
+                  <a:schemeClr val="tx1"/>
+                </a:solidFill>
+                <a:latin typeface="+mn-lt"/>
+                <a:ea typeface="+mn-ea"/>
+                <a:cs typeface="+mn-cs"/>
+              </a:defRPr>
+            </a:lvl2pPr>
+            <a:lvl3pPr marL="914400" algn="l" defTabSz="914400" rtl="0" eaLnBrk="1" latinLnBrk="0" hangingPunct="1">
+              <a:defRPr sz="1800" kern="1200">
+                <a:solidFill>
+                  <a:schemeClr val="tx1"/>
+                </a:solidFill>
+                <a:latin typeface="+mn-lt"/>
+                <a:ea typeface="+mn-ea"/>
+                <a:cs typeface="+mn-cs"/>
+              </a:defRPr>
+            </a:lvl3pPr>
+            <a:lvl4pPr marL="1371600" algn="l" defTabSz="914400" rtl="0" eaLnBrk="1" latinLnBrk="0" hangingPunct="1">
+              <a:defRPr sz="1800" kern="1200">
+                <a:solidFill>
+                  <a:schemeClr val="tx1"/>
+                </a:solidFill>
+                <a:latin typeface="+mn-lt"/>
+                <a:ea typeface="+mn-ea"/>
+                <a:cs typeface="+mn-cs"/>
+              </a:defRPr>
+            </a:lvl4pPr>
+            <a:lvl5pPr marL="1828800" algn="l" defTabSz="914400" rtl="0" eaLnBrk="1" latinLnBrk="0" hangingPunct="1">
+              <a:defRPr sz="1800" kern="1200">
+                <a:solidFill>
+                  <a:schemeClr val="tx1"/>
+                </a:solidFill>
+                <a:latin typeface="+mn-lt"/>
+                <a:ea typeface="+mn-ea"/>
+                <a:cs typeface="+mn-cs"/>
+              </a:defRPr>
+            </a:lvl5pPr>
+            <a:lvl6pPr marL="2286000" algn="l" defTabSz="914400" rtl="0" eaLnBrk="1" latinLnBrk="0" hangingPunct="1">
+              <a:defRPr sz="1800" kern="1200">
+                <a:solidFill>
+                  <a:schemeClr val="tx1"/>
+                </a:solidFill>
+                <a:latin typeface="+mn-lt"/>
+                <a:ea typeface="+mn-ea"/>
+                <a:cs typeface="+mn-cs"/>
+              </a:defRPr>
+            </a:lvl6pPr>
+            <a:lvl7pPr marL="2743200" algn="l" defTabSz="914400" rtl="0" eaLnBrk="1" latinLnBrk="0" hangingPunct="1">
+              <a:defRPr sz="1800" kern="1200">
+                <a:solidFill>
+                  <a:schemeClr val="tx1"/>
+                </a:solidFill>
+                <a:latin typeface="+mn-lt"/>
+                <a:ea typeface="+mn-ea"/>
+                <a:cs typeface="+mn-cs"/>
+              </a:defRPr>
+            </a:lvl7pPr>
+            <a:lvl8pPr marL="3200400" algn="l" defTabSz="914400" rtl="0" eaLnBrk="1" latinLnBrk="0" hangingPunct="1">
+              <a:defRPr sz="1800" kern="1200">
+                <a:solidFill>
+                  <a:schemeClr val="tx1"/>
+                </a:solidFill>
+                <a:latin typeface="+mn-lt"/>
+                <a:ea typeface="+mn-ea"/>
+                <a:cs typeface="+mn-cs"/>
+              </a:defRPr>
+            </a:lvl8pPr>
+            <a:lvl9pPr marL="3657600" algn="l" defTabSz="914400" rtl="0" eaLnBrk="1" latinLnBrk="0" hangingPunct="1">
+              <a:defRPr sz="1800" kern="1200">
+                <a:solidFill>
+                  <a:schemeClr val="tx1"/>
+                </a:solidFill>
+                <a:latin typeface="+mn-lt"/>
+                <a:ea typeface="+mn-ea"/>
+                <a:cs typeface="+mn-cs"/>
+              </a:defRPr>
+            </a:lvl9pPr>
+          </a:lstStyle>
+          <a:p>
+            <a:pPr lvl="1" algn="ctr"/>
+            <a:r>
+              <a:rPr lang="es-ES" b="1" dirty="0">
+                <a:latin typeface="Helvetica" panose="020B0604020202020204" pitchFamily="34" charset="0"/>
+                <a:cs typeface="Helvetica" panose="020B0604020202020204" pitchFamily="34" charset="0"/>
+              </a:rPr>
+              <a:t>SLA </a:t>
+            </a:r>
+            <a:r>
+              <a:rPr lang="es-ES" dirty="0" err="1">
+                <a:latin typeface="Helvetica" panose="020B0604020202020204" pitchFamily="34" charset="0"/>
+                <a:cs typeface="Helvetica" panose="020B0604020202020204" pitchFamily="34" charset="0"/>
+              </a:rPr>
+              <a:t>is</a:t>
+            </a:r>
+            <a:r>
+              <a:rPr lang="es-ES" dirty="0">
+                <a:latin typeface="Helvetica" panose="020B0604020202020204" pitchFamily="34" charset="0"/>
+                <a:cs typeface="Helvetica" panose="020B0604020202020204" pitchFamily="34" charset="0"/>
+              </a:rPr>
+              <a:t> a response </a:t>
+            </a:r>
+            <a:r>
+              <a:rPr lang="es-ES" dirty="0" err="1">
+                <a:latin typeface="Helvetica" panose="020B0604020202020204" pitchFamily="34" charset="0"/>
+                <a:cs typeface="Helvetica" panose="020B0604020202020204" pitchFamily="34" charset="0"/>
+              </a:rPr>
+              <a:t>instead</a:t>
+            </a:r>
+            <a:r>
+              <a:rPr lang="es-ES" dirty="0">
+                <a:latin typeface="Helvetica" panose="020B0604020202020204" pitchFamily="34" charset="0"/>
+                <a:cs typeface="Helvetica" panose="020B0604020202020204" pitchFamily="34" charset="0"/>
+              </a:rPr>
+              <a:t> </a:t>
+            </a:r>
+            <a:r>
+              <a:rPr lang="es-ES" dirty="0" err="1">
+                <a:latin typeface="Helvetica" panose="020B0604020202020204" pitchFamily="34" charset="0"/>
+                <a:cs typeface="Helvetica" panose="020B0604020202020204" pitchFamily="34" charset="0"/>
+              </a:rPr>
+              <a:t>of</a:t>
+            </a:r>
+            <a:r>
+              <a:rPr lang="es-ES" dirty="0">
+                <a:latin typeface="Helvetica" panose="020B0604020202020204" pitchFamily="34" charset="0"/>
+                <a:cs typeface="Helvetica" panose="020B0604020202020204" pitchFamily="34" charset="0"/>
+              </a:rPr>
+              <a:t> a </a:t>
+            </a:r>
+            <a:r>
+              <a:rPr lang="es-ES" dirty="0" err="1">
+                <a:latin typeface="Helvetica" panose="020B0604020202020204" pitchFamily="34" charset="0"/>
+                <a:cs typeface="Helvetica" panose="020B0604020202020204" pitchFamily="34" charset="0"/>
+              </a:rPr>
+              <a:t>vulnerability</a:t>
+            </a:r>
+            <a:r>
+              <a:rPr lang="es-ES" dirty="0">
+                <a:latin typeface="Helvetica" panose="020B0604020202020204" pitchFamily="34" charset="0"/>
+                <a:cs typeface="Helvetica" panose="020B0604020202020204" pitchFamily="34" charset="0"/>
+              </a:rPr>
+              <a:t> factor!</a:t>
+            </a:r>
+          </a:p>
+        </p:txBody>
+      </p:sp>
+      <p:sp>
+        <p:nvSpPr>
+          <p:cNvPr id="13" name="CuadroTexto 10">
+            <a:extLst>
+              <a:ext uri="{FF2B5EF4-FFF2-40B4-BE49-F238E27FC236}">
+                <a16:creationId xmlns:a16="http://schemas.microsoft.com/office/drawing/2014/main" id="{5E222CD1-A427-DC37-54F3-C3C02023523C}"/>
+              </a:ext>
+            </a:extLst>
+          </p:cNvPr>
+          <p:cNvSpPr txBox="1"/>
+          <p:nvPr/>
+        </p:nvSpPr>
+        <p:spPr>
+          <a:xfrm>
+            <a:off x="1807122" y="4105671"/>
             <a:ext cx="2956560" cy="2031325"/>
           </a:xfrm>
           <a:prstGeom prst="rect">
@@ -18300,407 +18517,154 @@
                 <a:latin typeface="Helvetica" panose="020B0604020202020204" pitchFamily="34" charset="0"/>
                 <a:cs typeface="Helvetica" panose="020B0604020202020204" pitchFamily="34" charset="0"/>
               </a:rPr>
-              <a:t>Growth</a:t>
+              <a:t>Competition</a:t>
+            </a:r>
+            <a:r>
+              <a:rPr lang="es-ES" dirty="0">
+                <a:latin typeface="Helvetica" panose="020B0604020202020204" pitchFamily="34" charset="0"/>
+                <a:cs typeface="Helvetica" panose="020B0604020202020204" pitchFamily="34" charset="0"/>
+              </a:rPr>
+              <a:t> </a:t>
+            </a:r>
+            <a:r>
+              <a:rPr lang="es-ES" dirty="0" err="1">
+                <a:latin typeface="Helvetica" panose="020B0604020202020204" pitchFamily="34" charset="0"/>
+                <a:cs typeface="Helvetica" panose="020B0604020202020204" pitchFamily="34" charset="0"/>
+              </a:rPr>
+              <a:t>is</a:t>
+            </a:r>
+            <a:r>
+              <a:rPr lang="es-ES" dirty="0">
+                <a:latin typeface="Helvetica" panose="020B0604020202020204" pitchFamily="34" charset="0"/>
+                <a:cs typeface="Helvetica" panose="020B0604020202020204" pitchFamily="34" charset="0"/>
+              </a:rPr>
+              <a:t> more intense in </a:t>
+            </a:r>
+            <a:r>
+              <a:rPr lang="es-ES" dirty="0" err="1">
+                <a:latin typeface="Helvetica" panose="020B0604020202020204" pitchFamily="34" charset="0"/>
+                <a:cs typeface="Helvetica" panose="020B0604020202020204" pitchFamily="34" charset="0"/>
+              </a:rPr>
+              <a:t>declining</a:t>
+            </a:r>
+            <a:r>
+              <a:rPr lang="es-ES" dirty="0">
+                <a:latin typeface="Helvetica" panose="020B0604020202020204" pitchFamily="34" charset="0"/>
+                <a:cs typeface="Helvetica" panose="020B0604020202020204" pitchFamily="34" charset="0"/>
+              </a:rPr>
+              <a:t> sites. </a:t>
+            </a:r>
+            <a:r>
+              <a:rPr lang="es-ES" b="1" dirty="0" err="1">
+                <a:latin typeface="Helvetica" panose="020B0604020202020204" pitchFamily="34" charset="0"/>
+                <a:cs typeface="Helvetica" panose="020B0604020202020204" pitchFamily="34" charset="0"/>
+              </a:rPr>
+              <a:t>Denser</a:t>
             </a:r>
             <a:r>
               <a:rPr lang="es-ES" b="1" dirty="0">
                 <a:latin typeface="Helvetica" panose="020B0604020202020204" pitchFamily="34" charset="0"/>
                 <a:cs typeface="Helvetica" panose="020B0604020202020204" pitchFamily="34" charset="0"/>
               </a:rPr>
+              <a:t> stands </a:t>
+            </a:r>
+            <a:r>
+              <a:rPr lang="es-ES" dirty="0">
+                <a:latin typeface="Helvetica" panose="020B0604020202020204" pitchFamily="34" charset="0"/>
+                <a:cs typeface="Helvetica" panose="020B0604020202020204" pitchFamily="34" charset="0"/>
+              </a:rPr>
+              <a:t>are </a:t>
+            </a:r>
+            <a:r>
+              <a:rPr lang="es-ES" b="1" dirty="0">
+                <a:latin typeface="Helvetica" panose="020B0604020202020204" pitchFamily="34" charset="0"/>
+                <a:cs typeface="Helvetica" panose="020B0604020202020204" pitchFamily="34" charset="0"/>
+              </a:rPr>
+              <a:t>more vulnerable </a:t>
+            </a:r>
+            <a:r>
+              <a:rPr lang="es-ES" dirty="0" err="1">
+                <a:latin typeface="Helvetica" panose="020B0604020202020204" pitchFamily="34" charset="0"/>
+                <a:cs typeface="Helvetica" panose="020B0604020202020204" pitchFamily="34" charset="0"/>
+              </a:rPr>
+              <a:t>due</a:t>
+            </a:r>
+            <a:r>
+              <a:rPr lang="es-ES" dirty="0">
+                <a:latin typeface="Helvetica" panose="020B0604020202020204" pitchFamily="34" charset="0"/>
+                <a:cs typeface="Helvetica" panose="020B0604020202020204" pitchFamily="34" charset="0"/>
+              </a:rPr>
               <a:t> </a:t>
             </a:r>
             <a:r>
-              <a:rPr lang="es-ES" b="1" dirty="0" err="1">
-                <a:latin typeface="Helvetica" panose="020B0604020202020204" pitchFamily="34" charset="0"/>
-                <a:cs typeface="Helvetica" panose="020B0604020202020204" pitchFamily="34" charset="0"/>
-              </a:rPr>
-              <a:t>rates</a:t>
+              <a:rPr lang="es-ES" dirty="0" err="1">
+                <a:latin typeface="Helvetica" panose="020B0604020202020204" pitchFamily="34" charset="0"/>
+                <a:cs typeface="Helvetica" panose="020B0604020202020204" pitchFamily="34" charset="0"/>
+              </a:rPr>
+              <a:t>limitting</a:t>
             </a:r>
             <a:r>
               <a:rPr lang="es-ES" dirty="0">
                 <a:latin typeface="Helvetica" panose="020B0604020202020204" pitchFamily="34" charset="0"/>
                 <a:cs typeface="Helvetica" panose="020B0604020202020204" pitchFamily="34" charset="0"/>
               </a:rPr>
-              <a:t> are more intense in </a:t>
+              <a:t> </a:t>
             </a:r>
             <a:r>
               <a:rPr lang="es-ES" dirty="0" err="1">
                 <a:latin typeface="Helvetica" panose="020B0604020202020204" pitchFamily="34" charset="0"/>
                 <a:cs typeface="Helvetica" panose="020B0604020202020204" pitchFamily="34" charset="0"/>
               </a:rPr>
-              <a:t>higher</a:t>
+              <a:t>water</a:t>
             </a:r>
             <a:r>
               <a:rPr lang="es-ES" dirty="0">
                 <a:latin typeface="Helvetica" panose="020B0604020202020204" pitchFamily="34" charset="0"/>
                 <a:cs typeface="Helvetica" panose="020B0604020202020204" pitchFamily="34" charset="0"/>
               </a:rPr>
-              <a:t> in </a:t>
+              <a:t> and </a:t>
             </a:r>
             <a:r>
               <a:rPr lang="es-ES" dirty="0" err="1">
                 <a:latin typeface="Helvetica" panose="020B0604020202020204" pitchFamily="34" charset="0"/>
                 <a:cs typeface="Helvetica" panose="020B0604020202020204" pitchFamily="34" charset="0"/>
               </a:rPr>
-              <a:t>declining</a:t>
+              <a:t>nutrients</a:t>
             </a:r>
             <a:r>
               <a:rPr lang="es-ES" dirty="0">
                 <a:latin typeface="Helvetica" panose="020B0604020202020204" pitchFamily="34" charset="0"/>
                 <a:cs typeface="Helvetica" panose="020B0604020202020204" pitchFamily="34" charset="0"/>
               </a:rPr>
-              <a:t> sites. </a:t>
+              <a:t> </a:t>
             </a:r>
             <a:r>
               <a:rPr lang="es-ES" dirty="0" err="1">
                 <a:latin typeface="Helvetica" panose="020B0604020202020204" pitchFamily="34" charset="0"/>
                 <a:cs typeface="Helvetica" panose="020B0604020202020204" pitchFamily="34" charset="0"/>
               </a:rPr>
-              <a:t>Trees</a:t>
+              <a:t>availability</a:t>
             </a:r>
             <a:r>
               <a:rPr lang="es-ES" dirty="0">
                 <a:latin typeface="Helvetica" panose="020B0604020202020204" pitchFamily="34" charset="0"/>
                 <a:cs typeface="Helvetica" panose="020B0604020202020204" pitchFamily="34" charset="0"/>
               </a:rPr>
-              <a:t> </a:t>
-            </a:r>
-            <a:r>
-              <a:rPr lang="es-ES" dirty="0" err="1">
-                <a:latin typeface="Helvetica" panose="020B0604020202020204" pitchFamily="34" charset="0"/>
-                <a:cs typeface="Helvetica" panose="020B0604020202020204" pitchFamily="34" charset="0"/>
-              </a:rPr>
-              <a:t>with</a:t>
-            </a:r>
-            <a:r>
-              <a:rPr lang="es-ES" dirty="0">
-                <a:latin typeface="Helvetica" panose="020B0604020202020204" pitchFamily="34" charset="0"/>
-                <a:cs typeface="Helvetica" panose="020B0604020202020204" pitchFamily="34" charset="0"/>
-              </a:rPr>
-              <a:t> </a:t>
-            </a:r>
-            <a:r>
-              <a:rPr lang="es-ES" b="1" dirty="0" err="1">
-                <a:latin typeface="Helvetica" panose="020B0604020202020204" pitchFamily="34" charset="0"/>
-                <a:cs typeface="Helvetica" panose="020B0604020202020204" pitchFamily="34" charset="0"/>
-              </a:rPr>
-              <a:t>declining</a:t>
-            </a:r>
-            <a:r>
-              <a:rPr lang="es-ES" b="1" dirty="0">
-                <a:latin typeface="Helvetica" panose="020B0604020202020204" pitchFamily="34" charset="0"/>
-                <a:cs typeface="Helvetica" panose="020B0604020202020204" pitchFamily="34" charset="0"/>
-              </a:rPr>
-              <a:t> </a:t>
-            </a:r>
-            <a:r>
-              <a:rPr lang="es-ES" b="1" dirty="0" err="1">
-                <a:latin typeface="Helvetica" panose="020B0604020202020204" pitchFamily="34" charset="0"/>
-                <a:cs typeface="Helvetica" panose="020B0604020202020204" pitchFamily="34" charset="0"/>
-              </a:rPr>
-              <a:t>growth</a:t>
-            </a:r>
-            <a:r>
-              <a:rPr lang="es-ES" b="1" dirty="0">
-                <a:latin typeface="Helvetica" panose="020B0604020202020204" pitchFamily="34" charset="0"/>
-                <a:cs typeface="Helvetica" panose="020B0604020202020204" pitchFamily="34" charset="0"/>
-              </a:rPr>
-              <a:t> </a:t>
-            </a:r>
-            <a:r>
-              <a:rPr lang="es-ES" b="1" dirty="0" err="1">
-                <a:latin typeface="Helvetica" panose="020B0604020202020204" pitchFamily="34" charset="0"/>
-                <a:cs typeface="Helvetica" panose="020B0604020202020204" pitchFamily="34" charset="0"/>
-              </a:rPr>
-              <a:t>rates</a:t>
-            </a:r>
-            <a:r>
-              <a:rPr lang="es-ES" b="1" dirty="0">
-                <a:latin typeface="Helvetica" panose="020B0604020202020204" pitchFamily="34" charset="0"/>
-                <a:cs typeface="Helvetica" panose="020B0604020202020204" pitchFamily="34" charset="0"/>
-              </a:rPr>
-              <a:t> </a:t>
-            </a:r>
-            <a:r>
-              <a:rPr lang="es-ES" dirty="0">
-                <a:latin typeface="Helvetica" panose="020B0604020202020204" pitchFamily="34" charset="0"/>
-                <a:cs typeface="Helvetica" panose="020B0604020202020204" pitchFamily="34" charset="0"/>
-              </a:rPr>
-              <a:t>are more vulnerable </a:t>
-            </a:r>
-            <a:r>
-              <a:rPr lang="es-ES" dirty="0" err="1">
-                <a:latin typeface="Helvetica" panose="020B0604020202020204" pitchFamily="34" charset="0"/>
-                <a:cs typeface="Helvetica" panose="020B0604020202020204" pitchFamily="34" charset="0"/>
-              </a:rPr>
-              <a:t>to</a:t>
-            </a:r>
-            <a:r>
-              <a:rPr lang="es-ES" dirty="0">
-                <a:latin typeface="Helvetica" panose="020B0604020202020204" pitchFamily="34" charset="0"/>
-                <a:cs typeface="Helvetica" panose="020B0604020202020204" pitchFamily="34" charset="0"/>
-              </a:rPr>
-              <a:t> </a:t>
-            </a:r>
-            <a:r>
-              <a:rPr lang="es-ES" dirty="0" err="1">
-                <a:latin typeface="Helvetica" panose="020B0604020202020204" pitchFamily="34" charset="0"/>
-                <a:cs typeface="Helvetica" panose="020B0604020202020204" pitchFamily="34" charset="0"/>
-              </a:rPr>
-              <a:t>drought</a:t>
-            </a:r>
-            <a:endParaRPr lang="es-ES" dirty="0">
-              <a:latin typeface="Helvetica" panose="020B0604020202020204" pitchFamily="34" charset="0"/>
-              <a:cs typeface="Helvetica" panose="020B0604020202020204" pitchFamily="34" charset="0"/>
-            </a:endParaRPr>
-          </a:p>
-        </p:txBody>
-      </p:sp>
-      <p:sp>
-        <p:nvSpPr>
-          <p:cNvPr id="14" name="CuadroTexto 10">
-            <a:extLst>
-              <a:ext uri="{FF2B5EF4-FFF2-40B4-BE49-F238E27FC236}">
-                <a16:creationId xmlns:a16="http://schemas.microsoft.com/office/drawing/2014/main" id="{984E2E61-6987-446E-0F1F-3DDE3400E43F}"/>
-              </a:ext>
-            </a:extLst>
-          </p:cNvPr>
-          <p:cNvSpPr txBox="1"/>
-          <p:nvPr/>
-        </p:nvSpPr>
-        <p:spPr>
-          <a:xfrm>
-            <a:off x="129540" y="6100313"/>
-            <a:ext cx="5664199" cy="369332"/>
-          </a:xfrm>
-          <a:prstGeom prst="rect">
-            <a:avLst/>
-          </a:prstGeom>
-          <a:noFill/>
-        </p:spPr>
-        <p:txBody>
-          <a:bodyPr wrap="square" rtlCol="0">
-            <a:spAutoFit/>
-          </a:bodyPr>
-          <a:lstStyle>
-            <a:defPPr>
-              <a:defRPr lang="es-ES"/>
-            </a:defPPr>
-            <a:lvl1pPr marL="0" algn="l" defTabSz="914400" rtl="0" eaLnBrk="1" latinLnBrk="0" hangingPunct="1">
-              <a:defRPr sz="1800" kern="1200">
-                <a:solidFill>
-                  <a:schemeClr val="tx1"/>
-                </a:solidFill>
-                <a:latin typeface="+mn-lt"/>
-                <a:ea typeface="+mn-ea"/>
-                <a:cs typeface="+mn-cs"/>
-              </a:defRPr>
-            </a:lvl1pPr>
-            <a:lvl2pPr marL="457200" algn="l" defTabSz="914400" rtl="0" eaLnBrk="1" latinLnBrk="0" hangingPunct="1">
-              <a:defRPr sz="1800" kern="1200">
-                <a:solidFill>
-                  <a:schemeClr val="tx1"/>
-                </a:solidFill>
-                <a:latin typeface="+mn-lt"/>
-                <a:ea typeface="+mn-ea"/>
-                <a:cs typeface="+mn-cs"/>
-              </a:defRPr>
-            </a:lvl2pPr>
-            <a:lvl3pPr marL="914400" algn="l" defTabSz="914400" rtl="0" eaLnBrk="1" latinLnBrk="0" hangingPunct="1">
-              <a:defRPr sz="1800" kern="1200">
-                <a:solidFill>
-                  <a:schemeClr val="tx1"/>
-                </a:solidFill>
-                <a:latin typeface="+mn-lt"/>
-                <a:ea typeface="+mn-ea"/>
-                <a:cs typeface="+mn-cs"/>
-              </a:defRPr>
-            </a:lvl3pPr>
-            <a:lvl4pPr marL="1371600" algn="l" defTabSz="914400" rtl="0" eaLnBrk="1" latinLnBrk="0" hangingPunct="1">
-              <a:defRPr sz="1800" kern="1200">
-                <a:solidFill>
-                  <a:schemeClr val="tx1"/>
-                </a:solidFill>
-                <a:latin typeface="+mn-lt"/>
-                <a:ea typeface="+mn-ea"/>
-                <a:cs typeface="+mn-cs"/>
-              </a:defRPr>
-            </a:lvl4pPr>
-            <a:lvl5pPr marL="1828800" algn="l" defTabSz="914400" rtl="0" eaLnBrk="1" latinLnBrk="0" hangingPunct="1">
-              <a:defRPr sz="1800" kern="1200">
-                <a:solidFill>
-                  <a:schemeClr val="tx1"/>
-                </a:solidFill>
-                <a:latin typeface="+mn-lt"/>
-                <a:ea typeface="+mn-ea"/>
-                <a:cs typeface="+mn-cs"/>
-              </a:defRPr>
-            </a:lvl5pPr>
-            <a:lvl6pPr marL="2286000" algn="l" defTabSz="914400" rtl="0" eaLnBrk="1" latinLnBrk="0" hangingPunct="1">
-              <a:defRPr sz="1800" kern="1200">
-                <a:solidFill>
-                  <a:schemeClr val="tx1"/>
-                </a:solidFill>
-                <a:latin typeface="+mn-lt"/>
-                <a:ea typeface="+mn-ea"/>
-                <a:cs typeface="+mn-cs"/>
-              </a:defRPr>
-            </a:lvl6pPr>
-            <a:lvl7pPr marL="2743200" algn="l" defTabSz="914400" rtl="0" eaLnBrk="1" latinLnBrk="0" hangingPunct="1">
-              <a:defRPr sz="1800" kern="1200">
-                <a:solidFill>
-                  <a:schemeClr val="tx1"/>
-                </a:solidFill>
-                <a:latin typeface="+mn-lt"/>
-                <a:ea typeface="+mn-ea"/>
-                <a:cs typeface="+mn-cs"/>
-              </a:defRPr>
-            </a:lvl7pPr>
-            <a:lvl8pPr marL="3200400" algn="l" defTabSz="914400" rtl="0" eaLnBrk="1" latinLnBrk="0" hangingPunct="1">
-              <a:defRPr sz="1800" kern="1200">
-                <a:solidFill>
-                  <a:schemeClr val="tx1"/>
-                </a:solidFill>
-                <a:latin typeface="+mn-lt"/>
-                <a:ea typeface="+mn-ea"/>
-                <a:cs typeface="+mn-cs"/>
-              </a:defRPr>
-            </a:lvl8pPr>
-            <a:lvl9pPr marL="3657600" algn="l" defTabSz="914400" rtl="0" eaLnBrk="1" latinLnBrk="0" hangingPunct="1">
-              <a:defRPr sz="1800" kern="1200">
-                <a:solidFill>
-                  <a:schemeClr val="tx1"/>
-                </a:solidFill>
-                <a:latin typeface="+mn-lt"/>
-                <a:ea typeface="+mn-ea"/>
-                <a:cs typeface="+mn-cs"/>
-              </a:defRPr>
-            </a:lvl9pPr>
-          </a:lstStyle>
-          <a:p>
-            <a:pPr lvl="1" algn="ctr"/>
-            <a:r>
-              <a:rPr lang="es-ES" b="1" dirty="0" err="1">
-                <a:solidFill>
-                  <a:srgbClr val="FF0000"/>
-                </a:solidFill>
-                <a:latin typeface="Helvetica" panose="020B0604020202020204" pitchFamily="34" charset="0"/>
-                <a:cs typeface="Helvetica" panose="020B0604020202020204" pitchFamily="34" charset="0"/>
-              </a:rPr>
-              <a:t>Contrary</a:t>
-            </a:r>
-            <a:r>
-              <a:rPr lang="es-ES" b="1" dirty="0">
-                <a:solidFill>
-                  <a:srgbClr val="FF0000"/>
-                </a:solidFill>
-                <a:latin typeface="Helvetica" panose="020B0604020202020204" pitchFamily="34" charset="0"/>
-                <a:cs typeface="Helvetica" panose="020B0604020202020204" pitchFamily="34" charset="0"/>
-              </a:rPr>
-              <a:t> </a:t>
-            </a:r>
-            <a:r>
-              <a:rPr lang="es-ES" b="1" dirty="0" err="1">
-                <a:solidFill>
-                  <a:srgbClr val="FF0000"/>
-                </a:solidFill>
-                <a:latin typeface="Helvetica" panose="020B0604020202020204" pitchFamily="34" charset="0"/>
-                <a:cs typeface="Helvetica" panose="020B0604020202020204" pitchFamily="34" charset="0"/>
-              </a:rPr>
-              <a:t>to</a:t>
-            </a:r>
-            <a:r>
-              <a:rPr lang="es-ES" b="1" dirty="0">
-                <a:solidFill>
-                  <a:srgbClr val="FF0000"/>
-                </a:solidFill>
-                <a:latin typeface="Helvetica" panose="020B0604020202020204" pitchFamily="34" charset="0"/>
-                <a:cs typeface="Helvetica" panose="020B0604020202020204" pitchFamily="34" charset="0"/>
-              </a:rPr>
-              <a:t> </a:t>
-            </a:r>
-            <a:r>
-              <a:rPr lang="es-ES" b="1" dirty="0" err="1">
-                <a:solidFill>
-                  <a:srgbClr val="FF0000"/>
-                </a:solidFill>
-                <a:latin typeface="Helvetica" panose="020B0604020202020204" pitchFamily="34" charset="0"/>
-                <a:cs typeface="Helvetica" panose="020B0604020202020204" pitchFamily="34" charset="0"/>
-              </a:rPr>
-              <a:t>what</a:t>
-            </a:r>
-            <a:r>
-              <a:rPr lang="es-ES" b="1" dirty="0">
-                <a:solidFill>
-                  <a:srgbClr val="FF0000"/>
-                </a:solidFill>
-                <a:latin typeface="Helvetica" panose="020B0604020202020204" pitchFamily="34" charset="0"/>
-                <a:cs typeface="Helvetica" panose="020B0604020202020204" pitchFamily="34" charset="0"/>
-              </a:rPr>
-              <a:t> </a:t>
-            </a:r>
-            <a:r>
-              <a:rPr lang="es-ES" b="1" dirty="0" err="1">
-                <a:solidFill>
-                  <a:srgbClr val="FF0000"/>
-                </a:solidFill>
-                <a:latin typeface="Helvetica" panose="020B0604020202020204" pitchFamily="34" charset="0"/>
-                <a:cs typeface="Helvetica" panose="020B0604020202020204" pitchFamily="34" charset="0"/>
-              </a:rPr>
-              <a:t>we</a:t>
-            </a:r>
-            <a:r>
-              <a:rPr lang="es-ES" b="1" dirty="0">
-                <a:solidFill>
-                  <a:srgbClr val="FF0000"/>
-                </a:solidFill>
-                <a:latin typeface="Helvetica" panose="020B0604020202020204" pitchFamily="34" charset="0"/>
-                <a:cs typeface="Helvetica" panose="020B0604020202020204" pitchFamily="34" charset="0"/>
-              </a:rPr>
-              <a:t> </a:t>
-            </a:r>
-            <a:r>
-              <a:rPr lang="es-ES" b="1" dirty="0" err="1">
-                <a:solidFill>
-                  <a:srgbClr val="FF0000"/>
-                </a:solidFill>
-                <a:latin typeface="Helvetica" panose="020B0604020202020204" pitchFamily="34" charset="0"/>
-                <a:cs typeface="Helvetica" panose="020B0604020202020204" pitchFamily="34" charset="0"/>
-              </a:rPr>
-              <a:t>expected</a:t>
-            </a:r>
-            <a:r>
-              <a:rPr lang="es-ES" b="1" dirty="0">
-                <a:solidFill>
-                  <a:srgbClr val="FF0000"/>
-                </a:solidFill>
-                <a:latin typeface="Helvetica" panose="020B0604020202020204" pitchFamily="34" charset="0"/>
-                <a:cs typeface="Helvetica" panose="020B0604020202020204" pitchFamily="34" charset="0"/>
-              </a:rPr>
-              <a:t>!</a:t>
-            </a:r>
-            <a:endParaRPr lang="es-ES" dirty="0">
-              <a:latin typeface="Helvetica" panose="020B0604020202020204" pitchFamily="34" charset="0"/>
-              <a:cs typeface="Helvetica" panose="020B0604020202020204" pitchFamily="34" charset="0"/>
-            </a:endParaRPr>
+              <a:t> per individual</a:t>
+            </a:r>
           </a:p>
         </p:txBody>
       </p:sp>
     </p:spTree>
     <p:extLst>
       <p:ext uri="{BB962C8B-B14F-4D97-AF65-F5344CB8AC3E}">
-        <p14:creationId xmlns:p14="http://schemas.microsoft.com/office/powerpoint/2010/main" val="3850298625"/>
+        <p14:creationId xmlns:p14="http://schemas.microsoft.com/office/powerpoint/2010/main" val="4188263335"/>
       </p:ext>
     </p:extLst>
   </p:cSld>
   <p:clrMapOvr>
     <a:masterClrMapping/>
   </p:clrMapOvr>
-  <p:extLst>
-    <p:ext uri="{6950BFC3-D8DA-4A85-94F7-54DA5524770B}">
-      <p188:commentRel xmlns:p188="http://schemas.microsoft.com/office/powerpoint/2018/8/main" r:id="rId2"/>
-    </p:ext>
-  </p:extLst>
 </p:sld>
 </file>
 
@@ -18712,7 +18676,7 @@
         <p:cNvPr id="1" name="">
           <a:extLst>
             <a:ext uri="{FF2B5EF4-FFF2-40B4-BE49-F238E27FC236}">
-              <a16:creationId xmlns:a16="http://schemas.microsoft.com/office/drawing/2014/main" id="{8CCFEB6C-5237-FAD5-FD30-22E62AF9C5E6}"/>
+              <a16:creationId xmlns:a16="http://schemas.microsoft.com/office/drawing/2014/main" id="{E5D7817C-A3F6-4CDF-EA36-D5DB876C36FA}"/>
             </a:ext>
           </a:extLst>
         </p:cNvPr>
@@ -18732,7 +18696,7 @@
           <p:cNvPr id="3" name="Rectangle 1">
             <a:extLst>
               <a:ext uri="{FF2B5EF4-FFF2-40B4-BE49-F238E27FC236}">
-                <a16:creationId xmlns:a16="http://schemas.microsoft.com/office/drawing/2014/main" id="{902E8109-2D9D-23DE-1AD2-033BA9B2E70F}"/>
+                <a16:creationId xmlns:a16="http://schemas.microsoft.com/office/drawing/2014/main" id="{51887738-5FA3-398F-5A45-8D1BE14389E1}"/>
               </a:ext>
             </a:extLst>
           </p:cNvPr>
@@ -18994,7 +18958,7 @@
           <p:cNvPr id="2" name="Título 1">
             <a:extLst>
               <a:ext uri="{FF2B5EF4-FFF2-40B4-BE49-F238E27FC236}">
-                <a16:creationId xmlns:a16="http://schemas.microsoft.com/office/drawing/2014/main" id="{CED90A4F-2E06-ED1D-D1D4-D61669DFD101}"/>
+                <a16:creationId xmlns:a16="http://schemas.microsoft.com/office/drawing/2014/main" id="{CFDAEAB4-983A-5310-50BA-5A0D50CDEDCC}"/>
               </a:ext>
             </a:extLst>
           </p:cNvPr>
@@ -19075,7 +19039,7 @@
           <p:cNvPr id="8" name="Título 1">
             <a:extLst>
               <a:ext uri="{FF2B5EF4-FFF2-40B4-BE49-F238E27FC236}">
-                <a16:creationId xmlns:a16="http://schemas.microsoft.com/office/drawing/2014/main" id="{E4569738-113F-F874-2875-405C8052CA6E}"/>
+                <a16:creationId xmlns:a16="http://schemas.microsoft.com/office/drawing/2014/main" id="{1549C90F-45ED-B3B2-EB45-508D4058995A}"/>
               </a:ext>
             </a:extLst>
           </p:cNvPr>
@@ -19149,10 +19113,10 @@
       </p:sp>
       <p:pic>
         <p:nvPicPr>
-          <p:cNvPr id="6" name="Imagen 5">
+          <p:cNvPr id="13" name="Imagen 12">
             <a:extLst>
               <a:ext uri="{FF2B5EF4-FFF2-40B4-BE49-F238E27FC236}">
-                <a16:creationId xmlns:a16="http://schemas.microsoft.com/office/drawing/2014/main" id="{F438458D-07A2-6454-15EC-DFD810CC89C2}"/>
+                <a16:creationId xmlns:a16="http://schemas.microsoft.com/office/drawing/2014/main" id="{E13DBB13-C45D-3BA8-A0AF-F4460C6C724D}"/>
               </a:ext>
             </a:extLst>
           </p:cNvPr>
@@ -19169,13 +19133,14 @@
               </a:ext>
             </a:extLst>
           </a:blip>
-          <a:srcRect l="67044" t="24665" r="-359" b="50950"/>
-          <a:stretch/>
+          <a:stretch>
+            <a:fillRect/>
+          </a:stretch>
         </p:blipFill>
         <p:spPr>
           <a:xfrm>
-            <a:off x="1234440" y="937508"/>
-            <a:ext cx="3205480" cy="2607059"/>
+            <a:off x="223935" y="1006150"/>
+            <a:ext cx="8957388" cy="4478695"/>
           </a:xfrm>
           <a:prstGeom prst="rect">
             <a:avLst/>
@@ -19184,10 +19149,10 @@
       </p:pic>
       <p:sp>
         <p:nvSpPr>
-          <p:cNvPr id="9" name="CuadroTexto 10">
+          <p:cNvPr id="15" name="CuadroTexto 10">
             <a:extLst>
               <a:ext uri="{FF2B5EF4-FFF2-40B4-BE49-F238E27FC236}">
-                <a16:creationId xmlns:a16="http://schemas.microsoft.com/office/drawing/2014/main" id="{1963F3A8-DB68-F37C-F7AD-65BDFDB074FB}"/>
+                <a16:creationId xmlns:a16="http://schemas.microsoft.com/office/drawing/2014/main" id="{376850FD-E880-7FF4-61E7-9A526E0ED34C}"/>
               </a:ext>
             </a:extLst>
           </p:cNvPr>
@@ -19196,8 +19161,8 @@
         </p:nvSpPr>
         <p:spPr>
           <a:xfrm>
-            <a:off x="7595119" y="4457406"/>
-            <a:ext cx="3872204" cy="923330"/>
+            <a:off x="6224763" y="3375849"/>
+            <a:ext cx="2956560" cy="2031325"/>
           </a:xfrm>
           <a:prstGeom prst="rect">
             <a:avLst/>
@@ -19306,31 +19271,73 @@
           <a:p>
             <a:pPr lvl="1" algn="ctr"/>
             <a:r>
+              <a:rPr lang="es-ES" b="1" dirty="0" err="1">
+                <a:latin typeface="Helvetica" panose="020B0604020202020204" pitchFamily="34" charset="0"/>
+                <a:cs typeface="Helvetica" panose="020B0604020202020204" pitchFamily="34" charset="0"/>
+              </a:rPr>
+              <a:t>Growth</a:t>
+            </a:r>
+            <a:r>
+              <a:rPr lang="es-ES" b="1" dirty="0">
+                <a:latin typeface="Helvetica" panose="020B0604020202020204" pitchFamily="34" charset="0"/>
+                <a:cs typeface="Helvetica" panose="020B0604020202020204" pitchFamily="34" charset="0"/>
+              </a:rPr>
+              <a:t> </a:t>
+            </a:r>
+            <a:r>
+              <a:rPr lang="es-ES" b="1" dirty="0" err="1">
+                <a:latin typeface="Helvetica" panose="020B0604020202020204" pitchFamily="34" charset="0"/>
+                <a:cs typeface="Helvetica" panose="020B0604020202020204" pitchFamily="34" charset="0"/>
+              </a:rPr>
+              <a:t>rates</a:t>
+            </a:r>
+            <a:r>
+              <a:rPr lang="es-ES" dirty="0">
+                <a:latin typeface="Helvetica" panose="020B0604020202020204" pitchFamily="34" charset="0"/>
+                <a:cs typeface="Helvetica" panose="020B0604020202020204" pitchFamily="34" charset="0"/>
+              </a:rPr>
+              <a:t> are more intense in </a:t>
+            </a:r>
+            <a:r>
               <a:rPr lang="es-ES" dirty="0" err="1">
                 <a:latin typeface="Helvetica" panose="020B0604020202020204" pitchFamily="34" charset="0"/>
                 <a:cs typeface="Helvetica" panose="020B0604020202020204" pitchFamily="34" charset="0"/>
               </a:rPr>
-              <a:t>Resistance</a:t>
+              <a:t>higher</a:t>
             </a:r>
             <a:r>
               <a:rPr lang="es-ES" dirty="0">
                 <a:latin typeface="Helvetica" panose="020B0604020202020204" pitchFamily="34" charset="0"/>
                 <a:cs typeface="Helvetica" panose="020B0604020202020204" pitchFamily="34" charset="0"/>
               </a:rPr>
-              <a:t> and </a:t>
+              <a:t> in </a:t>
             </a:r>
             <a:r>
               <a:rPr lang="es-ES" dirty="0" err="1">
                 <a:latin typeface="Helvetica" panose="020B0604020202020204" pitchFamily="34" charset="0"/>
                 <a:cs typeface="Helvetica" panose="020B0604020202020204" pitchFamily="34" charset="0"/>
               </a:rPr>
-              <a:t>Resilience</a:t>
+              <a:t>declining</a:t>
             </a:r>
             <a:r>
               <a:rPr lang="es-ES" dirty="0">
                 <a:latin typeface="Helvetica" panose="020B0604020202020204" pitchFamily="34" charset="0"/>
                 <a:cs typeface="Helvetica" panose="020B0604020202020204" pitchFamily="34" charset="0"/>
               </a:rPr>
+              <a:t> sites. </a:t>
+            </a:r>
+            <a:r>
+              <a:rPr lang="es-ES" dirty="0" err="1">
+                <a:latin typeface="Helvetica" panose="020B0604020202020204" pitchFamily="34" charset="0"/>
+                <a:cs typeface="Helvetica" panose="020B0604020202020204" pitchFamily="34" charset="0"/>
+              </a:rPr>
+              <a:t>Trees</a:t>
+            </a:r>
+            <a:r>
+              <a:rPr lang="es-ES" dirty="0">
+                <a:latin typeface="Helvetica" panose="020B0604020202020204" pitchFamily="34" charset="0"/>
+                <a:cs typeface="Helvetica" panose="020B0604020202020204" pitchFamily="34" charset="0"/>
+              </a:rPr>
               <a:t> </a:t>
             </a:r>
             <a:r>
@@ -19338,21 +19345,70 @@
                 <a:latin typeface="Helvetica" panose="020B0604020202020204" pitchFamily="34" charset="0"/>
                 <a:cs typeface="Helvetica" panose="020B0604020202020204" pitchFamily="34" charset="0"/>
               </a:rPr>
-              <a:t>values</a:t>
+              <a:t>with</a:t>
             </a:r>
             <a:r>
               <a:rPr lang="es-ES" dirty="0">
                 <a:latin typeface="Helvetica" panose="020B0604020202020204" pitchFamily="34" charset="0"/>
                 <a:cs typeface="Helvetica" panose="020B0604020202020204" pitchFamily="34" charset="0"/>
               </a:rPr>
-              <a:t> are </a:t>
+              <a:t> </a:t>
+            </a:r>
+            <a:r>
+              <a:rPr lang="es-ES" b="1" dirty="0" err="1">
+                <a:latin typeface="Helvetica" panose="020B0604020202020204" pitchFamily="34" charset="0"/>
+                <a:cs typeface="Helvetica" panose="020B0604020202020204" pitchFamily="34" charset="0"/>
+              </a:rPr>
+              <a:t>declining</a:t>
+            </a:r>
+            <a:r>
+              <a:rPr lang="es-ES" b="1" dirty="0">
+                <a:latin typeface="Helvetica" panose="020B0604020202020204" pitchFamily="34" charset="0"/>
+                <a:cs typeface="Helvetica" panose="020B0604020202020204" pitchFamily="34" charset="0"/>
+              </a:rPr>
+              <a:t> </a:t>
+            </a:r>
+            <a:r>
+              <a:rPr lang="es-ES" b="1" dirty="0" err="1">
+                <a:latin typeface="Helvetica" panose="020B0604020202020204" pitchFamily="34" charset="0"/>
+                <a:cs typeface="Helvetica" panose="020B0604020202020204" pitchFamily="34" charset="0"/>
+              </a:rPr>
+              <a:t>growth</a:t>
+            </a:r>
+            <a:r>
+              <a:rPr lang="es-ES" b="1" dirty="0">
+                <a:latin typeface="Helvetica" panose="020B0604020202020204" pitchFamily="34" charset="0"/>
+                <a:cs typeface="Helvetica" panose="020B0604020202020204" pitchFamily="34" charset="0"/>
+              </a:rPr>
+              <a:t> </a:t>
+            </a:r>
+            <a:r>
+              <a:rPr lang="es-ES" b="1" dirty="0" err="1">
+                <a:latin typeface="Helvetica" panose="020B0604020202020204" pitchFamily="34" charset="0"/>
+                <a:cs typeface="Helvetica" panose="020B0604020202020204" pitchFamily="34" charset="0"/>
+              </a:rPr>
+              <a:t>rates</a:t>
+            </a:r>
+            <a:r>
+              <a:rPr lang="es-ES" b="1" dirty="0">
+                <a:latin typeface="Helvetica" panose="020B0604020202020204" pitchFamily="34" charset="0"/>
+                <a:cs typeface="Helvetica" panose="020B0604020202020204" pitchFamily="34" charset="0"/>
+              </a:rPr>
+              <a:t> </a:t>
+            </a:r>
+            <a:r>
+              <a:rPr lang="es-ES" dirty="0">
+                <a:latin typeface="Helvetica" panose="020B0604020202020204" pitchFamily="34" charset="0"/>
+                <a:cs typeface="Helvetica" panose="020B0604020202020204" pitchFamily="34" charset="0"/>
+              </a:rPr>
+              <a:t>are more vulnerable </a:t>
             </a:r>
             <a:r>
               <a:rPr lang="es-ES" dirty="0" err="1">
                 <a:latin typeface="Helvetica" panose="020B0604020202020204" pitchFamily="34" charset="0"/>
                 <a:cs typeface="Helvetica" panose="020B0604020202020204" pitchFamily="34" charset="0"/>
               </a:rPr>
-              <a:t>different</a:t>
+              <a:t>to</a:t>
             </a:r>
             <a:r>
               <a:rPr lang="es-ES" dirty="0">
@@ -19366,77 +19422,7 @@
                 <a:latin typeface="Helvetica" panose="020B0604020202020204" pitchFamily="34" charset="0"/>
                 <a:cs typeface="Helvetica" panose="020B0604020202020204" pitchFamily="34" charset="0"/>
               </a:rPr>
-              <a:t>according</a:t>
-            </a:r>
-            <a:r>
-              <a:rPr lang="es-ES" dirty="0">
-                <a:latin typeface="Helvetica" panose="020B0604020202020204" pitchFamily="34" charset="0"/>
-                <a:cs typeface="Helvetica" panose="020B0604020202020204" pitchFamily="34" charset="0"/>
-              </a:rPr>
-              <a:t> </a:t>
-            </a:r>
-            <a:r>
-              <a:rPr lang="es-ES" dirty="0" err="1">
-                <a:latin typeface="Helvetica" panose="020B0604020202020204" pitchFamily="34" charset="0"/>
-                <a:cs typeface="Helvetica" panose="020B0604020202020204" pitchFamily="34" charset="0"/>
-              </a:rPr>
-              <a:t>to</a:t>
-            </a:r>
-            <a:r>
-              <a:rPr lang="es-ES" dirty="0">
-                <a:latin typeface="Helvetica" panose="020B0604020202020204" pitchFamily="34" charset="0"/>
-                <a:cs typeface="Helvetica" panose="020B0604020202020204" pitchFamily="34" charset="0"/>
-              </a:rPr>
-              <a:t> </a:t>
-            </a:r>
-            <a:r>
-              <a:rPr lang="es-ES" dirty="0" err="1">
-                <a:latin typeface="Helvetica" panose="020B0604020202020204" pitchFamily="34" charset="0"/>
-                <a:cs typeface="Helvetica" panose="020B0604020202020204" pitchFamily="34" charset="0"/>
-              </a:rPr>
-              <a:t>the</a:t>
-            </a:r>
-            <a:r>
-              <a:rPr lang="es-ES" dirty="0">
-                <a:latin typeface="Helvetica" panose="020B0604020202020204" pitchFamily="34" charset="0"/>
-                <a:cs typeface="Helvetica" panose="020B0604020202020204" pitchFamily="34" charset="0"/>
-              </a:rPr>
-              <a:t> </a:t>
-            </a:r>
-            <a:r>
-              <a:rPr lang="es-ES" dirty="0" err="1">
-                <a:latin typeface="Helvetica" panose="020B0604020202020204" pitchFamily="34" charset="0"/>
-                <a:cs typeface="Helvetica" panose="020B0604020202020204" pitchFamily="34" charset="0"/>
-              </a:rPr>
-              <a:t>year</a:t>
-            </a:r>
-            <a:r>
-              <a:rPr lang="es-ES" dirty="0">
-                <a:latin typeface="Helvetica" panose="020B0604020202020204" pitchFamily="34" charset="0"/>
-                <a:cs typeface="Helvetica" panose="020B0604020202020204" pitchFamily="34" charset="0"/>
-              </a:rPr>
-              <a:t> and </a:t>
-            </a:r>
-            <a:r>
-              <a:rPr lang="es-ES" dirty="0" err="1">
-                <a:latin typeface="Helvetica" panose="020B0604020202020204" pitchFamily="34" charset="0"/>
-                <a:cs typeface="Helvetica" panose="020B0604020202020204" pitchFamily="34" charset="0"/>
-              </a:rPr>
-              <a:t>the</a:t>
-            </a:r>
-            <a:r>
-              <a:rPr lang="es-ES" dirty="0">
-                <a:latin typeface="Helvetica" panose="020B0604020202020204" pitchFamily="34" charset="0"/>
-                <a:cs typeface="Helvetica" panose="020B0604020202020204" pitchFamily="34" charset="0"/>
-              </a:rPr>
-              <a:t> </a:t>
-            </a:r>
-            <a:r>
-              <a:rPr lang="es-ES" dirty="0" err="1">
-                <a:latin typeface="Helvetica" panose="020B0604020202020204" pitchFamily="34" charset="0"/>
-                <a:cs typeface="Helvetica" panose="020B0604020202020204" pitchFamily="34" charset="0"/>
-              </a:rPr>
-              <a:t>species</a:t>
+              <a:t>drought</a:t>
             </a:r>
             <a:endParaRPr lang="es-ES" dirty="0">
               <a:latin typeface="Helvetica" panose="020B0604020202020204" pitchFamily="34" charset="0"/>
@@ -19445,126 +19431,279 @@
           </a:p>
         </p:txBody>
       </p:sp>
-      <p:pic>
-        <p:nvPicPr>
-          <p:cNvPr id="4" name="Imagen 3">
+      <p:sp>
+        <p:nvSpPr>
+          <p:cNvPr id="16" name="CuadroTexto 10">
             <a:extLst>
               <a:ext uri="{FF2B5EF4-FFF2-40B4-BE49-F238E27FC236}">
-                <a16:creationId xmlns:a16="http://schemas.microsoft.com/office/drawing/2014/main" id="{9F708861-E722-E6AA-1AE5-7444F048B7AA}"/>
+                <a16:creationId xmlns:a16="http://schemas.microsoft.com/office/drawing/2014/main" id="{57FE396C-A654-0C38-F2C3-23BF5822CCB3}"/>
               </a:ext>
             </a:extLst>
           </p:cNvPr>
-          <p:cNvPicPr>
-            <a:picLocks noChangeAspect="1"/>
-          </p:cNvPicPr>
+          <p:cNvSpPr txBox="1"/>
           <p:nvPr/>
-        </p:nvPicPr>
-        <p:blipFill>
-          <a:blip r:embed="rId3">
-            <a:extLst>
-              <a:ext uri="{28A0092B-C50C-407E-A947-70E740481C1C}">
-                <a14:useLocalDpi xmlns:a14="http://schemas.microsoft.com/office/drawing/2010/main" val="0"/>
-              </a:ext>
-            </a:extLst>
-          </a:blip>
-          <a:srcRect l="-475" t="49349" r="33263" b="26266"/>
-          <a:stretch/>
-        </p:blipFill>
+        </p:nvSpPr>
         <p:spPr>
           <a:xfrm>
-            <a:off x="4518568" y="937508"/>
-            <a:ext cx="6467028" cy="2607059"/>
+            <a:off x="8907625" y="1477261"/>
+            <a:ext cx="3060440" cy="1477328"/>
           </a:xfrm>
           <a:prstGeom prst="rect">
             <a:avLst/>
           </a:prstGeom>
+          <a:noFill/>
         </p:spPr>
-      </p:pic>
-      <p:pic>
-        <p:nvPicPr>
-          <p:cNvPr id="10" name="Imagen 9">
-            <a:extLst>
-              <a:ext uri="{FF2B5EF4-FFF2-40B4-BE49-F238E27FC236}">
-                <a16:creationId xmlns:a16="http://schemas.microsoft.com/office/drawing/2014/main" id="{F6DA646B-2886-69BD-73C1-A198418D1044}"/>
-              </a:ext>
-            </a:extLst>
-          </p:cNvPr>
-          <p:cNvPicPr>
-            <a:picLocks noChangeAspect="1"/>
-          </p:cNvPicPr>
-          <p:nvPr/>
-        </p:nvPicPr>
-        <p:blipFill>
-          <a:blip r:embed="rId3">
-            <a:extLst>
-              <a:ext uri="{28A0092B-C50C-407E-A947-70E740481C1C}">
-                <a14:useLocalDpi xmlns:a14="http://schemas.microsoft.com/office/drawing/2010/main" val="0"/>
-              </a:ext>
-            </a:extLst>
-          </a:blip>
-          <a:srcRect l="66685" t="49652" b="25963"/>
-          <a:stretch/>
-        </p:blipFill>
-        <p:spPr>
-          <a:xfrm>
-            <a:off x="1234440" y="3615543"/>
-            <a:ext cx="3205480" cy="2607059"/>
-          </a:xfrm>
-          <a:prstGeom prst="rect">
-            <a:avLst/>
-          </a:prstGeom>
-        </p:spPr>
-      </p:pic>
-      <p:pic>
-        <p:nvPicPr>
-          <p:cNvPr id="11" name="Imagen 10">
-            <a:extLst>
-              <a:ext uri="{FF2B5EF4-FFF2-40B4-BE49-F238E27FC236}">
-                <a16:creationId xmlns:a16="http://schemas.microsoft.com/office/drawing/2014/main" id="{7EAF3FCA-BFB1-EEE7-4D5A-B7ADA2930AC4}"/>
-              </a:ext>
-            </a:extLst>
-          </p:cNvPr>
-          <p:cNvPicPr>
-            <a:picLocks noChangeAspect="1"/>
-          </p:cNvPicPr>
-          <p:nvPr/>
-        </p:nvPicPr>
-        <p:blipFill>
-          <a:blip r:embed="rId3">
-            <a:extLst>
-              <a:ext uri="{28A0092B-C50C-407E-A947-70E740481C1C}">
-                <a14:useLocalDpi xmlns:a14="http://schemas.microsoft.com/office/drawing/2010/main" val="0"/>
-              </a:ext>
-            </a:extLst>
-          </a:blip>
-          <a:srcRect l="291" t="74318" r="66394" b="1297"/>
-          <a:stretch/>
-        </p:blipFill>
-        <p:spPr>
-          <a:xfrm>
-            <a:off x="4546602" y="3615542"/>
-            <a:ext cx="3205480" cy="2607059"/>
-          </a:xfrm>
-          <a:prstGeom prst="rect">
-            <a:avLst/>
-          </a:prstGeom>
-        </p:spPr>
-      </p:pic>
+        <p:txBody>
+          <a:bodyPr wrap="square" rtlCol="0">
+            <a:spAutoFit/>
+          </a:bodyPr>
+          <a:lstStyle>
+            <a:defPPr>
+              <a:defRPr lang="es-ES"/>
+            </a:defPPr>
+            <a:lvl1pPr marL="0" algn="l" defTabSz="914400" rtl="0" eaLnBrk="1" latinLnBrk="0" hangingPunct="1">
+              <a:defRPr sz="1800" kern="1200">
+                <a:solidFill>
+                  <a:schemeClr val="tx1"/>
+                </a:solidFill>
+                <a:latin typeface="+mn-lt"/>
+                <a:ea typeface="+mn-ea"/>
+                <a:cs typeface="+mn-cs"/>
+              </a:defRPr>
+            </a:lvl1pPr>
+            <a:lvl2pPr marL="457200" algn="l" defTabSz="914400" rtl="0" eaLnBrk="1" latinLnBrk="0" hangingPunct="1">
+              <a:defRPr sz="1800" kern="1200">
+                <a:solidFill>
+                  <a:schemeClr val="tx1"/>
+                </a:solidFill>
+                <a:latin typeface="+mn-lt"/>
+                <a:ea typeface="+mn-ea"/>
+                <a:cs typeface="+mn-cs"/>
+              </a:defRPr>
+            </a:lvl2pPr>
+            <a:lvl3pPr marL="914400" algn="l" defTabSz="914400" rtl="0" eaLnBrk="1" latinLnBrk="0" hangingPunct="1">
+              <a:defRPr sz="1800" kern="1200">
+                <a:solidFill>
+                  <a:schemeClr val="tx1"/>
+                </a:solidFill>
+                <a:latin typeface="+mn-lt"/>
+                <a:ea typeface="+mn-ea"/>
+                <a:cs typeface="+mn-cs"/>
+              </a:defRPr>
+            </a:lvl3pPr>
+            <a:lvl4pPr marL="1371600" algn="l" defTabSz="914400" rtl="0" eaLnBrk="1" latinLnBrk="0" hangingPunct="1">
+              <a:defRPr sz="1800" kern="1200">
+                <a:solidFill>
+                  <a:schemeClr val="tx1"/>
+                </a:solidFill>
+                <a:latin typeface="+mn-lt"/>
+                <a:ea typeface="+mn-ea"/>
+                <a:cs typeface="+mn-cs"/>
+              </a:defRPr>
+            </a:lvl4pPr>
+            <a:lvl5pPr marL="1828800" algn="l" defTabSz="914400" rtl="0" eaLnBrk="1" latinLnBrk="0" hangingPunct="1">
+              <a:defRPr sz="1800" kern="1200">
+                <a:solidFill>
+                  <a:schemeClr val="tx1"/>
+                </a:solidFill>
+                <a:latin typeface="+mn-lt"/>
+                <a:ea typeface="+mn-ea"/>
+                <a:cs typeface="+mn-cs"/>
+              </a:defRPr>
+            </a:lvl5pPr>
+            <a:lvl6pPr marL="2286000" algn="l" defTabSz="914400" rtl="0" eaLnBrk="1" latinLnBrk="0" hangingPunct="1">
+              <a:defRPr sz="1800" kern="1200">
+                <a:solidFill>
+                  <a:schemeClr val="tx1"/>
+                </a:solidFill>
+                <a:latin typeface="+mn-lt"/>
+                <a:ea typeface="+mn-ea"/>
+                <a:cs typeface="+mn-cs"/>
+              </a:defRPr>
+            </a:lvl6pPr>
+            <a:lvl7pPr marL="2743200" algn="l" defTabSz="914400" rtl="0" eaLnBrk="1" latinLnBrk="0" hangingPunct="1">
+              <a:defRPr sz="1800" kern="1200">
+                <a:solidFill>
+                  <a:schemeClr val="tx1"/>
+                </a:solidFill>
+                <a:latin typeface="+mn-lt"/>
+                <a:ea typeface="+mn-ea"/>
+                <a:cs typeface="+mn-cs"/>
+              </a:defRPr>
+            </a:lvl7pPr>
+            <a:lvl8pPr marL="3200400" algn="l" defTabSz="914400" rtl="0" eaLnBrk="1" latinLnBrk="0" hangingPunct="1">
+              <a:defRPr sz="1800" kern="1200">
+                <a:solidFill>
+                  <a:schemeClr val="tx1"/>
+                </a:solidFill>
+                <a:latin typeface="+mn-lt"/>
+                <a:ea typeface="+mn-ea"/>
+                <a:cs typeface="+mn-cs"/>
+              </a:defRPr>
+            </a:lvl8pPr>
+            <a:lvl9pPr marL="3657600" algn="l" defTabSz="914400" rtl="0" eaLnBrk="1" latinLnBrk="0" hangingPunct="1">
+              <a:defRPr sz="1800" kern="1200">
+                <a:solidFill>
+                  <a:schemeClr val="tx1"/>
+                </a:solidFill>
+                <a:latin typeface="+mn-lt"/>
+                <a:ea typeface="+mn-ea"/>
+                <a:cs typeface="+mn-cs"/>
+              </a:defRPr>
+            </a:lvl9pPr>
+          </a:lstStyle>
+          <a:p>
+            <a:pPr lvl="1" algn="ctr"/>
+            <a:r>
+              <a:rPr lang="es-ES" dirty="0" err="1">
+                <a:latin typeface="Helvetica" panose="020B0604020202020204" pitchFamily="34" charset="0"/>
+                <a:cs typeface="Helvetica" panose="020B0604020202020204" pitchFamily="34" charset="0"/>
+              </a:rPr>
+              <a:t>Resistance</a:t>
+            </a:r>
+            <a:r>
+              <a:rPr lang="es-ES" dirty="0">
+                <a:latin typeface="Helvetica" panose="020B0604020202020204" pitchFamily="34" charset="0"/>
+                <a:cs typeface="Helvetica" panose="020B0604020202020204" pitchFamily="34" charset="0"/>
+              </a:rPr>
+              <a:t> and </a:t>
+            </a:r>
+            <a:r>
+              <a:rPr lang="es-ES" dirty="0" err="1">
+                <a:latin typeface="Helvetica" panose="020B0604020202020204" pitchFamily="34" charset="0"/>
+                <a:cs typeface="Helvetica" panose="020B0604020202020204" pitchFamily="34" charset="0"/>
+              </a:rPr>
+              <a:t>Resilience</a:t>
+            </a:r>
+            <a:r>
+              <a:rPr lang="es-ES" dirty="0">
+                <a:latin typeface="Helvetica" panose="020B0604020202020204" pitchFamily="34" charset="0"/>
+                <a:cs typeface="Helvetica" panose="020B0604020202020204" pitchFamily="34" charset="0"/>
+              </a:rPr>
+              <a:t> </a:t>
+            </a:r>
+            <a:r>
+              <a:rPr lang="es-ES" dirty="0" err="1">
+                <a:latin typeface="Helvetica" panose="020B0604020202020204" pitchFamily="34" charset="0"/>
+                <a:cs typeface="Helvetica" panose="020B0604020202020204" pitchFamily="34" charset="0"/>
+              </a:rPr>
+              <a:t>values</a:t>
+            </a:r>
+            <a:r>
+              <a:rPr lang="es-ES" dirty="0">
+                <a:latin typeface="Helvetica" panose="020B0604020202020204" pitchFamily="34" charset="0"/>
+                <a:cs typeface="Helvetica" panose="020B0604020202020204" pitchFamily="34" charset="0"/>
+              </a:rPr>
+              <a:t> are </a:t>
+            </a:r>
+            <a:r>
+              <a:rPr lang="es-ES" dirty="0" err="1">
+                <a:latin typeface="Helvetica" panose="020B0604020202020204" pitchFamily="34" charset="0"/>
+                <a:cs typeface="Helvetica" panose="020B0604020202020204" pitchFamily="34" charset="0"/>
+              </a:rPr>
+              <a:t>different</a:t>
+            </a:r>
+            <a:r>
+              <a:rPr lang="es-ES" dirty="0">
+                <a:latin typeface="Helvetica" panose="020B0604020202020204" pitchFamily="34" charset="0"/>
+                <a:cs typeface="Helvetica" panose="020B0604020202020204" pitchFamily="34" charset="0"/>
+              </a:rPr>
+              <a:t> </a:t>
+            </a:r>
+            <a:r>
+              <a:rPr lang="es-ES" dirty="0" err="1">
+                <a:latin typeface="Helvetica" panose="020B0604020202020204" pitchFamily="34" charset="0"/>
+                <a:cs typeface="Helvetica" panose="020B0604020202020204" pitchFamily="34" charset="0"/>
+              </a:rPr>
+              <a:t>according</a:t>
+            </a:r>
+            <a:r>
+              <a:rPr lang="es-ES" dirty="0">
+                <a:latin typeface="Helvetica" panose="020B0604020202020204" pitchFamily="34" charset="0"/>
+                <a:cs typeface="Helvetica" panose="020B0604020202020204" pitchFamily="34" charset="0"/>
+              </a:rPr>
+              <a:t> </a:t>
+            </a:r>
+            <a:r>
+              <a:rPr lang="es-ES" dirty="0" err="1">
+                <a:latin typeface="Helvetica" panose="020B0604020202020204" pitchFamily="34" charset="0"/>
+                <a:cs typeface="Helvetica" panose="020B0604020202020204" pitchFamily="34" charset="0"/>
+              </a:rPr>
+              <a:t>to</a:t>
+            </a:r>
+            <a:r>
+              <a:rPr lang="es-ES" dirty="0">
+                <a:latin typeface="Helvetica" panose="020B0604020202020204" pitchFamily="34" charset="0"/>
+                <a:cs typeface="Helvetica" panose="020B0604020202020204" pitchFamily="34" charset="0"/>
+              </a:rPr>
+              <a:t> </a:t>
+            </a:r>
+            <a:r>
+              <a:rPr lang="es-ES" dirty="0" err="1">
+                <a:latin typeface="Helvetica" panose="020B0604020202020204" pitchFamily="34" charset="0"/>
+                <a:cs typeface="Helvetica" panose="020B0604020202020204" pitchFamily="34" charset="0"/>
+              </a:rPr>
+              <a:t>the</a:t>
+            </a:r>
+            <a:r>
+              <a:rPr lang="es-ES" dirty="0">
+                <a:latin typeface="Helvetica" panose="020B0604020202020204" pitchFamily="34" charset="0"/>
+                <a:cs typeface="Helvetica" panose="020B0604020202020204" pitchFamily="34" charset="0"/>
+              </a:rPr>
+              <a:t> </a:t>
+            </a:r>
+            <a:r>
+              <a:rPr lang="es-ES" dirty="0" err="1">
+                <a:latin typeface="Helvetica" panose="020B0604020202020204" pitchFamily="34" charset="0"/>
+                <a:cs typeface="Helvetica" panose="020B0604020202020204" pitchFamily="34" charset="0"/>
+              </a:rPr>
+              <a:t>year</a:t>
+            </a:r>
+            <a:r>
+              <a:rPr lang="es-ES" dirty="0">
+                <a:latin typeface="Helvetica" panose="020B0604020202020204" pitchFamily="34" charset="0"/>
+                <a:cs typeface="Helvetica" panose="020B0604020202020204" pitchFamily="34" charset="0"/>
+              </a:rPr>
+              <a:t> and </a:t>
+            </a:r>
+            <a:r>
+              <a:rPr lang="es-ES" dirty="0" err="1">
+                <a:latin typeface="Helvetica" panose="020B0604020202020204" pitchFamily="34" charset="0"/>
+                <a:cs typeface="Helvetica" panose="020B0604020202020204" pitchFamily="34" charset="0"/>
+              </a:rPr>
+              <a:t>the</a:t>
+            </a:r>
+            <a:r>
+              <a:rPr lang="es-ES" dirty="0">
+                <a:latin typeface="Helvetica" panose="020B0604020202020204" pitchFamily="34" charset="0"/>
+                <a:cs typeface="Helvetica" panose="020B0604020202020204" pitchFamily="34" charset="0"/>
+              </a:rPr>
+              <a:t> </a:t>
+            </a:r>
+            <a:r>
+              <a:rPr lang="es-ES" dirty="0" err="1">
+                <a:latin typeface="Helvetica" panose="020B0604020202020204" pitchFamily="34" charset="0"/>
+                <a:cs typeface="Helvetica" panose="020B0604020202020204" pitchFamily="34" charset="0"/>
+              </a:rPr>
+              <a:t>species</a:t>
+            </a:r>
+            <a:endParaRPr lang="es-ES" dirty="0">
+              <a:latin typeface="Helvetica" panose="020B0604020202020204" pitchFamily="34" charset="0"/>
+              <a:cs typeface="Helvetica" panose="020B0604020202020204" pitchFamily="34" charset="0"/>
+            </a:endParaRPr>
+          </a:p>
+        </p:txBody>
+      </p:sp>
     </p:spTree>
     <p:extLst>
       <p:ext uri="{BB962C8B-B14F-4D97-AF65-F5344CB8AC3E}">
-        <p14:creationId xmlns:p14="http://schemas.microsoft.com/office/powerpoint/2010/main" val="128013919"/>
+        <p14:creationId xmlns:p14="http://schemas.microsoft.com/office/powerpoint/2010/main" val="660418765"/>
       </p:ext>
     </p:extLst>
   </p:cSld>
   <p:clrMapOvr>
     <a:masterClrMapping/>
   </p:clrMapOvr>
-  <p:extLst>
-    <p:ext uri="{6950BFC3-D8DA-4A85-94F7-54DA5524770B}">
-      <p188:commentRel xmlns:p188="http://schemas.microsoft.com/office/powerpoint/2018/8/main" r:id="rId2"/>
-    </p:ext>
-  </p:extLst>
 </p:sld>
 </file>
 
@@ -30767,10 +30906,10 @@
       </p:sp>
       <p:pic>
         <p:nvPicPr>
-          <p:cNvPr id="7" name="Imagen 6">
+          <p:cNvPr id="9" name="Imagen 8">
             <a:extLst>
               <a:ext uri="{FF2B5EF4-FFF2-40B4-BE49-F238E27FC236}">
-                <a16:creationId xmlns:a16="http://schemas.microsoft.com/office/drawing/2014/main" id="{3DCD98AE-E281-28B7-DDC6-9F8E6C5095C9}"/>
+                <a16:creationId xmlns:a16="http://schemas.microsoft.com/office/drawing/2014/main" id="{309A2C19-2DBA-1AE2-F8CF-9C15B2272987}"/>
               </a:ext>
             </a:extLst>
           </p:cNvPr>
@@ -30780,61 +30919,383 @@
           <p:nvPr/>
         </p:nvPicPr>
         <p:blipFill>
-          <a:blip r:embed="rId3">
+          <a:blip r:embed="rId2">
             <a:extLst>
               <a:ext uri="{28A0092B-C50C-407E-A947-70E740481C1C}">
                 <a14:useLocalDpi xmlns:a14="http://schemas.microsoft.com/office/drawing/2010/main" val="0"/>
               </a:ext>
             </a:extLst>
           </a:blip>
-          <a:srcRect t="5255"/>
-          <a:stretch/>
+          <a:srcRect t="7334" b="4493"/>
+          <a:stretch>
+            <a:fillRect/>
+          </a:stretch>
         </p:blipFill>
         <p:spPr>
           <a:xfrm>
-            <a:off x="3615224" y="920186"/>
-            <a:ext cx="8573689" cy="5846706"/>
+            <a:off x="3949147" y="811105"/>
+            <a:ext cx="6858000" cy="6046895"/>
           </a:xfrm>
           <a:prstGeom prst="rect">
             <a:avLst/>
           </a:prstGeom>
         </p:spPr>
       </p:pic>
-      <p:pic>
-        <p:nvPicPr>
-          <p:cNvPr id="8" name="Imagen 7">
+      <p:sp>
+        <p:nvSpPr>
+          <p:cNvPr id="10" name="Marcador de contenido 2">
             <a:extLst>
               <a:ext uri="{FF2B5EF4-FFF2-40B4-BE49-F238E27FC236}">
-                <a16:creationId xmlns:a16="http://schemas.microsoft.com/office/drawing/2014/main" id="{3E22E17E-5337-C684-089F-3EFE5D99CF6B}"/>
+                <a16:creationId xmlns:a16="http://schemas.microsoft.com/office/drawing/2014/main" id="{890B8ACB-5314-6A10-2AB3-9ECB817D1B6C}"/>
               </a:ext>
             </a:extLst>
           </p:cNvPr>
-          <p:cNvPicPr>
-            <a:picLocks noChangeAspect="1"/>
-          </p:cNvPicPr>
+          <p:cNvSpPr txBox="1">
+            <a:spLocks/>
+          </p:cNvSpPr>
           <p:nvPr/>
-        </p:nvPicPr>
-        <p:blipFill>
-          <a:blip r:embed="rId4">
-            <a:extLst>
-              <a:ext uri="{28A0092B-C50C-407E-A947-70E740481C1C}">
-                <a14:useLocalDpi xmlns:a14="http://schemas.microsoft.com/office/drawing/2010/main" val="0"/>
-              </a:ext>
-            </a:extLst>
-          </a:blip>
-          <a:srcRect t="9545" b="7334"/>
-          <a:stretch/>
-        </p:blipFill>
+        </p:nvSpPr>
         <p:spPr>
           <a:xfrm>
-            <a:off x="658548" y="1045028"/>
-            <a:ext cx="2833823" cy="2355479"/>
+            <a:off x="127518" y="990543"/>
+            <a:ext cx="3669229" cy="1355092"/>
           </a:xfrm>
           <a:prstGeom prst="rect">
             <a:avLst/>
           </a:prstGeom>
         </p:spPr>
-      </p:pic>
+        <p:txBody>
+          <a:bodyPr vert="horz" lIns="91440" tIns="45720" rIns="91440" bIns="45720" rtlCol="0" anchor="t">
+            <a:normAutofit/>
+          </a:bodyPr>
+          <a:lstStyle>
+            <a:lvl1pPr marL="228600" indent="-228600" algn="l" defTabSz="914400" rtl="0" eaLnBrk="1" latinLnBrk="0" hangingPunct="1">
+              <a:lnSpc>
+                <a:spcPct val="90000"/>
+              </a:lnSpc>
+              <a:spcBef>
+                <a:spcPts val="1000"/>
+              </a:spcBef>
+              <a:buFont typeface="Arial" panose="020B0604020202020204" pitchFamily="34" charset="0"/>
+              <a:buChar char="•"/>
+              <a:defRPr sz="2800" kern="1200">
+                <a:solidFill>
+                  <a:schemeClr val="tx1"/>
+                </a:solidFill>
+                <a:latin typeface="+mn-lt"/>
+                <a:ea typeface="+mn-ea"/>
+                <a:cs typeface="+mn-cs"/>
+              </a:defRPr>
+            </a:lvl1pPr>
+            <a:lvl2pPr marL="685800" indent="-228600" algn="l" defTabSz="914400" rtl="0" eaLnBrk="1" latinLnBrk="0" hangingPunct="1">
+              <a:lnSpc>
+                <a:spcPct val="90000"/>
+              </a:lnSpc>
+              <a:spcBef>
+                <a:spcPts val="500"/>
+              </a:spcBef>
+              <a:buFont typeface="Arial" panose="020B0604020202020204" pitchFamily="34" charset="0"/>
+              <a:buChar char="•"/>
+              <a:defRPr sz="2400" kern="1200">
+                <a:solidFill>
+                  <a:schemeClr val="tx1"/>
+                </a:solidFill>
+                <a:latin typeface="+mn-lt"/>
+                <a:ea typeface="+mn-ea"/>
+                <a:cs typeface="+mn-cs"/>
+              </a:defRPr>
+            </a:lvl2pPr>
+            <a:lvl3pPr marL="1143000" indent="-228600" algn="l" defTabSz="914400" rtl="0" eaLnBrk="1" latinLnBrk="0" hangingPunct="1">
+              <a:lnSpc>
+                <a:spcPct val="90000"/>
+              </a:lnSpc>
+              <a:spcBef>
+                <a:spcPts val="500"/>
+              </a:spcBef>
+              <a:buFont typeface="Arial" panose="020B0604020202020204" pitchFamily="34" charset="0"/>
+              <a:buChar char="•"/>
+              <a:defRPr sz="2000" kern="1200">
+                <a:solidFill>
+                  <a:schemeClr val="tx1"/>
+                </a:solidFill>
+                <a:latin typeface="+mn-lt"/>
+                <a:ea typeface="+mn-ea"/>
+                <a:cs typeface="+mn-cs"/>
+              </a:defRPr>
+            </a:lvl3pPr>
+            <a:lvl4pPr marL="1600200" indent="-228600" algn="l" defTabSz="914400" rtl="0" eaLnBrk="1" latinLnBrk="0" hangingPunct="1">
+              <a:lnSpc>
+                <a:spcPct val="90000"/>
+              </a:lnSpc>
+              <a:spcBef>
+                <a:spcPts val="500"/>
+              </a:spcBef>
+              <a:buFont typeface="Arial" panose="020B0604020202020204" pitchFamily="34" charset="0"/>
+              <a:buChar char="•"/>
+              <a:defRPr sz="1800" kern="1200">
+                <a:solidFill>
+                  <a:schemeClr val="tx1"/>
+                </a:solidFill>
+                <a:latin typeface="+mn-lt"/>
+                <a:ea typeface="+mn-ea"/>
+                <a:cs typeface="+mn-cs"/>
+              </a:defRPr>
+            </a:lvl4pPr>
+            <a:lvl5pPr marL="2057400" indent="-228600" algn="l" defTabSz="914400" rtl="0" eaLnBrk="1" latinLnBrk="0" hangingPunct="1">
+              <a:lnSpc>
+                <a:spcPct val="90000"/>
+              </a:lnSpc>
+              <a:spcBef>
+                <a:spcPts val="500"/>
+              </a:spcBef>
+              <a:buFont typeface="Arial" panose="020B0604020202020204" pitchFamily="34" charset="0"/>
+              <a:buChar char="•"/>
+              <a:defRPr sz="1800" kern="1200">
+                <a:solidFill>
+                  <a:schemeClr val="tx1"/>
+                </a:solidFill>
+                <a:latin typeface="+mn-lt"/>
+                <a:ea typeface="+mn-ea"/>
+                <a:cs typeface="+mn-cs"/>
+              </a:defRPr>
+            </a:lvl5pPr>
+            <a:lvl6pPr marL="2514600" indent="-228600" algn="l" defTabSz="914400" rtl="0" eaLnBrk="1" latinLnBrk="0" hangingPunct="1">
+              <a:lnSpc>
+                <a:spcPct val="90000"/>
+              </a:lnSpc>
+              <a:spcBef>
+                <a:spcPts val="500"/>
+              </a:spcBef>
+              <a:buFont typeface="Arial" panose="020B0604020202020204" pitchFamily="34" charset="0"/>
+              <a:buChar char="•"/>
+              <a:defRPr sz="1800" kern="1200">
+                <a:solidFill>
+                  <a:schemeClr val="tx1"/>
+                </a:solidFill>
+                <a:latin typeface="+mn-lt"/>
+                <a:ea typeface="+mn-ea"/>
+                <a:cs typeface="+mn-cs"/>
+              </a:defRPr>
+            </a:lvl6pPr>
+            <a:lvl7pPr marL="2971800" indent="-228600" algn="l" defTabSz="914400" rtl="0" eaLnBrk="1" latinLnBrk="0" hangingPunct="1">
+              <a:lnSpc>
+                <a:spcPct val="90000"/>
+              </a:lnSpc>
+              <a:spcBef>
+                <a:spcPts val="500"/>
+              </a:spcBef>
+              <a:buFont typeface="Arial" panose="020B0604020202020204" pitchFamily="34" charset="0"/>
+              <a:buChar char="•"/>
+              <a:defRPr sz="1800" kern="1200">
+                <a:solidFill>
+                  <a:schemeClr val="tx1"/>
+                </a:solidFill>
+                <a:latin typeface="+mn-lt"/>
+                <a:ea typeface="+mn-ea"/>
+                <a:cs typeface="+mn-cs"/>
+              </a:defRPr>
+            </a:lvl7pPr>
+            <a:lvl8pPr marL="3429000" indent="-228600" algn="l" defTabSz="914400" rtl="0" eaLnBrk="1" latinLnBrk="0" hangingPunct="1">
+              <a:lnSpc>
+                <a:spcPct val="90000"/>
+              </a:lnSpc>
+              <a:spcBef>
+                <a:spcPts val="500"/>
+              </a:spcBef>
+              <a:buFont typeface="Arial" panose="020B0604020202020204" pitchFamily="34" charset="0"/>
+              <a:buChar char="•"/>
+              <a:defRPr sz="1800" kern="1200">
+                <a:solidFill>
+                  <a:schemeClr val="tx1"/>
+                </a:solidFill>
+                <a:latin typeface="+mn-lt"/>
+                <a:ea typeface="+mn-ea"/>
+                <a:cs typeface="+mn-cs"/>
+              </a:defRPr>
+            </a:lvl8pPr>
+            <a:lvl9pPr marL="3886200" indent="-228600" algn="l" defTabSz="914400" rtl="0" eaLnBrk="1" latinLnBrk="0" hangingPunct="1">
+              <a:lnSpc>
+                <a:spcPct val="90000"/>
+              </a:lnSpc>
+              <a:spcBef>
+                <a:spcPts val="500"/>
+              </a:spcBef>
+              <a:buFont typeface="Arial" panose="020B0604020202020204" pitchFamily="34" charset="0"/>
+              <a:buChar char="•"/>
+              <a:defRPr sz="1800" kern="1200">
+                <a:solidFill>
+                  <a:schemeClr val="tx1"/>
+                </a:solidFill>
+                <a:latin typeface="+mn-lt"/>
+                <a:ea typeface="+mn-ea"/>
+                <a:cs typeface="+mn-cs"/>
+              </a:defRPr>
+            </a:lvl9pPr>
+          </a:lstStyle>
+          <a:p>
+            <a:pPr marL="457200" lvl="1" indent="0" algn="just">
+              <a:buClr>
+                <a:srgbClr val="218317"/>
+              </a:buClr>
+              <a:buNone/>
+            </a:pPr>
+            <a:r>
+              <a:rPr lang="es-ES" sz="2000" dirty="0">
+                <a:latin typeface="Helvetica" panose="020B0604020202020204" pitchFamily="34" charset="0"/>
+                <a:cs typeface="Helvetica" panose="020B0604020202020204" pitchFamily="34" charset="0"/>
+              </a:rPr>
+              <a:t>Fig. 1.: </a:t>
+            </a:r>
+            <a:r>
+              <a:rPr lang="es-ES" sz="2000" dirty="0" err="1">
+                <a:latin typeface="Helvetica" panose="020B0604020202020204" pitchFamily="34" charset="0"/>
+                <a:cs typeface="Helvetica" panose="020B0604020202020204" pitchFamily="34" charset="0"/>
+              </a:rPr>
+              <a:t>Study</a:t>
+            </a:r>
+            <a:r>
+              <a:rPr lang="es-ES" sz="2000" dirty="0">
+                <a:latin typeface="Helvetica" panose="020B0604020202020204" pitchFamily="34" charset="0"/>
+                <a:cs typeface="Helvetica" panose="020B0604020202020204" pitchFamily="34" charset="0"/>
+              </a:rPr>
+              <a:t> sites in Iberia. </a:t>
+            </a:r>
+            <a:r>
+              <a:rPr lang="es-ES" sz="2000" dirty="0" err="1">
+                <a:latin typeface="Helvetica" panose="020B0604020202020204" pitchFamily="34" charset="0"/>
+                <a:cs typeface="Helvetica" panose="020B0604020202020204" pitchFamily="34" charset="0"/>
+              </a:rPr>
+              <a:t>Coloured</a:t>
+            </a:r>
+            <a:r>
+              <a:rPr lang="es-ES" sz="2000" dirty="0">
+                <a:latin typeface="Helvetica" panose="020B0604020202020204" pitchFamily="34" charset="0"/>
+                <a:cs typeface="Helvetica" panose="020B0604020202020204" pitchFamily="34" charset="0"/>
+              </a:rPr>
+              <a:t> </a:t>
+            </a:r>
+            <a:r>
+              <a:rPr lang="es-ES" sz="2000" dirty="0" err="1">
+                <a:latin typeface="Helvetica" panose="020B0604020202020204" pitchFamily="34" charset="0"/>
+                <a:cs typeface="Helvetica" panose="020B0604020202020204" pitchFamily="34" charset="0"/>
+              </a:rPr>
+              <a:t>areas</a:t>
+            </a:r>
+            <a:r>
+              <a:rPr lang="es-ES" sz="2000" dirty="0">
+                <a:latin typeface="Helvetica" panose="020B0604020202020204" pitchFamily="34" charset="0"/>
+                <a:cs typeface="Helvetica" panose="020B0604020202020204" pitchFamily="34" charset="0"/>
+              </a:rPr>
+              <a:t> </a:t>
+            </a:r>
+            <a:r>
+              <a:rPr lang="es-ES" sz="2000" dirty="0" err="1">
+                <a:latin typeface="Helvetica" panose="020B0604020202020204" pitchFamily="34" charset="0"/>
+                <a:cs typeface="Helvetica" panose="020B0604020202020204" pitchFamily="34" charset="0"/>
+              </a:rPr>
+              <a:t>represent</a:t>
+            </a:r>
+            <a:r>
+              <a:rPr lang="es-ES" sz="2000" dirty="0">
+                <a:latin typeface="Helvetica" panose="020B0604020202020204" pitchFamily="34" charset="0"/>
+                <a:cs typeface="Helvetica" panose="020B0604020202020204" pitchFamily="34" charset="0"/>
+              </a:rPr>
+              <a:t> </a:t>
+            </a:r>
+            <a:r>
+              <a:rPr lang="es-ES" sz="2000" dirty="0" err="1">
+                <a:latin typeface="Helvetica" panose="020B0604020202020204" pitchFamily="34" charset="0"/>
+                <a:cs typeface="Helvetica" panose="020B0604020202020204" pitchFamily="34" charset="0"/>
+              </a:rPr>
+              <a:t>the</a:t>
+            </a:r>
+            <a:r>
+              <a:rPr lang="es-ES" sz="2000" dirty="0">
+                <a:latin typeface="Helvetica" panose="020B0604020202020204" pitchFamily="34" charset="0"/>
+                <a:cs typeface="Helvetica" panose="020B0604020202020204" pitchFamily="34" charset="0"/>
+              </a:rPr>
+              <a:t> </a:t>
+            </a:r>
+            <a:r>
+              <a:rPr lang="es-ES" sz="2000" dirty="0" err="1">
+                <a:latin typeface="Helvetica" panose="020B0604020202020204" pitchFamily="34" charset="0"/>
+                <a:cs typeface="Helvetica" panose="020B0604020202020204" pitchFamily="34" charset="0"/>
+              </a:rPr>
+              <a:t>distribution</a:t>
+            </a:r>
+            <a:r>
+              <a:rPr lang="es-ES" sz="2000" dirty="0">
+                <a:latin typeface="Helvetica" panose="020B0604020202020204" pitchFamily="34" charset="0"/>
+                <a:cs typeface="Helvetica" panose="020B0604020202020204" pitchFamily="34" charset="0"/>
+              </a:rPr>
+              <a:t> </a:t>
+            </a:r>
+            <a:r>
+              <a:rPr lang="es-ES" sz="2000" dirty="0" err="1">
+                <a:latin typeface="Helvetica" panose="020B0604020202020204" pitchFamily="34" charset="0"/>
+                <a:cs typeface="Helvetica" panose="020B0604020202020204" pitchFamily="34" charset="0"/>
+              </a:rPr>
+              <a:t>area</a:t>
+            </a:r>
+            <a:r>
+              <a:rPr lang="es-ES" sz="2000" dirty="0">
+                <a:latin typeface="Helvetica" panose="020B0604020202020204" pitchFamily="34" charset="0"/>
+                <a:cs typeface="Helvetica" panose="020B0604020202020204" pitchFamily="34" charset="0"/>
+              </a:rPr>
+              <a:t> </a:t>
+            </a:r>
+            <a:r>
+              <a:rPr lang="es-ES" sz="2000" dirty="0" err="1">
+                <a:latin typeface="Helvetica" panose="020B0604020202020204" pitchFamily="34" charset="0"/>
+                <a:cs typeface="Helvetica" panose="020B0604020202020204" pitchFamily="34" charset="0"/>
+              </a:rPr>
+              <a:t>of</a:t>
+            </a:r>
+            <a:r>
+              <a:rPr lang="es-ES" sz="2000" dirty="0">
+                <a:latin typeface="Helvetica" panose="020B0604020202020204" pitchFamily="34" charset="0"/>
+                <a:cs typeface="Helvetica" panose="020B0604020202020204" pitchFamily="34" charset="0"/>
+              </a:rPr>
+              <a:t> </a:t>
+            </a:r>
+            <a:r>
+              <a:rPr lang="es-ES" sz="2000" dirty="0" err="1">
+                <a:latin typeface="Helvetica" panose="020B0604020202020204" pitchFamily="34" charset="0"/>
+                <a:cs typeface="Helvetica" panose="020B0604020202020204" pitchFamily="34" charset="0"/>
+              </a:rPr>
+              <a:t>each</a:t>
+            </a:r>
+            <a:r>
+              <a:rPr lang="es-ES" sz="2000" dirty="0">
+                <a:latin typeface="Helvetica" panose="020B0604020202020204" pitchFamily="34" charset="0"/>
+                <a:cs typeface="Helvetica" panose="020B0604020202020204" pitchFamily="34" charset="0"/>
+              </a:rPr>
+              <a:t> </a:t>
+            </a:r>
+            <a:r>
+              <a:rPr lang="es-ES" sz="2000" dirty="0" err="1">
+                <a:latin typeface="Helvetica" panose="020B0604020202020204" pitchFamily="34" charset="0"/>
+                <a:cs typeface="Helvetica" panose="020B0604020202020204" pitchFamily="34" charset="0"/>
+              </a:rPr>
+              <a:t>species</a:t>
+            </a:r>
+            <a:r>
+              <a:rPr lang="es-ES" sz="2000" dirty="0">
+                <a:latin typeface="Helvetica" panose="020B0604020202020204" pitchFamily="34" charset="0"/>
+                <a:cs typeface="Helvetica" panose="020B0604020202020204" pitchFamily="34" charset="0"/>
+              </a:rPr>
+              <a:t>.</a:t>
+            </a:r>
+          </a:p>
+          <a:p>
+            <a:pPr algn="just"/>
+            <a:endParaRPr lang="es-ES" sz="2400" dirty="0">
+              <a:latin typeface="Helvetica" panose="020B0604020202020204" pitchFamily="34" charset="0"/>
+              <a:cs typeface="Helvetica" panose="020B0604020202020204" pitchFamily="34" charset="0"/>
+            </a:endParaRPr>
+          </a:p>
+        </p:txBody>
+      </p:sp>
     </p:spTree>
     <p:extLst>
       <p:ext uri="{BB962C8B-B14F-4D97-AF65-F5344CB8AC3E}">
@@ -30845,11 +31306,6 @@
   <p:clrMapOvr>
     <a:masterClrMapping/>
   </p:clrMapOvr>
-  <p:extLst>
-    <p:ext uri="{6950BFC3-D8DA-4A85-94F7-54DA5524770B}">
-      <p188:commentRel xmlns:p188="http://schemas.microsoft.com/office/powerpoint/2018/8/main" r:id="rId2"/>
-    </p:ext>
-  </p:extLst>
 </p:sld>
 </file>
 
@@ -32861,7 +33317,7 @@
         </p:nvSpPr>
         <p:spPr>
           <a:xfrm>
-            <a:off x="623545" y="2760950"/>
+            <a:off x="623545" y="2521266"/>
             <a:ext cx="10925077" cy="1146828"/>
           </a:xfrm>
           <a:prstGeom prst="rect">
@@ -33144,6 +33600,20 @@
                 <a:cs typeface="Helvetica"/>
               </a:rPr>
               <a:t>growth</a:t>
+            </a:r>
+            <a:r>
+              <a:rPr lang="es-ES" sz="2400" i="1" dirty="0">
+                <a:latin typeface="Helvetica"/>
+                <a:cs typeface="Helvetica"/>
+              </a:rPr>
+              <a:t> and </a:t>
+            </a:r>
+            <a:r>
+              <a:rPr lang="es-ES" sz="2400" i="1" dirty="0" err="1">
+                <a:latin typeface="Helvetica"/>
+                <a:cs typeface="Helvetica"/>
+              </a:rPr>
+              <a:t>resilience</a:t>
             </a:r>
             <a:r>
               <a:rPr lang="es-ES" sz="2400" i="1" dirty="0">
@@ -33460,8 +33930,8 @@
         </p:nvSpPr>
         <p:spPr>
           <a:xfrm>
-            <a:off x="643378" y="3907778"/>
-            <a:ext cx="10925077" cy="2561279"/>
+            <a:off x="643378" y="3359019"/>
+            <a:ext cx="11206500" cy="3293707"/>
           </a:xfrm>
           <a:prstGeom prst="rect">
             <a:avLst/>
@@ -33469,7 +33939,7 @@
         </p:spPr>
         <p:txBody>
           <a:bodyPr vert="horz" lIns="91440" tIns="45720" rIns="91440" bIns="45720" rtlCol="0" anchor="t">
-            <a:normAutofit lnSpcReduction="10000"/>
+            <a:normAutofit/>
           </a:bodyPr>
           <a:lstStyle>
             <a:lvl1pPr marL="228600" indent="-228600" algn="l" defTabSz="914400" rtl="0" eaLnBrk="1" latinLnBrk="0" hangingPunct="1">
@@ -33987,30 +34457,76 @@
                 <a:latin typeface="Helvetica"/>
                 <a:cs typeface="Helvetica"/>
               </a:rPr>
+              <a:t>, and </a:t>
+            </a:r>
+            <a:r>
+              <a:rPr lang="es-ES" sz="2400" b="1" dirty="0" err="1">
+                <a:latin typeface="Helvetica"/>
+                <a:cs typeface="Helvetica"/>
+              </a:rPr>
+              <a:t>resilience</a:t>
+            </a:r>
+            <a:r>
+              <a:rPr lang="es-ES" sz="2400" b="1" dirty="0">
+                <a:latin typeface="Helvetica"/>
+                <a:cs typeface="Helvetica"/>
+              </a:rPr>
+              <a:t> </a:t>
+            </a:r>
+            <a:r>
+              <a:rPr lang="es-ES" sz="2400" dirty="0">
+                <a:latin typeface="Helvetica"/>
+                <a:cs typeface="Helvetica"/>
+              </a:rPr>
+              <a:t> </a:t>
+            </a:r>
+            <a:r>
+              <a:rPr lang="es-ES" sz="2400" dirty="0">
+                <a:latin typeface="Helvetica"/>
+                <a:cs typeface="Helvetica"/>
+                <a:sym typeface="Wingdings" panose="05000000000000000000" pitchFamily="2" charset="2"/>
+              </a:rPr>
+              <a:t> </a:t>
+            </a:r>
+            <a:r>
+              <a:rPr lang="es-ES" sz="2400" b="1" dirty="0">
+                <a:latin typeface="Helvetica"/>
+                <a:cs typeface="Helvetica"/>
+                <a:sym typeface="Wingdings" panose="05000000000000000000" pitchFamily="2" charset="2"/>
+              </a:rPr>
+              <a:t>↓ BAI, </a:t>
+            </a:r>
+            <a:r>
+              <a:rPr lang="es-ES" sz="2400" b="1" dirty="0" err="1">
+                <a:latin typeface="Helvetica"/>
+                <a:cs typeface="Helvetica"/>
+                <a:sym typeface="Wingdings" panose="05000000000000000000" pitchFamily="2" charset="2"/>
+              </a:rPr>
+              <a:t>Rt</a:t>
+            </a:r>
+            <a:r>
+              <a:rPr lang="es-ES" sz="2400" b="1" dirty="0">
+                <a:latin typeface="Helvetica"/>
+                <a:cs typeface="Helvetica"/>
+                <a:sym typeface="Wingdings" panose="05000000000000000000" pitchFamily="2" charset="2"/>
+              </a:rPr>
+              <a:t> &amp; </a:t>
+            </a:r>
+            <a:r>
+              <a:rPr lang="es-ES" sz="2400" b="1" dirty="0" err="1">
+                <a:latin typeface="Helvetica"/>
+                <a:cs typeface="Helvetica"/>
+                <a:sym typeface="Wingdings" panose="05000000000000000000" pitchFamily="2" charset="2"/>
+              </a:rPr>
+              <a:t>Rs</a:t>
+            </a:r>
+            <a:r>
+              <a:rPr lang="es-ES" sz="2400" b="1" dirty="0">
+                <a:latin typeface="Helvetica"/>
+                <a:cs typeface="Helvetica"/>
+                <a:sym typeface="Wingdings" panose="05000000000000000000" pitchFamily="2" charset="2"/>
+              </a:rPr>
               <a:t> in </a:t>
-            </a:r>
-            <a:r>
-              <a:rPr lang="es-ES" sz="2400" dirty="0">
-                <a:latin typeface="Helvetica"/>
-                <a:cs typeface="Helvetica"/>
-              </a:rPr>
-              <a:t> </a:t>
-            </a:r>
-            <a:r>
-              <a:rPr lang="es-ES" sz="2400" dirty="0">
-                <a:latin typeface="Helvetica"/>
-                <a:cs typeface="Helvetica"/>
-                <a:sym typeface="Wingdings" panose="05000000000000000000" pitchFamily="2" charset="2"/>
-              </a:rPr>
-              <a:t> </a:t>
-            </a:r>
-            <a:r>
-              <a:rPr lang="es-ES" sz="2400" b="1" dirty="0">
-                <a:latin typeface="Helvetica"/>
-                <a:cs typeface="Helvetica"/>
-                <a:sym typeface="Wingdings" panose="05000000000000000000" pitchFamily="2" charset="2"/>
-              </a:rPr>
-              <a:t>↓ BAI in </a:t>
             </a:r>
             <a:r>
               <a:rPr lang="es-ES" sz="2400" b="1" dirty="0" err="1">
@@ -34143,7 +34659,23 @@
                 <a:cs typeface="Helvetica"/>
                 <a:sym typeface="Wingdings" panose="05000000000000000000" pitchFamily="2" charset="2"/>
               </a:rPr>
-              <a:t> los  </a:t>
+              <a:t> </a:t>
+            </a:r>
+            <a:r>
+              <a:rPr lang="es-ES" sz="2400" dirty="0" err="1">
+                <a:latin typeface="Helvetica"/>
+                <a:cs typeface="Helvetica"/>
+                <a:sym typeface="Wingdings" panose="05000000000000000000" pitchFamily="2" charset="2"/>
+              </a:rPr>
+              <a:t>loss</a:t>
+            </a:r>
+            <a:r>
+              <a:rPr lang="es-ES" sz="2400" dirty="0">
+                <a:latin typeface="Helvetica"/>
+                <a:cs typeface="Helvetica"/>
+                <a:sym typeface="Wingdings" panose="05000000000000000000" pitchFamily="2" charset="2"/>
+              </a:rPr>
+              <a:t>  </a:t>
             </a:r>
             <a:r>
               <a:rPr lang="es-ES" sz="2400" b="1" dirty="0">

--- a/06_ppts/exploratory_analysis_figures_v3-CFB-CG.pptx
+++ b/06_ppts/exploratory_analysis_figures_v3-CFB-CG.pptx
@@ -5,7 +5,7 @@
     <p:sldMasterId id="2147483648" r:id="rId1"/>
   </p:sldMasterIdLst>
   <p:notesMasterIdLst>
-    <p:notesMasterId r:id="rId21"/>
+    <p:notesMasterId r:id="rId22"/>
   </p:notesMasterIdLst>
   <p:sldIdLst>
     <p:sldId id="257" r:id="rId2"/>
@@ -27,6 +27,7 @@
     <p:sldId id="413" r:id="rId18"/>
     <p:sldId id="417" r:id="rId19"/>
     <p:sldId id="418" r:id="rId20"/>
+    <p:sldId id="419" r:id="rId21"/>
   </p:sldIdLst>
   <p:sldSz cx="12192000" cy="6858000"/>
   <p:notesSz cx="6858000" cy="9144000"/>
@@ -1111,6 +1112,114 @@
     <p:extLst>
       <p:ext uri="{BB962C8B-B14F-4D97-AF65-F5344CB8AC3E}">
         <p14:creationId xmlns:p14="http://schemas.microsoft.com/office/powerpoint/2010/main" val="2778219967"/>
+      </p:ext>
+    </p:extLst>
+  </p:cSld>
+  <p:clrMapOvr>
+    <a:masterClrMapping/>
+  </p:clrMapOvr>
+</p:notes>
+</file>
+
+<file path=ppt/notesSlides/notesSlide6.xml><?xml version="1.0" encoding="utf-8"?>
+<p:notes xmlns:a="http://schemas.openxmlformats.org/drawingml/2006/main" xmlns:r="http://schemas.openxmlformats.org/officeDocument/2006/relationships" xmlns:p="http://schemas.openxmlformats.org/presentationml/2006/main">
+  <p:cSld>
+    <p:spTree>
+      <p:nvGrpSpPr>
+        <p:cNvPr id="1" name="">
+          <a:extLst>
+            <a:ext uri="{FF2B5EF4-FFF2-40B4-BE49-F238E27FC236}">
+              <a16:creationId xmlns:a16="http://schemas.microsoft.com/office/drawing/2014/main" id="{0A728F5F-221D-C4EE-213E-013A839F67BD}"/>
+            </a:ext>
+          </a:extLst>
+        </p:cNvPr>
+        <p:cNvGrpSpPr/>
+        <p:nvPr/>
+      </p:nvGrpSpPr>
+      <p:grpSpPr>
+        <a:xfrm>
+          <a:off x="0" y="0"/>
+          <a:ext cx="0" cy="0"/>
+          <a:chOff x="0" y="0"/>
+          <a:chExt cx="0" cy="0"/>
+        </a:xfrm>
+      </p:grpSpPr>
+      <p:sp>
+        <p:nvSpPr>
+          <p:cNvPr id="2" name="Marcador de imagen de diapositiva 1">
+            <a:extLst>
+              <a:ext uri="{FF2B5EF4-FFF2-40B4-BE49-F238E27FC236}">
+                <a16:creationId xmlns:a16="http://schemas.microsoft.com/office/drawing/2014/main" id="{FF7E85AA-05C4-D6E2-E11F-5A7CB29D8B5D}"/>
+              </a:ext>
+            </a:extLst>
+          </p:cNvPr>
+          <p:cNvSpPr>
+            <a:spLocks noGrp="1" noRot="1" noChangeAspect="1"/>
+          </p:cNvSpPr>
+          <p:nvPr>
+            <p:ph type="sldImg"/>
+          </p:nvPr>
+        </p:nvSpPr>
+        <p:spPr/>
+      </p:sp>
+      <p:sp>
+        <p:nvSpPr>
+          <p:cNvPr id="3" name="Marcador de notas 2">
+            <a:extLst>
+              <a:ext uri="{FF2B5EF4-FFF2-40B4-BE49-F238E27FC236}">
+                <a16:creationId xmlns:a16="http://schemas.microsoft.com/office/drawing/2014/main" id="{A02E503E-6750-5E62-8871-4E5E1C374273}"/>
+              </a:ext>
+            </a:extLst>
+          </p:cNvPr>
+          <p:cNvSpPr>
+            <a:spLocks noGrp="1"/>
+          </p:cNvSpPr>
+          <p:nvPr>
+            <p:ph type="body" idx="1"/>
+          </p:nvPr>
+        </p:nvSpPr>
+        <p:spPr/>
+        <p:txBody>
+          <a:bodyPr/>
+          <a:lstStyle/>
+          <a:p>
+            <a:endParaRPr lang="es-ES" dirty="0"/>
+          </a:p>
+        </p:txBody>
+      </p:sp>
+      <p:sp>
+        <p:nvSpPr>
+          <p:cNvPr id="4" name="Marcador de número de diapositiva 3">
+            <a:extLst>
+              <a:ext uri="{FF2B5EF4-FFF2-40B4-BE49-F238E27FC236}">
+                <a16:creationId xmlns:a16="http://schemas.microsoft.com/office/drawing/2014/main" id="{1C7252C7-98D8-DC13-5C33-3632D72200AD}"/>
+              </a:ext>
+            </a:extLst>
+          </p:cNvPr>
+          <p:cNvSpPr>
+            <a:spLocks noGrp="1"/>
+          </p:cNvSpPr>
+          <p:nvPr>
+            <p:ph type="sldNum" sz="quarter" idx="5"/>
+          </p:nvPr>
+        </p:nvSpPr>
+        <p:spPr/>
+        <p:txBody>
+          <a:bodyPr/>
+          <a:lstStyle/>
+          <a:p>
+            <a:fld id="{95285FFF-AA8A-422F-901E-D94C39C8B224}" type="slidenum">
+              <a:rPr lang="es-ES" smtClean="0"/>
+              <a:t>20</a:t>
+            </a:fld>
+            <a:endParaRPr lang="es-ES"/>
+          </a:p>
+        </p:txBody>
+      </p:sp>
+    </p:spTree>
+    <p:extLst>
+      <p:ext uri="{BB962C8B-B14F-4D97-AF65-F5344CB8AC3E}">
+        <p14:creationId xmlns:p14="http://schemas.microsoft.com/office/powerpoint/2010/main" val="3916906487"/>
       </p:ext>
     </p:extLst>
   </p:cSld>
@@ -24100,6 +24209,1045 @@
     <p:extLst>
       <p:ext uri="{BB962C8B-B14F-4D97-AF65-F5344CB8AC3E}">
         <p14:creationId xmlns:p14="http://schemas.microsoft.com/office/powerpoint/2010/main" val="1866045094"/>
+      </p:ext>
+    </p:extLst>
+  </p:cSld>
+  <p:clrMapOvr>
+    <a:masterClrMapping/>
+  </p:clrMapOvr>
+</p:sld>
+</file>
+
+<file path=ppt/slides/slide20.xml><?xml version="1.0" encoding="utf-8"?>
+<p:sld xmlns:a="http://schemas.openxmlformats.org/drawingml/2006/main" xmlns:r="http://schemas.openxmlformats.org/officeDocument/2006/relationships" xmlns:p="http://schemas.openxmlformats.org/presentationml/2006/main">
+  <p:cSld>
+    <p:spTree>
+      <p:nvGrpSpPr>
+        <p:cNvPr id="1" name="">
+          <a:extLst>
+            <a:ext uri="{FF2B5EF4-FFF2-40B4-BE49-F238E27FC236}">
+              <a16:creationId xmlns:a16="http://schemas.microsoft.com/office/drawing/2014/main" id="{C2831A88-F51D-EB8A-44AC-6EEA3A808C6A}"/>
+            </a:ext>
+          </a:extLst>
+        </p:cNvPr>
+        <p:cNvGrpSpPr/>
+        <p:nvPr/>
+      </p:nvGrpSpPr>
+      <p:grpSpPr>
+        <a:xfrm>
+          <a:off x="0" y="0"/>
+          <a:ext cx="0" cy="0"/>
+          <a:chOff x="0" y="0"/>
+          <a:chExt cx="0" cy="0"/>
+        </a:xfrm>
+      </p:grpSpPr>
+      <p:sp>
+        <p:nvSpPr>
+          <p:cNvPr id="3" name="Rectangle 1">
+            <a:extLst>
+              <a:ext uri="{FF2B5EF4-FFF2-40B4-BE49-F238E27FC236}">
+                <a16:creationId xmlns:a16="http://schemas.microsoft.com/office/drawing/2014/main" id="{9C077BF2-D4B1-544F-EAF9-E722DCB4F855}"/>
+              </a:ext>
+            </a:extLst>
+          </p:cNvPr>
+          <p:cNvSpPr>
+            <a:spLocks noChangeArrowheads="1"/>
+          </p:cNvSpPr>
+          <p:nvPr/>
+        </p:nvSpPr>
+        <p:spPr bwMode="auto">
+          <a:xfrm>
+            <a:off x="5288915" y="1477262"/>
+            <a:ext cx="9366245" cy="646331"/>
+          </a:xfrm>
+          <a:prstGeom prst="rect">
+            <a:avLst/>
+          </a:prstGeom>
+          <a:noFill/>
+          <a:ln>
+            <a:noFill/>
+          </a:ln>
+          <a:effectLst/>
+          <a:extLst>
+            <a:ext uri="{909E8E84-426E-40DD-AFC4-6F175D3DCCD1}">
+              <a14:hiddenFill xmlns:a14="http://schemas.microsoft.com/office/drawing/2010/main">
+                <a:solidFill>
+                  <a:schemeClr val="accent1"/>
+                </a:solidFill>
+              </a14:hiddenFill>
+            </a:ext>
+            <a:ext uri="{91240B29-F687-4F45-9708-019B960494DF}">
+              <a14:hiddenLine xmlns:a14="http://schemas.microsoft.com/office/drawing/2010/main" w="9525">
+                <a:solidFill>
+                  <a:schemeClr val="tx1"/>
+                </a:solidFill>
+                <a:miter lim="800000"/>
+                <a:headEnd/>
+                <a:tailEnd/>
+              </a14:hiddenLine>
+            </a:ext>
+            <a:ext uri="{AF507438-7753-43E0-B8FC-AC1667EBCBE1}">
+              <a14:hiddenEffects xmlns:a14="http://schemas.microsoft.com/office/drawing/2010/main">
+                <a:effectLst>
+                  <a:outerShdw dist="35921" dir="2700000" algn="ctr" rotWithShape="0">
+                    <a:schemeClr val="bg2"/>
+                  </a:outerShdw>
+                </a:effectLst>
+              </a14:hiddenEffects>
+            </a:ext>
+          </a:extLst>
+        </p:spPr>
+        <p:txBody>
+          <a:bodyPr vert="horz" wrap="square" lIns="91440" tIns="45720" rIns="91440" bIns="45720" numCol="1" anchor="ctr" anchorCtr="0" compatLnSpc="1">
+            <a:prstTxWarp prst="textNoShape">
+              <a:avLst/>
+            </a:prstTxWarp>
+            <a:spAutoFit/>
+          </a:bodyPr>
+          <a:lstStyle>
+            <a:lvl1pPr eaLnBrk="0" fontAlgn="base" hangingPunct="0">
+              <a:spcBef>
+                <a:spcPct val="0"/>
+              </a:spcBef>
+              <a:spcAft>
+                <a:spcPct val="0"/>
+              </a:spcAft>
+              <a:defRPr>
+                <a:solidFill>
+                  <a:schemeClr val="tx1"/>
+                </a:solidFill>
+                <a:latin typeface="Arial" panose="020B0604020202020204" pitchFamily="34" charset="0"/>
+              </a:defRPr>
+            </a:lvl1pPr>
+            <a:lvl2pPr eaLnBrk="0" fontAlgn="base" hangingPunct="0">
+              <a:spcBef>
+                <a:spcPct val="0"/>
+              </a:spcBef>
+              <a:spcAft>
+                <a:spcPct val="0"/>
+              </a:spcAft>
+              <a:defRPr>
+                <a:solidFill>
+                  <a:schemeClr val="tx1"/>
+                </a:solidFill>
+                <a:latin typeface="Arial" panose="020B0604020202020204" pitchFamily="34" charset="0"/>
+              </a:defRPr>
+            </a:lvl2pPr>
+            <a:lvl3pPr eaLnBrk="0" fontAlgn="base" hangingPunct="0">
+              <a:spcBef>
+                <a:spcPct val="0"/>
+              </a:spcBef>
+              <a:spcAft>
+                <a:spcPct val="0"/>
+              </a:spcAft>
+              <a:defRPr>
+                <a:solidFill>
+                  <a:schemeClr val="tx1"/>
+                </a:solidFill>
+                <a:latin typeface="Arial" panose="020B0604020202020204" pitchFamily="34" charset="0"/>
+              </a:defRPr>
+            </a:lvl3pPr>
+            <a:lvl4pPr eaLnBrk="0" fontAlgn="base" hangingPunct="0">
+              <a:spcBef>
+                <a:spcPct val="0"/>
+              </a:spcBef>
+              <a:spcAft>
+                <a:spcPct val="0"/>
+              </a:spcAft>
+              <a:defRPr>
+                <a:solidFill>
+                  <a:schemeClr val="tx1"/>
+                </a:solidFill>
+                <a:latin typeface="Arial" panose="020B0604020202020204" pitchFamily="34" charset="0"/>
+              </a:defRPr>
+            </a:lvl4pPr>
+            <a:lvl5pPr eaLnBrk="0" fontAlgn="base" hangingPunct="0">
+              <a:spcBef>
+                <a:spcPct val="0"/>
+              </a:spcBef>
+              <a:spcAft>
+                <a:spcPct val="0"/>
+              </a:spcAft>
+              <a:defRPr>
+                <a:solidFill>
+                  <a:schemeClr val="tx1"/>
+                </a:solidFill>
+                <a:latin typeface="Arial" panose="020B0604020202020204" pitchFamily="34" charset="0"/>
+              </a:defRPr>
+            </a:lvl5pPr>
+            <a:lvl6pPr eaLnBrk="0" fontAlgn="base" hangingPunct="0">
+              <a:spcBef>
+                <a:spcPct val="0"/>
+              </a:spcBef>
+              <a:spcAft>
+                <a:spcPct val="0"/>
+              </a:spcAft>
+              <a:defRPr>
+                <a:solidFill>
+                  <a:schemeClr val="tx1"/>
+                </a:solidFill>
+                <a:latin typeface="Arial" panose="020B0604020202020204" pitchFamily="34" charset="0"/>
+              </a:defRPr>
+            </a:lvl6pPr>
+            <a:lvl7pPr eaLnBrk="0" fontAlgn="base" hangingPunct="0">
+              <a:spcBef>
+                <a:spcPct val="0"/>
+              </a:spcBef>
+              <a:spcAft>
+                <a:spcPct val="0"/>
+              </a:spcAft>
+              <a:defRPr>
+                <a:solidFill>
+                  <a:schemeClr val="tx1"/>
+                </a:solidFill>
+                <a:latin typeface="Arial" panose="020B0604020202020204" pitchFamily="34" charset="0"/>
+              </a:defRPr>
+            </a:lvl7pPr>
+            <a:lvl8pPr eaLnBrk="0" fontAlgn="base" hangingPunct="0">
+              <a:spcBef>
+                <a:spcPct val="0"/>
+              </a:spcBef>
+              <a:spcAft>
+                <a:spcPct val="0"/>
+              </a:spcAft>
+              <a:defRPr>
+                <a:solidFill>
+                  <a:schemeClr val="tx1"/>
+                </a:solidFill>
+                <a:latin typeface="Arial" panose="020B0604020202020204" pitchFamily="34" charset="0"/>
+              </a:defRPr>
+            </a:lvl8pPr>
+            <a:lvl9pPr eaLnBrk="0" fontAlgn="base" hangingPunct="0">
+              <a:spcBef>
+                <a:spcPct val="0"/>
+              </a:spcBef>
+              <a:spcAft>
+                <a:spcPct val="0"/>
+              </a:spcAft>
+              <a:defRPr>
+                <a:solidFill>
+                  <a:schemeClr val="tx1"/>
+                </a:solidFill>
+                <a:latin typeface="Arial" panose="020B0604020202020204" pitchFamily="34" charset="0"/>
+              </a:defRPr>
+            </a:lvl9pPr>
+          </a:lstStyle>
+          <a:p>
+            <a:pPr marL="0" marR="0" lvl="0" indent="0" algn="l" defTabSz="914400" rtl="0" eaLnBrk="0" fontAlgn="base" latinLnBrk="0" hangingPunct="0">
+              <a:lnSpc>
+                <a:spcPct val="100000"/>
+              </a:lnSpc>
+              <a:spcBef>
+                <a:spcPct val="0"/>
+              </a:spcBef>
+              <a:spcAft>
+                <a:spcPct val="0"/>
+              </a:spcAft>
+              <a:buClrTx/>
+              <a:buSzTx/>
+              <a:buFontTx/>
+              <a:buNone/>
+              <a:tabLst/>
+            </a:pPr>
+            <a:r>
+              <a:rPr kumimoji="0" lang="es-ES" altLang="es-ES" sz="1800" b="0" i="0" u="none" strike="noStrike" cap="none" normalizeH="0" baseline="0">
+                <a:ln>
+                  <a:noFill/>
+                </a:ln>
+                <a:solidFill>
+                  <a:srgbClr val="000000"/>
+                </a:solidFill>
+                <a:effectLst/>
+                <a:latin typeface="Times New Roman" panose="02020603050405020304" pitchFamily="18" charset="0"/>
+                <a:cs typeface="Times New Roman" panose="02020603050405020304" pitchFamily="18" charset="0"/>
+              </a:rPr>
+              <a:t> </a:t>
+            </a:r>
+            <a:endParaRPr kumimoji="0" lang="es-ES" altLang="es-ES" sz="1800" b="0" i="0" u="none" strike="noStrike" cap="none" normalizeH="0" baseline="0">
+              <a:ln>
+                <a:noFill/>
+              </a:ln>
+              <a:solidFill>
+                <a:schemeClr val="tx1"/>
+              </a:solidFill>
+              <a:effectLst/>
+            </a:endParaRPr>
+          </a:p>
+          <a:p>
+            <a:pPr marL="0" marR="0" lvl="0" indent="0" algn="l" defTabSz="914400" rtl="0" eaLnBrk="0" fontAlgn="base" latinLnBrk="0" hangingPunct="0">
+              <a:lnSpc>
+                <a:spcPct val="100000"/>
+              </a:lnSpc>
+              <a:spcBef>
+                <a:spcPct val="0"/>
+              </a:spcBef>
+              <a:spcAft>
+                <a:spcPct val="0"/>
+              </a:spcAft>
+              <a:buClrTx/>
+              <a:buSzTx/>
+              <a:buFontTx/>
+              <a:buNone/>
+              <a:tabLst/>
+            </a:pPr>
+            <a:endParaRPr kumimoji="0" lang="es-ES" altLang="es-ES" sz="1800" b="0" i="0" u="none" strike="noStrike" cap="none" normalizeH="0" baseline="0">
+              <a:ln>
+                <a:noFill/>
+              </a:ln>
+              <a:solidFill>
+                <a:schemeClr val="tx1"/>
+              </a:solidFill>
+              <a:effectLst/>
+              <a:latin typeface="Arial" panose="020B0604020202020204" pitchFamily="34" charset="0"/>
+            </a:endParaRPr>
+          </a:p>
+        </p:txBody>
+      </p:sp>
+      <p:sp>
+        <p:nvSpPr>
+          <p:cNvPr id="2" name="Título 1">
+            <a:extLst>
+              <a:ext uri="{FF2B5EF4-FFF2-40B4-BE49-F238E27FC236}">
+                <a16:creationId xmlns:a16="http://schemas.microsoft.com/office/drawing/2014/main" id="{9F23DB8B-E40E-1440-4F43-D6E7E359BA62}"/>
+              </a:ext>
+            </a:extLst>
+          </p:cNvPr>
+          <p:cNvSpPr>
+            <a:spLocks noGrp="1"/>
+          </p:cNvSpPr>
+          <p:nvPr>
+            <p:ph type="title"/>
+          </p:nvPr>
+        </p:nvSpPr>
+        <p:spPr>
+          <a:xfrm>
+            <a:off x="0" y="0"/>
+            <a:ext cx="9690902" cy="804155"/>
+          </a:xfrm>
+          <a:solidFill>
+            <a:srgbClr val="218317"/>
+          </a:solidFill>
+        </p:spPr>
+        <p:txBody>
+          <a:bodyPr>
+            <a:normAutofit/>
+          </a:bodyPr>
+          <a:lstStyle/>
+          <a:p>
+            <a:r>
+              <a:rPr lang="es-ES" sz="3200" b="1" dirty="0">
+                <a:solidFill>
+                  <a:schemeClr val="bg1"/>
+                </a:solidFill>
+                <a:latin typeface="Helvetica" panose="020B0604020202020204" pitchFamily="34" charset="0"/>
+                <a:cs typeface="Helvetica" panose="020B0604020202020204" pitchFamily="34" charset="0"/>
+              </a:rPr>
+              <a:t>	</a:t>
+            </a:r>
+            <a:r>
+              <a:rPr lang="es-ES" sz="3200" b="1" dirty="0" err="1">
+                <a:solidFill>
+                  <a:schemeClr val="bg1"/>
+                </a:solidFill>
+                <a:latin typeface="Helvetica" panose="020B0604020202020204" pitchFamily="34" charset="0"/>
+                <a:cs typeface="Helvetica" panose="020B0604020202020204" pitchFamily="34" charset="0"/>
+              </a:rPr>
+              <a:t>Preliminary</a:t>
+            </a:r>
+            <a:r>
+              <a:rPr lang="es-ES" sz="3200" b="1" dirty="0">
+                <a:solidFill>
+                  <a:schemeClr val="bg1"/>
+                </a:solidFill>
+                <a:latin typeface="Helvetica" panose="020B0604020202020204" pitchFamily="34" charset="0"/>
+                <a:cs typeface="Helvetica" panose="020B0604020202020204" pitchFamily="34" charset="0"/>
+              </a:rPr>
+              <a:t> </a:t>
+            </a:r>
+            <a:r>
+              <a:rPr lang="es-ES" sz="3200" b="1" dirty="0" err="1">
+                <a:solidFill>
+                  <a:schemeClr val="bg1"/>
+                </a:solidFill>
+                <a:latin typeface="Helvetica" panose="020B0604020202020204" pitchFamily="34" charset="0"/>
+                <a:cs typeface="Helvetica" panose="020B0604020202020204" pitchFamily="34" charset="0"/>
+              </a:rPr>
+              <a:t>results</a:t>
+            </a:r>
+            <a:endParaRPr lang="es-ES" sz="3200" b="1" dirty="0">
+              <a:solidFill>
+                <a:schemeClr val="bg1"/>
+              </a:solidFill>
+              <a:latin typeface="Helvetica" panose="020B0604020202020204" pitchFamily="34" charset="0"/>
+              <a:cs typeface="Helvetica" panose="020B0604020202020204" pitchFamily="34" charset="0"/>
+            </a:endParaRPr>
+          </a:p>
+        </p:txBody>
+      </p:sp>
+      <p:sp>
+        <p:nvSpPr>
+          <p:cNvPr id="8" name="Título 1">
+            <a:extLst>
+              <a:ext uri="{FF2B5EF4-FFF2-40B4-BE49-F238E27FC236}">
+                <a16:creationId xmlns:a16="http://schemas.microsoft.com/office/drawing/2014/main" id="{07F2AF2A-89F0-8480-0028-952448512460}"/>
+              </a:ext>
+            </a:extLst>
+          </p:cNvPr>
+          <p:cNvSpPr txBox="1">
+            <a:spLocks/>
+          </p:cNvSpPr>
+          <p:nvPr/>
+        </p:nvSpPr>
+        <p:spPr>
+          <a:xfrm>
+            <a:off x="9690902" y="-1"/>
+            <a:ext cx="2501098" cy="804157"/>
+          </a:xfrm>
+          <a:prstGeom prst="rect">
+            <a:avLst/>
+          </a:prstGeom>
+          <a:solidFill>
+            <a:srgbClr val="218317"/>
+          </a:solidFill>
+        </p:spPr>
+        <p:txBody>
+          <a:bodyPr vert="horz" lIns="91440" tIns="45720" rIns="91440" bIns="45720" rtlCol="0" anchor="ctr">
+            <a:normAutofit/>
+          </a:bodyPr>
+          <a:lstStyle>
+            <a:lvl1pPr algn="l" defTabSz="914400" rtl="0" eaLnBrk="1" latinLnBrk="0" hangingPunct="1">
+              <a:lnSpc>
+                <a:spcPct val="90000"/>
+              </a:lnSpc>
+              <a:spcBef>
+                <a:spcPct val="0"/>
+              </a:spcBef>
+              <a:buNone/>
+              <a:defRPr sz="4400" kern="1200">
+                <a:solidFill>
+                  <a:schemeClr val="tx1"/>
+                </a:solidFill>
+                <a:latin typeface="+mj-lt"/>
+                <a:ea typeface="+mj-ea"/>
+                <a:cs typeface="+mj-cs"/>
+              </a:defRPr>
+            </a:lvl1pPr>
+          </a:lstStyle>
+          <a:p>
+            <a:pPr algn="r"/>
+            <a:r>
+              <a:rPr lang="es-ES" sz="2800" b="1" dirty="0">
+                <a:solidFill>
+                  <a:schemeClr val="accent6">
+                    <a:lumMod val="60000"/>
+                    <a:lumOff val="40000"/>
+                  </a:schemeClr>
+                </a:solidFill>
+                <a:latin typeface="Helvetica" panose="020B0604020202020204" pitchFamily="34" charset="0"/>
+                <a:cs typeface="Helvetica" panose="020B0604020202020204" pitchFamily="34" charset="0"/>
+              </a:rPr>
+              <a:t>M&amp;M </a:t>
+            </a:r>
+            <a:r>
+              <a:rPr lang="es-ES" sz="2800" b="1" dirty="0">
+                <a:solidFill>
+                  <a:srgbClr val="218317"/>
+                </a:solidFill>
+                <a:latin typeface="Helvetica" panose="020B0604020202020204" pitchFamily="34" charset="0"/>
+                <a:cs typeface="Helvetica" panose="020B0604020202020204" pitchFamily="34" charset="0"/>
+              </a:rPr>
+              <a:t>.</a:t>
+            </a:r>
+          </a:p>
+        </p:txBody>
+      </p:sp>
+      <p:sp>
+        <p:nvSpPr>
+          <p:cNvPr id="15" name="CuadroTexto 10">
+            <a:extLst>
+              <a:ext uri="{FF2B5EF4-FFF2-40B4-BE49-F238E27FC236}">
+                <a16:creationId xmlns:a16="http://schemas.microsoft.com/office/drawing/2014/main" id="{15067287-9DBC-9B34-CE2B-65B29960CD6A}"/>
+              </a:ext>
+            </a:extLst>
+          </p:cNvPr>
+          <p:cNvSpPr txBox="1"/>
+          <p:nvPr/>
+        </p:nvSpPr>
+        <p:spPr>
+          <a:xfrm>
+            <a:off x="1398120" y="4262378"/>
+            <a:ext cx="2956560" cy="2031325"/>
+          </a:xfrm>
+          <a:prstGeom prst="rect">
+            <a:avLst/>
+          </a:prstGeom>
+          <a:noFill/>
+        </p:spPr>
+        <p:txBody>
+          <a:bodyPr wrap="square" rtlCol="0">
+            <a:spAutoFit/>
+          </a:bodyPr>
+          <a:lstStyle>
+            <a:defPPr>
+              <a:defRPr lang="es-ES"/>
+            </a:defPPr>
+            <a:lvl1pPr marL="0" algn="l" defTabSz="914400" rtl="0" eaLnBrk="1" latinLnBrk="0" hangingPunct="1">
+              <a:defRPr sz="1800" kern="1200">
+                <a:solidFill>
+                  <a:schemeClr val="tx1"/>
+                </a:solidFill>
+                <a:latin typeface="+mn-lt"/>
+                <a:ea typeface="+mn-ea"/>
+                <a:cs typeface="+mn-cs"/>
+              </a:defRPr>
+            </a:lvl1pPr>
+            <a:lvl2pPr marL="457200" algn="l" defTabSz="914400" rtl="0" eaLnBrk="1" latinLnBrk="0" hangingPunct="1">
+              <a:defRPr sz="1800" kern="1200">
+                <a:solidFill>
+                  <a:schemeClr val="tx1"/>
+                </a:solidFill>
+                <a:latin typeface="+mn-lt"/>
+                <a:ea typeface="+mn-ea"/>
+                <a:cs typeface="+mn-cs"/>
+              </a:defRPr>
+            </a:lvl2pPr>
+            <a:lvl3pPr marL="914400" algn="l" defTabSz="914400" rtl="0" eaLnBrk="1" latinLnBrk="0" hangingPunct="1">
+              <a:defRPr sz="1800" kern="1200">
+                <a:solidFill>
+                  <a:schemeClr val="tx1"/>
+                </a:solidFill>
+                <a:latin typeface="+mn-lt"/>
+                <a:ea typeface="+mn-ea"/>
+                <a:cs typeface="+mn-cs"/>
+              </a:defRPr>
+            </a:lvl3pPr>
+            <a:lvl4pPr marL="1371600" algn="l" defTabSz="914400" rtl="0" eaLnBrk="1" latinLnBrk="0" hangingPunct="1">
+              <a:defRPr sz="1800" kern="1200">
+                <a:solidFill>
+                  <a:schemeClr val="tx1"/>
+                </a:solidFill>
+                <a:latin typeface="+mn-lt"/>
+                <a:ea typeface="+mn-ea"/>
+                <a:cs typeface="+mn-cs"/>
+              </a:defRPr>
+            </a:lvl4pPr>
+            <a:lvl5pPr marL="1828800" algn="l" defTabSz="914400" rtl="0" eaLnBrk="1" latinLnBrk="0" hangingPunct="1">
+              <a:defRPr sz="1800" kern="1200">
+                <a:solidFill>
+                  <a:schemeClr val="tx1"/>
+                </a:solidFill>
+                <a:latin typeface="+mn-lt"/>
+                <a:ea typeface="+mn-ea"/>
+                <a:cs typeface="+mn-cs"/>
+              </a:defRPr>
+            </a:lvl5pPr>
+            <a:lvl6pPr marL="2286000" algn="l" defTabSz="914400" rtl="0" eaLnBrk="1" latinLnBrk="0" hangingPunct="1">
+              <a:defRPr sz="1800" kern="1200">
+                <a:solidFill>
+                  <a:schemeClr val="tx1"/>
+                </a:solidFill>
+                <a:latin typeface="+mn-lt"/>
+                <a:ea typeface="+mn-ea"/>
+                <a:cs typeface="+mn-cs"/>
+              </a:defRPr>
+            </a:lvl6pPr>
+            <a:lvl7pPr marL="2743200" algn="l" defTabSz="914400" rtl="0" eaLnBrk="1" latinLnBrk="0" hangingPunct="1">
+              <a:defRPr sz="1800" kern="1200">
+                <a:solidFill>
+                  <a:schemeClr val="tx1"/>
+                </a:solidFill>
+                <a:latin typeface="+mn-lt"/>
+                <a:ea typeface="+mn-ea"/>
+                <a:cs typeface="+mn-cs"/>
+              </a:defRPr>
+            </a:lvl7pPr>
+            <a:lvl8pPr marL="3200400" algn="l" defTabSz="914400" rtl="0" eaLnBrk="1" latinLnBrk="0" hangingPunct="1">
+              <a:defRPr sz="1800" kern="1200">
+                <a:solidFill>
+                  <a:schemeClr val="tx1"/>
+                </a:solidFill>
+                <a:latin typeface="+mn-lt"/>
+                <a:ea typeface="+mn-ea"/>
+                <a:cs typeface="+mn-cs"/>
+              </a:defRPr>
+            </a:lvl8pPr>
+            <a:lvl9pPr marL="3657600" algn="l" defTabSz="914400" rtl="0" eaLnBrk="1" latinLnBrk="0" hangingPunct="1">
+              <a:defRPr sz="1800" kern="1200">
+                <a:solidFill>
+                  <a:schemeClr val="tx1"/>
+                </a:solidFill>
+                <a:latin typeface="+mn-lt"/>
+                <a:ea typeface="+mn-ea"/>
+                <a:cs typeface="+mn-cs"/>
+              </a:defRPr>
+            </a:lvl9pPr>
+          </a:lstStyle>
+          <a:p>
+            <a:pPr lvl="1" algn="ctr"/>
+            <a:r>
+              <a:rPr lang="es-ES" b="1" dirty="0" err="1">
+                <a:latin typeface="Helvetica" panose="020B0604020202020204" pitchFamily="34" charset="0"/>
+                <a:cs typeface="Helvetica" panose="020B0604020202020204" pitchFamily="34" charset="0"/>
+              </a:rPr>
+              <a:t>Growth</a:t>
+            </a:r>
+            <a:r>
+              <a:rPr lang="es-ES" b="1" dirty="0">
+                <a:latin typeface="Helvetica" panose="020B0604020202020204" pitchFamily="34" charset="0"/>
+                <a:cs typeface="Helvetica" panose="020B0604020202020204" pitchFamily="34" charset="0"/>
+              </a:rPr>
+              <a:t> </a:t>
+            </a:r>
+            <a:r>
+              <a:rPr lang="es-ES" b="1" dirty="0" err="1">
+                <a:latin typeface="Helvetica" panose="020B0604020202020204" pitchFamily="34" charset="0"/>
+                <a:cs typeface="Helvetica" panose="020B0604020202020204" pitchFamily="34" charset="0"/>
+              </a:rPr>
+              <a:t>rates</a:t>
+            </a:r>
+            <a:r>
+              <a:rPr lang="es-ES" dirty="0">
+                <a:latin typeface="Helvetica" panose="020B0604020202020204" pitchFamily="34" charset="0"/>
+                <a:cs typeface="Helvetica" panose="020B0604020202020204" pitchFamily="34" charset="0"/>
+              </a:rPr>
+              <a:t> are more intense in </a:t>
+            </a:r>
+            <a:r>
+              <a:rPr lang="es-ES" dirty="0" err="1">
+                <a:latin typeface="Helvetica" panose="020B0604020202020204" pitchFamily="34" charset="0"/>
+                <a:cs typeface="Helvetica" panose="020B0604020202020204" pitchFamily="34" charset="0"/>
+              </a:rPr>
+              <a:t>higher</a:t>
+            </a:r>
+            <a:r>
+              <a:rPr lang="es-ES" dirty="0">
+                <a:latin typeface="Helvetica" panose="020B0604020202020204" pitchFamily="34" charset="0"/>
+                <a:cs typeface="Helvetica" panose="020B0604020202020204" pitchFamily="34" charset="0"/>
+              </a:rPr>
+              <a:t> in </a:t>
+            </a:r>
+            <a:r>
+              <a:rPr lang="es-ES" dirty="0" err="1">
+                <a:latin typeface="Helvetica" panose="020B0604020202020204" pitchFamily="34" charset="0"/>
+                <a:cs typeface="Helvetica" panose="020B0604020202020204" pitchFamily="34" charset="0"/>
+              </a:rPr>
+              <a:t>declining</a:t>
+            </a:r>
+            <a:r>
+              <a:rPr lang="es-ES" dirty="0">
+                <a:latin typeface="Helvetica" panose="020B0604020202020204" pitchFamily="34" charset="0"/>
+                <a:cs typeface="Helvetica" panose="020B0604020202020204" pitchFamily="34" charset="0"/>
+              </a:rPr>
+              <a:t> sites. </a:t>
+            </a:r>
+            <a:r>
+              <a:rPr lang="es-ES" dirty="0" err="1">
+                <a:latin typeface="Helvetica" panose="020B0604020202020204" pitchFamily="34" charset="0"/>
+                <a:cs typeface="Helvetica" panose="020B0604020202020204" pitchFamily="34" charset="0"/>
+              </a:rPr>
+              <a:t>Trees</a:t>
+            </a:r>
+            <a:r>
+              <a:rPr lang="es-ES" dirty="0">
+                <a:latin typeface="Helvetica" panose="020B0604020202020204" pitchFamily="34" charset="0"/>
+                <a:cs typeface="Helvetica" panose="020B0604020202020204" pitchFamily="34" charset="0"/>
+              </a:rPr>
+              <a:t> </a:t>
+            </a:r>
+            <a:r>
+              <a:rPr lang="es-ES" dirty="0" err="1">
+                <a:latin typeface="Helvetica" panose="020B0604020202020204" pitchFamily="34" charset="0"/>
+                <a:cs typeface="Helvetica" panose="020B0604020202020204" pitchFamily="34" charset="0"/>
+              </a:rPr>
+              <a:t>with</a:t>
+            </a:r>
+            <a:r>
+              <a:rPr lang="es-ES" dirty="0">
+                <a:latin typeface="Helvetica" panose="020B0604020202020204" pitchFamily="34" charset="0"/>
+                <a:cs typeface="Helvetica" panose="020B0604020202020204" pitchFamily="34" charset="0"/>
+              </a:rPr>
+              <a:t> </a:t>
+            </a:r>
+            <a:r>
+              <a:rPr lang="es-ES" b="1" dirty="0" err="1">
+                <a:latin typeface="Helvetica" panose="020B0604020202020204" pitchFamily="34" charset="0"/>
+                <a:cs typeface="Helvetica" panose="020B0604020202020204" pitchFamily="34" charset="0"/>
+              </a:rPr>
+              <a:t>declining</a:t>
+            </a:r>
+            <a:r>
+              <a:rPr lang="es-ES" b="1" dirty="0">
+                <a:latin typeface="Helvetica" panose="020B0604020202020204" pitchFamily="34" charset="0"/>
+                <a:cs typeface="Helvetica" panose="020B0604020202020204" pitchFamily="34" charset="0"/>
+              </a:rPr>
+              <a:t> </a:t>
+            </a:r>
+            <a:r>
+              <a:rPr lang="es-ES" b="1" dirty="0" err="1">
+                <a:latin typeface="Helvetica" panose="020B0604020202020204" pitchFamily="34" charset="0"/>
+                <a:cs typeface="Helvetica" panose="020B0604020202020204" pitchFamily="34" charset="0"/>
+              </a:rPr>
+              <a:t>growth</a:t>
+            </a:r>
+            <a:r>
+              <a:rPr lang="es-ES" b="1" dirty="0">
+                <a:latin typeface="Helvetica" panose="020B0604020202020204" pitchFamily="34" charset="0"/>
+                <a:cs typeface="Helvetica" panose="020B0604020202020204" pitchFamily="34" charset="0"/>
+              </a:rPr>
+              <a:t> </a:t>
+            </a:r>
+            <a:r>
+              <a:rPr lang="es-ES" b="1" dirty="0" err="1">
+                <a:latin typeface="Helvetica" panose="020B0604020202020204" pitchFamily="34" charset="0"/>
+                <a:cs typeface="Helvetica" panose="020B0604020202020204" pitchFamily="34" charset="0"/>
+              </a:rPr>
+              <a:t>rates</a:t>
+            </a:r>
+            <a:r>
+              <a:rPr lang="es-ES" b="1" dirty="0">
+                <a:latin typeface="Helvetica" panose="020B0604020202020204" pitchFamily="34" charset="0"/>
+                <a:cs typeface="Helvetica" panose="020B0604020202020204" pitchFamily="34" charset="0"/>
+              </a:rPr>
+              <a:t> </a:t>
+            </a:r>
+            <a:r>
+              <a:rPr lang="es-ES" dirty="0">
+                <a:latin typeface="Helvetica" panose="020B0604020202020204" pitchFamily="34" charset="0"/>
+                <a:cs typeface="Helvetica" panose="020B0604020202020204" pitchFamily="34" charset="0"/>
+              </a:rPr>
+              <a:t>are more vulnerable </a:t>
+            </a:r>
+            <a:r>
+              <a:rPr lang="es-ES" dirty="0" err="1">
+                <a:latin typeface="Helvetica" panose="020B0604020202020204" pitchFamily="34" charset="0"/>
+                <a:cs typeface="Helvetica" panose="020B0604020202020204" pitchFamily="34" charset="0"/>
+              </a:rPr>
+              <a:t>to</a:t>
+            </a:r>
+            <a:r>
+              <a:rPr lang="es-ES" dirty="0">
+                <a:latin typeface="Helvetica" panose="020B0604020202020204" pitchFamily="34" charset="0"/>
+                <a:cs typeface="Helvetica" panose="020B0604020202020204" pitchFamily="34" charset="0"/>
+              </a:rPr>
+              <a:t> </a:t>
+            </a:r>
+            <a:r>
+              <a:rPr lang="es-ES" dirty="0" err="1">
+                <a:latin typeface="Helvetica" panose="020B0604020202020204" pitchFamily="34" charset="0"/>
+                <a:cs typeface="Helvetica" panose="020B0604020202020204" pitchFamily="34" charset="0"/>
+              </a:rPr>
+              <a:t>drought</a:t>
+            </a:r>
+            <a:endParaRPr lang="es-ES" dirty="0">
+              <a:latin typeface="Helvetica" panose="020B0604020202020204" pitchFamily="34" charset="0"/>
+              <a:cs typeface="Helvetica" panose="020B0604020202020204" pitchFamily="34" charset="0"/>
+            </a:endParaRPr>
+          </a:p>
+        </p:txBody>
+      </p:sp>
+      <p:sp>
+        <p:nvSpPr>
+          <p:cNvPr id="16" name="CuadroTexto 10">
+            <a:extLst>
+              <a:ext uri="{FF2B5EF4-FFF2-40B4-BE49-F238E27FC236}">
+                <a16:creationId xmlns:a16="http://schemas.microsoft.com/office/drawing/2014/main" id="{DA9B830B-9DDD-1B8A-F4D7-5B00A018A22A}"/>
+              </a:ext>
+            </a:extLst>
+          </p:cNvPr>
+          <p:cNvSpPr txBox="1"/>
+          <p:nvPr/>
+        </p:nvSpPr>
+        <p:spPr>
+          <a:xfrm>
+            <a:off x="8907625" y="1477261"/>
+            <a:ext cx="3060440" cy="1477328"/>
+          </a:xfrm>
+          <a:prstGeom prst="rect">
+            <a:avLst/>
+          </a:prstGeom>
+          <a:noFill/>
+        </p:spPr>
+        <p:txBody>
+          <a:bodyPr wrap="square" rtlCol="0">
+            <a:spAutoFit/>
+          </a:bodyPr>
+          <a:lstStyle>
+            <a:defPPr>
+              <a:defRPr lang="es-ES"/>
+            </a:defPPr>
+            <a:lvl1pPr marL="0" algn="l" defTabSz="914400" rtl="0" eaLnBrk="1" latinLnBrk="0" hangingPunct="1">
+              <a:defRPr sz="1800" kern="1200">
+                <a:solidFill>
+                  <a:schemeClr val="tx1"/>
+                </a:solidFill>
+                <a:latin typeface="+mn-lt"/>
+                <a:ea typeface="+mn-ea"/>
+                <a:cs typeface="+mn-cs"/>
+              </a:defRPr>
+            </a:lvl1pPr>
+            <a:lvl2pPr marL="457200" algn="l" defTabSz="914400" rtl="0" eaLnBrk="1" latinLnBrk="0" hangingPunct="1">
+              <a:defRPr sz="1800" kern="1200">
+                <a:solidFill>
+                  <a:schemeClr val="tx1"/>
+                </a:solidFill>
+                <a:latin typeface="+mn-lt"/>
+                <a:ea typeface="+mn-ea"/>
+                <a:cs typeface="+mn-cs"/>
+              </a:defRPr>
+            </a:lvl2pPr>
+            <a:lvl3pPr marL="914400" algn="l" defTabSz="914400" rtl="0" eaLnBrk="1" latinLnBrk="0" hangingPunct="1">
+              <a:defRPr sz="1800" kern="1200">
+                <a:solidFill>
+                  <a:schemeClr val="tx1"/>
+                </a:solidFill>
+                <a:latin typeface="+mn-lt"/>
+                <a:ea typeface="+mn-ea"/>
+                <a:cs typeface="+mn-cs"/>
+              </a:defRPr>
+            </a:lvl3pPr>
+            <a:lvl4pPr marL="1371600" algn="l" defTabSz="914400" rtl="0" eaLnBrk="1" latinLnBrk="0" hangingPunct="1">
+              <a:defRPr sz="1800" kern="1200">
+                <a:solidFill>
+                  <a:schemeClr val="tx1"/>
+                </a:solidFill>
+                <a:latin typeface="+mn-lt"/>
+                <a:ea typeface="+mn-ea"/>
+                <a:cs typeface="+mn-cs"/>
+              </a:defRPr>
+            </a:lvl4pPr>
+            <a:lvl5pPr marL="1828800" algn="l" defTabSz="914400" rtl="0" eaLnBrk="1" latinLnBrk="0" hangingPunct="1">
+              <a:defRPr sz="1800" kern="1200">
+                <a:solidFill>
+                  <a:schemeClr val="tx1"/>
+                </a:solidFill>
+                <a:latin typeface="+mn-lt"/>
+                <a:ea typeface="+mn-ea"/>
+                <a:cs typeface="+mn-cs"/>
+              </a:defRPr>
+            </a:lvl5pPr>
+            <a:lvl6pPr marL="2286000" algn="l" defTabSz="914400" rtl="0" eaLnBrk="1" latinLnBrk="0" hangingPunct="1">
+              <a:defRPr sz="1800" kern="1200">
+                <a:solidFill>
+                  <a:schemeClr val="tx1"/>
+                </a:solidFill>
+                <a:latin typeface="+mn-lt"/>
+                <a:ea typeface="+mn-ea"/>
+                <a:cs typeface="+mn-cs"/>
+              </a:defRPr>
+            </a:lvl6pPr>
+            <a:lvl7pPr marL="2743200" algn="l" defTabSz="914400" rtl="0" eaLnBrk="1" latinLnBrk="0" hangingPunct="1">
+              <a:defRPr sz="1800" kern="1200">
+                <a:solidFill>
+                  <a:schemeClr val="tx1"/>
+                </a:solidFill>
+                <a:latin typeface="+mn-lt"/>
+                <a:ea typeface="+mn-ea"/>
+                <a:cs typeface="+mn-cs"/>
+              </a:defRPr>
+            </a:lvl7pPr>
+            <a:lvl8pPr marL="3200400" algn="l" defTabSz="914400" rtl="0" eaLnBrk="1" latinLnBrk="0" hangingPunct="1">
+              <a:defRPr sz="1800" kern="1200">
+                <a:solidFill>
+                  <a:schemeClr val="tx1"/>
+                </a:solidFill>
+                <a:latin typeface="+mn-lt"/>
+                <a:ea typeface="+mn-ea"/>
+                <a:cs typeface="+mn-cs"/>
+              </a:defRPr>
+            </a:lvl8pPr>
+            <a:lvl9pPr marL="3657600" algn="l" defTabSz="914400" rtl="0" eaLnBrk="1" latinLnBrk="0" hangingPunct="1">
+              <a:defRPr sz="1800" kern="1200">
+                <a:solidFill>
+                  <a:schemeClr val="tx1"/>
+                </a:solidFill>
+                <a:latin typeface="+mn-lt"/>
+                <a:ea typeface="+mn-ea"/>
+                <a:cs typeface="+mn-cs"/>
+              </a:defRPr>
+            </a:lvl9pPr>
+          </a:lstStyle>
+          <a:p>
+            <a:pPr lvl="1" algn="ctr"/>
+            <a:r>
+              <a:rPr lang="es-ES" dirty="0" err="1">
+                <a:latin typeface="Helvetica" panose="020B0604020202020204" pitchFamily="34" charset="0"/>
+                <a:cs typeface="Helvetica" panose="020B0604020202020204" pitchFamily="34" charset="0"/>
+              </a:rPr>
+              <a:t>Resistance</a:t>
+            </a:r>
+            <a:r>
+              <a:rPr lang="es-ES" dirty="0">
+                <a:latin typeface="Helvetica" panose="020B0604020202020204" pitchFamily="34" charset="0"/>
+                <a:cs typeface="Helvetica" panose="020B0604020202020204" pitchFamily="34" charset="0"/>
+              </a:rPr>
+              <a:t> and </a:t>
+            </a:r>
+            <a:r>
+              <a:rPr lang="es-ES" dirty="0" err="1">
+                <a:latin typeface="Helvetica" panose="020B0604020202020204" pitchFamily="34" charset="0"/>
+                <a:cs typeface="Helvetica" panose="020B0604020202020204" pitchFamily="34" charset="0"/>
+              </a:rPr>
+              <a:t>Resilience</a:t>
+            </a:r>
+            <a:r>
+              <a:rPr lang="es-ES" dirty="0">
+                <a:latin typeface="Helvetica" panose="020B0604020202020204" pitchFamily="34" charset="0"/>
+                <a:cs typeface="Helvetica" panose="020B0604020202020204" pitchFamily="34" charset="0"/>
+              </a:rPr>
+              <a:t> </a:t>
+            </a:r>
+            <a:r>
+              <a:rPr lang="es-ES" dirty="0" err="1">
+                <a:latin typeface="Helvetica" panose="020B0604020202020204" pitchFamily="34" charset="0"/>
+                <a:cs typeface="Helvetica" panose="020B0604020202020204" pitchFamily="34" charset="0"/>
+              </a:rPr>
+              <a:t>values</a:t>
+            </a:r>
+            <a:r>
+              <a:rPr lang="es-ES" dirty="0">
+                <a:latin typeface="Helvetica" panose="020B0604020202020204" pitchFamily="34" charset="0"/>
+                <a:cs typeface="Helvetica" panose="020B0604020202020204" pitchFamily="34" charset="0"/>
+              </a:rPr>
+              <a:t> are </a:t>
+            </a:r>
+            <a:r>
+              <a:rPr lang="es-ES" dirty="0" err="1">
+                <a:latin typeface="Helvetica" panose="020B0604020202020204" pitchFamily="34" charset="0"/>
+                <a:cs typeface="Helvetica" panose="020B0604020202020204" pitchFamily="34" charset="0"/>
+              </a:rPr>
+              <a:t>different</a:t>
+            </a:r>
+            <a:r>
+              <a:rPr lang="es-ES" dirty="0">
+                <a:latin typeface="Helvetica" panose="020B0604020202020204" pitchFamily="34" charset="0"/>
+                <a:cs typeface="Helvetica" panose="020B0604020202020204" pitchFamily="34" charset="0"/>
+              </a:rPr>
+              <a:t> </a:t>
+            </a:r>
+            <a:r>
+              <a:rPr lang="es-ES" dirty="0" err="1">
+                <a:latin typeface="Helvetica" panose="020B0604020202020204" pitchFamily="34" charset="0"/>
+                <a:cs typeface="Helvetica" panose="020B0604020202020204" pitchFamily="34" charset="0"/>
+              </a:rPr>
+              <a:t>according</a:t>
+            </a:r>
+            <a:r>
+              <a:rPr lang="es-ES" dirty="0">
+                <a:latin typeface="Helvetica" panose="020B0604020202020204" pitchFamily="34" charset="0"/>
+                <a:cs typeface="Helvetica" panose="020B0604020202020204" pitchFamily="34" charset="0"/>
+              </a:rPr>
+              <a:t> </a:t>
+            </a:r>
+            <a:r>
+              <a:rPr lang="es-ES" dirty="0" err="1">
+                <a:latin typeface="Helvetica" panose="020B0604020202020204" pitchFamily="34" charset="0"/>
+                <a:cs typeface="Helvetica" panose="020B0604020202020204" pitchFamily="34" charset="0"/>
+              </a:rPr>
+              <a:t>to</a:t>
+            </a:r>
+            <a:r>
+              <a:rPr lang="es-ES" dirty="0">
+                <a:latin typeface="Helvetica" panose="020B0604020202020204" pitchFamily="34" charset="0"/>
+                <a:cs typeface="Helvetica" panose="020B0604020202020204" pitchFamily="34" charset="0"/>
+              </a:rPr>
+              <a:t> </a:t>
+            </a:r>
+            <a:r>
+              <a:rPr lang="es-ES" dirty="0" err="1">
+                <a:latin typeface="Helvetica" panose="020B0604020202020204" pitchFamily="34" charset="0"/>
+                <a:cs typeface="Helvetica" panose="020B0604020202020204" pitchFamily="34" charset="0"/>
+              </a:rPr>
+              <a:t>the</a:t>
+            </a:r>
+            <a:r>
+              <a:rPr lang="es-ES" dirty="0">
+                <a:latin typeface="Helvetica" panose="020B0604020202020204" pitchFamily="34" charset="0"/>
+                <a:cs typeface="Helvetica" panose="020B0604020202020204" pitchFamily="34" charset="0"/>
+              </a:rPr>
+              <a:t> </a:t>
+            </a:r>
+            <a:r>
+              <a:rPr lang="es-ES" dirty="0" err="1">
+                <a:latin typeface="Helvetica" panose="020B0604020202020204" pitchFamily="34" charset="0"/>
+                <a:cs typeface="Helvetica" panose="020B0604020202020204" pitchFamily="34" charset="0"/>
+              </a:rPr>
+              <a:t>year</a:t>
+            </a:r>
+            <a:r>
+              <a:rPr lang="es-ES" dirty="0">
+                <a:latin typeface="Helvetica" panose="020B0604020202020204" pitchFamily="34" charset="0"/>
+                <a:cs typeface="Helvetica" panose="020B0604020202020204" pitchFamily="34" charset="0"/>
+              </a:rPr>
+              <a:t> and </a:t>
+            </a:r>
+            <a:r>
+              <a:rPr lang="es-ES" dirty="0" err="1">
+                <a:latin typeface="Helvetica" panose="020B0604020202020204" pitchFamily="34" charset="0"/>
+                <a:cs typeface="Helvetica" panose="020B0604020202020204" pitchFamily="34" charset="0"/>
+              </a:rPr>
+              <a:t>the</a:t>
+            </a:r>
+            <a:r>
+              <a:rPr lang="es-ES" dirty="0">
+                <a:latin typeface="Helvetica" panose="020B0604020202020204" pitchFamily="34" charset="0"/>
+                <a:cs typeface="Helvetica" panose="020B0604020202020204" pitchFamily="34" charset="0"/>
+              </a:rPr>
+              <a:t> </a:t>
+            </a:r>
+            <a:r>
+              <a:rPr lang="es-ES" dirty="0" err="1">
+                <a:latin typeface="Helvetica" panose="020B0604020202020204" pitchFamily="34" charset="0"/>
+                <a:cs typeface="Helvetica" panose="020B0604020202020204" pitchFamily="34" charset="0"/>
+              </a:rPr>
+              <a:t>species</a:t>
+            </a:r>
+            <a:endParaRPr lang="es-ES" dirty="0">
+              <a:latin typeface="Helvetica" panose="020B0604020202020204" pitchFamily="34" charset="0"/>
+              <a:cs typeface="Helvetica" panose="020B0604020202020204" pitchFamily="34" charset="0"/>
+            </a:endParaRPr>
+          </a:p>
+        </p:txBody>
+      </p:sp>
+      <p:pic>
+        <p:nvPicPr>
+          <p:cNvPr id="5" name="Imagen 4">
+            <a:extLst>
+              <a:ext uri="{FF2B5EF4-FFF2-40B4-BE49-F238E27FC236}">
+                <a16:creationId xmlns:a16="http://schemas.microsoft.com/office/drawing/2014/main" id="{4CA2EDFE-0015-1D6B-CED3-06D71D4518E7}"/>
+              </a:ext>
+            </a:extLst>
+          </p:cNvPr>
+          <p:cNvPicPr>
+            <a:picLocks noChangeAspect="1"/>
+          </p:cNvPicPr>
+          <p:nvPr/>
+        </p:nvPicPr>
+        <p:blipFill>
+          <a:blip r:embed="rId3">
+            <a:extLst>
+              <a:ext uri="{28A0092B-C50C-407E-A947-70E740481C1C}">
+                <a14:useLocalDpi xmlns:a14="http://schemas.microsoft.com/office/drawing/2010/main" val="0"/>
+              </a:ext>
+            </a:extLst>
+          </a:blip>
+          <a:stretch>
+            <a:fillRect/>
+          </a:stretch>
+        </p:blipFill>
+        <p:spPr>
+          <a:xfrm>
+            <a:off x="938241" y="1096912"/>
+            <a:ext cx="4692269" cy="3127848"/>
+          </a:xfrm>
+          <a:prstGeom prst="rect">
+            <a:avLst/>
+          </a:prstGeom>
+        </p:spPr>
+      </p:pic>
+    </p:spTree>
+    <p:extLst>
+      <p:ext uri="{BB962C8B-B14F-4D97-AF65-F5344CB8AC3E}">
+        <p14:creationId xmlns:p14="http://schemas.microsoft.com/office/powerpoint/2010/main" val="1364544141"/>
       </p:ext>
     </p:extLst>
   </p:cSld>
